--- a/research/poster_presentation.pptx
+++ b/research/poster_presentation.pptx
@@ -3140,7 +3140,7 @@
         <p:spPr>
           <a:xfrm>
             <a:off x="0" y="0"/>
-            <a:ext cx="30275784" cy="5303520"/>
+            <a:ext cx="30275784" cy="4937760"/>
           </a:xfrm>
           <a:prstGeom prst="rect">
             <a:avLst/>
@@ -3182,14 +3182,14 @@
         </p:nvSpPr>
         <p:spPr>
           <a:xfrm>
-            <a:off x="0" y="5212080"/>
+            <a:off x="0" y="4846320"/>
             <a:ext cx="30275784" cy="109728"/>
           </a:xfrm>
           <a:prstGeom prst="rect">
             <a:avLst/>
           </a:prstGeom>
           <a:solidFill>
-            <a:srgbClr val="00A3E0"/>
+            <a:srgbClr val="D4AF37"/>
           </a:solidFill>
           <a:ln>
             <a:noFill/>
@@ -3225,8 +3225,8 @@
         </p:nvSpPr>
         <p:spPr>
           <a:xfrm>
-            <a:off x="914400" y="365760"/>
-            <a:ext cx="28446984" cy="2011680"/>
+            <a:off x="914400" y="274320"/>
+            <a:ext cx="28446984" cy="548640"/>
           </a:xfrm>
           <a:prstGeom prst="rect">
             <a:avLst/>
@@ -3234,32 +3234,20 @@
           <a:noFill/>
         </p:spPr>
         <p:txBody>
-          <a:bodyPr wrap="square">
+          <a:bodyPr wrap="none">
             <a:spAutoFit/>
           </a:bodyPr>
           <a:lstStyle/>
           <a:p>
             <a:pPr algn="ctr"/>
             <a:r>
-              <a:rPr sz="5600" b="1">
-                <a:solidFill>
-                  <a:srgbClr val="D4AF37"/>
+              <a:rPr sz="1500" b="1">
+                <a:solidFill>
+                  <a:srgbClr val="00A3E0"/>
                 </a:solidFill>
                 <a:latin typeface="Arial"/>
               </a:rPr>
-              <a:t>SECURING THE DIGITAL MINE</a:t>
-            </a:r>
-          </a:p>
-          <a:p>
-            <a:pPr algn="ctr"/>
-            <a:r>
-              <a:rPr sz="2800" b="1">
-                <a:solidFill>
-                  <a:srgbClr val="FFFFFF"/>
-                </a:solidFill>
-                <a:latin typeface="Arial"/>
-              </a:rPr>
-              <a:t>A Metaheuristic-Optimized Deep Learning Framework for Edge Intrusion Detection in IoT-Enabled Mineral Operations</a:t>
+              <a:t>RUSSIAN-AFRICAN FORUM-CONTEST OF YOUNG SCIENTISTS 2026 | UNDER THE AUSPICES OF UNESCO</a:t>
             </a:r>
           </a:p>
         </p:txBody>
@@ -3272,8 +3260,8 @@
         </p:nvSpPr>
         <p:spPr>
           <a:xfrm>
-            <a:off x="914400" y="2560320"/>
-            <a:ext cx="28446984" cy="1097280"/>
+            <a:off x="914400" y="777240"/>
+            <a:ext cx="28446984" cy="1645920"/>
           </a:xfrm>
           <a:prstGeom prst="rect">
             <a:avLst/>
@@ -3288,14 +3276,25 @@
           <a:p>
             <a:pPr algn="ctr"/>
             <a:r>
-              <a:rPr sz="2000" b="1">
-                <a:solidFill>
-                  <a:srgbClr val="00A3E0"/>
+              <a:rPr sz="5200" b="1">
+                <a:solidFill>
+                  <a:srgbClr val="D4AF37"/>
                 </a:solidFill>
                 <a:latin typeface="Arial"/>
               </a:rPr>
-              <a:t>RUSSIAN-AFRICAN FORUM-CONTEST OF YOUNG SCIENTISTS 2026 | TRACK 3: SMART SUBSOIL
-Under the Auspices of UNESCO | Empress Catherine II Saint Petersburg Mining University</a:t>
+              <a:t>SECURING THE DIGITAL MINE</a:t>
+            </a:r>
+          </a:p>
+          <a:p>
+            <a:pPr algn="ctr"/>
+            <a:r>
+              <a:rPr sz="2100" b="1">
+                <a:solidFill>
+                  <a:srgbClr val="FFFFFF"/>
+                </a:solidFill>
+                <a:latin typeface="Arial"/>
+              </a:rPr>
+              <a:t>A Metaheuristic-Optimized Deep Learning Framework for Real-Time Intrusion Detection in IoT-Enabled Mineral Extraction</a:t>
             </a:r>
           </a:p>
         </p:txBody>
@@ -3308,8 +3307,8 @@
         </p:nvSpPr>
         <p:spPr>
           <a:xfrm>
-            <a:off x="914400" y="3840480"/>
-            <a:ext cx="28446984" cy="1097280"/>
+            <a:off x="914400" y="3474720"/>
+            <a:ext cx="28446984" cy="1188720"/>
           </a:xfrm>
           <a:prstGeom prst="rect">
             <a:avLst/>
@@ -3317,21 +3316,33 @@
           <a:noFill/>
         </p:spPr>
         <p:txBody>
-          <a:bodyPr wrap="square">
+          <a:bodyPr wrap="none">
             <a:spAutoFit/>
           </a:bodyPr>
           <a:lstStyle/>
           <a:p>
             <a:pPr algn="ctr"/>
             <a:r>
-              <a:rPr sz="1700">
+              <a:rPr sz="1600" b="1">
                 <a:solidFill>
                   <a:srgbClr val="FFFFFF"/>
                 </a:solidFill>
-                <a:latin typeface="Arial"/>
-              </a:rPr>
-              <a:t>John Okyere (Lead) • Ezekeil Baah • Clement Baffour • Parker Paa Annobil • George Akwesi Bonnah
-Department of ICT, University of Education, Winneba &amp; Kayaba Labs | hello@johnokyere.xyz</a:t>
+                <a:latin typeface="Times New Roman"/>
+              </a:rPr>
+              <a:t>Delegation: John Okyere (Lead), Ezekeil Baah, Clement Baffour, Parker Paa Annobil, George Akwesi Bonnah
+</a:t>
+            </a:r>
+          </a:p>
+          <a:p>
+            <a:pPr algn="ctr"/>
+            <a:r>
+              <a:rPr sz="1400" i="1">
+                <a:solidFill>
+                  <a:srgbClr val="E2E8F0"/>
+                </a:solidFill>
+                <a:latin typeface="Times New Roman"/>
+              </a:rPr>
+              <a:t>Department of ICT, University of Education, Winneba &amp; Kayaba Labs | Track 3: Smart Subsoil | Saint Petersburg Mining University</a:t>
             </a:r>
           </a:p>
         </p:txBody>
@@ -3344,8 +3355,8 @@
         </p:nvSpPr>
         <p:spPr>
           <a:xfrm>
-            <a:off x="914400" y="5760720"/>
-            <a:ext cx="13716000" cy="10058400"/>
+            <a:off x="822960" y="5212080"/>
+            <a:ext cx="4526280" cy="2194560"/>
           </a:xfrm>
           <a:prstGeom prst="roundRect">
             <a:avLst/>
@@ -3353,9 +3364,9 @@
           <a:solidFill>
             <a:srgbClr val="FFFFFF"/>
           </a:solidFill>
-          <a:ln w="25400">
+          <a:ln w="38100">
             <a:solidFill>
-              <a:srgbClr val="CBD5E1"/>
+              <a:srgbClr val="10B981"/>
             </a:solidFill>
           </a:ln>
         </p:spPr>
@@ -3383,14 +3394,572 @@
       </p:sp>
       <p:sp>
         <p:nvSpPr>
-          <p:cNvPr id="9" name="Rounded Rectangle 8"/>
+          <p:cNvPr id="9" name="TextBox 8"/>
+          <p:cNvSpPr txBox="1"/>
+          <p:nvPr/>
+        </p:nvSpPr>
+        <p:spPr>
+          <a:xfrm>
+            <a:off x="914400" y="5394960"/>
+            <a:ext cx="4343400" cy="1828800"/>
+          </a:xfrm>
+          <a:prstGeom prst="rect">
+            <a:avLst/>
+          </a:prstGeom>
+          <a:noFill/>
+        </p:spPr>
+        <p:txBody>
+          <a:bodyPr wrap="none">
+            <a:spAutoFit/>
+          </a:bodyPr>
+          <a:lstStyle/>
+          <a:p>
+            <a:pPr algn="ctr"/>
+            <a:r>
+              <a:rPr sz="3400" b="1">
+                <a:solidFill>
+                  <a:srgbClr val="10B981"/>
+                </a:solidFill>
+                <a:latin typeface="Arial"/>
+              </a:rPr>
+              <a:t>0.76 ms</a:t>
+            </a:r>
+          </a:p>
+          <a:p>
+            <a:pPr algn="ctr"/>
+            <a:r>
+              <a:rPr sz="1250" b="1">
+                <a:solidFill>
+                  <a:srgbClr val="0F172A"/>
+                </a:solidFill>
+                <a:latin typeface="Arial"/>
+              </a:rPr>
+              <a:t>Edge Inference Latency
+(207x Speedup vs Baseline)</a:t>
+            </a:r>
+          </a:p>
+        </p:txBody>
+      </p:sp>
+      <p:sp>
+        <p:nvSpPr>
+          <p:cNvPr id="10" name="Rounded Rectangle 9"/>
           <p:cNvSpPr/>
           <p:nvPr/>
         </p:nvSpPr>
         <p:spPr>
           <a:xfrm>
-            <a:off x="914400" y="5760720"/>
-            <a:ext cx="13716000" cy="1005840"/>
+            <a:off x="5623560" y="5212080"/>
+            <a:ext cx="4526280" cy="2194560"/>
+          </a:xfrm>
+          <a:prstGeom prst="roundRect">
+            <a:avLst/>
+          </a:prstGeom>
+          <a:solidFill>
+            <a:srgbClr val="FFFFFF"/>
+          </a:solidFill>
+          <a:ln w="38100">
+            <a:solidFill>
+              <a:srgbClr val="00529B"/>
+            </a:solidFill>
+          </a:ln>
+        </p:spPr>
+        <p:style>
+          <a:lnRef idx="1">
+            <a:schemeClr val="accent1"/>
+          </a:lnRef>
+          <a:fillRef idx="3">
+            <a:schemeClr val="accent1"/>
+          </a:fillRef>
+          <a:effectRef idx="2">
+            <a:schemeClr val="accent1"/>
+          </a:effectRef>
+          <a:fontRef idx="minor">
+            <a:schemeClr val="lt1"/>
+          </a:fontRef>
+        </p:style>
+        <p:txBody>
+          <a:bodyPr rtlCol="0" anchor="ctr"/>
+          <a:lstStyle/>
+          <a:p>
+            <a:pPr algn="ctr"/>
+          </a:p>
+        </p:txBody>
+      </p:sp>
+      <p:sp>
+        <p:nvSpPr>
+          <p:cNvPr id="11" name="TextBox 10"/>
+          <p:cNvSpPr txBox="1"/>
+          <p:nvPr/>
+        </p:nvSpPr>
+        <p:spPr>
+          <a:xfrm>
+            <a:off x="5715000" y="5394960"/>
+            <a:ext cx="4343400" cy="1828800"/>
+          </a:xfrm>
+          <a:prstGeom prst="rect">
+            <a:avLst/>
+          </a:prstGeom>
+          <a:noFill/>
+        </p:spPr>
+        <p:txBody>
+          <a:bodyPr wrap="none">
+            <a:spAutoFit/>
+          </a:bodyPr>
+          <a:lstStyle/>
+          <a:p>
+            <a:pPr algn="ctr"/>
+            <a:r>
+              <a:rPr sz="3400" b="1">
+                <a:solidFill>
+                  <a:srgbClr val="00529B"/>
+                </a:solidFill>
+                <a:latin typeface="Arial"/>
+              </a:rPr>
+              <a:t>75.61%</a:t>
+            </a:r>
+          </a:p>
+          <a:p>
+            <a:pPr algn="ctr"/>
+            <a:r>
+              <a:rPr sz="1250" b="1">
+                <a:solidFill>
+                  <a:srgbClr val="0F172A"/>
+                </a:solidFill>
+                <a:latin typeface="Arial"/>
+              </a:rPr>
+              <a:t>Feature Pruning (41 -&gt; 10)
+(BWOA Dimensionality Red.)</a:t>
+            </a:r>
+          </a:p>
+        </p:txBody>
+      </p:sp>
+      <p:sp>
+        <p:nvSpPr>
+          <p:cNvPr id="12" name="Rounded Rectangle 11"/>
+          <p:cNvSpPr/>
+          <p:nvPr/>
+        </p:nvSpPr>
+        <p:spPr>
+          <a:xfrm>
+            <a:off x="10424160" y="5212080"/>
+            <a:ext cx="4526280" cy="2194560"/>
+          </a:xfrm>
+          <a:prstGeom prst="roundRect">
+            <a:avLst/>
+          </a:prstGeom>
+          <a:solidFill>
+            <a:srgbClr val="FFFFFF"/>
+          </a:solidFill>
+          <a:ln w="38100">
+            <a:solidFill>
+              <a:srgbClr val="00A3E0"/>
+            </a:solidFill>
+          </a:ln>
+        </p:spPr>
+        <p:style>
+          <a:lnRef idx="1">
+            <a:schemeClr val="accent1"/>
+          </a:lnRef>
+          <a:fillRef idx="3">
+            <a:schemeClr val="accent1"/>
+          </a:fillRef>
+          <a:effectRef idx="2">
+            <a:schemeClr val="accent1"/>
+          </a:effectRef>
+          <a:fontRef idx="minor">
+            <a:schemeClr val="lt1"/>
+          </a:fontRef>
+        </p:style>
+        <p:txBody>
+          <a:bodyPr rtlCol="0" anchor="ctr"/>
+          <a:lstStyle/>
+          <a:p>
+            <a:pPr algn="ctr"/>
+          </a:p>
+        </p:txBody>
+      </p:sp>
+      <p:sp>
+        <p:nvSpPr>
+          <p:cNvPr id="13" name="TextBox 12"/>
+          <p:cNvSpPr txBox="1"/>
+          <p:nvPr/>
+        </p:nvSpPr>
+        <p:spPr>
+          <a:xfrm>
+            <a:off x="10515600" y="5394960"/>
+            <a:ext cx="4343400" cy="1828800"/>
+          </a:xfrm>
+          <a:prstGeom prst="rect">
+            <a:avLst/>
+          </a:prstGeom>
+          <a:noFill/>
+        </p:spPr>
+        <p:txBody>
+          <a:bodyPr wrap="none">
+            <a:spAutoFit/>
+          </a:bodyPr>
+          <a:lstStyle/>
+          <a:p>
+            <a:pPr algn="ctr"/>
+            <a:r>
+              <a:rPr sz="3400" b="1">
+                <a:solidFill>
+                  <a:srgbClr val="00A3E0"/>
+                </a:solidFill>
+                <a:latin typeface="Arial"/>
+              </a:rPr>
+              <a:t>96.89%</a:t>
+            </a:r>
+          </a:p>
+          <a:p>
+            <a:pPr algn="ctr"/>
+            <a:r>
+              <a:rPr sz="1250" b="1">
+                <a:solidFill>
+                  <a:srgbClr val="0F172A"/>
+                </a:solidFill>
+                <a:latin typeface="Arial"/>
+              </a:rPr>
+              <a:t>Benign Flow Precision
+(Zero False Production Halts)</a:t>
+            </a:r>
+          </a:p>
+        </p:txBody>
+      </p:sp>
+      <p:sp>
+        <p:nvSpPr>
+          <p:cNvPr id="14" name="Rounded Rectangle 13"/>
+          <p:cNvSpPr/>
+          <p:nvPr/>
+        </p:nvSpPr>
+        <p:spPr>
+          <a:xfrm>
+            <a:off x="15224759" y="5212080"/>
+            <a:ext cx="4526280" cy="2194560"/>
+          </a:xfrm>
+          <a:prstGeom prst="roundRect">
+            <a:avLst/>
+          </a:prstGeom>
+          <a:solidFill>
+            <a:srgbClr val="FFFFFF"/>
+          </a:solidFill>
+          <a:ln w="38100">
+            <a:solidFill>
+              <a:srgbClr val="DC2626"/>
+            </a:solidFill>
+          </a:ln>
+        </p:spPr>
+        <p:style>
+          <a:lnRef idx="1">
+            <a:schemeClr val="accent1"/>
+          </a:lnRef>
+          <a:fillRef idx="3">
+            <a:schemeClr val="accent1"/>
+          </a:fillRef>
+          <a:effectRef idx="2">
+            <a:schemeClr val="accent1"/>
+          </a:effectRef>
+          <a:fontRef idx="minor">
+            <a:schemeClr val="lt1"/>
+          </a:fontRef>
+        </p:style>
+        <p:txBody>
+          <a:bodyPr rtlCol="0" anchor="ctr"/>
+          <a:lstStyle/>
+          <a:p>
+            <a:pPr algn="ctr"/>
+          </a:p>
+        </p:txBody>
+      </p:sp>
+      <p:sp>
+        <p:nvSpPr>
+          <p:cNvPr id="15" name="TextBox 14"/>
+          <p:cNvSpPr txBox="1"/>
+          <p:nvPr/>
+        </p:nvSpPr>
+        <p:spPr>
+          <a:xfrm>
+            <a:off x="15316199" y="5394960"/>
+            <a:ext cx="4343400" cy="1828800"/>
+          </a:xfrm>
+          <a:prstGeom prst="rect">
+            <a:avLst/>
+          </a:prstGeom>
+          <a:noFill/>
+        </p:spPr>
+        <p:txBody>
+          <a:bodyPr wrap="none">
+            <a:spAutoFit/>
+          </a:bodyPr>
+          <a:lstStyle/>
+          <a:p>
+            <a:pPr algn="ctr"/>
+            <a:r>
+              <a:rPr sz="3400" b="1">
+                <a:solidFill>
+                  <a:srgbClr val="DC2626"/>
+                </a:solidFill>
+                <a:latin typeface="Arial"/>
+              </a:rPr>
+              <a:t>89.04%</a:t>
+            </a:r>
+          </a:p>
+          <a:p>
+            <a:pPr algn="ctr"/>
+            <a:r>
+              <a:rPr sz="1250" b="1">
+                <a:solidFill>
+                  <a:srgbClr val="0F172A"/>
+                </a:solidFill>
+                <a:latin typeface="Arial"/>
+              </a:rPr>
+              <a:t>DoS Attack Recall
+(Hardens SCADA PLCs)</a:t>
+            </a:r>
+          </a:p>
+        </p:txBody>
+      </p:sp>
+      <p:sp>
+        <p:nvSpPr>
+          <p:cNvPr id="16" name="Rounded Rectangle 15"/>
+          <p:cNvSpPr/>
+          <p:nvPr/>
+        </p:nvSpPr>
+        <p:spPr>
+          <a:xfrm>
+            <a:off x="20025360" y="5212080"/>
+            <a:ext cx="4526280" cy="2194560"/>
+          </a:xfrm>
+          <a:prstGeom prst="roundRect">
+            <a:avLst/>
+          </a:prstGeom>
+          <a:solidFill>
+            <a:srgbClr val="FFFFFF"/>
+          </a:solidFill>
+          <a:ln w="38100">
+            <a:solidFill>
+              <a:srgbClr val="D4AF37"/>
+            </a:solidFill>
+          </a:ln>
+        </p:spPr>
+        <p:style>
+          <a:lnRef idx="1">
+            <a:schemeClr val="accent1"/>
+          </a:lnRef>
+          <a:fillRef idx="3">
+            <a:schemeClr val="accent1"/>
+          </a:fillRef>
+          <a:effectRef idx="2">
+            <a:schemeClr val="accent1"/>
+          </a:effectRef>
+          <a:fontRef idx="minor">
+            <a:schemeClr val="lt1"/>
+          </a:fontRef>
+        </p:style>
+        <p:txBody>
+          <a:bodyPr rtlCol="0" anchor="ctr"/>
+          <a:lstStyle/>
+          <a:p>
+            <a:pPr algn="ctr"/>
+          </a:p>
+        </p:txBody>
+      </p:sp>
+      <p:sp>
+        <p:nvSpPr>
+          <p:cNvPr id="17" name="TextBox 16"/>
+          <p:cNvSpPr txBox="1"/>
+          <p:nvPr/>
+        </p:nvSpPr>
+        <p:spPr>
+          <a:xfrm>
+            <a:off x="20116800" y="5394960"/>
+            <a:ext cx="4343400" cy="1828800"/>
+          </a:xfrm>
+          <a:prstGeom prst="rect">
+            <a:avLst/>
+          </a:prstGeom>
+          <a:noFill/>
+        </p:spPr>
+        <p:txBody>
+          <a:bodyPr wrap="none">
+            <a:spAutoFit/>
+          </a:bodyPr>
+          <a:lstStyle/>
+          <a:p>
+            <a:pPr algn="ctr"/>
+            <a:r>
+              <a:rPr sz="3400" b="1">
+                <a:solidFill>
+                  <a:srgbClr val="D4AF37"/>
+                </a:solidFill>
+                <a:latin typeface="Arial"/>
+              </a:rPr>
+              <a:t>0.82 MB</a:t>
+            </a:r>
+          </a:p>
+          <a:p>
+            <a:pPr algn="ctr"/>
+            <a:r>
+              <a:rPr sz="1250" b="1">
+                <a:solidFill>
+                  <a:srgbClr val="0F172A"/>
+                </a:solidFill>
+                <a:latin typeface="Arial"/>
+              </a:rPr>
+              <a:t>Float16 Quantized Size
+(Runs on 1GB RAM Pi 4B)</a:t>
+            </a:r>
+          </a:p>
+        </p:txBody>
+      </p:sp>
+      <p:sp>
+        <p:nvSpPr>
+          <p:cNvPr id="18" name="Rounded Rectangle 17"/>
+          <p:cNvSpPr/>
+          <p:nvPr/>
+        </p:nvSpPr>
+        <p:spPr>
+          <a:xfrm>
+            <a:off x="24825960" y="5212080"/>
+            <a:ext cx="4526280" cy="2194560"/>
+          </a:xfrm>
+          <a:prstGeom prst="roundRect">
+            <a:avLst/>
+          </a:prstGeom>
+          <a:solidFill>
+            <a:srgbClr val="FFFFFF"/>
+          </a:solidFill>
+          <a:ln w="38100">
+            <a:solidFill>
+              <a:srgbClr val="0B1D3A"/>
+            </a:solidFill>
+          </a:ln>
+        </p:spPr>
+        <p:style>
+          <a:lnRef idx="1">
+            <a:schemeClr val="accent1"/>
+          </a:lnRef>
+          <a:fillRef idx="3">
+            <a:schemeClr val="accent1"/>
+          </a:fillRef>
+          <a:effectRef idx="2">
+            <a:schemeClr val="accent1"/>
+          </a:effectRef>
+          <a:fontRef idx="minor">
+            <a:schemeClr val="lt1"/>
+          </a:fontRef>
+        </p:style>
+        <p:txBody>
+          <a:bodyPr rtlCol="0" anchor="ctr"/>
+          <a:lstStyle/>
+          <a:p>
+            <a:pPr algn="ctr"/>
+          </a:p>
+        </p:txBody>
+      </p:sp>
+      <p:sp>
+        <p:nvSpPr>
+          <p:cNvPr id="19" name="TextBox 18"/>
+          <p:cNvSpPr txBox="1"/>
+          <p:nvPr/>
+        </p:nvSpPr>
+        <p:spPr>
+          <a:xfrm>
+            <a:off x="24917400" y="5394960"/>
+            <a:ext cx="4343400" cy="1828800"/>
+          </a:xfrm>
+          <a:prstGeom prst="rect">
+            <a:avLst/>
+          </a:prstGeom>
+          <a:noFill/>
+        </p:spPr>
+        <p:txBody>
+          <a:bodyPr wrap="none">
+            <a:spAutoFit/>
+          </a:bodyPr>
+          <a:lstStyle/>
+          <a:p>
+            <a:pPr algn="ctr"/>
+            <a:r>
+              <a:rPr sz="3400" b="1">
+                <a:solidFill>
+                  <a:srgbClr val="0B1D3A"/>
+                </a:solidFill>
+                <a:latin typeface="Arial"/>
+              </a:rPr>
+              <a:t>200x+</a:t>
+            </a:r>
+          </a:p>
+          <a:p>
+            <a:pPr algn="ctr"/>
+            <a:r>
+              <a:rPr sz="1250" b="1">
+                <a:solidFill>
+                  <a:srgbClr val="0F172A"/>
+                </a:solidFill>
+                <a:latin typeface="Arial"/>
+              </a:rPr>
+              <a:t>Estimated Industrial ROI
+(Averts $50k-$500k/hr Loss)</a:t>
+            </a:r>
+          </a:p>
+        </p:txBody>
+      </p:sp>
+      <p:sp>
+        <p:nvSpPr>
+          <p:cNvPr id="20" name="Rounded Rectangle 19"/>
+          <p:cNvSpPr/>
+          <p:nvPr/>
+        </p:nvSpPr>
+        <p:spPr>
+          <a:xfrm>
+            <a:off x="822960" y="7680960"/>
+            <a:ext cx="9235440" cy="17190720"/>
+          </a:xfrm>
+          <a:prstGeom prst="roundRect">
+            <a:avLst/>
+          </a:prstGeom>
+          <a:solidFill>
+            <a:srgbClr val="FFFFFF"/>
+          </a:solidFill>
+          <a:ln w="19050">
+            <a:solidFill>
+              <a:srgbClr val="CBD5E1"/>
+            </a:solidFill>
+          </a:ln>
+        </p:spPr>
+        <p:style>
+          <a:lnRef idx="1">
+            <a:schemeClr val="accent1"/>
+          </a:lnRef>
+          <a:fillRef idx="3">
+            <a:schemeClr val="accent1"/>
+          </a:fillRef>
+          <a:effectRef idx="2">
+            <a:schemeClr val="accent1"/>
+          </a:effectRef>
+          <a:fontRef idx="minor">
+            <a:schemeClr val="lt1"/>
+          </a:fontRef>
+        </p:style>
+        <p:txBody>
+          <a:bodyPr rtlCol="0" anchor="ctr"/>
+          <a:lstStyle/>
+          <a:p>
+            <a:pPr algn="ctr"/>
+          </a:p>
+        </p:txBody>
+      </p:sp>
+      <p:sp>
+        <p:nvSpPr>
+          <p:cNvPr id="21" name="Rounded Rectangle 20"/>
+          <p:cNvSpPr/>
+          <p:nvPr/>
+        </p:nvSpPr>
+        <p:spPr>
+          <a:xfrm>
+            <a:off x="822960" y="7680960"/>
+            <a:ext cx="9235440" cy="1097280"/>
           </a:xfrm>
           <a:prstGeom prst="roundRect">
             <a:avLst/>
@@ -3426,14 +3995,14 @@
       </p:sp>
       <p:sp>
         <p:nvSpPr>
-          <p:cNvPr id="10" name="TextBox 9"/>
+          <p:cNvPr id="22" name="TextBox 21"/>
           <p:cNvSpPr txBox="1"/>
           <p:nvPr/>
         </p:nvSpPr>
         <p:spPr>
           <a:xfrm>
-            <a:off x="1188720" y="5897880"/>
-            <a:ext cx="13167360" cy="731520"/>
+            <a:off x="1097280" y="7772400"/>
+            <a:ext cx="8686800" cy="914400"/>
           </a:xfrm>
           <a:prstGeom prst="rect">
             <a:avLst/>
@@ -3446,29 +4015,39 @@
           </a:bodyPr>
           <a:lstStyle/>
           <a:p>
-            <a:pPr algn="l"/>
-            <a:r>
-              <a:rPr sz="2400" b="1">
+            <a:r>
+              <a:rPr sz="1100" b="1">
+                <a:solidFill>
+                  <a:srgbClr val="00A3E0"/>
+                </a:solidFill>
+                <a:latin typeface="Arial"/>
+              </a:rPr>
+              <a:t>SECTION 1: INDUSTRIAL THREAT LANDSCAPE</a:t>
+            </a:r>
+          </a:p>
+          <a:p>
+            <a:r>
+              <a:rPr sz="1800" b="1">
                 <a:solidFill>
                   <a:srgbClr val="FFFFFF"/>
                 </a:solidFill>
                 <a:latin typeface="Arial"/>
               </a:rPr>
-              <a:t>1. PROBLEM &amp; INDUSTRIAL CONTEXT</a:t>
-            </a:r>
-          </a:p>
-        </p:txBody>
-      </p:sp>
-      <p:sp>
-        <p:nvSpPr>
-          <p:cNvPr id="11" name="TextBox 10"/>
+              <a:t>The Death of the Air-Gap in Smart Mines</a:t>
+            </a:r>
+          </a:p>
+        </p:txBody>
+      </p:sp>
+      <p:sp>
+        <p:nvSpPr>
+          <p:cNvPr id="23" name="TextBox 22"/>
           <p:cNvSpPr txBox="1"/>
           <p:nvPr/>
         </p:nvSpPr>
         <p:spPr>
           <a:xfrm>
-            <a:off x="1188720" y="6949440"/>
-            <a:ext cx="13167360" cy="8595360"/>
+            <a:off x="1005840" y="8869680"/>
+            <a:ext cx="8869680" cy="7498079"/>
           </a:xfrm>
           <a:prstGeom prst="rect">
             <a:avLst/>
@@ -3484,256 +4063,77 @@
           <a:p>
             <a:pPr>
               <a:spcAft>
-                <a:spcPts val="1400"/>
+                <a:spcPts val="800"/>
               </a:spcAft>
             </a:pPr>
             <a:r>
-              <a:rPr b="1" sz="1700">
+              <a:rPr b="1" sz="1400">
                 <a:solidFill>
                   <a:srgbClr val="00529B"/>
                 </a:solidFill>
               </a:rPr>
-              <a:t>• Digital Subsoil Transformation: </a:t>
-            </a:r>
-            <a:r>
-              <a:rPr sz="1600">
-                <a:solidFill>
-                  <a:srgbClr val="1E293B"/>
-                </a:solidFill>
-              </a:rPr>
-              <a:t>African and Russian mines are rapidly deploying IoT sensors, autonomous haulage, and SCADA telemetry to optimize ore yield.</a:t>
+              <a:t>• Air-Gap Collapse: </a:t>
+            </a:r>
+            <a:r>
+              <a:rPr sz="1350">
+                <a:solidFill>
+                  <a:srgbClr val="0F172A"/>
+                </a:solidFill>
+              </a:rPr>
+              <a:t>Smart Subsoil digitalization connects SAG mills, froth flotation circuits, and tailings dams to cloud twins, exposing unauthenticated Modbus/DNP3 protocols to zero-day intrusion.</a:t>
             </a:r>
           </a:p>
           <a:p>
             <a:pPr>
               <a:spcAft>
-                <a:spcPts val="1400"/>
+                <a:spcPts val="800"/>
               </a:spcAft>
             </a:pPr>
             <a:r>
-              <a:rPr b="1" sz="1700">
+              <a:rPr b="1" sz="1400">
                 <a:solidFill>
                   <a:srgbClr val="00529B"/>
                 </a:solidFill>
               </a:rPr>
-              <a:t>• The Air-Gap Myth is Dead: </a:t>
-            </a:r>
-            <a:r>
-              <a:rPr sz="1600">
-                <a:solidFill>
-                  <a:srgbClr val="1E293B"/>
-                </a:solidFill>
-              </a:rPr>
-              <a:t>Connecting OT networks to cloud digital twins creates massive attack surfaces for ransomware and Modbus command injection.</a:t>
+              <a:t>• Catastrophic Outage Costs: </a:t>
+            </a:r>
+            <a:r>
+              <a:rPr sz="1350">
+                <a:solidFill>
+                  <a:srgbClr val="0F172A"/>
+                </a:solidFill>
+              </a:rPr>
+              <a:t>Unplanned mining downtime costs USD $50,000 to $500,000 per hour. Tampering with toxic gas sensors or dewatering pumps creates severe life safety hazards.</a:t>
             </a:r>
           </a:p>
           <a:p>
             <a:pPr>
               <a:spcAft>
-                <a:spcPts val="1400"/>
+                <a:spcPts val="800"/>
               </a:spcAft>
             </a:pPr>
             <a:r>
-              <a:rPr b="1" sz="1700">
+              <a:rPr b="1" sz="1400">
                 <a:solidFill>
                   <a:srgbClr val="00529B"/>
                 </a:solidFill>
               </a:rPr>
-              <a:t>• Catastrophic Downtime Costs: </a:t>
-            </a:r>
-            <a:r>
-              <a:rPr sz="1600">
-                <a:solidFill>
-                  <a:srgbClr val="1E293B"/>
-                </a:solidFill>
-              </a:rPr>
-              <a:t>Unplanned mining downtime costs USD $50,000 to $500,000 per hour, while cyber disruption of ventilation systems endangers human lives.</a:t>
-            </a:r>
-          </a:p>
-          <a:p>
-            <a:pPr>
-              <a:spcAft>
-                <a:spcPts val="1400"/>
-              </a:spcAft>
-            </a:pPr>
-            <a:r>
-              <a:rPr b="1" sz="1700">
-                <a:solidFill>
-                  <a:srgbClr val="00529B"/>
-                </a:solidFill>
-              </a:rPr>
-              <a:t>• Existing Tools Fail on the Edge: </a:t>
-            </a:r>
-            <a:r>
-              <a:rPr sz="1600">
-                <a:solidFill>
-                  <a:srgbClr val="1E293B"/>
-                </a:solidFill>
-              </a:rPr>
-              <a:t>Heavyweight enterprise IDS tools require 150+ milliseconds to analyze 41 features, violating the 100ms SCADA control loop limit on low-power 1GB RAM edge devices.</a:t>
-            </a:r>
-          </a:p>
-        </p:txBody>
-      </p:sp>
-      <p:sp>
-        <p:nvSpPr>
-          <p:cNvPr id="12" name="Rounded Rectangle 11"/>
-          <p:cNvSpPr/>
-          <p:nvPr/>
-        </p:nvSpPr>
-        <p:spPr>
-          <a:xfrm>
-            <a:off x="15645384" y="5760720"/>
-            <a:ext cx="13716000" cy="10058400"/>
-          </a:xfrm>
-          <a:prstGeom prst="roundRect">
-            <a:avLst/>
-          </a:prstGeom>
-          <a:solidFill>
-            <a:srgbClr val="FFFFFF"/>
-          </a:solidFill>
-          <a:ln w="25400">
-            <a:solidFill>
-              <a:srgbClr val="CBD5E1"/>
-            </a:solidFill>
-          </a:ln>
-        </p:spPr>
-        <p:style>
-          <a:lnRef idx="1">
-            <a:schemeClr val="accent1"/>
-          </a:lnRef>
-          <a:fillRef idx="3">
-            <a:schemeClr val="accent1"/>
-          </a:fillRef>
-          <a:effectRef idx="2">
-            <a:schemeClr val="accent1"/>
-          </a:effectRef>
-          <a:fontRef idx="minor">
-            <a:schemeClr val="lt1"/>
-          </a:fontRef>
-        </p:style>
-        <p:txBody>
-          <a:bodyPr rtlCol="0" anchor="ctr"/>
-          <a:lstStyle/>
-          <a:p>
-            <a:pPr algn="ctr"/>
-          </a:p>
-        </p:txBody>
-      </p:sp>
-      <p:sp>
-        <p:nvSpPr>
-          <p:cNvPr id="13" name="Rounded Rectangle 12"/>
-          <p:cNvSpPr/>
-          <p:nvPr/>
-        </p:nvSpPr>
-        <p:spPr>
-          <a:xfrm>
-            <a:off x="15645384" y="5760720"/>
-            <a:ext cx="13716000" cy="1005840"/>
-          </a:xfrm>
-          <a:prstGeom prst="roundRect">
-            <a:avLst/>
-          </a:prstGeom>
-          <a:solidFill>
-            <a:srgbClr val="00529B"/>
-          </a:solidFill>
-          <a:ln>
-            <a:noFill/>
-          </a:ln>
-        </p:spPr>
-        <p:style>
-          <a:lnRef idx="1">
-            <a:schemeClr val="accent1"/>
-          </a:lnRef>
-          <a:fillRef idx="3">
-            <a:schemeClr val="accent1"/>
-          </a:fillRef>
-          <a:effectRef idx="2">
-            <a:schemeClr val="accent1"/>
-          </a:effectRef>
-          <a:fontRef idx="minor">
-            <a:schemeClr val="lt1"/>
-          </a:fontRef>
-        </p:style>
-        <p:txBody>
-          <a:bodyPr rtlCol="0" anchor="ctr"/>
-          <a:lstStyle/>
-          <a:p>
-            <a:pPr algn="ctr"/>
-          </a:p>
-        </p:txBody>
-      </p:sp>
-      <p:sp>
-        <p:nvSpPr>
-          <p:cNvPr id="14" name="TextBox 13"/>
-          <p:cNvSpPr txBox="1"/>
-          <p:nvPr/>
-        </p:nvSpPr>
-        <p:spPr>
-          <a:xfrm>
-            <a:off x="15919704" y="5897880"/>
-            <a:ext cx="13167360" cy="731520"/>
-          </a:xfrm>
-          <a:prstGeom prst="rect">
-            <a:avLst/>
-          </a:prstGeom>
-          <a:noFill/>
-        </p:spPr>
-        <p:txBody>
-          <a:bodyPr wrap="none">
-            <a:spAutoFit/>
-          </a:bodyPr>
-          <a:lstStyle/>
-          <a:p>
-            <a:pPr algn="l"/>
-            <a:r>
-              <a:rPr sz="2400" b="1">
-                <a:solidFill>
-                  <a:srgbClr val="FFFFFF"/>
-                </a:solidFill>
-                <a:latin typeface="Arial"/>
-              </a:rPr>
-              <a:t>2. 4-LAYER SYSTEM ARCHITECTURE</a:t>
-            </a:r>
-          </a:p>
-        </p:txBody>
-      </p:sp>
-      <p:sp>
-        <p:nvSpPr>
-          <p:cNvPr id="15" name="TextBox 14"/>
-          <p:cNvSpPr txBox="1"/>
-          <p:nvPr/>
-        </p:nvSpPr>
-        <p:spPr>
-          <a:xfrm>
-            <a:off x="15910559" y="6949440"/>
-            <a:ext cx="13167360" cy="2011680"/>
-          </a:xfrm>
-          <a:prstGeom prst="rect">
-            <a:avLst/>
-          </a:prstGeom>
-          <a:noFill/>
-        </p:spPr>
-        <p:txBody>
-          <a:bodyPr wrap="square">
-            <a:spAutoFit/>
-          </a:bodyPr>
-          <a:lstStyle/>
-          <a:p>
-            <a:r>
-              <a:rPr sz="1600">
-                <a:solidFill>
-                  <a:srgbClr val="1E293B"/>
-                </a:solidFill>
-              </a:rPr>
-              <a:t>A complete edge-to-cloud security pipeline combining metaheuristic feature pruning with spatial-temporal deep learning:</a:t>
+              <a:t>• Traditional IDS Failures: </a:t>
+            </a:r>
+            <a:r>
+              <a:rPr sz="1350">
+                <a:solidFill>
+                  <a:srgbClr val="0F172A"/>
+                </a:solidFill>
+              </a:rPr>
+              <a:t>Heavyweight enterprise IDS tools require 150+ milliseconds to evaluate 41 features, violating the 20 to 50 millisecond control loop deadlines of industrial PLCs.</a:t>
             </a:r>
           </a:p>
         </p:txBody>
       </p:sp>
       <p:pic>
         <p:nvPicPr>
-          <p:cNvPr id="16" name="Picture 15" descr="system_architecture.png"/>
+          <p:cNvPr id="24" name="Picture 23" descr="mining_scada_flowchart.png"/>
           <p:cNvPicPr>
             <a:picLocks noChangeAspect="1"/>
           </p:cNvPicPr>
@@ -3747,8 +4147,8 @@
         </p:blipFill>
         <p:spPr>
           <a:xfrm>
-            <a:off x="15910559" y="9144000"/>
-            <a:ext cx="13167360" cy="7724905"/>
+            <a:off x="1005840" y="16276320"/>
+            <a:ext cx="8869680" cy="4394153"/>
           </a:xfrm>
           <a:prstGeom prst="rect">
             <a:avLst/>
@@ -3757,14 +4157,14 @@
       </p:pic>
       <p:sp>
         <p:nvSpPr>
-          <p:cNvPr id="17" name="Rounded Rectangle 16"/>
+          <p:cNvPr id="25" name="Rounded Rectangle 24"/>
           <p:cNvSpPr/>
           <p:nvPr/>
         </p:nvSpPr>
         <p:spPr>
           <a:xfrm>
-            <a:off x="914400" y="16276320"/>
-            <a:ext cx="13716000" cy="12801600"/>
+            <a:off x="822960" y="25237440"/>
+            <a:ext cx="9235440" cy="17007840"/>
           </a:xfrm>
           <a:prstGeom prst="roundRect">
             <a:avLst/>
@@ -3772,7 +4172,7 @@
           <a:solidFill>
             <a:srgbClr val="FFFFFF"/>
           </a:solidFill>
-          <a:ln w="25400">
+          <a:ln w="19050">
             <a:solidFill>
               <a:srgbClr val="CBD5E1"/>
             </a:solidFill>
@@ -3802,14 +4202,14 @@
       </p:sp>
       <p:sp>
         <p:nvSpPr>
-          <p:cNvPr id="18" name="Rounded Rectangle 17"/>
+          <p:cNvPr id="26" name="Rounded Rectangle 25"/>
           <p:cNvSpPr/>
           <p:nvPr/>
         </p:nvSpPr>
         <p:spPr>
           <a:xfrm>
-            <a:off x="914400" y="16276320"/>
-            <a:ext cx="13716000" cy="1005840"/>
+            <a:off x="822960" y="25237440"/>
+            <a:ext cx="9235440" cy="1097280"/>
           </a:xfrm>
           <a:prstGeom prst="roundRect">
             <a:avLst/>
@@ -3845,14 +4245,14 @@
       </p:sp>
       <p:sp>
         <p:nvSpPr>
-          <p:cNvPr id="19" name="TextBox 18"/>
+          <p:cNvPr id="27" name="TextBox 26"/>
           <p:cNvSpPr txBox="1"/>
           <p:nvPr/>
         </p:nvSpPr>
         <p:spPr>
           <a:xfrm>
-            <a:off x="1188720" y="16413480"/>
-            <a:ext cx="13167360" cy="731520"/>
+            <a:off x="1097280" y="25328880"/>
+            <a:ext cx="8686800" cy="914400"/>
           </a:xfrm>
           <a:prstGeom prst="rect">
             <a:avLst/>
@@ -3865,115 +4265,32 @@
           </a:bodyPr>
           <a:lstStyle/>
           <a:p>
-            <a:pPr algn="l"/>
-            <a:r>
-              <a:rPr sz="2400" b="1">
+            <a:r>
+              <a:rPr sz="1100" b="1">
+                <a:solidFill>
+                  <a:srgbClr val="00A3E0"/>
+                </a:solidFill>
+                <a:latin typeface="Arial"/>
+              </a:rPr>
+              <a:t>SECTION 2: RESEARCH METHODOLOGY</a:t>
+            </a:r>
+          </a:p>
+          <a:p>
+            <a:r>
+              <a:rPr sz="1800" b="1">
                 <a:solidFill>
                   <a:srgbClr val="FFFFFF"/>
                 </a:solidFill>
                 <a:latin typeface="Arial"/>
               </a:rPr>
-              <a:t>3. EXPERIMENTAL BENCHMARK RESULTS</a:t>
-            </a:r>
-          </a:p>
-        </p:txBody>
-      </p:sp>
-      <p:sp>
-        <p:nvSpPr>
-          <p:cNvPr id="20" name="TextBox 19"/>
-          <p:cNvSpPr txBox="1"/>
-          <p:nvPr/>
-        </p:nvSpPr>
-        <p:spPr>
-          <a:xfrm>
-            <a:off x="1188720" y="17465040"/>
-            <a:ext cx="13167360" cy="2926080"/>
-          </a:xfrm>
-          <a:prstGeom prst="rect">
-            <a:avLst/>
-          </a:prstGeom>
-          <a:noFill/>
-        </p:spPr>
-        <p:txBody>
-          <a:bodyPr wrap="square">
-            <a:spAutoFit/>
-          </a:bodyPr>
-          <a:lstStyle/>
-          <a:p/>
-          <a:p>
-            <a:pPr>
-              <a:spcAft>
-                <a:spcPts val="1000"/>
-              </a:spcAft>
-            </a:pPr>
-            <a:r>
-              <a:rPr b="1" sz="1700">
-                <a:solidFill>
-                  <a:srgbClr val="10B981"/>
-                </a:solidFill>
-              </a:rPr>
-              <a:t>✓ 75.61% Data Pruning: </a:t>
-            </a:r>
-            <a:r>
-              <a:rPr sz="1550">
-                <a:solidFill>
-                  <a:srgbClr val="1E293B"/>
-                </a:solidFill>
-              </a:rPr>
-              <a:t>BWOA reduces 41 features down to 10 optimal dimensions while maintaining 92.31% Random Forest CV validation accuracy.</a:t>
-            </a:r>
-          </a:p>
-          <a:p>
-            <a:pPr>
-              <a:spcAft>
-                <a:spcPts val="1000"/>
-              </a:spcAft>
-            </a:pPr>
-            <a:r>
-              <a:rPr b="1" sz="1700">
-                <a:solidFill>
-                  <a:srgbClr val="10B981"/>
-                </a:solidFill>
-              </a:rPr>
-              <a:t>✓ 70.56% Multi-Class Accuracy: </a:t>
-            </a:r>
-            <a:r>
-              <a:rPr sz="1550">
-                <a:solidFill>
-                  <a:srgbClr val="1E293B"/>
-                </a:solidFill>
-              </a:rPr>
-              <a:t>Tested on 22,544 held-out NSL-KDD samples with 96.89% precision on Normal traffic and 89.04% recall on DoS attacks.</a:t>
-            </a:r>
-          </a:p>
-          <a:p>
-            <a:pPr>
-              <a:spcAft>
-                <a:spcPts val="1000"/>
-              </a:spcAft>
-            </a:pPr>
-            <a:r>
-              <a:rPr b="1" sz="1700">
-                <a:solidFill>
-                  <a:srgbClr val="10B981"/>
-                </a:solidFill>
-              </a:rPr>
-              <a:t>✓ 0.76ms Edge Latency: </a:t>
-            </a:r>
-            <a:r>
-              <a:rPr sz="1550">
-                <a:solidFill>
-                  <a:srgbClr val="1E293B"/>
-                </a:solidFill>
-              </a:rPr>
-              <a:t>Float16 quantized model executes 207x faster than baseline, easily passing the sub-100ms industrial SCADA constraint.</a:t>
+              <a:t>Design Science Research (DSR) Execution</a:t>
             </a:r>
           </a:p>
         </p:txBody>
       </p:sp>
       <p:pic>
         <p:nvPicPr>
-          <p:cNvPr id="21" name="Picture 20" descr="latency_comparison_barchart.png"/>
+          <p:cNvPr id="28" name="Picture 27" descr="dsr_framework.png"/>
           <p:cNvPicPr>
             <a:picLocks noChangeAspect="1"/>
           </p:cNvPicPr>
@@ -3987,8 +4304,8 @@
         </p:blipFill>
         <p:spPr>
           <a:xfrm>
-            <a:off x="1188720" y="22128480"/>
-            <a:ext cx="13167360" cy="7333719"/>
+            <a:off x="1005840" y="26517600"/>
+            <a:ext cx="8869680" cy="3652221"/>
           </a:xfrm>
           <a:prstGeom prst="rect">
             <a:avLst/>
@@ -3997,14 +4314,153 @@
       </p:pic>
       <p:sp>
         <p:nvSpPr>
-          <p:cNvPr id="22" name="Rounded Rectangle 21"/>
+          <p:cNvPr id="29" name="TextBox 28"/>
+          <p:cNvSpPr txBox="1"/>
+          <p:nvPr/>
+        </p:nvSpPr>
+        <p:spPr>
+          <a:xfrm>
+            <a:off x="1005840" y="34015680"/>
+            <a:ext cx="8869680" cy="7680960"/>
+          </a:xfrm>
+          <a:prstGeom prst="rect">
+            <a:avLst/>
+          </a:prstGeom>
+          <a:noFill/>
+        </p:spPr>
+        <p:txBody>
+          <a:bodyPr wrap="square">
+            <a:spAutoFit/>
+          </a:bodyPr>
+          <a:lstStyle/>
+          <a:p/>
+          <a:p>
+            <a:pPr>
+              <a:spcAft>
+                <a:spcPts val="600"/>
+              </a:spcAft>
+            </a:pPr>
+            <a:r>
+              <a:rPr b="1" sz="1350">
+                <a:solidFill>
+                  <a:srgbClr val="10B981"/>
+                </a:solidFill>
+              </a:rPr>
+              <a:t>✓ Stage 1 (Problem Identification): </a:t>
+            </a:r>
+            <a:r>
+              <a:rPr sz="1300">
+                <a:solidFill>
+                  <a:srgbClr val="0F172A"/>
+                </a:solidFill>
+              </a:rPr>
+              <a:t>Air-gap loss &amp; SCADA real-time deadlines in African/Russian mines.</a:t>
+            </a:r>
+          </a:p>
+          <a:p>
+            <a:pPr>
+              <a:spcAft>
+                <a:spcPts val="600"/>
+              </a:spcAft>
+            </a:pPr>
+            <a:r>
+              <a:rPr b="1" sz="1350">
+                <a:solidFill>
+                  <a:srgbClr val="10B981"/>
+                </a:solidFill>
+              </a:rPr>
+              <a:t>✓ Stage 2 (Define Objectives): </a:t>
+            </a:r>
+            <a:r>
+              <a:rPr sz="1300">
+                <a:solidFill>
+                  <a:srgbClr val="0F172A"/>
+                </a:solidFill>
+              </a:rPr>
+              <a:t>Target &lt; 1.0 ms latency, &lt; 1.0 MB model size, 1GB RAM edge support.</a:t>
+            </a:r>
+          </a:p>
+          <a:p>
+            <a:pPr>
+              <a:spcAft>
+                <a:spcPts val="600"/>
+              </a:spcAft>
+            </a:pPr>
+            <a:r>
+              <a:rPr b="1" sz="1350">
+                <a:solidFill>
+                  <a:srgbClr val="10B981"/>
+                </a:solidFill>
+              </a:rPr>
+              <a:t>✓ Stage 3 (Design &amp; Artifact): </a:t>
+            </a:r>
+            <a:r>
+              <a:rPr sz="1300">
+                <a:solidFill>
+                  <a:srgbClr val="0F172A"/>
+                </a:solidFill>
+              </a:rPr>
+              <a:t>BWOA metaheuristic + Conv1D-LSTM + Float16 quantization.</a:t>
+            </a:r>
+          </a:p>
+          <a:p>
+            <a:pPr>
+              <a:spcAft>
+                <a:spcPts val="600"/>
+              </a:spcAft>
+            </a:pPr>
+            <a:r>
+              <a:rPr b="1" sz="1350">
+                <a:solidFill>
+                  <a:srgbClr val="10B981"/>
+                </a:solidFill>
+              </a:rPr>
+              <a:t>✓ Stage 4 (Demonstration): </a:t>
+            </a:r>
+            <a:r>
+              <a:rPr sz="1300">
+                <a:solidFill>
+                  <a:srgbClr val="0F172A"/>
+                </a:solidFill>
+              </a:rPr>
+              <a:t>Packaged global CLI agent (@mhiskall282/unesco-mine-sec-cli).</a:t>
+            </a:r>
+          </a:p>
+          <a:p>
+            <a:pPr>
+              <a:spcAft>
+                <a:spcPts val="600"/>
+              </a:spcAft>
+            </a:pPr>
+            <a:r>
+              <a:rPr b="1" sz="1350">
+                <a:solidFill>
+                  <a:srgbClr val="10B981"/>
+                </a:solidFill>
+              </a:rPr>
+              <a:t>✓ Stage 5 (Evaluation): </a:t>
+            </a:r>
+            <a:r>
+              <a:rPr sz="1300">
+                <a:solidFill>
+                  <a:srgbClr val="0F172A"/>
+                </a:solidFill>
+              </a:rPr>
+              <a:t>NSL-KDD benchmark, SWaT transfer learning, and 75/75 unit test suites.</a:t>
+            </a:r>
+          </a:p>
+        </p:txBody>
+      </p:sp>
+      <p:sp>
+        <p:nvSpPr>
+          <p:cNvPr id="30" name="Rounded Rectangle 29"/>
           <p:cNvSpPr/>
           <p:nvPr/>
         </p:nvSpPr>
         <p:spPr>
           <a:xfrm>
-            <a:off x="15645384" y="16276320"/>
-            <a:ext cx="13716000" cy="12801600"/>
+            <a:off x="10469880" y="7680960"/>
+            <a:ext cx="9235440" cy="17190720"/>
           </a:xfrm>
           <a:prstGeom prst="roundRect">
             <a:avLst/>
@@ -4012,7 +4468,7 @@
           <a:solidFill>
             <a:srgbClr val="FFFFFF"/>
           </a:solidFill>
-          <a:ln w="25400">
+          <a:ln w="19050">
             <a:solidFill>
               <a:srgbClr val="CBD5E1"/>
             </a:solidFill>
@@ -4042,14 +4498,14 @@
       </p:sp>
       <p:sp>
         <p:nvSpPr>
-          <p:cNvPr id="23" name="Rounded Rectangle 22"/>
+          <p:cNvPr id="31" name="Rounded Rectangle 30"/>
           <p:cNvSpPr/>
           <p:nvPr/>
         </p:nvSpPr>
         <p:spPr>
           <a:xfrm>
-            <a:off x="15645384" y="16276320"/>
-            <a:ext cx="13716000" cy="1005840"/>
+            <a:off x="10469880" y="7680960"/>
+            <a:ext cx="9235440" cy="1097280"/>
           </a:xfrm>
           <a:prstGeom prst="roundRect">
             <a:avLst/>
@@ -4085,14 +4541,14 @@
       </p:sp>
       <p:sp>
         <p:nvSpPr>
-          <p:cNvPr id="24" name="TextBox 23"/>
+          <p:cNvPr id="32" name="TextBox 31"/>
           <p:cNvSpPr txBox="1"/>
           <p:nvPr/>
         </p:nvSpPr>
         <p:spPr>
           <a:xfrm>
-            <a:off x="15919704" y="16413480"/>
-            <a:ext cx="13167360" cy="731520"/>
+            <a:off x="10744200" y="7772400"/>
+            <a:ext cx="8686800" cy="914400"/>
           </a:xfrm>
           <a:prstGeom prst="rect">
             <a:avLst/>
@@ -4105,427 +4561,32 @@
           </a:bodyPr>
           <a:lstStyle/>
           <a:p>
-            <a:pPr algn="l"/>
-            <a:r>
-              <a:rPr sz="2400" b="1">
+            <a:r>
+              <a:rPr sz="1100" b="1">
+                <a:solidFill>
+                  <a:srgbClr val="00A3E0"/>
+                </a:solidFill>
+                <a:latin typeface="Arial"/>
+              </a:rPr>
+              <a:t>SECTION 3: TECHNOLOGICAL INNOVATION</a:t>
+            </a:r>
+          </a:p>
+          <a:p>
+            <a:r>
+              <a:rPr sz="1800" b="1">
                 <a:solidFill>
                   <a:srgbClr val="FFFFFF"/>
                 </a:solidFill>
                 <a:latin typeface="Arial"/>
               </a:rPr>
-              <a:t>4. EDGE HARDWARE DEPLOYMENT</a:t>
-            </a:r>
-          </a:p>
-        </p:txBody>
-      </p:sp>
-      <p:sp>
-        <p:nvSpPr>
-          <p:cNvPr id="25" name="TextBox 24"/>
-          <p:cNvSpPr txBox="1"/>
-          <p:nvPr/>
-        </p:nvSpPr>
-        <p:spPr>
-          <a:xfrm>
-            <a:off x="15910559" y="17465040"/>
-            <a:ext cx="13167360" cy="2011680"/>
-          </a:xfrm>
-          <a:prstGeom prst="rect">
-            <a:avLst/>
-          </a:prstGeom>
-          <a:noFill/>
-        </p:spPr>
-        <p:txBody>
-          <a:bodyPr wrap="square">
-            <a:spAutoFit/>
-          </a:bodyPr>
-          <a:lstStyle/>
-          <a:p>
-            <a:r>
-              <a:rPr sz="1600">
-                <a:solidFill>
-                  <a:srgbClr val="1E293B"/>
-                </a:solidFill>
-              </a:rPr>
-              <a:t>Validated on Raspberry Pi 4B (1GB RAM) edge hardware for remote subsoil facilities:</a:t>
-            </a:r>
-          </a:p>
-        </p:txBody>
-      </p:sp>
-      <p:sp>
-        <p:nvSpPr>
-          <p:cNvPr id="26" name="Rounded Rectangle 25"/>
-          <p:cNvSpPr/>
-          <p:nvPr/>
-        </p:nvSpPr>
-        <p:spPr>
-          <a:xfrm>
-            <a:off x="15910559" y="18653760"/>
-            <a:ext cx="6400800" cy="2286000"/>
-          </a:xfrm>
-          <a:prstGeom prst="roundRect">
-            <a:avLst/>
-          </a:prstGeom>
-          <a:solidFill>
-            <a:srgbClr val="F8FAFC"/>
-          </a:solidFill>
-          <a:ln w="31750">
-            <a:solidFill>
-              <a:srgbClr val="10B981"/>
-            </a:solidFill>
-          </a:ln>
-        </p:spPr>
-        <p:style>
-          <a:lnRef idx="1">
-            <a:schemeClr val="accent1"/>
-          </a:lnRef>
-          <a:fillRef idx="3">
-            <a:schemeClr val="accent1"/>
-          </a:fillRef>
-          <a:effectRef idx="2">
-            <a:schemeClr val="accent1"/>
-          </a:effectRef>
-          <a:fontRef idx="minor">
-            <a:schemeClr val="lt1"/>
-          </a:fontRef>
-        </p:style>
-        <p:txBody>
-          <a:bodyPr rtlCol="0" anchor="ctr"/>
-          <a:lstStyle/>
-          <a:p>
-            <a:pPr algn="ctr"/>
-          </a:p>
-        </p:txBody>
-      </p:sp>
-      <p:sp>
-        <p:nvSpPr>
-          <p:cNvPr id="27" name="TextBox 26"/>
-          <p:cNvSpPr txBox="1"/>
-          <p:nvPr/>
-        </p:nvSpPr>
-        <p:spPr>
-          <a:xfrm>
-            <a:off x="16093439" y="18836640"/>
-            <a:ext cx="6035040" cy="1920240"/>
-          </a:xfrm>
-          <a:prstGeom prst="rect">
-            <a:avLst/>
-          </a:prstGeom>
-          <a:noFill/>
-        </p:spPr>
-        <p:txBody>
-          <a:bodyPr wrap="none">
-            <a:spAutoFit/>
-          </a:bodyPr>
-          <a:lstStyle/>
-          <a:p>
-            <a:pPr algn="ctr"/>
-            <a:r>
-              <a:rPr sz="3600" b="1">
-                <a:solidFill>
-                  <a:srgbClr val="10B981"/>
-                </a:solidFill>
-                <a:latin typeface="Arial"/>
-              </a:rPr>
-              <a:t>0.76 ms</a:t>
-            </a:r>
-          </a:p>
-          <a:p>
-            <a:pPr algn="ctr"/>
-            <a:r>
-              <a:rPr sz="1400">
-                <a:solidFill>
-                  <a:srgbClr val="1E293B"/>
-                </a:solidFill>
-                <a:latin typeface="Arial"/>
-              </a:rPr>
-              <a:t>Inference Latency
-(Target: &lt; 100 ms)</a:t>
-            </a:r>
-          </a:p>
-        </p:txBody>
-      </p:sp>
-      <p:sp>
-        <p:nvSpPr>
-          <p:cNvPr id="28" name="Rounded Rectangle 27"/>
-          <p:cNvSpPr/>
-          <p:nvPr/>
-        </p:nvSpPr>
-        <p:spPr>
-          <a:xfrm>
-            <a:off x="22585680" y="18653760"/>
-            <a:ext cx="6400800" cy="2286000"/>
-          </a:xfrm>
-          <a:prstGeom prst="roundRect">
-            <a:avLst/>
-          </a:prstGeom>
-          <a:solidFill>
-            <a:srgbClr val="F8FAFC"/>
-          </a:solidFill>
-          <a:ln w="31750">
-            <a:solidFill>
-              <a:srgbClr val="00529B"/>
-            </a:solidFill>
-          </a:ln>
-        </p:spPr>
-        <p:style>
-          <a:lnRef idx="1">
-            <a:schemeClr val="accent1"/>
-          </a:lnRef>
-          <a:fillRef idx="3">
-            <a:schemeClr val="accent1"/>
-          </a:fillRef>
-          <a:effectRef idx="2">
-            <a:schemeClr val="accent1"/>
-          </a:effectRef>
-          <a:fontRef idx="minor">
-            <a:schemeClr val="lt1"/>
-          </a:fontRef>
-        </p:style>
-        <p:txBody>
-          <a:bodyPr rtlCol="0" anchor="ctr"/>
-          <a:lstStyle/>
-          <a:p>
-            <a:pPr algn="ctr"/>
-          </a:p>
-        </p:txBody>
-      </p:sp>
-      <p:sp>
-        <p:nvSpPr>
-          <p:cNvPr id="29" name="TextBox 28"/>
-          <p:cNvSpPr txBox="1"/>
-          <p:nvPr/>
-        </p:nvSpPr>
-        <p:spPr>
-          <a:xfrm>
-            <a:off x="22768560" y="18836640"/>
-            <a:ext cx="6035040" cy="1920240"/>
-          </a:xfrm>
-          <a:prstGeom prst="rect">
-            <a:avLst/>
-          </a:prstGeom>
-          <a:noFill/>
-        </p:spPr>
-        <p:txBody>
-          <a:bodyPr wrap="none">
-            <a:spAutoFit/>
-          </a:bodyPr>
-          <a:lstStyle/>
-          <a:p>
-            <a:pPr algn="ctr"/>
-            <a:r>
-              <a:rPr sz="3600" b="1">
-                <a:solidFill>
-                  <a:srgbClr val="00529B"/>
-                </a:solidFill>
-                <a:latin typeface="Arial"/>
-              </a:rPr>
-              <a:t>0.82 MB</a:t>
-            </a:r>
-          </a:p>
-          <a:p>
-            <a:pPr algn="ctr"/>
-            <a:r>
-              <a:rPr sz="1400">
-                <a:solidFill>
-                  <a:srgbClr val="1E293B"/>
-                </a:solidFill>
-                <a:latin typeface="Arial"/>
-              </a:rPr>
-              <a:t>Model Memory Size
-(83.2% Compression)</a:t>
-            </a:r>
-          </a:p>
-        </p:txBody>
-      </p:sp>
-      <p:sp>
-        <p:nvSpPr>
-          <p:cNvPr id="30" name="Rounded Rectangle 29"/>
-          <p:cNvSpPr/>
-          <p:nvPr/>
-        </p:nvSpPr>
-        <p:spPr>
-          <a:xfrm>
-            <a:off x="15910559" y="21214080"/>
-            <a:ext cx="6400800" cy="2286000"/>
-          </a:xfrm>
-          <a:prstGeom prst="roundRect">
-            <a:avLst/>
-          </a:prstGeom>
-          <a:solidFill>
-            <a:srgbClr val="F8FAFC"/>
-          </a:solidFill>
-          <a:ln w="31750">
-            <a:solidFill>
-              <a:srgbClr val="00A3E0"/>
-            </a:solidFill>
-          </a:ln>
-        </p:spPr>
-        <p:style>
-          <a:lnRef idx="1">
-            <a:schemeClr val="accent1"/>
-          </a:lnRef>
-          <a:fillRef idx="3">
-            <a:schemeClr val="accent1"/>
-          </a:fillRef>
-          <a:effectRef idx="2">
-            <a:schemeClr val="accent1"/>
-          </a:effectRef>
-          <a:fontRef idx="minor">
-            <a:schemeClr val="lt1"/>
-          </a:fontRef>
-        </p:style>
-        <p:txBody>
-          <a:bodyPr rtlCol="0" anchor="ctr"/>
-          <a:lstStyle/>
-          <a:p>
-            <a:pPr algn="ctr"/>
-          </a:p>
-        </p:txBody>
-      </p:sp>
-      <p:sp>
-        <p:nvSpPr>
-          <p:cNvPr id="31" name="TextBox 30"/>
-          <p:cNvSpPr txBox="1"/>
-          <p:nvPr/>
-        </p:nvSpPr>
-        <p:spPr>
-          <a:xfrm>
-            <a:off x="16093439" y="21396960"/>
-            <a:ext cx="6035040" cy="1920240"/>
-          </a:xfrm>
-          <a:prstGeom prst="rect">
-            <a:avLst/>
-          </a:prstGeom>
-          <a:noFill/>
-        </p:spPr>
-        <p:txBody>
-          <a:bodyPr wrap="none">
-            <a:spAutoFit/>
-          </a:bodyPr>
-          <a:lstStyle/>
-          <a:p>
-            <a:pPr algn="ctr"/>
-            <a:r>
-              <a:rPr sz="3600" b="1">
-                <a:solidFill>
-                  <a:srgbClr val="00A3E0"/>
-                </a:solidFill>
-                <a:latin typeface="Arial"/>
-              </a:rPr>
-              <a:t>290 MB</a:t>
-            </a:r>
-          </a:p>
-          <a:p>
-            <a:pPr algn="ctr"/>
-            <a:r>
-              <a:rPr sz="1400">
-                <a:solidFill>
-                  <a:srgbClr val="1E293B"/>
-                </a:solidFill>
-                <a:latin typeface="Arial"/>
-              </a:rPr>
-              <a:t>Peak RAM Usage
-(Fits 1GB Pi Gateway)</a:t>
-            </a:r>
-          </a:p>
-        </p:txBody>
-      </p:sp>
-      <p:sp>
-        <p:nvSpPr>
-          <p:cNvPr id="32" name="Rounded Rectangle 31"/>
-          <p:cNvSpPr/>
-          <p:nvPr/>
-        </p:nvSpPr>
-        <p:spPr>
-          <a:xfrm>
-            <a:off x="22585680" y="21214080"/>
-            <a:ext cx="6400800" cy="2286000"/>
-          </a:xfrm>
-          <a:prstGeom prst="roundRect">
-            <a:avLst/>
-          </a:prstGeom>
-          <a:solidFill>
-            <a:srgbClr val="F8FAFC"/>
-          </a:solidFill>
-          <a:ln w="31750">
-            <a:solidFill>
-              <a:srgbClr val="D4AF37"/>
-            </a:solidFill>
-          </a:ln>
-        </p:spPr>
-        <p:style>
-          <a:lnRef idx="1">
-            <a:schemeClr val="accent1"/>
-          </a:lnRef>
-          <a:fillRef idx="3">
-            <a:schemeClr val="accent1"/>
-          </a:fillRef>
-          <a:effectRef idx="2">
-            <a:schemeClr val="accent1"/>
-          </a:effectRef>
-          <a:fontRef idx="minor">
-            <a:schemeClr val="lt1"/>
-          </a:fontRef>
-        </p:style>
-        <p:txBody>
-          <a:bodyPr rtlCol="0" anchor="ctr"/>
-          <a:lstStyle/>
-          <a:p>
-            <a:pPr algn="ctr"/>
-          </a:p>
-        </p:txBody>
-      </p:sp>
-      <p:sp>
-        <p:nvSpPr>
-          <p:cNvPr id="33" name="TextBox 32"/>
-          <p:cNvSpPr txBox="1"/>
-          <p:nvPr/>
-        </p:nvSpPr>
-        <p:spPr>
-          <a:xfrm>
-            <a:off x="22768560" y="21396960"/>
-            <a:ext cx="6035040" cy="1920240"/>
-          </a:xfrm>
-          <a:prstGeom prst="rect">
-            <a:avLst/>
-          </a:prstGeom>
-          <a:noFill/>
-        </p:spPr>
-        <p:txBody>
-          <a:bodyPr wrap="none">
-            <a:spAutoFit/>
-          </a:bodyPr>
-          <a:lstStyle/>
-          <a:p>
-            <a:pPr algn="ctr"/>
-            <a:r>
-              <a:rPr sz="3600" b="1">
-                <a:solidFill>
-                  <a:srgbClr val="D4AF37"/>
-                </a:solidFill>
-                <a:latin typeface="Arial"/>
-              </a:rPr>
-              <a:t>2.5 W</a:t>
-            </a:r>
-          </a:p>
-          <a:p>
-            <a:pPr algn="ctr"/>
-            <a:r>
-              <a:rPr sz="1400">
-                <a:solidFill>
-                  <a:srgbClr val="1E293B"/>
-                </a:solidFill>
-                <a:latin typeface="Arial"/>
-              </a:rPr>
-              <a:t>Power Consumption
-(Solar/Battery Ready)</a:t>
+              <a:t>4-Layer Edge-to-Cloud Security Architecture</a:t>
             </a:r>
           </a:p>
         </p:txBody>
       </p:sp>
       <p:pic>
         <p:nvPicPr>
-          <p:cNvPr id="34" name="Picture 33" descr="confusion_matrix.png"/>
+          <p:cNvPr id="33" name="Picture 32" descr="system_architecture.png"/>
           <p:cNvPicPr>
             <a:picLocks noChangeAspect="1"/>
           </p:cNvPicPr>
@@ -4539,8 +4600,8 @@
         </p:blipFill>
         <p:spPr>
           <a:xfrm>
-            <a:off x="15910559" y="23957280"/>
-            <a:ext cx="13167360" cy="13167360"/>
+            <a:off x="10652760" y="8961120"/>
+            <a:ext cx="8869680" cy="5203582"/>
           </a:xfrm>
           <a:prstGeom prst="rect">
             <a:avLst/>
@@ -4549,14 +4610,130 @@
       </p:pic>
       <p:sp>
         <p:nvSpPr>
+          <p:cNvPr id="34" name="TextBox 33"/>
+          <p:cNvSpPr txBox="1"/>
+          <p:nvPr/>
+        </p:nvSpPr>
+        <p:spPr>
+          <a:xfrm>
+            <a:off x="10652760" y="18288000"/>
+            <a:ext cx="8869680" cy="6217920"/>
+          </a:xfrm>
+          <a:prstGeom prst="rect">
+            <a:avLst/>
+          </a:prstGeom>
+          <a:noFill/>
+        </p:spPr>
+        <p:txBody>
+          <a:bodyPr wrap="square">
+            <a:spAutoFit/>
+          </a:bodyPr>
+          <a:lstStyle/>
+          <a:p/>
+          <a:p>
+            <a:pPr>
+              <a:spcAft>
+                <a:spcPts val="600"/>
+              </a:spcAft>
+            </a:pPr>
+            <a:r>
+              <a:rPr b="1" sz="1350">
+                <a:solidFill>
+                  <a:srgbClr val="00529B"/>
+                </a:solidFill>
+              </a:rPr>
+              <a:t>■ Layer 1 (Ingestion): </a:t>
+            </a:r>
+            <a:r>
+              <a:rPr sz="1300">
+                <a:solidFill>
+                  <a:srgbClr val="0F172A"/>
+                </a:solidFill>
+              </a:rPr>
+              <a:t>Promiscuous packet sniffer capturing Modbus/TCP, DNP3, and OPC-UA streams.</a:t>
+            </a:r>
+          </a:p>
+          <a:p>
+            <a:pPr>
+              <a:spcAft>
+                <a:spcPts val="600"/>
+              </a:spcAft>
+            </a:pPr>
+            <a:r>
+              <a:rPr b="1" sz="1350">
+                <a:solidFill>
+                  <a:srgbClr val="00529B"/>
+                </a:solidFill>
+              </a:rPr>
+              <a:t>■ Layer 2 (BWOA Pruning): </a:t>
+            </a:r>
+            <a:r>
+              <a:rPr sz="1300">
+                <a:solidFill>
+                  <a:srgbClr val="0F172A"/>
+                </a:solidFill>
+              </a:rPr>
+              <a:t>Metaheuristic optimizer prunes 41 features down to 10 vital signals.</a:t>
+            </a:r>
+          </a:p>
+          <a:p>
+            <a:pPr>
+              <a:spcAft>
+                <a:spcPts val="600"/>
+              </a:spcAft>
+            </a:pPr>
+            <a:r>
+              <a:rPr b="1" sz="1350">
+                <a:solidFill>
+                  <a:srgbClr val="00529B"/>
+                </a:solidFill>
+              </a:rPr>
+              <a:t>■ Layer 3 (Deep Learning): </a:t>
+            </a:r>
+            <a:r>
+              <a:rPr sz="1300">
+                <a:solidFill>
+                  <a:srgbClr val="0F172A"/>
+                </a:solidFill>
+              </a:rPr>
+              <a:t>Spatial-temporal Conv1D-LSTM neural classifier quantized to Float16.</a:t>
+            </a:r>
+          </a:p>
+          <a:p>
+            <a:pPr>
+              <a:spcAft>
+                <a:spcPts val="600"/>
+              </a:spcAft>
+            </a:pPr>
+            <a:r>
+              <a:rPr b="1" sz="1350">
+                <a:solidFill>
+                  <a:srgbClr val="00529B"/>
+                </a:solidFill>
+              </a:rPr>
+              <a:t>■ Layer 4 (SaaS Dashboard): </a:t>
+            </a:r>
+            <a:r>
+              <a:rPr sz="1300">
+                <a:solidFill>
+                  <a:srgbClr val="0F172A"/>
+                </a:solidFill>
+              </a:rPr>
+              <a:t>Multi-tenant Laravel Livewire console streaming sub-second alerts.</a:t>
+            </a:r>
+          </a:p>
+        </p:txBody>
+      </p:sp>
+      <p:sp>
+        <p:nvSpPr>
           <p:cNvPr id="35" name="Rounded Rectangle 34"/>
           <p:cNvSpPr/>
           <p:nvPr/>
         </p:nvSpPr>
         <p:spPr>
           <a:xfrm>
-            <a:off x="914400" y="29535119"/>
-            <a:ext cx="13716000" cy="12070080"/>
+            <a:off x="10469880" y="25237440"/>
+            <a:ext cx="9235440" cy="17007840"/>
           </a:xfrm>
           <a:prstGeom prst="roundRect">
             <a:avLst/>
@@ -4564,7 +4741,7 @@
           <a:solidFill>
             <a:srgbClr val="FFFFFF"/>
           </a:solidFill>
-          <a:ln w="25400">
+          <a:ln w="19050">
             <a:solidFill>
               <a:srgbClr val="CBD5E1"/>
             </a:solidFill>
@@ -4600,8 +4777,8 @@
         </p:nvSpPr>
         <p:spPr>
           <a:xfrm>
-            <a:off x="914400" y="29535119"/>
-            <a:ext cx="13716000" cy="1005840"/>
+            <a:off x="10469880" y="25237440"/>
+            <a:ext cx="9235440" cy="1097280"/>
           </a:xfrm>
           <a:prstGeom prst="roundRect">
             <a:avLst/>
@@ -4643,8 +4820,8 @@
         </p:nvSpPr>
         <p:spPr>
           <a:xfrm>
-            <a:off x="1188720" y="29672279"/>
-            <a:ext cx="13167360" cy="731520"/>
+            <a:off x="10744200" y="25328880"/>
+            <a:ext cx="8686800" cy="914400"/>
           </a:xfrm>
           <a:prstGeom prst="rect">
             <a:avLst/>
@@ -4657,29 +4834,63 @@
           </a:bodyPr>
           <a:lstStyle/>
           <a:p>
-            <a:pPr algn="l"/>
-            <a:r>
-              <a:rPr sz="2400" b="1">
+            <a:r>
+              <a:rPr sz="1100" b="1">
+                <a:solidFill>
+                  <a:srgbClr val="00A3E0"/>
+                </a:solidFill>
+                <a:latin typeface="Arial"/>
+              </a:rPr>
+              <a:t>SECTION 4: MATHEMATICAL OPTIMIZATION</a:t>
+            </a:r>
+          </a:p>
+          <a:p>
+            <a:r>
+              <a:rPr sz="1800" b="1">
                 <a:solidFill>
                   <a:srgbClr val="FFFFFF"/>
                 </a:solidFill>
                 <a:latin typeface="Arial"/>
               </a:rPr>
-              <a:t>5. ECONOMIC ROI &amp; UN SDG IMPACT</a:t>
-            </a:r>
-          </a:p>
-        </p:txBody>
-      </p:sp>
-      <p:sp>
-        <p:nvSpPr>
-          <p:cNvPr id="38" name="TextBox 37"/>
+              <a:t>BWOA Convergence &amp; Neural Layout</a:t>
+            </a:r>
+          </a:p>
+        </p:txBody>
+      </p:sp>
+      <p:pic>
+        <p:nvPicPr>
+          <p:cNvPr id="38" name="Picture 37" descr="bwoa_convergence.png"/>
+          <p:cNvPicPr>
+            <a:picLocks noChangeAspect="1"/>
+          </p:cNvPicPr>
+          <p:nvPr/>
+        </p:nvPicPr>
+        <p:blipFill>
+          <a:blip r:embed="rId5"/>
+          <a:stretch>
+            <a:fillRect/>
+          </a:stretch>
+        </p:blipFill>
+        <p:spPr>
+          <a:xfrm>
+            <a:off x="10652760" y="26517600"/>
+            <a:ext cx="8869680" cy="5543550"/>
+          </a:xfrm>
+          <a:prstGeom prst="rect">
+            <a:avLst/>
+          </a:prstGeom>
+        </p:spPr>
+      </p:pic>
+      <p:sp>
+        <p:nvSpPr>
+          <p:cNvPr id="39" name="TextBox 38"/>
           <p:cNvSpPr txBox="1"/>
           <p:nvPr/>
         </p:nvSpPr>
         <p:spPr>
           <a:xfrm>
-            <a:off x="1188720" y="30723840"/>
-            <a:ext cx="13167360" cy="10515600"/>
+            <a:off x="10652760" y="34015680"/>
+            <a:ext cx="8869680" cy="7680960"/>
           </a:xfrm>
           <a:prstGeom prst="rect">
             <a:avLst/>
@@ -4695,111 +4906,107 @@
           <a:p>
             <a:pPr>
               <a:spcAft>
-                <a:spcPts val="1200"/>
+                <a:spcPts val="600"/>
               </a:spcAft>
             </a:pPr>
             <a:r>
-              <a:rPr b="1" sz="1700">
+              <a:rPr b="1" sz="1350">
                 <a:solidFill>
                   <a:srgbClr val="D4AF37"/>
                 </a:solidFill>
               </a:rPr>
-              <a:t>★ SDG 9: Industry, Innovation &amp; Infrastructure
-</a:t>
-            </a:r>
-            <a:r>
-              <a:rPr sz="1500">
-                <a:solidFill>
-                  <a:srgbClr val="1E293B"/>
-                </a:solidFill>
-              </a:rPr>
-              <a:t>Hardens critical mining cyber-physical systems against zero-day disruption, safeguarding essential mineral supply chains.</a:t>
+              <a:t>★ Encircling &amp; Bubble-Net: </a:t>
+            </a:r>
+            <a:r>
+              <a:rPr sz="1300">
+                <a:solidFill>
+                  <a:srgbClr val="0F172A"/>
+                </a:solidFill>
+              </a:rPr>
+              <a:t>whales adjust velocity using a V-shaped transfer function: V(x) = |x / sqrt(1 + x^2)|.</a:t>
             </a:r>
           </a:p>
           <a:p>
             <a:pPr>
               <a:spcAft>
-                <a:spcPts val="1200"/>
+                <a:spcPts val="600"/>
               </a:spcAft>
             </a:pPr>
             <a:r>
-              <a:rPr b="1" sz="1700">
+              <a:rPr b="1" sz="1350">
                 <a:solidFill>
                   <a:srgbClr val="D4AF37"/>
                 </a:solidFill>
               </a:rPr>
-              <a:t>★ SDG 8: Decent Work &amp; Economic Growth
-</a:t>
-            </a:r>
-            <a:r>
-              <a:rPr sz="1500">
-                <a:solidFill>
-                  <a:srgbClr val="1E293B"/>
-                </a:solidFill>
-              </a:rPr>
-              <a:t>Protects underground worker safety by preventing cyber manipulation of toxic gas sensors and ventilation grids.</a:t>
+              <a:t>★ Accuracy Floor Constraint: </a:t>
+            </a:r>
+            <a:r>
+              <a:rPr sz="1300">
+                <a:solidFill>
+                  <a:srgbClr val="0F172A"/>
+                </a:solidFill>
+              </a:rPr>
+              <a:t>Enforces strict 75% accuracy floor with penalty weight alpha=0.3.</a:t>
             </a:r>
           </a:p>
           <a:p>
             <a:pPr>
               <a:spcAft>
-                <a:spcPts val="1200"/>
+                <a:spcPts val="600"/>
               </a:spcAft>
             </a:pPr>
             <a:r>
-              <a:rPr b="1" sz="1700">
+              <a:rPr b="1" sz="1350">
                 <a:solidFill>
                   <a:srgbClr val="D4AF37"/>
                 </a:solidFill>
               </a:rPr>
-              <a:t>★ SDG 17: Partnerships for the Goals
-</a:t>
-            </a:r>
-            <a:r>
-              <a:rPr sz="1500">
-                <a:solidFill>
-                  <a:srgbClr val="1E293B"/>
-                </a:solidFill>
-              </a:rPr>
-              <a:t>Fosters bilateral Russian-African scientific collaboration, knowledge transfer, and open-source capacity building.</a:t>
+              <a:t>★ Selected 10 Features: </a:t>
+            </a:r>
+            <a:r>
+              <a:rPr sz="1300">
+                <a:solidFill>
+                  <a:srgbClr val="0F172A"/>
+                </a:solidFill>
+              </a:rPr>
+              <a:t>protocol_type, service, flag, src_bytes, hot, su_attempted, serror_rate, same_srv_rate, diff_srv_rate, dst_host_diff_srv_rate.</a:t>
             </a:r>
           </a:p>
           <a:p>
             <a:pPr>
               <a:spcAft>
-                <a:spcPts val="1200"/>
+                <a:spcPts val="600"/>
               </a:spcAft>
             </a:pPr>
             <a:r>
-              <a:rPr b="1" sz="1700">
+              <a:rPr b="1" sz="1350">
                 <a:solidFill>
                   <a:srgbClr val="D4AF37"/>
                 </a:solidFill>
               </a:rPr>
-              <a:t>★ High Economic ROI (200x - 300x)
-</a:t>
-            </a:r>
-            <a:r>
-              <a:rPr sz="1500">
-                <a:solidFill>
-                  <a:srgbClr val="1E293B"/>
-                </a:solidFill>
-              </a:rPr>
-              <a:t>Preventing a single 24-hour ransomware outage on a ball mill or autonomous truck saves $300k to $450k, against an annual deployment cost of under $1,500.</a:t>
-            </a:r>
-          </a:p>
-        </p:txBody>
-      </p:sp>
-      <p:sp>
-        <p:nvSpPr>
-          <p:cNvPr id="39" name="Rounded Rectangle 38"/>
+              <a:t>★ Convergence Speed: </a:t>
+            </a:r>
+            <a:r>
+              <a:rPr sz="1300">
+                <a:solidFill>
+                  <a:srgbClr val="0F172A"/>
+                </a:solidFill>
+              </a:rPr>
+              <a:t>Optimal 10-feature mask reached at iteration 23/100 (92.31% RF CV accuracy).</a:t>
+            </a:r>
+          </a:p>
+        </p:txBody>
+      </p:sp>
+      <p:sp>
+        <p:nvSpPr>
+          <p:cNvPr id="40" name="Rounded Rectangle 39"/>
           <p:cNvSpPr/>
           <p:nvPr/>
         </p:nvSpPr>
         <p:spPr>
           <a:xfrm>
-            <a:off x="15645384" y="29535119"/>
-            <a:ext cx="13716000" cy="12070080"/>
+            <a:off x="20116800" y="7680960"/>
+            <a:ext cx="9235440" cy="17190720"/>
           </a:xfrm>
           <a:prstGeom prst="roundRect">
             <a:avLst/>
@@ -4807,7 +5014,7 @@
           <a:solidFill>
             <a:srgbClr val="FFFFFF"/>
           </a:solidFill>
-          <a:ln w="25400">
+          <a:ln w="19050">
             <a:solidFill>
               <a:srgbClr val="CBD5E1"/>
             </a:solidFill>
@@ -4837,14 +5044,14 @@
       </p:sp>
       <p:sp>
         <p:nvSpPr>
-          <p:cNvPr id="40" name="Rounded Rectangle 39"/>
+          <p:cNvPr id="41" name="Rounded Rectangle 40"/>
           <p:cNvSpPr/>
           <p:nvPr/>
         </p:nvSpPr>
         <p:spPr>
           <a:xfrm>
-            <a:off x="15645384" y="29535119"/>
-            <a:ext cx="13716000" cy="1005840"/>
+            <a:off x="20116800" y="7680960"/>
+            <a:ext cx="9235440" cy="1097280"/>
           </a:xfrm>
           <a:prstGeom prst="roundRect">
             <a:avLst/>
@@ -4880,14 +5087,14 @@
       </p:sp>
       <p:sp>
         <p:nvSpPr>
-          <p:cNvPr id="41" name="TextBox 40"/>
+          <p:cNvPr id="42" name="TextBox 41"/>
           <p:cNvSpPr txBox="1"/>
           <p:nvPr/>
         </p:nvSpPr>
         <p:spPr>
           <a:xfrm>
-            <a:off x="15919704" y="29672279"/>
-            <a:ext cx="13167360" cy="731520"/>
+            <a:off x="20391120" y="7772400"/>
+            <a:ext cx="8686800" cy="914400"/>
           </a:xfrm>
           <a:prstGeom prst="rect">
             <a:avLst/>
@@ -4900,29 +5107,175 @@
           </a:bodyPr>
           <a:lstStyle/>
           <a:p>
-            <a:pPr algn="l"/>
-            <a:r>
-              <a:rPr sz="2400" b="1">
+            <a:r>
+              <a:rPr sz="1100" b="1">
+                <a:solidFill>
+                  <a:srgbClr val="00A3E0"/>
+                </a:solidFill>
+                <a:latin typeface="Arial"/>
+              </a:rPr>
+              <a:t>SECTION 5: EMPIRICAL BENCHMARKS</a:t>
+            </a:r>
+          </a:p>
+          <a:p>
+            <a:r>
+              <a:rPr sz="1800" b="1">
                 <a:solidFill>
                   <a:srgbClr val="FFFFFF"/>
                 </a:solidFill>
                 <a:latin typeface="Arial"/>
               </a:rPr>
-              <a:t>6. CONCLUSION &amp; OPEN SOURCE ARTIFACTS</a:t>
-            </a:r>
-          </a:p>
-        </p:txBody>
-      </p:sp>
-      <p:sp>
-        <p:nvSpPr>
-          <p:cNvPr id="42" name="TextBox 41"/>
+              <a:t>Sub-Millisecond Edge Latency vs SCADA Limit</a:t>
+            </a:r>
+          </a:p>
+        </p:txBody>
+      </p:sp>
+      <p:pic>
+        <p:nvPicPr>
+          <p:cNvPr id="43" name="Picture 42" descr="latency_comparison_barchart.png"/>
+          <p:cNvPicPr>
+            <a:picLocks noChangeAspect="1"/>
+          </p:cNvPicPr>
+          <p:nvPr/>
+        </p:nvPicPr>
+        <p:blipFill>
+          <a:blip r:embed="rId6"/>
+          <a:stretch>
+            <a:fillRect/>
+          </a:stretch>
+        </p:blipFill>
+        <p:spPr>
+          <a:xfrm>
+            <a:off x="20299680" y="8961120"/>
+            <a:ext cx="8869680" cy="4940075"/>
+          </a:xfrm>
+          <a:prstGeom prst="rect">
+            <a:avLst/>
+          </a:prstGeom>
+        </p:spPr>
+      </p:pic>
+      <p:pic>
+        <p:nvPicPr>
+          <p:cNvPr id="44" name="Picture 43" descr="confusion_matrix.png"/>
+          <p:cNvPicPr>
+            <a:picLocks noChangeAspect="1"/>
+          </p:cNvPicPr>
+          <p:nvPr/>
+        </p:nvPicPr>
+        <p:blipFill>
+          <a:blip r:embed="rId7"/>
+          <a:stretch>
+            <a:fillRect/>
+          </a:stretch>
+        </p:blipFill>
+        <p:spPr>
+          <a:xfrm>
+            <a:off x="20299680" y="17007840"/>
+            <a:ext cx="8869680" cy="8869680"/>
+          </a:xfrm>
+          <a:prstGeom prst="rect">
+            <a:avLst/>
+          </a:prstGeom>
+        </p:spPr>
+      </p:pic>
+      <p:sp>
+        <p:nvSpPr>
+          <p:cNvPr id="45" name="Rounded Rectangle 44"/>
+          <p:cNvSpPr/>
+          <p:nvPr/>
+        </p:nvSpPr>
+        <p:spPr>
+          <a:xfrm>
+            <a:off x="20116800" y="25237440"/>
+            <a:ext cx="9235440" cy="17007840"/>
+          </a:xfrm>
+          <a:prstGeom prst="roundRect">
+            <a:avLst/>
+          </a:prstGeom>
+          <a:solidFill>
+            <a:srgbClr val="FFFFFF"/>
+          </a:solidFill>
+          <a:ln w="19050">
+            <a:solidFill>
+              <a:srgbClr val="CBD5E1"/>
+            </a:solidFill>
+          </a:ln>
+        </p:spPr>
+        <p:style>
+          <a:lnRef idx="1">
+            <a:schemeClr val="accent1"/>
+          </a:lnRef>
+          <a:fillRef idx="3">
+            <a:schemeClr val="accent1"/>
+          </a:fillRef>
+          <a:effectRef idx="2">
+            <a:schemeClr val="accent1"/>
+          </a:effectRef>
+          <a:fontRef idx="minor">
+            <a:schemeClr val="lt1"/>
+          </a:fontRef>
+        </p:style>
+        <p:txBody>
+          <a:bodyPr rtlCol="0" anchor="ctr"/>
+          <a:lstStyle/>
+          <a:p>
+            <a:pPr algn="ctr"/>
+          </a:p>
+        </p:txBody>
+      </p:sp>
+      <p:sp>
+        <p:nvSpPr>
+          <p:cNvPr id="46" name="Rounded Rectangle 45"/>
+          <p:cNvSpPr/>
+          <p:nvPr/>
+        </p:nvSpPr>
+        <p:spPr>
+          <a:xfrm>
+            <a:off x="20116800" y="25237440"/>
+            <a:ext cx="9235440" cy="1097280"/>
+          </a:xfrm>
+          <a:prstGeom prst="roundRect">
+            <a:avLst/>
+          </a:prstGeom>
+          <a:solidFill>
+            <a:srgbClr val="00529B"/>
+          </a:solidFill>
+          <a:ln>
+            <a:noFill/>
+          </a:ln>
+        </p:spPr>
+        <p:style>
+          <a:lnRef idx="1">
+            <a:schemeClr val="accent1"/>
+          </a:lnRef>
+          <a:fillRef idx="3">
+            <a:schemeClr val="accent1"/>
+          </a:fillRef>
+          <a:effectRef idx="2">
+            <a:schemeClr val="accent1"/>
+          </a:effectRef>
+          <a:fontRef idx="minor">
+            <a:schemeClr val="lt1"/>
+          </a:fontRef>
+        </p:style>
+        <p:txBody>
+          <a:bodyPr rtlCol="0" anchor="ctr"/>
+          <a:lstStyle/>
+          <a:p>
+            <a:pPr algn="ctr"/>
+          </a:p>
+        </p:txBody>
+      </p:sp>
+      <p:sp>
+        <p:nvSpPr>
+          <p:cNvPr id="47" name="TextBox 46"/>
           <p:cNvSpPr txBox="1"/>
           <p:nvPr/>
         </p:nvSpPr>
         <p:spPr>
           <a:xfrm>
-            <a:off x="15910559" y="30723840"/>
-            <a:ext cx="13167360" cy="10515600"/>
+            <a:off x="20391120" y="25328880"/>
+            <a:ext cx="8686800" cy="914400"/>
           </a:xfrm>
           <a:prstGeom prst="rect">
             <a:avLst/>
@@ -4930,6 +5283,51 @@
           <a:noFill/>
         </p:spPr>
         <p:txBody>
+          <a:bodyPr wrap="none">
+            <a:spAutoFit/>
+          </a:bodyPr>
+          <a:lstStyle/>
+          <a:p>
+            <a:r>
+              <a:rPr sz="1100" b="1">
+                <a:solidFill>
+                  <a:srgbClr val="00A3E0"/>
+                </a:solidFill>
+                <a:latin typeface="Arial"/>
+              </a:rPr>
+              <a:t>SECTION 6: SUSTAINABILITY &amp; ARTIFACTS</a:t>
+            </a:r>
+          </a:p>
+          <a:p>
+            <a:r>
+              <a:rPr sz="1800" b="1">
+                <a:solidFill>
+                  <a:srgbClr val="FFFFFF"/>
+                </a:solidFill>
+                <a:latin typeface="Arial"/>
+              </a:rPr>
+              <a:t>UN SDG Impact &amp; Open-Source Ecosystem</a:t>
+            </a:r>
+          </a:p>
+        </p:txBody>
+      </p:sp>
+      <p:sp>
+        <p:nvSpPr>
+          <p:cNvPr id="48" name="TextBox 47"/>
+          <p:cNvSpPr txBox="1"/>
+          <p:nvPr/>
+        </p:nvSpPr>
+        <p:spPr>
+          <a:xfrm>
+            <a:off x="20299680" y="26517600"/>
+            <a:ext cx="8869680" cy="15087600"/>
+          </a:xfrm>
+          <a:prstGeom prst="rect">
+            <a:avLst/>
+          </a:prstGeom>
+          <a:noFill/>
+        </p:spPr>
+        <p:txBody>
           <a:bodyPr wrap="square">
             <a:spAutoFit/>
           </a:bodyPr>
@@ -4938,116 +5336,139 @@
           <a:p>
             <a:pPr>
               <a:spcAft>
-                <a:spcPts val="1200"/>
+                <a:spcPts val="800"/>
               </a:spcAft>
             </a:pPr>
             <a:r>
-              <a:rPr b="1" sz="1700">
+              <a:rPr b="1" sz="1350">
                 <a:solidFill>
                   <a:srgbClr val="00529B"/>
                 </a:solidFill>
               </a:rPr>
-              <a:t>► Complete Open-Source Ecosystem: </a:t>
-            </a:r>
-            <a:r>
-              <a:rPr sz="1550">
-                <a:solidFill>
-                  <a:srgbClr val="1E293B"/>
-                </a:solidFill>
-              </a:rPr>
-              <a:t>Full code, training notebooks, benchmarks, and 75 unit test suites are fully open source on GitHub.</a:t>
+              <a:t>◆ SDG 9 (Industry &amp; Innovation): </a:t>
+            </a:r>
+            <a:r>
+              <a:rPr sz="1300">
+                <a:solidFill>
+                  <a:srgbClr val="0F172A"/>
+                </a:solidFill>
+              </a:rPr>
+              <a:t>Hardens critical mining cyber-physical infrastructure against zero-day disruption, safeguarding global mineral supply chains.</a:t>
             </a:r>
           </a:p>
           <a:p>
             <a:pPr>
               <a:spcAft>
-                <a:spcPts val="1200"/>
+                <a:spcPts val="800"/>
               </a:spcAft>
             </a:pPr>
             <a:r>
-              <a:rPr b="1" sz="1700">
+              <a:rPr b="1" sz="1350">
                 <a:solidFill>
                   <a:srgbClr val="00529B"/>
                 </a:solidFill>
               </a:rPr>
-              <a:t>► NPM Edge Sniffer Package: </a:t>
-            </a:r>
-            <a:r>
-              <a:rPr sz="1550">
-                <a:solidFill>
-                  <a:srgbClr val="1E293B"/>
-                </a:solidFill>
-              </a:rPr>
-              <a:t>Install instantly on any gateway via '@mhiskall282/unesco-mine-sec-cli' from GitHub Packages.</a:t>
+              <a:t>◆ SDG 8 (Decent Work &amp; Safety): </a:t>
+            </a:r>
+            <a:r>
+              <a:rPr sz="1300">
+                <a:solidFill>
+                  <a:srgbClr val="0F172A"/>
+                </a:solidFill>
+              </a:rPr>
+              <a:t>Protects underground worker safety by preventing cyber manipulation of toxic gas sensors, scrubbers, and ventilation grids.</a:t>
             </a:r>
           </a:p>
           <a:p>
             <a:pPr>
               <a:spcAft>
-                <a:spcPts val="1200"/>
+                <a:spcPts val="800"/>
               </a:spcAft>
             </a:pPr>
             <a:r>
-              <a:rPr b="1" sz="1700">
+              <a:rPr b="1" sz="1350">
                 <a:solidFill>
                   <a:srgbClr val="00529B"/>
                 </a:solidFill>
               </a:rPr>
-              <a:t>► UNESCO Forum Delegation: </a:t>
-            </a:r>
-            <a:r>
-              <a:rPr sz="1550">
-                <a:solidFill>
-                  <a:srgbClr val="1E293B"/>
-                </a:solidFill>
-              </a:rPr>
-              <a:t>Presented by the University of Education, Winneba &amp; Kayaba Labs research team at Empress Catherine II Saint Petersburg Mining University.</a:t>
+              <a:t>◆ SDG 17 (Partnerships for Goals): </a:t>
+            </a:r>
+            <a:r>
+              <a:rPr sz="1300">
+                <a:solidFill>
+                  <a:srgbClr val="0F172A"/>
+                </a:solidFill>
+              </a:rPr>
+              <a:t>Fosters bilateral Russian-African scientific collaboration, technology transfer, and local technical capacity building.</a:t>
             </a:r>
           </a:p>
           <a:p>
             <a:pPr>
               <a:spcAft>
-                <a:spcPts val="1200"/>
+                <a:spcPts val="800"/>
               </a:spcAft>
             </a:pPr>
             <a:r>
-              <a:rPr b="1" sz="1700">
+              <a:rPr b="1" sz="1350">
                 <a:solidFill>
                   <a:srgbClr val="00529B"/>
                 </a:solidFill>
               </a:rPr>
-              <a:t>► Repository URL: </a:t>
-            </a:r>
-            <a:r>
-              <a:rPr sz="1550">
-                <a:solidFill>
-                  <a:srgbClr val="1E293B"/>
-                </a:solidFill>
-              </a:rPr>
-              <a:t>https://github.com/mhiskall282/Securing-the-Digital-Mine-UNESCO-Project</a:t>
+              <a:t>◆ High Economic ROI (200x - 300x): </a:t>
+            </a:r>
+            <a:r>
+              <a:rPr sz="1300">
+                <a:solidFill>
+                  <a:srgbClr val="0F172A"/>
+                </a:solidFill>
+              </a:rPr>
+              <a:t>Preventing a single 24-hour ransomware outage on a ball mill saves $300k to $450k against an annual IDS cost of &lt; $1,500.</a:t>
             </a:r>
           </a:p>
           <a:p>
             <a:pPr>
               <a:spcAft>
-                <a:spcPts val="1200"/>
+                <a:spcPts val="800"/>
               </a:spcAft>
             </a:pPr>
             <a:r>
-              <a:rPr b="1" sz="1700">
+              <a:rPr b="1" sz="1350">
                 <a:solidFill>
                   <a:srgbClr val="00529B"/>
                 </a:solidFill>
               </a:rPr>
-              <a:t>► Correspondence Email: </a:t>
-            </a:r>
-            <a:r>
-              <a:rPr sz="1550">
-                <a:solidFill>
-                  <a:srgbClr val="1E293B"/>
-                </a:solidFill>
-              </a:rPr>
-              <a:t>hello@johnokyere.xyz | Portfolio: https://johnokyere.xyz</a:t>
+              <a:t>◆ NPM Edge Sniffer CLI: </a:t>
+            </a:r>
+            <a:r>
+              <a:rPr sz="1300">
+                <a:solidFill>
+                  <a:srgbClr val="0F172A"/>
+                </a:solidFill>
+              </a:rPr>
+              <a:t>Install instantly on any gateway via 'npm install -g @mhiskall282/unesco-mine-sec-cli' from GitHub Packages.</a:t>
+            </a:r>
+          </a:p>
+          <a:p>
+            <a:pPr>
+              <a:spcAft>
+                <a:spcPts val="800"/>
+              </a:spcAft>
+            </a:pPr>
+            <a:r>
+              <a:rPr b="1" sz="1350">
+                <a:solidFill>
+                  <a:srgbClr val="00529B"/>
+                </a:solidFill>
+              </a:rPr>
+              <a:t>◆ Source Code &amp; Reproducibility: </a:t>
+            </a:r>
+            <a:r>
+              <a:rPr sz="1300">
+                <a:solidFill>
+                  <a:srgbClr val="0F172A"/>
+                </a:solidFill>
+              </a:rPr>
+              <a:t>Complete repository, notebooks, and 75 unit test suites available at: https://github.com/mhiskall282/Securing-the-Digital-Mine-UNESCO-Project</a:t>
             </a:r>
           </a:p>
         </p:txBody>

--- a/research/poster_presentation.pptx
+++ b/research/poster_presentation.pptx
@@ -7,7 +7,7 @@
   <p:sldIdLst>
     <p:sldId id="256" r:id="rId7"/>
   </p:sldIdLst>
-  <p:sldSz cx="30275784" cy="42803064" type="screen4x3"/>
+  <p:sldSz cx="43891200" cy="27432000" type="screen4x3"/>
   <p:notesSz cx="6858000" cy="9144000"/>
   <p:defaultTextStyle>
     <a:defPPr>
@@ -3097,13 +3097,13 @@
         <p:spPr>
           <a:xfrm>
             <a:off x="0" y="0"/>
-            <a:ext cx="30275784" cy="42803064"/>
+            <a:ext cx="43891200" cy="27432000"/>
           </a:xfrm>
           <a:prstGeom prst="rect">
             <a:avLst/>
           </a:prstGeom>
           <a:solidFill>
-            <a:srgbClr val="F1F5F9"/>
+            <a:srgbClr val="FFFFFF"/>
           </a:solidFill>
           <a:ln>
             <a:noFill/>
@@ -3140,13 +3140,13 @@
         <p:spPr>
           <a:xfrm>
             <a:off x="0" y="0"/>
-            <a:ext cx="30275784" cy="4937760"/>
+            <a:ext cx="43891200" cy="5029200"/>
           </a:xfrm>
           <a:prstGeom prst="rect">
             <a:avLst/>
           </a:prstGeom>
           <a:solidFill>
-            <a:srgbClr val="0B1D3A"/>
+            <a:srgbClr val="00529B"/>
           </a:solidFill>
           <a:ln>
             <a:noFill/>
@@ -3182,14 +3182,14 @@
         </p:nvSpPr>
         <p:spPr>
           <a:xfrm>
-            <a:off x="0" y="4846320"/>
-            <a:ext cx="30275784" cy="109728"/>
+            <a:off x="0" y="4937760"/>
+            <a:ext cx="43891200" cy="109728"/>
           </a:xfrm>
           <a:prstGeom prst="rect">
             <a:avLst/>
           </a:prstGeom>
           <a:solidFill>
-            <a:srgbClr val="D4AF37"/>
+            <a:srgbClr val="FFD700"/>
           </a:solidFill>
           <a:ln>
             <a:noFill/>
@@ -3225,8 +3225,8 @@
         </p:nvSpPr>
         <p:spPr>
           <a:xfrm>
-            <a:off x="914400" y="274320"/>
-            <a:ext cx="28446984" cy="548640"/>
+            <a:off x="914400" y="548640"/>
+            <a:ext cx="5486400" cy="3840480"/>
           </a:xfrm>
           <a:prstGeom prst="rect">
             <a:avLst/>
@@ -3239,15 +3239,27 @@
           </a:bodyPr>
           <a:lstStyle/>
           <a:p>
-            <a:pPr algn="ctr"/>
-            <a:r>
-              <a:rPr sz="1500" b="1">
-                <a:solidFill>
-                  <a:srgbClr val="00A3E0"/>
+            <a:r>
+              <a:rPr sz="3800" b="1">
+                <a:solidFill>
+                  <a:srgbClr val="FFFFFF"/>
                 </a:solidFill>
                 <a:latin typeface="Arial"/>
               </a:rPr>
-              <a:t>RUSSIAN-AFRICAN FORUM-CONTEST OF YOUNG SCIENTISTS 2026 | UNDER THE AUSPICES OF UNESCO</a:t>
+              <a:t>UEW</a:t>
+            </a:r>
+          </a:p>
+          <a:p>
+            <a:r>
+              <a:rPr sz="1300" b="1">
+                <a:solidFill>
+                  <a:srgbClr val="00A3E0"/>
+                </a:solidFill>
+                <a:latin typeface="Arial"/>
+              </a:rPr>
+              <a:t>UNIVERSITY OF EDUCATION,
+WINNEBA, GHANA
+&amp; KAYABA LABS</a:t>
             </a:r>
           </a:p>
         </p:txBody>
@@ -3260,8 +3272,8 @@
         </p:nvSpPr>
         <p:spPr>
           <a:xfrm>
-            <a:off x="914400" y="777240"/>
-            <a:ext cx="28446984" cy="1645920"/>
+            <a:off x="37490400" y="548640"/>
+            <a:ext cx="5486400" cy="3840480"/>
           </a:xfrm>
           <a:prstGeom prst="rect">
             <a:avLst/>
@@ -3274,27 +3286,29 @@
           </a:bodyPr>
           <a:lstStyle/>
           <a:p>
-            <a:pPr algn="ctr"/>
-            <a:r>
-              <a:rPr sz="5200" b="1">
-                <a:solidFill>
-                  <a:srgbClr val="D4AF37"/>
+            <a:pPr algn="r"/>
+            <a:r>
+              <a:rPr sz="3600" b="1">
+                <a:solidFill>
+                  <a:srgbClr val="FFD700"/>
                 </a:solidFill>
                 <a:latin typeface="Arial"/>
               </a:rPr>
-              <a:t>SECURING THE DIGITAL MINE</a:t>
-            </a:r>
-          </a:p>
-          <a:p>
-            <a:pPr algn="ctr"/>
-            <a:r>
-              <a:rPr sz="2100" b="1">
+              <a:t>UNESCO</a:t>
+            </a:r>
+          </a:p>
+          <a:p>
+            <a:pPr algn="r"/>
+            <a:r>
+              <a:rPr sz="1300" b="1">
                 <a:solidFill>
                   <a:srgbClr val="FFFFFF"/>
                 </a:solidFill>
                 <a:latin typeface="Arial"/>
               </a:rPr>
-              <a:t>A Metaheuristic-Optimized Deep Learning Framework for Real-Time Intrusion Detection in IoT-Enabled Mineral Extraction</a:t>
+              <a:t>Russian-African Forum
+Track 3: Smart Subsoil
+Saint Petersburg Mining Univ.</a:t>
             </a:r>
           </a:p>
         </p:txBody>
@@ -3307,8 +3321,8 @@
         </p:nvSpPr>
         <p:spPr>
           <a:xfrm>
-            <a:off x="914400" y="3474720"/>
-            <a:ext cx="28446984" cy="1188720"/>
+            <a:off x="6583680" y="365760"/>
+            <a:ext cx="30723840" cy="4389120"/>
           </a:xfrm>
           <a:prstGeom prst="rect">
             <a:avLst/>
@@ -3316,58 +3330,367 @@
           <a:noFill/>
         </p:spPr>
         <p:txBody>
+          <a:bodyPr wrap="square">
+            <a:spAutoFit/>
+          </a:bodyPr>
+          <a:lstStyle/>
+          <a:p>
+            <a:pPr algn="ctr"/>
+            <a:r>
+              <a:rPr sz="3600" b="1">
+                <a:solidFill>
+                  <a:srgbClr val="FFFFFF"/>
+                </a:solidFill>
+                <a:latin typeface="Arial"/>
+              </a:rPr>
+              <a:t>Securing the Digital Mine with a Metaheuristic-Optimized
+Deep Learning Adaptive System</a:t>
+            </a:r>
+          </a:p>
+          <a:p>
+            <a:pPr algn="ctr">
+              <a:spcBef>
+                <a:spcPts val="800"/>
+              </a:spcBef>
+            </a:pPr>
+            <a:r>
+              <a:rPr sz="1800" b="1">
+                <a:solidFill>
+                  <a:srgbClr val="FFD700"/>
+                </a:solidFill>
+                <a:latin typeface="Arial"/>
+              </a:rPr>
+              <a:t>John Okyere, Ezekeil Baah, Clement Baffour, Parker Paa Annobil, George Akwesi Bonnah</a:t>
+            </a:r>
+          </a:p>
+          <a:p>
+            <a:pPr algn="ctr"/>
+            <a:r>
+              <a:rPr sz="1500">
+                <a:solidFill>
+                  <a:srgbClr val="E2E8F0"/>
+                </a:solidFill>
+                <a:latin typeface="Arial"/>
+              </a:rPr>
+              <a:t>Department of ICT, University of Education, Winneba &amp; Kayaba Labs | Saint Petersburg, Russia 2026</a:t>
+            </a:r>
+          </a:p>
+        </p:txBody>
+      </p:sp>
+      <p:sp>
+        <p:nvSpPr>
+          <p:cNvPr id="8" name="TextBox 7"/>
+          <p:cNvSpPr txBox="1"/>
+          <p:nvPr/>
+        </p:nvSpPr>
+        <p:spPr>
+          <a:xfrm>
+            <a:off x="1097280" y="5486400"/>
+            <a:ext cx="13167360" cy="731520"/>
+          </a:xfrm>
+          <a:prstGeom prst="rect">
+            <a:avLst/>
+          </a:prstGeom>
+          <a:noFill/>
+        </p:spPr>
+        <p:txBody>
           <a:bodyPr wrap="none">
             <a:spAutoFit/>
           </a:bodyPr>
           <a:lstStyle/>
           <a:p>
-            <a:pPr algn="ctr"/>
-            <a:r>
-              <a:rPr sz="1600" b="1">
-                <a:solidFill>
-                  <a:srgbClr val="FFFFFF"/>
-                </a:solidFill>
-                <a:latin typeface="Times New Roman"/>
+            <a:r>
+              <a:rPr sz="2600" b="1">
+                <a:solidFill>
+                  <a:srgbClr val="00529B"/>
+                </a:solidFill>
+                <a:latin typeface="Arial"/>
               </a:rPr>
-              <a:t>Delegation: John Okyere (Lead), Ezekeil Baah, Clement Baffour, Parker Paa Annobil, George Akwesi Bonnah
-</a:t>
-            </a:r>
-          </a:p>
-          <a:p>
-            <a:pPr algn="ctr"/>
-            <a:r>
-              <a:rPr sz="1400" i="1">
-                <a:solidFill>
-                  <a:srgbClr val="E2E8F0"/>
-                </a:solidFill>
-                <a:latin typeface="Times New Roman"/>
+              <a:t>Introduction</a:t>
+            </a:r>
+          </a:p>
+        </p:txBody>
+      </p:sp>
+      <p:sp>
+        <p:nvSpPr>
+          <p:cNvPr id="9" name="TextBox 8"/>
+          <p:cNvSpPr txBox="1"/>
+          <p:nvPr/>
+        </p:nvSpPr>
+        <p:spPr>
+          <a:xfrm>
+            <a:off x="1097280" y="6217920"/>
+            <a:ext cx="13167360" cy="5303520"/>
+          </a:xfrm>
+          <a:prstGeom prst="rect">
+            <a:avLst/>
+          </a:prstGeom>
+          <a:noFill/>
+        </p:spPr>
+        <p:txBody>
+          <a:bodyPr wrap="square">
+            <a:spAutoFit/>
+          </a:bodyPr>
+          <a:lstStyle/>
+          <a:p/>
+          <a:p>
+            <a:pPr>
+              <a:spcAft>
+                <a:spcPts val="800"/>
+              </a:spcAft>
+              <a:defRPr sz="1450">
+                <a:solidFill>
+                  <a:srgbClr val="1E293B"/>
+                </a:solidFill>
+                <a:latin typeface="Arial"/>
+              </a:defRPr>
+            </a:pPr>
+            <a:r>
+              <a:t>• Mining 4.0 &amp; Smart Subsoil: African and Russian mineral extraction complexes are rapidly integrating IoT sensors, SCADA telemetry, and automated milling fleets to maximize ore recovery.</a:t>
+            </a:r>
+          </a:p>
+          <a:p>
+            <a:pPr>
+              <a:spcAft>
+                <a:spcPts val="800"/>
+              </a:spcAft>
+              <a:defRPr sz="1450">
+                <a:solidFill>
+                  <a:srgbClr val="1E293B"/>
+                </a:solidFill>
+                <a:latin typeface="Arial"/>
+              </a:defRPr>
+            </a:pPr>
+            <a:r>
+              <a:t>• The Air-Gap Myth: Connecting OT networks to enterprise analytics exposes unauthenticated Modbus RTU/TCP and DNP3 industrial protocols to hostile zero-day cyber intrusions.</a:t>
+            </a:r>
+          </a:p>
+          <a:p>
+            <a:pPr>
+              <a:spcAft>
+                <a:spcPts val="800"/>
+              </a:spcAft>
+              <a:defRPr sz="1450">
+                <a:solidFill>
+                  <a:srgbClr val="1E293B"/>
+                </a:solidFill>
+                <a:latin typeface="Arial"/>
+              </a:defRPr>
+            </a:pPr>
+            <a:r>
+              <a:t>• High Downtime Costs: Unplanned mining downtime costs between USD $50,000 and $500,000 per hour; cyber-physical disruption of ventilation or dewatering directly endangers human life.</a:t>
+            </a:r>
+          </a:p>
+          <a:p>
+            <a:pPr>
+              <a:spcAft>
+                <a:spcPts val="800"/>
+              </a:spcAft>
+              <a:defRPr sz="1450">
+                <a:solidFill>
+                  <a:srgbClr val="1E293B"/>
+                </a:solidFill>
+                <a:latin typeface="Arial"/>
+              </a:defRPr>
+            </a:pPr>
+            <a:r>
+              <a:t>• Failure of IT-Centric IDS: Enterprise security tools analyze 41+ features taking 150+ ms, directly violating the 20 to 50 millisecond control loop deadlines of industrial PLCs.</a:t>
+            </a:r>
+          </a:p>
+        </p:txBody>
+      </p:sp>
+      <p:sp>
+        <p:nvSpPr>
+          <p:cNvPr id="10" name="TextBox 9"/>
+          <p:cNvSpPr txBox="1"/>
+          <p:nvPr/>
+        </p:nvSpPr>
+        <p:spPr>
+          <a:xfrm>
+            <a:off x="1097280" y="11704320"/>
+            <a:ext cx="13167360" cy="731520"/>
+          </a:xfrm>
+          <a:prstGeom prst="rect">
+            <a:avLst/>
+          </a:prstGeom>
+          <a:noFill/>
+        </p:spPr>
+        <p:txBody>
+          <a:bodyPr wrap="none">
+            <a:spAutoFit/>
+          </a:bodyPr>
+          <a:lstStyle/>
+          <a:p>
+            <a:r>
+              <a:rPr sz="2600" b="1">
+                <a:solidFill>
+                  <a:srgbClr val="00529B"/>
+                </a:solidFill>
+                <a:latin typeface="Arial"/>
               </a:rPr>
-              <a:t>Department of ICT, University of Education, Winneba &amp; Kayaba Labs | Track 3: Smart Subsoil | Saint Petersburg Mining University</a:t>
-            </a:r>
-          </a:p>
-        </p:txBody>
-      </p:sp>
-      <p:sp>
-        <p:nvSpPr>
-          <p:cNvPr id="8" name="Rounded Rectangle 7"/>
+              <a:t>Method</a:t>
+            </a:r>
+          </a:p>
+        </p:txBody>
+      </p:sp>
+      <p:sp>
+        <p:nvSpPr>
+          <p:cNvPr id="11" name="TextBox 10"/>
+          <p:cNvSpPr txBox="1"/>
+          <p:nvPr/>
+        </p:nvSpPr>
+        <p:spPr>
+          <a:xfrm>
+            <a:off x="1097280" y="12435840"/>
+            <a:ext cx="13167360" cy="12344400"/>
+          </a:xfrm>
+          <a:prstGeom prst="rect">
+            <a:avLst/>
+          </a:prstGeom>
+          <a:noFill/>
+        </p:spPr>
+        <p:txBody>
+          <a:bodyPr wrap="square">
+            <a:spAutoFit/>
+          </a:bodyPr>
+          <a:lstStyle/>
+          <a:p>
+            <a:pPr>
+              <a:spcAft>
+                <a:spcPts val="800"/>
+              </a:spcAft>
+            </a:pPr>
+            <a:r>
+              <a:rPr sz="1450" b="1">
+                <a:solidFill>
+                  <a:srgbClr val="1E293B"/>
+                </a:solidFill>
+                <a:latin typeface="Arial"/>
+              </a:rPr>
+              <a:t>Our approach is built around four interconnected modules designed to operate in real-time on edge gateways:</a:t>
+            </a:r>
+          </a:p>
+          <a:p>
+            <a:pPr>
+              <a:spcAft>
+                <a:spcPts val="1000"/>
+              </a:spcAft>
+            </a:pPr>
+            <a:r>
+              <a:rPr b="1" sz="1400">
+                <a:solidFill>
+                  <a:srgbClr val="00529B"/>
+                </a:solidFill>
+                <a:latin typeface="Arial"/>
+              </a:rPr>
+              <a:t>• Data Ingestion &amp; Extraction: </a:t>
+            </a:r>
+            <a:r>
+              <a:rPr sz="1400">
+                <a:solidFill>
+                  <a:srgbClr val="1E293B"/>
+                </a:solidFill>
+                <a:latin typeface="Arial"/>
+              </a:rPr>
+              <a:t>Promiscuously captures raw network frames from SCADA interfaces at line speed using @mhiskall282/unesco-mine-sec-cli, parsing IP/TCP/Modbus packet headers without dropping packets.</a:t>
+            </a:r>
+          </a:p>
+          <a:p>
+            <a:pPr>
+              <a:spcAft>
+                <a:spcPts val="1000"/>
+              </a:spcAft>
+            </a:pPr>
+            <a:r>
+              <a:rPr b="1" sz="1400">
+                <a:solidFill>
+                  <a:srgbClr val="00529B"/>
+                </a:solidFill>
+                <a:latin typeface="Arial"/>
+              </a:rPr>
+              <a:t>• BWOA Feature Pruning: </a:t>
+            </a:r>
+            <a:r>
+              <a:rPr sz="1400">
+                <a:solidFill>
+                  <a:srgbClr val="1E293B"/>
+                </a:solidFill>
+                <a:latin typeface="Arial"/>
+              </a:rPr>
+              <a:t>Applies Binary Whale Optimization with a V-shaped transfer function and a 75% accuracy floor constraint, pruning input dimensions by 75.61% (from 41 down to 10 vital features).</a:t>
+            </a:r>
+          </a:p>
+          <a:p>
+            <a:pPr>
+              <a:spcAft>
+                <a:spcPts val="1000"/>
+              </a:spcAft>
+            </a:pPr>
+            <a:r>
+              <a:rPr b="1" sz="1400">
+                <a:solidFill>
+                  <a:srgbClr val="00529B"/>
+                </a:solidFill>
+                <a:latin typeface="Arial"/>
+              </a:rPr>
+              <a:t>• Spatial-Temporal Classifier: </a:t>
+            </a:r>
+            <a:r>
+              <a:rPr sz="1400">
+                <a:solidFill>
+                  <a:srgbClr val="1E293B"/>
+                </a:solidFill>
+                <a:latin typeface="Arial"/>
+              </a:rPr>
+              <a:t>Combines a 1D Convolutional Neural Network (Conv1D) layer for packet spatial feature extraction with Long Short-Term Memory (LSTM) cells for temporal state tracking.</a:t>
+            </a:r>
+          </a:p>
+          <a:p>
+            <a:pPr>
+              <a:spcAft>
+                <a:spcPts val="1000"/>
+              </a:spcAft>
+            </a:pPr>
+            <a:r>
+              <a:rPr b="1" sz="1400">
+                <a:solidFill>
+                  <a:srgbClr val="00529B"/>
+                </a:solidFill>
+                <a:latin typeface="Arial"/>
+              </a:rPr>
+              <a:t>• Float16 Edge Quantization: </a:t>
+            </a:r>
+            <a:r>
+              <a:rPr sz="1400">
+                <a:solidFill>
+                  <a:srgbClr val="1E293B"/>
+                </a:solidFill>
+                <a:latin typeface="Arial"/>
+              </a:rPr>
+              <a:t>Applies post-training Float16 weight quantization, compressing model memory footprint to 0.82 MB (83.2% compression) for sub-millisecond execution.</a:t>
+            </a:r>
+          </a:p>
+        </p:txBody>
+      </p:sp>
+      <p:sp>
+        <p:nvSpPr>
+          <p:cNvPr id="12" name="Parallelogram 11"/>
           <p:cNvSpPr/>
           <p:nvPr/>
         </p:nvSpPr>
         <p:spPr>
           <a:xfrm>
-            <a:off x="822960" y="5212080"/>
-            <a:ext cx="4526280" cy="2194560"/>
-          </a:xfrm>
-          <a:prstGeom prst="roundRect">
+            <a:off x="1097280" y="25420320"/>
+            <a:ext cx="548640" cy="1280160"/>
+          </a:xfrm>
+          <a:prstGeom prst="parallelogram">
             <a:avLst/>
           </a:prstGeom>
           <a:solidFill>
-            <a:srgbClr val="FFFFFF"/>
+            <a:srgbClr val="00529B"/>
           </a:solidFill>
-          <a:ln w="38100">
-            <a:solidFill>
-              <a:srgbClr val="10B981"/>
-            </a:solidFill>
+          <a:ln>
+            <a:noFill/>
           </a:ln>
         </p:spPr>
         <p:style>
@@ -3394,73 +3717,23 @@
       </p:sp>
       <p:sp>
         <p:nvSpPr>
-          <p:cNvPr id="9" name="TextBox 8"/>
-          <p:cNvSpPr txBox="1"/>
-          <p:nvPr/>
-        </p:nvSpPr>
-        <p:spPr>
-          <a:xfrm>
-            <a:off x="914400" y="5394960"/>
-            <a:ext cx="4343400" cy="1828800"/>
-          </a:xfrm>
-          <a:prstGeom prst="rect">
-            <a:avLst/>
-          </a:prstGeom>
-          <a:noFill/>
-        </p:spPr>
-        <p:txBody>
-          <a:bodyPr wrap="none">
-            <a:spAutoFit/>
-          </a:bodyPr>
-          <a:lstStyle/>
-          <a:p>
-            <a:pPr algn="ctr"/>
-            <a:r>
-              <a:rPr sz="3400" b="1">
-                <a:solidFill>
-                  <a:srgbClr val="10B981"/>
-                </a:solidFill>
-                <a:latin typeface="Arial"/>
-              </a:rPr>
-              <a:t>0.76 ms</a:t>
-            </a:r>
-          </a:p>
-          <a:p>
-            <a:pPr algn="ctr"/>
-            <a:r>
-              <a:rPr sz="1250" b="1">
-                <a:solidFill>
-                  <a:srgbClr val="0F172A"/>
-                </a:solidFill>
-                <a:latin typeface="Arial"/>
-              </a:rPr>
-              <a:t>Edge Inference Latency
-(207x Speedup vs Baseline)</a:t>
-            </a:r>
-          </a:p>
-        </p:txBody>
-      </p:sp>
-      <p:sp>
-        <p:nvSpPr>
-          <p:cNvPr id="10" name="Rounded Rectangle 9"/>
+          <p:cNvPr id="13" name="Parallelogram 12"/>
           <p:cNvSpPr/>
           <p:nvPr/>
         </p:nvSpPr>
         <p:spPr>
           <a:xfrm>
-            <a:off x="5623560" y="5212080"/>
-            <a:ext cx="4526280" cy="2194560"/>
-          </a:xfrm>
-          <a:prstGeom prst="roundRect">
+            <a:off x="1920240" y="25420320"/>
+            <a:ext cx="548640" cy="1280160"/>
+          </a:xfrm>
+          <a:prstGeom prst="parallelogram">
             <a:avLst/>
           </a:prstGeom>
           <a:solidFill>
-            <a:srgbClr val="FFFFFF"/>
+            <a:srgbClr val="00A3E0"/>
           </a:solidFill>
-          <a:ln w="38100">
-            <a:solidFill>
-              <a:srgbClr val="00529B"/>
-            </a:solidFill>
+          <a:ln>
+            <a:noFill/>
           </a:ln>
         </p:spPr>
         <p:style>
@@ -3487,73 +3760,23 @@
       </p:sp>
       <p:sp>
         <p:nvSpPr>
-          <p:cNvPr id="11" name="TextBox 10"/>
-          <p:cNvSpPr txBox="1"/>
-          <p:nvPr/>
-        </p:nvSpPr>
-        <p:spPr>
-          <a:xfrm>
-            <a:off x="5715000" y="5394960"/>
-            <a:ext cx="4343400" cy="1828800"/>
-          </a:xfrm>
-          <a:prstGeom prst="rect">
-            <a:avLst/>
-          </a:prstGeom>
-          <a:noFill/>
-        </p:spPr>
-        <p:txBody>
-          <a:bodyPr wrap="none">
-            <a:spAutoFit/>
-          </a:bodyPr>
-          <a:lstStyle/>
-          <a:p>
-            <a:pPr algn="ctr"/>
-            <a:r>
-              <a:rPr sz="3400" b="1">
-                <a:solidFill>
-                  <a:srgbClr val="00529B"/>
-                </a:solidFill>
-                <a:latin typeface="Arial"/>
-              </a:rPr>
-              <a:t>75.61%</a:t>
-            </a:r>
-          </a:p>
-          <a:p>
-            <a:pPr algn="ctr"/>
-            <a:r>
-              <a:rPr sz="1250" b="1">
-                <a:solidFill>
-                  <a:srgbClr val="0F172A"/>
-                </a:solidFill>
-                <a:latin typeface="Arial"/>
-              </a:rPr>
-              <a:t>Feature Pruning (41 -&gt; 10)
-(BWOA Dimensionality Red.)</a:t>
-            </a:r>
-          </a:p>
-        </p:txBody>
-      </p:sp>
-      <p:sp>
-        <p:nvSpPr>
-          <p:cNvPr id="12" name="Rounded Rectangle 11"/>
+          <p:cNvPr id="14" name="Parallelogram 13"/>
           <p:cNvSpPr/>
           <p:nvPr/>
         </p:nvSpPr>
         <p:spPr>
           <a:xfrm>
-            <a:off x="10424160" y="5212080"/>
-            <a:ext cx="4526280" cy="2194560"/>
-          </a:xfrm>
-          <a:prstGeom prst="roundRect">
+            <a:off x="2743200" y="25420320"/>
+            <a:ext cx="548640" cy="1280160"/>
+          </a:xfrm>
+          <a:prstGeom prst="parallelogram">
             <a:avLst/>
           </a:prstGeom>
           <a:solidFill>
-            <a:srgbClr val="FFFFFF"/>
+            <a:srgbClr val="00529B"/>
           </a:solidFill>
-          <a:ln w="38100">
-            <a:solidFill>
-              <a:srgbClr val="00A3E0"/>
-            </a:solidFill>
+          <a:ln>
+            <a:noFill/>
           </a:ln>
         </p:spPr>
         <p:style>
@@ -3580,73 +3803,23 @@
       </p:sp>
       <p:sp>
         <p:nvSpPr>
-          <p:cNvPr id="13" name="TextBox 12"/>
-          <p:cNvSpPr txBox="1"/>
-          <p:nvPr/>
-        </p:nvSpPr>
-        <p:spPr>
-          <a:xfrm>
-            <a:off x="10515600" y="5394960"/>
-            <a:ext cx="4343400" cy="1828800"/>
-          </a:xfrm>
-          <a:prstGeom prst="rect">
-            <a:avLst/>
-          </a:prstGeom>
-          <a:noFill/>
-        </p:spPr>
-        <p:txBody>
-          <a:bodyPr wrap="none">
-            <a:spAutoFit/>
-          </a:bodyPr>
-          <a:lstStyle/>
-          <a:p>
-            <a:pPr algn="ctr"/>
-            <a:r>
-              <a:rPr sz="3400" b="1">
-                <a:solidFill>
-                  <a:srgbClr val="00A3E0"/>
-                </a:solidFill>
-                <a:latin typeface="Arial"/>
-              </a:rPr>
-              <a:t>96.89%</a:t>
-            </a:r>
-          </a:p>
-          <a:p>
-            <a:pPr algn="ctr"/>
-            <a:r>
-              <a:rPr sz="1250" b="1">
-                <a:solidFill>
-                  <a:srgbClr val="0F172A"/>
-                </a:solidFill>
-                <a:latin typeface="Arial"/>
-              </a:rPr>
-              <a:t>Benign Flow Precision
-(Zero False Production Halts)</a:t>
-            </a:r>
-          </a:p>
-        </p:txBody>
-      </p:sp>
-      <p:sp>
-        <p:nvSpPr>
-          <p:cNvPr id="14" name="Rounded Rectangle 13"/>
+          <p:cNvPr id="15" name="Parallelogram 14"/>
           <p:cNvSpPr/>
           <p:nvPr/>
         </p:nvSpPr>
         <p:spPr>
           <a:xfrm>
-            <a:off x="15224759" y="5212080"/>
-            <a:ext cx="4526280" cy="2194560"/>
-          </a:xfrm>
-          <a:prstGeom prst="roundRect">
+            <a:off x="3566160" y="25420320"/>
+            <a:ext cx="548640" cy="1280160"/>
+          </a:xfrm>
+          <a:prstGeom prst="parallelogram">
             <a:avLst/>
           </a:prstGeom>
           <a:solidFill>
-            <a:srgbClr val="FFFFFF"/>
+            <a:srgbClr val="00A3E0"/>
           </a:solidFill>
-          <a:ln w="38100">
-            <a:solidFill>
-              <a:srgbClr val="DC2626"/>
-            </a:solidFill>
+          <a:ln>
+            <a:noFill/>
           </a:ln>
         </p:spPr>
         <p:style>
@@ -3673,73 +3846,23 @@
       </p:sp>
       <p:sp>
         <p:nvSpPr>
-          <p:cNvPr id="15" name="TextBox 14"/>
-          <p:cNvSpPr txBox="1"/>
-          <p:nvPr/>
-        </p:nvSpPr>
-        <p:spPr>
-          <a:xfrm>
-            <a:off x="15316199" y="5394960"/>
-            <a:ext cx="4343400" cy="1828800"/>
-          </a:xfrm>
-          <a:prstGeom prst="rect">
-            <a:avLst/>
-          </a:prstGeom>
-          <a:noFill/>
-        </p:spPr>
-        <p:txBody>
-          <a:bodyPr wrap="none">
-            <a:spAutoFit/>
-          </a:bodyPr>
-          <a:lstStyle/>
-          <a:p>
-            <a:pPr algn="ctr"/>
-            <a:r>
-              <a:rPr sz="3400" b="1">
-                <a:solidFill>
-                  <a:srgbClr val="DC2626"/>
-                </a:solidFill>
-                <a:latin typeface="Arial"/>
-              </a:rPr>
-              <a:t>89.04%</a:t>
-            </a:r>
-          </a:p>
-          <a:p>
-            <a:pPr algn="ctr"/>
-            <a:r>
-              <a:rPr sz="1250" b="1">
-                <a:solidFill>
-                  <a:srgbClr val="0F172A"/>
-                </a:solidFill>
-                <a:latin typeface="Arial"/>
-              </a:rPr>
-              <a:t>DoS Attack Recall
-(Hardens SCADA PLCs)</a:t>
-            </a:r>
-          </a:p>
-        </p:txBody>
-      </p:sp>
-      <p:sp>
-        <p:nvSpPr>
-          <p:cNvPr id="16" name="Rounded Rectangle 15"/>
+          <p:cNvPr id="16" name="Parallelogram 15"/>
           <p:cNvSpPr/>
           <p:nvPr/>
         </p:nvSpPr>
         <p:spPr>
           <a:xfrm>
-            <a:off x="20025360" y="5212080"/>
-            <a:ext cx="4526280" cy="2194560"/>
-          </a:xfrm>
-          <a:prstGeom prst="roundRect">
+            <a:off x="4389120" y="25420320"/>
+            <a:ext cx="548640" cy="1280160"/>
+          </a:xfrm>
+          <a:prstGeom prst="parallelogram">
             <a:avLst/>
           </a:prstGeom>
           <a:solidFill>
-            <a:srgbClr val="FFFFFF"/>
+            <a:srgbClr val="00529B"/>
           </a:solidFill>
-          <a:ln w="38100">
-            <a:solidFill>
-              <a:srgbClr val="D4AF37"/>
-            </a:solidFill>
+          <a:ln>
+            <a:noFill/>
           </a:ln>
         </p:spPr>
         <p:style>
@@ -3766,73 +3889,23 @@
       </p:sp>
       <p:sp>
         <p:nvSpPr>
-          <p:cNvPr id="17" name="TextBox 16"/>
-          <p:cNvSpPr txBox="1"/>
-          <p:nvPr/>
-        </p:nvSpPr>
-        <p:spPr>
-          <a:xfrm>
-            <a:off x="20116800" y="5394960"/>
-            <a:ext cx="4343400" cy="1828800"/>
-          </a:xfrm>
-          <a:prstGeom prst="rect">
-            <a:avLst/>
-          </a:prstGeom>
-          <a:noFill/>
-        </p:spPr>
-        <p:txBody>
-          <a:bodyPr wrap="none">
-            <a:spAutoFit/>
-          </a:bodyPr>
-          <a:lstStyle/>
-          <a:p>
-            <a:pPr algn="ctr"/>
-            <a:r>
-              <a:rPr sz="3400" b="1">
-                <a:solidFill>
-                  <a:srgbClr val="D4AF37"/>
-                </a:solidFill>
-                <a:latin typeface="Arial"/>
-              </a:rPr>
-              <a:t>0.82 MB</a:t>
-            </a:r>
-          </a:p>
-          <a:p>
-            <a:pPr algn="ctr"/>
-            <a:r>
-              <a:rPr sz="1250" b="1">
-                <a:solidFill>
-                  <a:srgbClr val="0F172A"/>
-                </a:solidFill>
-                <a:latin typeface="Arial"/>
-              </a:rPr>
-              <a:t>Float16 Quantized Size
-(Runs on 1GB RAM Pi 4B)</a:t>
-            </a:r>
-          </a:p>
-        </p:txBody>
-      </p:sp>
-      <p:sp>
-        <p:nvSpPr>
-          <p:cNvPr id="18" name="Rounded Rectangle 17"/>
+          <p:cNvPr id="17" name="Parallelogram 16"/>
           <p:cNvSpPr/>
           <p:nvPr/>
         </p:nvSpPr>
         <p:spPr>
           <a:xfrm>
-            <a:off x="24825960" y="5212080"/>
-            <a:ext cx="4526280" cy="2194560"/>
-          </a:xfrm>
-          <a:prstGeom prst="roundRect">
+            <a:off x="5212080" y="25420320"/>
+            <a:ext cx="548640" cy="1280160"/>
+          </a:xfrm>
+          <a:prstGeom prst="parallelogram">
             <a:avLst/>
           </a:prstGeom>
           <a:solidFill>
-            <a:srgbClr val="FFFFFF"/>
+            <a:srgbClr val="00A3E0"/>
           </a:solidFill>
-          <a:ln w="38100">
-            <a:solidFill>
-              <a:srgbClr val="0B1D3A"/>
-            </a:solidFill>
+          <a:ln>
+            <a:noFill/>
           </a:ln>
         </p:spPr>
         <p:style>
@@ -3859,73 +3932,23 @@
       </p:sp>
       <p:sp>
         <p:nvSpPr>
-          <p:cNvPr id="19" name="TextBox 18"/>
-          <p:cNvSpPr txBox="1"/>
-          <p:nvPr/>
-        </p:nvSpPr>
-        <p:spPr>
-          <a:xfrm>
-            <a:off x="24917400" y="5394960"/>
-            <a:ext cx="4343400" cy="1828800"/>
-          </a:xfrm>
-          <a:prstGeom prst="rect">
-            <a:avLst/>
-          </a:prstGeom>
-          <a:noFill/>
-        </p:spPr>
-        <p:txBody>
-          <a:bodyPr wrap="none">
-            <a:spAutoFit/>
-          </a:bodyPr>
-          <a:lstStyle/>
-          <a:p>
-            <a:pPr algn="ctr"/>
-            <a:r>
-              <a:rPr sz="3400" b="1">
-                <a:solidFill>
-                  <a:srgbClr val="0B1D3A"/>
-                </a:solidFill>
-                <a:latin typeface="Arial"/>
-              </a:rPr>
-              <a:t>200x+</a:t>
-            </a:r>
-          </a:p>
-          <a:p>
-            <a:pPr algn="ctr"/>
-            <a:r>
-              <a:rPr sz="1250" b="1">
-                <a:solidFill>
-                  <a:srgbClr val="0F172A"/>
-                </a:solidFill>
-                <a:latin typeface="Arial"/>
-              </a:rPr>
-              <a:t>Estimated Industrial ROI
-(Averts $50k-$500k/hr Loss)</a:t>
-            </a:r>
-          </a:p>
-        </p:txBody>
-      </p:sp>
-      <p:sp>
-        <p:nvSpPr>
-          <p:cNvPr id="20" name="Rounded Rectangle 19"/>
+          <p:cNvPr id="18" name="Parallelogram 17"/>
           <p:cNvSpPr/>
           <p:nvPr/>
         </p:nvSpPr>
         <p:spPr>
           <a:xfrm>
-            <a:off x="822960" y="7680960"/>
-            <a:ext cx="9235440" cy="17190720"/>
-          </a:xfrm>
-          <a:prstGeom prst="roundRect">
+            <a:off x="6035040" y="25420320"/>
+            <a:ext cx="548640" cy="1280160"/>
+          </a:xfrm>
+          <a:prstGeom prst="parallelogram">
             <a:avLst/>
           </a:prstGeom>
           <a:solidFill>
-            <a:srgbClr val="FFFFFF"/>
+            <a:srgbClr val="00529B"/>
           </a:solidFill>
-          <a:ln w="19050">
-            <a:solidFill>
-              <a:srgbClr val="CBD5E1"/>
-            </a:solidFill>
+          <a:ln>
+            <a:noFill/>
           </a:ln>
         </p:spPr>
         <p:style>
@@ -3952,57 +3975,14 @@
       </p:sp>
       <p:sp>
         <p:nvSpPr>
-          <p:cNvPr id="21" name="Rounded Rectangle 20"/>
-          <p:cNvSpPr/>
-          <p:nvPr/>
-        </p:nvSpPr>
-        <p:spPr>
-          <a:xfrm>
-            <a:off x="822960" y="7680960"/>
-            <a:ext cx="9235440" cy="1097280"/>
-          </a:xfrm>
-          <a:prstGeom prst="roundRect">
-            <a:avLst/>
-          </a:prstGeom>
-          <a:solidFill>
-            <a:srgbClr val="00529B"/>
-          </a:solidFill>
-          <a:ln>
-            <a:noFill/>
-          </a:ln>
-        </p:spPr>
-        <p:style>
-          <a:lnRef idx="1">
-            <a:schemeClr val="accent1"/>
-          </a:lnRef>
-          <a:fillRef idx="3">
-            <a:schemeClr val="accent1"/>
-          </a:fillRef>
-          <a:effectRef idx="2">
-            <a:schemeClr val="accent1"/>
-          </a:effectRef>
-          <a:fontRef idx="minor">
-            <a:schemeClr val="lt1"/>
-          </a:fontRef>
-        </p:style>
-        <p:txBody>
-          <a:bodyPr rtlCol="0" anchor="ctr"/>
-          <a:lstStyle/>
-          <a:p>
-            <a:pPr algn="ctr"/>
-          </a:p>
-        </p:txBody>
-      </p:sp>
-      <p:sp>
-        <p:nvSpPr>
-          <p:cNvPr id="22" name="TextBox 21"/>
+          <p:cNvPr id="19" name="TextBox 18"/>
           <p:cNvSpPr txBox="1"/>
           <p:nvPr/>
         </p:nvSpPr>
         <p:spPr>
           <a:xfrm>
-            <a:off x="1097280" y="7772400"/>
-            <a:ext cx="8686800" cy="914400"/>
+            <a:off x="15361920" y="5486400"/>
+            <a:ext cx="13167360" cy="914400"/>
           </a:xfrm>
           <a:prstGeom prst="rect">
             <a:avLst/>
@@ -4010,130 +3990,26 @@
           <a:noFill/>
         </p:spPr>
         <p:txBody>
-          <a:bodyPr wrap="none">
-            <a:spAutoFit/>
-          </a:bodyPr>
-          <a:lstStyle/>
-          <a:p>
-            <a:r>
-              <a:rPr sz="1100" b="1">
-                <a:solidFill>
-                  <a:srgbClr val="00A3E0"/>
-                </a:solidFill>
-                <a:latin typeface="Arial"/>
-              </a:rPr>
-              <a:t>SECTION 1: INDUSTRIAL THREAT LANDSCAPE</a:t>
-            </a:r>
-          </a:p>
-          <a:p>
-            <a:r>
-              <a:rPr sz="1800" b="1">
-                <a:solidFill>
-                  <a:srgbClr val="FFFFFF"/>
-                </a:solidFill>
-                <a:latin typeface="Arial"/>
-              </a:rPr>
-              <a:t>The Death of the Air-Gap in Smart Mines</a:t>
-            </a:r>
-          </a:p>
-        </p:txBody>
-      </p:sp>
-      <p:sp>
-        <p:nvSpPr>
-          <p:cNvPr id="23" name="TextBox 22"/>
-          <p:cNvSpPr txBox="1"/>
-          <p:nvPr/>
-        </p:nvSpPr>
-        <p:spPr>
-          <a:xfrm>
-            <a:off x="1005840" y="8869680"/>
-            <a:ext cx="8869680" cy="7498079"/>
-          </a:xfrm>
-          <a:prstGeom prst="rect">
-            <a:avLst/>
-          </a:prstGeom>
-          <a:noFill/>
-        </p:spPr>
-        <p:txBody>
           <a:bodyPr wrap="square">
             <a:spAutoFit/>
           </a:bodyPr>
           <a:lstStyle/>
-          <a:p/>
-          <a:p>
-            <a:pPr>
-              <a:spcAft>
-                <a:spcPts val="800"/>
-              </a:spcAft>
-            </a:pPr>
-            <a:r>
-              <a:rPr b="1" sz="1400">
-                <a:solidFill>
-                  <a:srgbClr val="00529B"/>
-                </a:solidFill>
+          <a:p>
+            <a:r>
+              <a:rPr sz="1500" b="1">
+                <a:solidFill>
+                  <a:srgbClr val="1E293B"/>
+                </a:solidFill>
+                <a:latin typeface="Arial"/>
               </a:rPr>
-              <a:t>• Air-Gap Collapse: </a:t>
-            </a:r>
-            <a:r>
-              <a:rPr sz="1350">
-                <a:solidFill>
-                  <a:srgbClr val="0F172A"/>
-                </a:solidFill>
-              </a:rPr>
-              <a:t>Smart Subsoil digitalization connects SAG mills, froth flotation circuits, and tailings dams to cloud twins, exposing unauthenticated Modbus/DNP3 protocols to zero-day intrusion.</a:t>
-            </a:r>
-          </a:p>
-          <a:p>
-            <a:pPr>
-              <a:spcAft>
-                <a:spcPts val="800"/>
-              </a:spcAft>
-            </a:pPr>
-            <a:r>
-              <a:rPr b="1" sz="1400">
-                <a:solidFill>
-                  <a:srgbClr val="00529B"/>
-                </a:solidFill>
-              </a:rPr>
-              <a:t>• Catastrophic Outage Costs: </a:t>
-            </a:r>
-            <a:r>
-              <a:rPr sz="1350">
-                <a:solidFill>
-                  <a:srgbClr val="0F172A"/>
-                </a:solidFill>
-              </a:rPr>
-              <a:t>Unplanned mining downtime costs USD $50,000 to $500,000 per hour. Tampering with toxic gas sensors or dewatering pumps creates severe life safety hazards.</a:t>
-            </a:r>
-          </a:p>
-          <a:p>
-            <a:pPr>
-              <a:spcAft>
-                <a:spcPts val="800"/>
-              </a:spcAft>
-            </a:pPr>
-            <a:r>
-              <a:rPr b="1" sz="1400">
-                <a:solidFill>
-                  <a:srgbClr val="00529B"/>
-                </a:solidFill>
-              </a:rPr>
-              <a:t>• Traditional IDS Failures: </a:t>
-            </a:r>
-            <a:r>
-              <a:rPr sz="1350">
-                <a:solidFill>
-                  <a:srgbClr val="0F172A"/>
-                </a:solidFill>
-              </a:rPr>
-              <a:t>Heavyweight enterprise IDS tools require 150+ milliseconds to evaluate 41 features, violating the 20 to 50 millisecond control loop deadlines of industrial PLCs.</a:t>
+              <a:t>• Real-Time Edge Telemetry to Deep Learning Inference Pipeline:</a:t>
             </a:r>
           </a:p>
         </p:txBody>
       </p:sp>
       <p:pic>
         <p:nvPicPr>
-          <p:cNvPr id="24" name="Picture 23" descr="mining_scada_flowchart.png"/>
+          <p:cNvPr id="20" name="Picture 19" descr="system_architecture.png"/>
           <p:cNvPicPr>
             <a:picLocks noChangeAspect="1"/>
           </p:cNvPicPr>
@@ -4147,8 +4023,8 @@
         </p:blipFill>
         <p:spPr>
           <a:xfrm>
-            <a:off x="1005840" y="16276320"/>
-            <a:ext cx="8869680" cy="4394153"/>
+            <a:off x="15361920" y="6217920"/>
+            <a:ext cx="13167360" cy="7724905"/>
           </a:xfrm>
           <a:prstGeom prst="rect">
             <a:avLst/>
@@ -4157,102 +4033,14 @@
       </p:pic>
       <p:sp>
         <p:nvSpPr>
-          <p:cNvPr id="25" name="Rounded Rectangle 24"/>
-          <p:cNvSpPr/>
-          <p:nvPr/>
-        </p:nvSpPr>
-        <p:spPr>
-          <a:xfrm>
-            <a:off x="822960" y="25237440"/>
-            <a:ext cx="9235440" cy="17007840"/>
-          </a:xfrm>
-          <a:prstGeom prst="roundRect">
-            <a:avLst/>
-          </a:prstGeom>
-          <a:solidFill>
-            <a:srgbClr val="FFFFFF"/>
-          </a:solidFill>
-          <a:ln w="19050">
-            <a:solidFill>
-              <a:srgbClr val="CBD5E1"/>
-            </a:solidFill>
-          </a:ln>
-        </p:spPr>
-        <p:style>
-          <a:lnRef idx="1">
-            <a:schemeClr val="accent1"/>
-          </a:lnRef>
-          <a:fillRef idx="3">
-            <a:schemeClr val="accent1"/>
-          </a:fillRef>
-          <a:effectRef idx="2">
-            <a:schemeClr val="accent1"/>
-          </a:effectRef>
-          <a:fontRef idx="minor">
-            <a:schemeClr val="lt1"/>
-          </a:fontRef>
-        </p:style>
-        <p:txBody>
-          <a:bodyPr rtlCol="0" anchor="ctr"/>
-          <a:lstStyle/>
-          <a:p>
-            <a:pPr algn="ctr"/>
-          </a:p>
-        </p:txBody>
-      </p:sp>
-      <p:sp>
-        <p:nvSpPr>
-          <p:cNvPr id="26" name="Rounded Rectangle 25"/>
-          <p:cNvSpPr/>
-          <p:nvPr/>
-        </p:nvSpPr>
-        <p:spPr>
-          <a:xfrm>
-            <a:off x="822960" y="25237440"/>
-            <a:ext cx="9235440" cy="1097280"/>
-          </a:xfrm>
-          <a:prstGeom prst="roundRect">
-            <a:avLst/>
-          </a:prstGeom>
-          <a:solidFill>
-            <a:srgbClr val="00529B"/>
-          </a:solidFill>
-          <a:ln>
-            <a:noFill/>
-          </a:ln>
-        </p:spPr>
-        <p:style>
-          <a:lnRef idx="1">
-            <a:schemeClr val="accent1"/>
-          </a:lnRef>
-          <a:fillRef idx="3">
-            <a:schemeClr val="accent1"/>
-          </a:fillRef>
-          <a:effectRef idx="2">
-            <a:schemeClr val="accent1"/>
-          </a:effectRef>
-          <a:fontRef idx="minor">
-            <a:schemeClr val="lt1"/>
-          </a:fontRef>
-        </p:style>
-        <p:txBody>
-          <a:bodyPr rtlCol="0" anchor="ctr"/>
-          <a:lstStyle/>
-          <a:p>
-            <a:pPr algn="ctr"/>
-          </a:p>
-        </p:txBody>
-      </p:sp>
-      <p:sp>
-        <p:nvSpPr>
-          <p:cNvPr id="27" name="TextBox 26"/>
+          <p:cNvPr id="21" name="TextBox 20"/>
           <p:cNvSpPr txBox="1"/>
           <p:nvPr/>
         </p:nvSpPr>
         <p:spPr>
           <a:xfrm>
-            <a:off x="1097280" y="25328880"/>
-            <a:ext cx="8686800" cy="914400"/>
+            <a:off x="15361920" y="13533120"/>
+            <a:ext cx="13167360" cy="731520"/>
           </a:xfrm>
           <a:prstGeom prst="rect">
             <a:avLst/>
@@ -4266,31 +4054,119 @@
           <a:lstStyle/>
           <a:p>
             <a:r>
-              <a:rPr sz="1100" b="1">
-                <a:solidFill>
-                  <a:srgbClr val="00A3E0"/>
+              <a:rPr sz="2600" b="1">
+                <a:solidFill>
+                  <a:srgbClr val="00529B"/>
                 </a:solidFill>
                 <a:latin typeface="Arial"/>
               </a:rPr>
-              <a:t>SECTION 2: RESEARCH METHODOLOGY</a:t>
-            </a:r>
-          </a:p>
-          <a:p>
-            <a:r>
-              <a:rPr sz="1800" b="1">
-                <a:solidFill>
-                  <a:srgbClr val="FFFFFF"/>
+              <a:t>Analysis</a:t>
+            </a:r>
+          </a:p>
+        </p:txBody>
+      </p:sp>
+      <p:sp>
+        <p:nvSpPr>
+          <p:cNvPr id="22" name="TextBox 21"/>
+          <p:cNvSpPr txBox="1"/>
+          <p:nvPr/>
+        </p:nvSpPr>
+        <p:spPr>
+          <a:xfrm>
+            <a:off x="15361920" y="14264640"/>
+            <a:ext cx="13167360" cy="5486400"/>
+          </a:xfrm>
+          <a:prstGeom prst="rect">
+            <a:avLst/>
+          </a:prstGeom>
+          <a:noFill/>
+        </p:spPr>
+        <p:txBody>
+          <a:bodyPr wrap="square">
+            <a:spAutoFit/>
+          </a:bodyPr>
+          <a:lstStyle/>
+          <a:p/>
+          <a:p>
+            <a:pPr>
+              <a:spcAft>
+                <a:spcPts val="800"/>
+              </a:spcAft>
+            </a:pPr>
+            <a:r>
+              <a:rPr b="1" sz="1400">
+                <a:solidFill>
+                  <a:srgbClr val="00529B"/>
                 </a:solidFill>
                 <a:latin typeface="Arial"/>
               </a:rPr>
-              <a:t>Design Science Research (DSR) Execution</a:t>
+              <a:t>• BWOA Convergence: </a:t>
+            </a:r>
+            <a:r>
+              <a:rPr sz="1400">
+                <a:solidFill>
+                  <a:srgbClr val="1E293B"/>
+                </a:solidFill>
+                <a:latin typeface="Arial"/>
+              </a:rPr>
+              <a:t>BWOA optimization reached minimal fitness at iteration 23/100, maintaining 92.31% Random Forest cross-validation accuracy on the selected 10-feature subset.</a:t>
+            </a:r>
+          </a:p>
+          <a:p>
+            <a:pPr>
+              <a:spcAft>
+                <a:spcPts val="800"/>
+              </a:spcAft>
+            </a:pPr>
+            <a:r>
+              <a:rPr b="1" sz="1400">
+                <a:solidFill>
+                  <a:srgbClr val="00529B"/>
+                </a:solidFill>
+                <a:latin typeface="Arial"/>
+              </a:rPr>
+              <a:t>• Significant Dimension Reduction: </a:t>
+            </a:r>
+            <a:r>
+              <a:rPr sz="1400">
+                <a:solidFill>
+                  <a:srgbClr val="1E293B"/>
+                </a:solidFill>
+                <a:latin typeface="Arial"/>
+              </a:rPr>
+              <a:t>Pruned 31 uninformative features, reducing bandwidth transmission overhead by 75.61% across low-bandwidth satellite links in African extraction sites.</a:t>
+            </a:r>
+          </a:p>
+          <a:p>
+            <a:pPr>
+              <a:spcAft>
+                <a:spcPts val="800"/>
+              </a:spcAft>
+            </a:pPr>
+            <a:r>
+              <a:rPr b="1" sz="1400">
+                <a:solidFill>
+                  <a:srgbClr val="00529B"/>
+                </a:solidFill>
+                <a:latin typeface="Arial"/>
+              </a:rPr>
+              <a:t>• Key Discriminative Signals: </a:t>
+            </a:r>
+            <a:r>
+              <a:rPr sz="1400">
+                <a:solidFill>
+                  <a:srgbClr val="1E293B"/>
+                </a:solidFill>
+                <a:latin typeface="Arial"/>
+              </a:rPr>
+              <a:t>Selected features capture connection state (`service`, `flag`), volume asymmetry for DoS (`src_bytes`), privilege escalation (`hot`, `su_attempted`), and error rates (`serror_rate`, `same_srv_rate`).</a:t>
             </a:r>
           </a:p>
         </p:txBody>
       </p:sp>
       <p:pic>
         <p:nvPicPr>
-          <p:cNvPr id="28" name="Picture 27" descr="dsr_framework.png"/>
+          <p:cNvPr id="23" name="Picture 22" descr="bwoa_convergence.png"/>
           <p:cNvPicPr>
             <a:picLocks noChangeAspect="1"/>
           </p:cNvPicPr>
@@ -4304,8 +4180,8 @@
         </p:blipFill>
         <p:spPr>
           <a:xfrm>
-            <a:off x="1005840" y="26517600"/>
-            <a:ext cx="8869680" cy="3652221"/>
+            <a:off x="15361920" y="19933920"/>
+            <a:ext cx="13167360" cy="8229600"/>
           </a:xfrm>
           <a:prstGeom prst="rect">
             <a:avLst/>
@@ -4314,14 +4190,14 @@
       </p:pic>
       <p:sp>
         <p:nvSpPr>
-          <p:cNvPr id="29" name="TextBox 28"/>
+          <p:cNvPr id="24" name="TextBox 23"/>
           <p:cNvSpPr txBox="1"/>
           <p:nvPr/>
         </p:nvSpPr>
         <p:spPr>
           <a:xfrm>
-            <a:off x="1005840" y="34015680"/>
-            <a:ext cx="8869680" cy="7680960"/>
+            <a:off x="29626560" y="5486400"/>
+            <a:ext cx="13167360" cy="1097280"/>
           </a:xfrm>
           <a:prstGeom prst="rect">
             <a:avLst/>
@@ -4333,260 +4209,22 @@
             <a:spAutoFit/>
           </a:bodyPr>
           <a:lstStyle/>
-          <a:p/>
-          <a:p>
-            <a:pPr>
-              <a:spcAft>
-                <a:spcPts val="600"/>
-              </a:spcAft>
-            </a:pPr>
-            <a:r>
-              <a:rPr b="1" sz="1350">
-                <a:solidFill>
-                  <a:srgbClr val="10B981"/>
-                </a:solidFill>
-              </a:rPr>
-              <a:t>✓ Stage 1 (Problem Identification): </a:t>
-            </a:r>
-            <a:r>
-              <a:rPr sz="1300">
-                <a:solidFill>
-                  <a:srgbClr val="0F172A"/>
-                </a:solidFill>
-              </a:rPr>
-              <a:t>Air-gap loss &amp; SCADA real-time deadlines in African/Russian mines.</a:t>
-            </a:r>
-          </a:p>
-          <a:p>
-            <a:pPr>
-              <a:spcAft>
-                <a:spcPts val="600"/>
-              </a:spcAft>
-            </a:pPr>
-            <a:r>
-              <a:rPr b="1" sz="1350">
-                <a:solidFill>
-                  <a:srgbClr val="10B981"/>
-                </a:solidFill>
-              </a:rPr>
-              <a:t>✓ Stage 2 (Define Objectives): </a:t>
-            </a:r>
-            <a:r>
-              <a:rPr sz="1300">
-                <a:solidFill>
-                  <a:srgbClr val="0F172A"/>
-                </a:solidFill>
-              </a:rPr>
-              <a:t>Target &lt; 1.0 ms latency, &lt; 1.0 MB model size, 1GB RAM edge support.</a:t>
-            </a:r>
-          </a:p>
-          <a:p>
-            <a:pPr>
-              <a:spcAft>
-                <a:spcPts val="600"/>
-              </a:spcAft>
-            </a:pPr>
-            <a:r>
-              <a:rPr b="1" sz="1350">
-                <a:solidFill>
-                  <a:srgbClr val="10B981"/>
-                </a:solidFill>
-              </a:rPr>
-              <a:t>✓ Stage 3 (Design &amp; Artifact): </a:t>
-            </a:r>
-            <a:r>
-              <a:rPr sz="1300">
-                <a:solidFill>
-                  <a:srgbClr val="0F172A"/>
-                </a:solidFill>
-              </a:rPr>
-              <a:t>BWOA metaheuristic + Conv1D-LSTM + Float16 quantization.</a:t>
-            </a:r>
-          </a:p>
-          <a:p>
-            <a:pPr>
-              <a:spcAft>
-                <a:spcPts val="600"/>
-              </a:spcAft>
-            </a:pPr>
-            <a:r>
-              <a:rPr b="1" sz="1350">
-                <a:solidFill>
-                  <a:srgbClr val="10B981"/>
-                </a:solidFill>
-              </a:rPr>
-              <a:t>✓ Stage 4 (Demonstration): </a:t>
-            </a:r>
-            <a:r>
-              <a:rPr sz="1300">
-                <a:solidFill>
-                  <a:srgbClr val="0F172A"/>
-                </a:solidFill>
-              </a:rPr>
-              <a:t>Packaged global CLI agent (@mhiskall282/unesco-mine-sec-cli).</a:t>
-            </a:r>
-          </a:p>
-          <a:p>
-            <a:pPr>
-              <a:spcAft>
-                <a:spcPts val="600"/>
-              </a:spcAft>
-            </a:pPr>
-            <a:r>
-              <a:rPr b="1" sz="1350">
-                <a:solidFill>
-                  <a:srgbClr val="10B981"/>
-                </a:solidFill>
-              </a:rPr>
-              <a:t>✓ Stage 5 (Evaluation): </a:t>
-            </a:r>
-            <a:r>
-              <a:rPr sz="1300">
-                <a:solidFill>
-                  <a:srgbClr val="0F172A"/>
-                </a:solidFill>
-              </a:rPr>
-              <a:t>NSL-KDD benchmark, SWaT transfer learning, and 75/75 unit test suites.</a:t>
-            </a:r>
-          </a:p>
-        </p:txBody>
-      </p:sp>
-      <p:sp>
-        <p:nvSpPr>
-          <p:cNvPr id="30" name="Rounded Rectangle 29"/>
-          <p:cNvSpPr/>
-          <p:nvPr/>
-        </p:nvSpPr>
-        <p:spPr>
-          <a:xfrm>
-            <a:off x="10469880" y="7680960"/>
-            <a:ext cx="9235440" cy="17190720"/>
-          </a:xfrm>
-          <a:prstGeom prst="roundRect">
-            <a:avLst/>
-          </a:prstGeom>
-          <a:solidFill>
-            <a:srgbClr val="FFFFFF"/>
-          </a:solidFill>
-          <a:ln w="19050">
-            <a:solidFill>
-              <a:srgbClr val="CBD5E1"/>
-            </a:solidFill>
-          </a:ln>
-        </p:spPr>
-        <p:style>
-          <a:lnRef idx="1">
-            <a:schemeClr val="accent1"/>
-          </a:lnRef>
-          <a:fillRef idx="3">
-            <a:schemeClr val="accent1"/>
-          </a:fillRef>
-          <a:effectRef idx="2">
-            <a:schemeClr val="accent1"/>
-          </a:effectRef>
-          <a:fontRef idx="minor">
-            <a:schemeClr val="lt1"/>
-          </a:fontRef>
-        </p:style>
-        <p:txBody>
-          <a:bodyPr rtlCol="0" anchor="ctr"/>
-          <a:lstStyle/>
-          <a:p>
-            <a:pPr algn="ctr"/>
-          </a:p>
-        </p:txBody>
-      </p:sp>
-      <p:sp>
-        <p:nvSpPr>
-          <p:cNvPr id="31" name="Rounded Rectangle 30"/>
-          <p:cNvSpPr/>
-          <p:nvPr/>
-        </p:nvSpPr>
-        <p:spPr>
-          <a:xfrm>
-            <a:off x="10469880" y="7680960"/>
-            <a:ext cx="9235440" cy="1097280"/>
-          </a:xfrm>
-          <a:prstGeom prst="roundRect">
-            <a:avLst/>
-          </a:prstGeom>
-          <a:solidFill>
-            <a:srgbClr val="00529B"/>
-          </a:solidFill>
-          <a:ln>
-            <a:noFill/>
-          </a:ln>
-        </p:spPr>
-        <p:style>
-          <a:lnRef idx="1">
-            <a:schemeClr val="accent1"/>
-          </a:lnRef>
-          <a:fillRef idx="3">
-            <a:schemeClr val="accent1"/>
-          </a:fillRef>
-          <a:effectRef idx="2">
-            <a:schemeClr val="accent1"/>
-          </a:effectRef>
-          <a:fontRef idx="minor">
-            <a:schemeClr val="lt1"/>
-          </a:fontRef>
-        </p:style>
-        <p:txBody>
-          <a:bodyPr rtlCol="0" anchor="ctr"/>
-          <a:lstStyle/>
-          <a:p>
-            <a:pPr algn="ctr"/>
-          </a:p>
-        </p:txBody>
-      </p:sp>
-      <p:sp>
-        <p:nvSpPr>
-          <p:cNvPr id="32" name="TextBox 31"/>
-          <p:cNvSpPr txBox="1"/>
-          <p:nvPr/>
-        </p:nvSpPr>
-        <p:spPr>
-          <a:xfrm>
-            <a:off x="10744200" y="7772400"/>
-            <a:ext cx="8686800" cy="914400"/>
-          </a:xfrm>
-          <a:prstGeom prst="rect">
-            <a:avLst/>
-          </a:prstGeom>
-          <a:noFill/>
-        </p:spPr>
-        <p:txBody>
-          <a:bodyPr wrap="none">
-            <a:spAutoFit/>
-          </a:bodyPr>
-          <a:lstStyle/>
-          <a:p>
-            <a:r>
-              <a:rPr sz="1100" b="1">
-                <a:solidFill>
-                  <a:srgbClr val="00A3E0"/>
+          <a:p>
+            <a:r>
+              <a:rPr sz="1450" b="1">
+                <a:solidFill>
+                  <a:srgbClr val="1E293B"/>
                 </a:solidFill>
                 <a:latin typeface="Arial"/>
               </a:rPr>
-              <a:t>SECTION 3: TECHNOLOGICAL INNOVATION</a:t>
-            </a:r>
-          </a:p>
-          <a:p>
-            <a:r>
-              <a:rPr sz="1800" b="1">
-                <a:solidFill>
-                  <a:srgbClr val="FFFFFF"/>
-                </a:solidFill>
-                <a:latin typeface="Arial"/>
-              </a:rPr>
-              <a:t>4-Layer Edge-to-Cloud Security Architecture</a:t>
+              <a:t>• Objective latency and multi-class benchmark evaluation on physical edge hardware (Raspberry Pi 4B, 1GB RAM):</a:t>
             </a:r>
           </a:p>
         </p:txBody>
       </p:sp>
       <p:pic>
         <p:nvPicPr>
-          <p:cNvPr id="33" name="Picture 32" descr="system_architecture.png"/>
+          <p:cNvPr id="25" name="Picture 24" descr="latency_comparison_barchart.png"/>
           <p:cNvPicPr>
             <a:picLocks noChangeAspect="1"/>
           </p:cNvPicPr>
@@ -4600,8 +4238,8 @@
         </p:blipFill>
         <p:spPr>
           <a:xfrm>
-            <a:off x="10652760" y="8961120"/>
-            <a:ext cx="8869680" cy="5203582"/>
+            <a:off x="29626560" y="6583680"/>
+            <a:ext cx="13167360" cy="7333719"/>
           </a:xfrm>
           <a:prstGeom prst="rect">
             <a:avLst/>
@@ -4610,14 +4248,14 @@
       </p:pic>
       <p:sp>
         <p:nvSpPr>
-          <p:cNvPr id="34" name="TextBox 33"/>
+          <p:cNvPr id="26" name="TextBox 25"/>
           <p:cNvSpPr txBox="1"/>
           <p:nvPr/>
         </p:nvSpPr>
         <p:spPr>
           <a:xfrm>
-            <a:off x="10652760" y="18288000"/>
-            <a:ext cx="8869680" cy="6217920"/>
+            <a:off x="29626560" y="13898880"/>
+            <a:ext cx="13167360" cy="731520"/>
           </a:xfrm>
           <a:prstGeom prst="rect">
             <a:avLst/>
@@ -4625,702 +4263,33 @@
           <a:noFill/>
         </p:spPr>
         <p:txBody>
-          <a:bodyPr wrap="square">
-            <a:spAutoFit/>
-          </a:bodyPr>
-          <a:lstStyle/>
-          <a:p/>
-          <a:p>
-            <a:pPr>
-              <a:spcAft>
-                <a:spcPts val="600"/>
-              </a:spcAft>
-            </a:pPr>
-            <a:r>
-              <a:rPr b="1" sz="1350">
-                <a:solidFill>
-                  <a:srgbClr val="00529B"/>
-                </a:solidFill>
-              </a:rPr>
-              <a:t>■ Layer 1 (Ingestion): </a:t>
-            </a:r>
-            <a:r>
-              <a:rPr sz="1300">
-                <a:solidFill>
-                  <a:srgbClr val="0F172A"/>
-                </a:solidFill>
-              </a:rPr>
-              <a:t>Promiscuous packet sniffer capturing Modbus/TCP, DNP3, and OPC-UA streams.</a:t>
-            </a:r>
-          </a:p>
-          <a:p>
-            <a:pPr>
-              <a:spcAft>
-                <a:spcPts val="600"/>
-              </a:spcAft>
-            </a:pPr>
-            <a:r>
-              <a:rPr b="1" sz="1350">
-                <a:solidFill>
-                  <a:srgbClr val="00529B"/>
-                </a:solidFill>
-              </a:rPr>
-              <a:t>■ Layer 2 (BWOA Pruning): </a:t>
-            </a:r>
-            <a:r>
-              <a:rPr sz="1300">
-                <a:solidFill>
-                  <a:srgbClr val="0F172A"/>
-                </a:solidFill>
-              </a:rPr>
-              <a:t>Metaheuristic optimizer prunes 41 features down to 10 vital signals.</a:t>
-            </a:r>
-          </a:p>
-          <a:p>
-            <a:pPr>
-              <a:spcAft>
-                <a:spcPts val="600"/>
-              </a:spcAft>
-            </a:pPr>
-            <a:r>
-              <a:rPr b="1" sz="1350">
-                <a:solidFill>
-                  <a:srgbClr val="00529B"/>
-                </a:solidFill>
-              </a:rPr>
-              <a:t>■ Layer 3 (Deep Learning): </a:t>
-            </a:r>
-            <a:r>
-              <a:rPr sz="1300">
-                <a:solidFill>
-                  <a:srgbClr val="0F172A"/>
-                </a:solidFill>
-              </a:rPr>
-              <a:t>Spatial-temporal Conv1D-LSTM neural classifier quantized to Float16.</a:t>
-            </a:r>
-          </a:p>
-          <a:p>
-            <a:pPr>
-              <a:spcAft>
-                <a:spcPts val="600"/>
-              </a:spcAft>
-            </a:pPr>
-            <a:r>
-              <a:rPr b="1" sz="1350">
-                <a:solidFill>
-                  <a:srgbClr val="00529B"/>
-                </a:solidFill>
-              </a:rPr>
-              <a:t>■ Layer 4 (SaaS Dashboard): </a:t>
-            </a:r>
-            <a:r>
-              <a:rPr sz="1300">
-                <a:solidFill>
-                  <a:srgbClr val="0F172A"/>
-                </a:solidFill>
-              </a:rPr>
-              <a:t>Multi-tenant Laravel Livewire console streaming sub-second alerts.</a:t>
-            </a:r>
-          </a:p>
-        </p:txBody>
-      </p:sp>
-      <p:sp>
-        <p:nvSpPr>
-          <p:cNvPr id="35" name="Rounded Rectangle 34"/>
-          <p:cNvSpPr/>
-          <p:nvPr/>
-        </p:nvSpPr>
-        <p:spPr>
-          <a:xfrm>
-            <a:off x="10469880" y="25237440"/>
-            <a:ext cx="9235440" cy="17007840"/>
-          </a:xfrm>
-          <a:prstGeom prst="roundRect">
-            <a:avLst/>
-          </a:prstGeom>
-          <a:solidFill>
-            <a:srgbClr val="FFFFFF"/>
-          </a:solidFill>
-          <a:ln w="19050">
-            <a:solidFill>
-              <a:srgbClr val="CBD5E1"/>
-            </a:solidFill>
-          </a:ln>
-        </p:spPr>
-        <p:style>
-          <a:lnRef idx="1">
-            <a:schemeClr val="accent1"/>
-          </a:lnRef>
-          <a:fillRef idx="3">
-            <a:schemeClr val="accent1"/>
-          </a:fillRef>
-          <a:effectRef idx="2">
-            <a:schemeClr val="accent1"/>
-          </a:effectRef>
-          <a:fontRef idx="minor">
-            <a:schemeClr val="lt1"/>
-          </a:fontRef>
-        </p:style>
-        <p:txBody>
-          <a:bodyPr rtlCol="0" anchor="ctr"/>
-          <a:lstStyle/>
-          <a:p>
-            <a:pPr algn="ctr"/>
-          </a:p>
-        </p:txBody>
-      </p:sp>
-      <p:sp>
-        <p:nvSpPr>
-          <p:cNvPr id="36" name="Rounded Rectangle 35"/>
-          <p:cNvSpPr/>
-          <p:nvPr/>
-        </p:nvSpPr>
-        <p:spPr>
-          <a:xfrm>
-            <a:off x="10469880" y="25237440"/>
-            <a:ext cx="9235440" cy="1097280"/>
-          </a:xfrm>
-          <a:prstGeom prst="roundRect">
-            <a:avLst/>
-          </a:prstGeom>
-          <a:solidFill>
-            <a:srgbClr val="00529B"/>
-          </a:solidFill>
-          <a:ln>
-            <a:noFill/>
-          </a:ln>
-        </p:spPr>
-        <p:style>
-          <a:lnRef idx="1">
-            <a:schemeClr val="accent1"/>
-          </a:lnRef>
-          <a:fillRef idx="3">
-            <a:schemeClr val="accent1"/>
-          </a:fillRef>
-          <a:effectRef idx="2">
-            <a:schemeClr val="accent1"/>
-          </a:effectRef>
-          <a:fontRef idx="minor">
-            <a:schemeClr val="lt1"/>
-          </a:fontRef>
-        </p:style>
-        <p:txBody>
-          <a:bodyPr rtlCol="0" anchor="ctr"/>
-          <a:lstStyle/>
-          <a:p>
-            <a:pPr algn="ctr"/>
-          </a:p>
-        </p:txBody>
-      </p:sp>
-      <p:sp>
-        <p:nvSpPr>
-          <p:cNvPr id="37" name="TextBox 36"/>
-          <p:cNvSpPr txBox="1"/>
-          <p:nvPr/>
-        </p:nvSpPr>
-        <p:spPr>
-          <a:xfrm>
-            <a:off x="10744200" y="25328880"/>
-            <a:ext cx="8686800" cy="914400"/>
-          </a:xfrm>
-          <a:prstGeom prst="rect">
-            <a:avLst/>
-          </a:prstGeom>
-          <a:noFill/>
-        </p:spPr>
-        <p:txBody>
           <a:bodyPr wrap="none">
             <a:spAutoFit/>
           </a:bodyPr>
           <a:lstStyle/>
           <a:p>
             <a:r>
-              <a:rPr sz="1100" b="1">
-                <a:solidFill>
-                  <a:srgbClr val="00A3E0"/>
+              <a:rPr sz="2600" b="1">
+                <a:solidFill>
+                  <a:srgbClr val="00529B"/>
                 </a:solidFill>
                 <a:latin typeface="Arial"/>
               </a:rPr>
-              <a:t>SECTION 4: MATHEMATICAL OPTIMIZATION</a:t>
-            </a:r>
-          </a:p>
-          <a:p>
-            <a:r>
-              <a:rPr sz="1800" b="1">
-                <a:solidFill>
-                  <a:srgbClr val="FFFFFF"/>
-                </a:solidFill>
-                <a:latin typeface="Arial"/>
-              </a:rPr>
-              <a:t>BWOA Convergence &amp; Neural Layout</a:t>
-            </a:r>
-          </a:p>
-        </p:txBody>
-      </p:sp>
-      <p:pic>
-        <p:nvPicPr>
-          <p:cNvPr id="38" name="Picture 37" descr="bwoa_convergence.png"/>
-          <p:cNvPicPr>
-            <a:picLocks noChangeAspect="1"/>
-          </p:cNvPicPr>
-          <p:nvPr/>
-        </p:nvPicPr>
-        <p:blipFill>
-          <a:blip r:embed="rId5"/>
-          <a:stretch>
-            <a:fillRect/>
-          </a:stretch>
-        </p:blipFill>
-        <p:spPr>
-          <a:xfrm>
-            <a:off x="10652760" y="26517600"/>
-            <a:ext cx="8869680" cy="5543550"/>
-          </a:xfrm>
-          <a:prstGeom prst="rect">
-            <a:avLst/>
-          </a:prstGeom>
-        </p:spPr>
-      </p:pic>
-      <p:sp>
-        <p:nvSpPr>
-          <p:cNvPr id="39" name="TextBox 38"/>
+              <a:t>Conclusions</a:t>
+            </a:r>
+          </a:p>
+        </p:txBody>
+      </p:sp>
+      <p:sp>
+        <p:nvSpPr>
+          <p:cNvPr id="27" name="TextBox 26"/>
           <p:cNvSpPr txBox="1"/>
           <p:nvPr/>
         </p:nvSpPr>
         <p:spPr>
           <a:xfrm>
-            <a:off x="10652760" y="34015680"/>
-            <a:ext cx="8869680" cy="7680960"/>
-          </a:xfrm>
-          <a:prstGeom prst="rect">
-            <a:avLst/>
-          </a:prstGeom>
-          <a:noFill/>
-        </p:spPr>
-        <p:txBody>
-          <a:bodyPr wrap="square">
-            <a:spAutoFit/>
-          </a:bodyPr>
-          <a:lstStyle/>
-          <a:p/>
-          <a:p>
-            <a:pPr>
-              <a:spcAft>
-                <a:spcPts val="600"/>
-              </a:spcAft>
-            </a:pPr>
-            <a:r>
-              <a:rPr b="1" sz="1350">
-                <a:solidFill>
-                  <a:srgbClr val="D4AF37"/>
-                </a:solidFill>
-              </a:rPr>
-              <a:t>★ Encircling &amp; Bubble-Net: </a:t>
-            </a:r>
-            <a:r>
-              <a:rPr sz="1300">
-                <a:solidFill>
-                  <a:srgbClr val="0F172A"/>
-                </a:solidFill>
-              </a:rPr>
-              <a:t>whales adjust velocity using a V-shaped transfer function: V(x) = |x / sqrt(1 + x^2)|.</a:t>
-            </a:r>
-          </a:p>
-          <a:p>
-            <a:pPr>
-              <a:spcAft>
-                <a:spcPts val="600"/>
-              </a:spcAft>
-            </a:pPr>
-            <a:r>
-              <a:rPr b="1" sz="1350">
-                <a:solidFill>
-                  <a:srgbClr val="D4AF37"/>
-                </a:solidFill>
-              </a:rPr>
-              <a:t>★ Accuracy Floor Constraint: </a:t>
-            </a:r>
-            <a:r>
-              <a:rPr sz="1300">
-                <a:solidFill>
-                  <a:srgbClr val="0F172A"/>
-                </a:solidFill>
-              </a:rPr>
-              <a:t>Enforces strict 75% accuracy floor with penalty weight alpha=0.3.</a:t>
-            </a:r>
-          </a:p>
-          <a:p>
-            <a:pPr>
-              <a:spcAft>
-                <a:spcPts val="600"/>
-              </a:spcAft>
-            </a:pPr>
-            <a:r>
-              <a:rPr b="1" sz="1350">
-                <a:solidFill>
-                  <a:srgbClr val="D4AF37"/>
-                </a:solidFill>
-              </a:rPr>
-              <a:t>★ Selected 10 Features: </a:t>
-            </a:r>
-            <a:r>
-              <a:rPr sz="1300">
-                <a:solidFill>
-                  <a:srgbClr val="0F172A"/>
-                </a:solidFill>
-              </a:rPr>
-              <a:t>protocol_type, service, flag, src_bytes, hot, su_attempted, serror_rate, same_srv_rate, diff_srv_rate, dst_host_diff_srv_rate.</a:t>
-            </a:r>
-          </a:p>
-          <a:p>
-            <a:pPr>
-              <a:spcAft>
-                <a:spcPts val="600"/>
-              </a:spcAft>
-            </a:pPr>
-            <a:r>
-              <a:rPr b="1" sz="1350">
-                <a:solidFill>
-                  <a:srgbClr val="D4AF37"/>
-                </a:solidFill>
-              </a:rPr>
-              <a:t>★ Convergence Speed: </a:t>
-            </a:r>
-            <a:r>
-              <a:rPr sz="1300">
-                <a:solidFill>
-                  <a:srgbClr val="0F172A"/>
-                </a:solidFill>
-              </a:rPr>
-              <a:t>Optimal 10-feature mask reached at iteration 23/100 (92.31% RF CV accuracy).</a:t>
-            </a:r>
-          </a:p>
-        </p:txBody>
-      </p:sp>
-      <p:sp>
-        <p:nvSpPr>
-          <p:cNvPr id="40" name="Rounded Rectangle 39"/>
-          <p:cNvSpPr/>
-          <p:nvPr/>
-        </p:nvSpPr>
-        <p:spPr>
-          <a:xfrm>
-            <a:off x="20116800" y="7680960"/>
-            <a:ext cx="9235440" cy="17190720"/>
-          </a:xfrm>
-          <a:prstGeom prst="roundRect">
-            <a:avLst/>
-          </a:prstGeom>
-          <a:solidFill>
-            <a:srgbClr val="FFFFFF"/>
-          </a:solidFill>
-          <a:ln w="19050">
-            <a:solidFill>
-              <a:srgbClr val="CBD5E1"/>
-            </a:solidFill>
-          </a:ln>
-        </p:spPr>
-        <p:style>
-          <a:lnRef idx="1">
-            <a:schemeClr val="accent1"/>
-          </a:lnRef>
-          <a:fillRef idx="3">
-            <a:schemeClr val="accent1"/>
-          </a:fillRef>
-          <a:effectRef idx="2">
-            <a:schemeClr val="accent1"/>
-          </a:effectRef>
-          <a:fontRef idx="minor">
-            <a:schemeClr val="lt1"/>
-          </a:fontRef>
-        </p:style>
-        <p:txBody>
-          <a:bodyPr rtlCol="0" anchor="ctr"/>
-          <a:lstStyle/>
-          <a:p>
-            <a:pPr algn="ctr"/>
-          </a:p>
-        </p:txBody>
-      </p:sp>
-      <p:sp>
-        <p:nvSpPr>
-          <p:cNvPr id="41" name="Rounded Rectangle 40"/>
-          <p:cNvSpPr/>
-          <p:nvPr/>
-        </p:nvSpPr>
-        <p:spPr>
-          <a:xfrm>
-            <a:off x="20116800" y="7680960"/>
-            <a:ext cx="9235440" cy="1097280"/>
-          </a:xfrm>
-          <a:prstGeom prst="roundRect">
-            <a:avLst/>
-          </a:prstGeom>
-          <a:solidFill>
-            <a:srgbClr val="00529B"/>
-          </a:solidFill>
-          <a:ln>
-            <a:noFill/>
-          </a:ln>
-        </p:spPr>
-        <p:style>
-          <a:lnRef idx="1">
-            <a:schemeClr val="accent1"/>
-          </a:lnRef>
-          <a:fillRef idx="3">
-            <a:schemeClr val="accent1"/>
-          </a:fillRef>
-          <a:effectRef idx="2">
-            <a:schemeClr val="accent1"/>
-          </a:effectRef>
-          <a:fontRef idx="minor">
-            <a:schemeClr val="lt1"/>
-          </a:fontRef>
-        </p:style>
-        <p:txBody>
-          <a:bodyPr rtlCol="0" anchor="ctr"/>
-          <a:lstStyle/>
-          <a:p>
-            <a:pPr algn="ctr"/>
-          </a:p>
-        </p:txBody>
-      </p:sp>
-      <p:sp>
-        <p:nvSpPr>
-          <p:cNvPr id="42" name="TextBox 41"/>
-          <p:cNvSpPr txBox="1"/>
-          <p:nvPr/>
-        </p:nvSpPr>
-        <p:spPr>
-          <a:xfrm>
-            <a:off x="20391120" y="7772400"/>
-            <a:ext cx="8686800" cy="914400"/>
-          </a:xfrm>
-          <a:prstGeom prst="rect">
-            <a:avLst/>
-          </a:prstGeom>
-          <a:noFill/>
-        </p:spPr>
-        <p:txBody>
-          <a:bodyPr wrap="none">
-            <a:spAutoFit/>
-          </a:bodyPr>
-          <a:lstStyle/>
-          <a:p>
-            <a:r>
-              <a:rPr sz="1100" b="1">
-                <a:solidFill>
-                  <a:srgbClr val="00A3E0"/>
-                </a:solidFill>
-                <a:latin typeface="Arial"/>
-              </a:rPr>
-              <a:t>SECTION 5: EMPIRICAL BENCHMARKS</a:t>
-            </a:r>
-          </a:p>
-          <a:p>
-            <a:r>
-              <a:rPr sz="1800" b="1">
-                <a:solidFill>
-                  <a:srgbClr val="FFFFFF"/>
-                </a:solidFill>
-                <a:latin typeface="Arial"/>
-              </a:rPr>
-              <a:t>Sub-Millisecond Edge Latency vs SCADA Limit</a:t>
-            </a:r>
-          </a:p>
-        </p:txBody>
-      </p:sp>
-      <p:pic>
-        <p:nvPicPr>
-          <p:cNvPr id="43" name="Picture 42" descr="latency_comparison_barchart.png"/>
-          <p:cNvPicPr>
-            <a:picLocks noChangeAspect="1"/>
-          </p:cNvPicPr>
-          <p:nvPr/>
-        </p:nvPicPr>
-        <p:blipFill>
-          <a:blip r:embed="rId6"/>
-          <a:stretch>
-            <a:fillRect/>
-          </a:stretch>
-        </p:blipFill>
-        <p:spPr>
-          <a:xfrm>
-            <a:off x="20299680" y="8961120"/>
-            <a:ext cx="8869680" cy="4940075"/>
-          </a:xfrm>
-          <a:prstGeom prst="rect">
-            <a:avLst/>
-          </a:prstGeom>
-        </p:spPr>
-      </p:pic>
-      <p:pic>
-        <p:nvPicPr>
-          <p:cNvPr id="44" name="Picture 43" descr="confusion_matrix.png"/>
-          <p:cNvPicPr>
-            <a:picLocks noChangeAspect="1"/>
-          </p:cNvPicPr>
-          <p:nvPr/>
-        </p:nvPicPr>
-        <p:blipFill>
-          <a:blip r:embed="rId7"/>
-          <a:stretch>
-            <a:fillRect/>
-          </a:stretch>
-        </p:blipFill>
-        <p:spPr>
-          <a:xfrm>
-            <a:off x="20299680" y="17007840"/>
-            <a:ext cx="8869680" cy="8869680"/>
-          </a:xfrm>
-          <a:prstGeom prst="rect">
-            <a:avLst/>
-          </a:prstGeom>
-        </p:spPr>
-      </p:pic>
-      <p:sp>
-        <p:nvSpPr>
-          <p:cNvPr id="45" name="Rounded Rectangle 44"/>
-          <p:cNvSpPr/>
-          <p:nvPr/>
-        </p:nvSpPr>
-        <p:spPr>
-          <a:xfrm>
-            <a:off x="20116800" y="25237440"/>
-            <a:ext cx="9235440" cy="17007840"/>
-          </a:xfrm>
-          <a:prstGeom prst="roundRect">
-            <a:avLst/>
-          </a:prstGeom>
-          <a:solidFill>
-            <a:srgbClr val="FFFFFF"/>
-          </a:solidFill>
-          <a:ln w="19050">
-            <a:solidFill>
-              <a:srgbClr val="CBD5E1"/>
-            </a:solidFill>
-          </a:ln>
-        </p:spPr>
-        <p:style>
-          <a:lnRef idx="1">
-            <a:schemeClr val="accent1"/>
-          </a:lnRef>
-          <a:fillRef idx="3">
-            <a:schemeClr val="accent1"/>
-          </a:fillRef>
-          <a:effectRef idx="2">
-            <a:schemeClr val="accent1"/>
-          </a:effectRef>
-          <a:fontRef idx="minor">
-            <a:schemeClr val="lt1"/>
-          </a:fontRef>
-        </p:style>
-        <p:txBody>
-          <a:bodyPr rtlCol="0" anchor="ctr"/>
-          <a:lstStyle/>
-          <a:p>
-            <a:pPr algn="ctr"/>
-          </a:p>
-        </p:txBody>
-      </p:sp>
-      <p:sp>
-        <p:nvSpPr>
-          <p:cNvPr id="46" name="Rounded Rectangle 45"/>
-          <p:cNvSpPr/>
-          <p:nvPr/>
-        </p:nvSpPr>
-        <p:spPr>
-          <a:xfrm>
-            <a:off x="20116800" y="25237440"/>
-            <a:ext cx="9235440" cy="1097280"/>
-          </a:xfrm>
-          <a:prstGeom prst="roundRect">
-            <a:avLst/>
-          </a:prstGeom>
-          <a:solidFill>
-            <a:srgbClr val="00529B"/>
-          </a:solidFill>
-          <a:ln>
-            <a:noFill/>
-          </a:ln>
-        </p:spPr>
-        <p:style>
-          <a:lnRef idx="1">
-            <a:schemeClr val="accent1"/>
-          </a:lnRef>
-          <a:fillRef idx="3">
-            <a:schemeClr val="accent1"/>
-          </a:fillRef>
-          <a:effectRef idx="2">
-            <a:schemeClr val="accent1"/>
-          </a:effectRef>
-          <a:fontRef idx="minor">
-            <a:schemeClr val="lt1"/>
-          </a:fontRef>
-        </p:style>
-        <p:txBody>
-          <a:bodyPr rtlCol="0" anchor="ctr"/>
-          <a:lstStyle/>
-          <a:p>
-            <a:pPr algn="ctr"/>
-          </a:p>
-        </p:txBody>
-      </p:sp>
-      <p:sp>
-        <p:nvSpPr>
-          <p:cNvPr id="47" name="TextBox 46"/>
-          <p:cNvSpPr txBox="1"/>
-          <p:nvPr/>
-        </p:nvSpPr>
-        <p:spPr>
-          <a:xfrm>
-            <a:off x="20391120" y="25328880"/>
-            <a:ext cx="8686800" cy="914400"/>
-          </a:xfrm>
-          <a:prstGeom prst="rect">
-            <a:avLst/>
-          </a:prstGeom>
-          <a:noFill/>
-        </p:spPr>
-        <p:txBody>
-          <a:bodyPr wrap="none">
-            <a:spAutoFit/>
-          </a:bodyPr>
-          <a:lstStyle/>
-          <a:p>
-            <a:r>
-              <a:rPr sz="1100" b="1">
-                <a:solidFill>
-                  <a:srgbClr val="00A3E0"/>
-                </a:solidFill>
-                <a:latin typeface="Arial"/>
-              </a:rPr>
-              <a:t>SECTION 6: SUSTAINABILITY &amp; ARTIFACTS</a:t>
-            </a:r>
-          </a:p>
-          <a:p>
-            <a:r>
-              <a:rPr sz="1800" b="1">
-                <a:solidFill>
-                  <a:srgbClr val="FFFFFF"/>
-                </a:solidFill>
-                <a:latin typeface="Arial"/>
-              </a:rPr>
-              <a:t>UN SDG Impact &amp; Open-Source Ecosystem</a:t>
-            </a:r>
-          </a:p>
-        </p:txBody>
-      </p:sp>
-      <p:sp>
-        <p:nvSpPr>
-          <p:cNvPr id="48" name="TextBox 47"/>
-          <p:cNvSpPr txBox="1"/>
-          <p:nvPr/>
-        </p:nvSpPr>
-        <p:spPr>
-          <a:xfrm>
-            <a:off x="20299680" y="26517600"/>
-            <a:ext cx="8869680" cy="15087600"/>
+            <a:off x="29626560" y="14630400"/>
+            <a:ext cx="13167360" cy="6858000"/>
           </a:xfrm>
           <a:prstGeom prst="rect">
             <a:avLst/>
@@ -5340,20 +4309,22 @@
               </a:spcAft>
             </a:pPr>
             <a:r>
-              <a:rPr b="1" sz="1350">
-                <a:solidFill>
-                  <a:srgbClr val="00529B"/>
-                </a:solidFill>
+              <a:rPr b="1" sz="1400">
+                <a:solidFill>
+                  <a:srgbClr val="10B981"/>
+                </a:solidFill>
+                <a:latin typeface="Arial"/>
               </a:rPr>
-              <a:t>◆ SDG 9 (Industry &amp; Innovation): </a:t>
-            </a:r>
-            <a:r>
-              <a:rPr sz="1300">
-                <a:solidFill>
-                  <a:srgbClr val="0F172A"/>
-                </a:solidFill>
+              <a:t>• Sub-Millisecond Edge Real-Time: </a:t>
+            </a:r>
+            <a:r>
+              <a:rPr sz="1400">
+                <a:solidFill>
+                  <a:srgbClr val="1E293B"/>
+                </a:solidFill>
+                <a:latin typeface="Arial"/>
               </a:rPr>
-              <a:t>Hardens critical mining cyber-physical infrastructure against zero-day disruption, safeguarding global mineral supply chains.</a:t>
+              <a:t>Executes single-sample inference in 0.76 milliseconds on a Raspberry Pi 4B (207x faster than baseline), easily satisfying the sub-100ms industrial SCADA control loop deadline.</a:t>
             </a:r>
           </a:p>
           <a:p>
@@ -5363,20 +4334,22 @@
               </a:spcAft>
             </a:pPr>
             <a:r>
-              <a:rPr b="1" sz="1350">
-                <a:solidFill>
-                  <a:srgbClr val="00529B"/>
-                </a:solidFill>
+              <a:rPr b="1" sz="1400">
+                <a:solidFill>
+                  <a:srgbClr val="10B981"/>
+                </a:solidFill>
+                <a:latin typeface="Arial"/>
               </a:rPr>
-              <a:t>◆ SDG 8 (Decent Work &amp; Safety): </a:t>
-            </a:r>
-            <a:r>
-              <a:rPr sz="1300">
-                <a:solidFill>
-                  <a:srgbClr val="0F172A"/>
-                </a:solidFill>
+              <a:t>• High Detection Fidelity: </a:t>
+            </a:r>
+            <a:r>
+              <a:rPr sz="1400">
+                <a:solidFill>
+                  <a:srgbClr val="1E293B"/>
+                </a:solidFill>
+                <a:latin typeface="Arial"/>
               </a:rPr>
-              <a:t>Protects underground worker safety by preventing cyber manipulation of toxic gas sensors, scrubbers, and ventilation grids.</a:t>
+              <a:t>Delivers 70.56% multi-class accuracy, 96.89% precision on benign telemetry (preventing false alarms), and 89.04% recall on denial-of-service intrusions.</a:t>
             </a:r>
           </a:p>
           <a:p>
@@ -5386,20 +4359,22 @@
               </a:spcAft>
             </a:pPr>
             <a:r>
-              <a:rPr b="1" sz="1350">
-                <a:solidFill>
-                  <a:srgbClr val="00529B"/>
-                </a:solidFill>
+              <a:rPr b="1" sz="1400">
+                <a:solidFill>
+                  <a:srgbClr val="10B981"/>
+                </a:solidFill>
+                <a:latin typeface="Arial"/>
               </a:rPr>
-              <a:t>◆ SDG 17 (Partnerships for Goals): </a:t>
-            </a:r>
-            <a:r>
-              <a:rPr sz="1300">
-                <a:solidFill>
-                  <a:srgbClr val="0F172A"/>
-                </a:solidFill>
+              <a:t>• Economic &amp; Life Safety Impact: </a:t>
+            </a:r>
+            <a:r>
+              <a:rPr sz="1400">
+                <a:solidFill>
+                  <a:srgbClr val="1E293B"/>
+                </a:solidFill>
+                <a:latin typeface="Arial"/>
               </a:rPr>
-              <a:t>Fosters bilateral Russian-African scientific collaboration, technology transfer, and local technical capacity building.</a:t>
+              <a:t>Provides 200x to 300x industrial ROI by preventing USD $50,000 to $500,000/hr downtime while safeguarding miner lives from toxic gas or ventilation manipulation (SDG 8 &amp; 9).</a:t>
             </a:r>
           </a:p>
           <a:p>
@@ -5409,66 +4384,160 @@
               </a:spcAft>
             </a:pPr>
             <a:r>
-              <a:rPr b="1" sz="1350">
+              <a:rPr b="1" sz="1400">
+                <a:solidFill>
+                  <a:srgbClr val="10B981"/>
+                </a:solidFill>
+                <a:latin typeface="Arial"/>
+              </a:rPr>
+              <a:t>• Open-Source Ecosystem: </a:t>
+            </a:r>
+            <a:r>
+              <a:rPr sz="1400">
+                <a:solidFill>
+                  <a:srgbClr val="1E293B"/>
+                </a:solidFill>
+                <a:latin typeface="Arial"/>
+              </a:rPr>
+              <a:t>Fully open-source CLI agent (@mhiskall282/unesco-mine-sec-cli) and 75/75 automated unit test suites ensure complete reproducibility.</a:t>
+            </a:r>
+          </a:p>
+        </p:txBody>
+      </p:sp>
+      <p:sp>
+        <p:nvSpPr>
+          <p:cNvPr id="28" name="TextBox 27"/>
+          <p:cNvSpPr txBox="1"/>
+          <p:nvPr/>
+        </p:nvSpPr>
+        <p:spPr>
+          <a:xfrm>
+            <a:off x="29626560" y="21762720"/>
+            <a:ext cx="13167360" cy="731520"/>
+          </a:xfrm>
+          <a:prstGeom prst="rect">
+            <a:avLst/>
+          </a:prstGeom>
+          <a:noFill/>
+        </p:spPr>
+        <p:txBody>
+          <a:bodyPr wrap="none">
+            <a:spAutoFit/>
+          </a:bodyPr>
+          <a:lstStyle/>
+          <a:p>
+            <a:r>
+              <a:rPr sz="2600" b="1">
                 <a:solidFill>
                   <a:srgbClr val="00529B"/>
                 </a:solidFill>
+                <a:latin typeface="Arial"/>
               </a:rPr>
-              <a:t>◆ High Economic ROI (200x - 300x): </a:t>
-            </a:r>
-            <a:r>
-              <a:rPr sz="1300">
-                <a:solidFill>
-                  <a:srgbClr val="0F172A"/>
-                </a:solidFill>
-              </a:rPr>
-              <a:t>Preventing a single 24-hour ransomware outage on a ball mill saves $300k to $450k against an annual IDS cost of &lt; $1,500.</a:t>
-            </a:r>
-          </a:p>
+              <a:t>References</a:t>
+            </a:r>
+          </a:p>
+        </p:txBody>
+      </p:sp>
+      <p:sp>
+        <p:nvSpPr>
+          <p:cNvPr id="29" name="TextBox 28"/>
+          <p:cNvSpPr txBox="1"/>
+          <p:nvPr/>
+        </p:nvSpPr>
+        <p:spPr>
+          <a:xfrm>
+            <a:off x="29626560" y="22402800"/>
+            <a:ext cx="13167360" cy="4114800"/>
+          </a:xfrm>
+          <a:prstGeom prst="rect">
+            <a:avLst/>
+          </a:prstGeom>
+          <a:noFill/>
+        </p:spPr>
+        <p:txBody>
+          <a:bodyPr wrap="square">
+            <a:spAutoFit/>
+          </a:bodyPr>
+          <a:lstStyle/>
+          <a:p/>
           <a:p>
             <a:pPr>
               <a:spcAft>
-                <a:spcPts val="800"/>
+                <a:spcPts val="300"/>
               </a:spcAft>
             </a:pPr>
             <a:r>
-              <a:rPr b="1" sz="1350">
-                <a:solidFill>
-                  <a:srgbClr val="00529B"/>
-                </a:solidFill>
+              <a:rPr sz="1000">
+                <a:solidFill>
+                  <a:srgbClr val="64748B"/>
+                </a:solidFill>
+                <a:latin typeface="Arial"/>
               </a:rPr>
-              <a:t>◆ NPM Edge Sniffer CLI: </a:t>
-            </a:r>
-            <a:r>
-              <a:rPr sz="1300">
-                <a:solidFill>
-                  <a:srgbClr val="0F172A"/>
-                </a:solidFill>
-              </a:rPr>
-              <a:t>Install instantly on any gateway via 'npm install -g @mhiskall282/unesco-mine-sec-cli' from GitHub Packages.</a:t>
+              <a:t>1. Alanazi, M., et al. (2022). SCADA vulnerabilities and attacks: A review. Computers &amp; Security, 125, 103028.</a:t>
             </a:r>
           </a:p>
           <a:p>
             <a:pPr>
               <a:spcAft>
-                <a:spcPts val="800"/>
+                <a:spcPts val="300"/>
               </a:spcAft>
             </a:pPr>
             <a:r>
-              <a:rPr b="1" sz="1350">
-                <a:solidFill>
-                  <a:srgbClr val="00529B"/>
-                </a:solidFill>
+              <a:rPr sz="1000">
+                <a:solidFill>
+                  <a:srgbClr val="64748B"/>
+                </a:solidFill>
+                <a:latin typeface="Arial"/>
               </a:rPr>
-              <a:t>◆ Source Code &amp; Reproducibility: </a:t>
-            </a:r>
-            <a:r>
-              <a:rPr sz="1300">
-                <a:solidFill>
-                  <a:srgbClr val="0F172A"/>
-                </a:solidFill>
+              <a:t>2. Almomani, O., et al. (2025). Cyberattack detection for SCADA in industrial IoT. Symmetry, 17(4), 480.</a:t>
+            </a:r>
+          </a:p>
+          <a:p>
+            <a:pPr>
+              <a:spcAft>
+                <a:spcPts val="300"/>
+              </a:spcAft>
+            </a:pPr>
+            <a:r>
+              <a:rPr sz="1000">
+                <a:solidFill>
+                  <a:srgbClr val="64748B"/>
+                </a:solidFill>
+                <a:latin typeface="Arial"/>
               </a:rPr>
-              <a:t>Complete repository, notebooks, and 75 unit test suites available at: https://github.com/mhiskall282/Securing-the-Digital-Mine-UNESCO-Project</a:t>
+              <a:t>3. Kheddar, H., et al. (2023). Deep transfer learning for intrusion detection in ICS. JNCA, 220, 103747.</a:t>
+            </a:r>
+          </a:p>
+          <a:p>
+            <a:pPr>
+              <a:spcAft>
+                <a:spcPts val="300"/>
+              </a:spcAft>
+            </a:pPr>
+            <a:r>
+              <a:rPr sz="1000">
+                <a:solidFill>
+                  <a:srgbClr val="64748B"/>
+                </a:solidFill>
+                <a:latin typeface="Arial"/>
+              </a:rPr>
+              <a:t>4. Mirjalili, S., &amp; Lewis, A. (2016). The whale optimization algorithm. Advances in Eng. Software, 95, 51-67.</a:t>
+            </a:r>
+          </a:p>
+          <a:p>
+            <a:pPr>
+              <a:spcAft>
+                <a:spcPts val="300"/>
+              </a:spcAft>
+            </a:pPr>
+            <a:r>
+              <a:rPr sz="1000">
+                <a:solidFill>
+                  <a:srgbClr val="64748B"/>
+                </a:solidFill>
+                <a:latin typeface="Arial"/>
+              </a:rPr>
+              <a:t>5. Minerals Commission of Ghana. (2024). Digital telemetry and cybersecurity compliance guidelines.</a:t>
             </a:r>
           </a:p>
         </p:txBody>

--- a/research/poster_presentation.pptx
+++ b/research/poster_presentation.pptx
@@ -7,7 +7,7 @@
   <p:sldIdLst>
     <p:sldId id="256" r:id="rId7"/>
   </p:sldIdLst>
-  <p:sldSz cx="43891200" cy="27432000" type="screen4x3"/>
+  <p:sldSz cx="43891200" cy="29260800" type="screen4x3"/>
   <p:notesSz cx="6858000" cy="9144000"/>
   <p:defaultTextStyle>
     <a:defPPr>
@@ -3097,7 +3097,7 @@
         <p:spPr>
           <a:xfrm>
             <a:off x="0" y="0"/>
-            <a:ext cx="43891200" cy="27432000"/>
+            <a:ext cx="43891200" cy="29260800"/>
           </a:xfrm>
           <a:prstGeom prst="rect">
             <a:avLst/>
@@ -3140,7 +3140,7 @@
         <p:spPr>
           <a:xfrm>
             <a:off x="0" y="0"/>
-            <a:ext cx="43891200" cy="5029200"/>
+            <a:ext cx="43891200" cy="4937760"/>
           </a:xfrm>
           <a:prstGeom prst="rect">
             <a:avLst/>
@@ -3182,7 +3182,7 @@
         </p:nvSpPr>
         <p:spPr>
           <a:xfrm>
-            <a:off x="0" y="4937760"/>
+            <a:off x="0" y="4846320"/>
             <a:ext cx="43891200" cy="109728"/>
           </a:xfrm>
           <a:prstGeom prst="rect">
@@ -3225,8 +3225,8 @@
         </p:nvSpPr>
         <p:spPr>
           <a:xfrm>
-            <a:off x="914400" y="548640"/>
-            <a:ext cx="5486400" cy="3840480"/>
+            <a:off x="914400" y="457200"/>
+            <a:ext cx="5943600" cy="3840480"/>
           </a:xfrm>
           <a:prstGeom prst="rect">
             <a:avLst/>
@@ -3240,7 +3240,7 @@
           <a:lstStyle/>
           <a:p>
             <a:r>
-              <a:rPr sz="3800" b="1">
+              <a:rPr sz="3600" b="1">
                 <a:solidFill>
                   <a:srgbClr val="FFFFFF"/>
                 </a:solidFill>
@@ -3272,8 +3272,8 @@
         </p:nvSpPr>
         <p:spPr>
           <a:xfrm>
-            <a:off x="37490400" y="548640"/>
-            <a:ext cx="5486400" cy="3840480"/>
+            <a:off x="37033200" y="457200"/>
+            <a:ext cx="5943600" cy="3840480"/>
           </a:xfrm>
           <a:prstGeom prst="rect">
             <a:avLst/>
@@ -3288,7 +3288,7 @@
           <a:p>
             <a:pPr algn="r"/>
             <a:r>
-              <a:rPr sz="3600" b="1">
+              <a:rPr sz="3400" b="1">
                 <a:solidFill>
                   <a:srgbClr val="FFD700"/>
                 </a:solidFill>
@@ -3321,8 +3321,8 @@
         </p:nvSpPr>
         <p:spPr>
           <a:xfrm>
-            <a:off x="6583680" y="365760"/>
-            <a:ext cx="30723840" cy="4389120"/>
+            <a:off x="6949440" y="320040"/>
+            <a:ext cx="29992319" cy="4389120"/>
           </a:xfrm>
           <a:prstGeom prst="rect">
             <a:avLst/>
@@ -3337,42 +3337,42 @@
           <a:p>
             <a:pPr algn="ctr"/>
             <a:r>
-              <a:rPr sz="3600" b="1">
+              <a:rPr sz="3200" b="1">
                 <a:solidFill>
                   <a:srgbClr val="FFFFFF"/>
                 </a:solidFill>
                 <a:latin typeface="Arial"/>
               </a:rPr>
               <a:t>Securing the Digital Mine with a Metaheuristic-Optimized
-Deep Learning Adaptive System</a:t>
+Deep Learning Adaptive Intrusion Detection System</a:t>
             </a:r>
           </a:p>
           <a:p>
             <a:pPr algn="ctr">
               <a:spcBef>
-                <a:spcPts val="800"/>
+                <a:spcPts val="600"/>
               </a:spcBef>
             </a:pPr>
             <a:r>
-              <a:rPr sz="1800" b="1">
+              <a:rPr sz="1700" b="1">
                 <a:solidFill>
                   <a:srgbClr val="FFD700"/>
                 </a:solidFill>
                 <a:latin typeface="Arial"/>
               </a:rPr>
-              <a:t>John Okyere, Ezekeil Baah, Clement Baffour, Parker Paa Annobil, George Akwesi Bonnah</a:t>
+              <a:t>John Okyere (Lead), Ezekeil Baah, Clement Baffour, Parker Paa Annobil, George Akwesi Bonnah</a:t>
             </a:r>
           </a:p>
           <a:p>
             <a:pPr algn="ctr"/>
             <a:r>
-              <a:rPr sz="1500">
+              <a:rPr sz="1400">
                 <a:solidFill>
                   <a:srgbClr val="E2E8F0"/>
                 </a:solidFill>
                 <a:latin typeface="Arial"/>
               </a:rPr>
-              <a:t>Department of ICT, University of Education, Winneba &amp; Kayaba Labs | Saint Petersburg, Russia 2026</a:t>
+              <a:t>Department of ICT, University of Education, Winneba &amp; Kayaba Labs | Track 3: Smart Subsoil | Saint Petersburg, Russia 2026</a:t>
             </a:r>
           </a:p>
         </p:txBody>
@@ -3385,8 +3385,8 @@
         </p:nvSpPr>
         <p:spPr>
           <a:xfrm>
-            <a:off x="1097280" y="5486400"/>
-            <a:ext cx="13167360" cy="731520"/>
+            <a:off x="914400" y="5303520"/>
+            <a:ext cx="13350240" cy="548640"/>
           </a:xfrm>
           <a:prstGeom prst="rect">
             <a:avLst/>
@@ -3400,13 +3400,13 @@
           <a:lstStyle/>
           <a:p>
             <a:r>
-              <a:rPr sz="2600" b="1">
+              <a:rPr sz="2200" b="1">
                 <a:solidFill>
                   <a:srgbClr val="00529B"/>
                 </a:solidFill>
                 <a:latin typeface="Arial"/>
               </a:rPr>
-              <a:t>Introduction</a:t>
+              <a:t>1. Industrial Threat Landscape &amp; Context</a:t>
             </a:r>
           </a:p>
         </p:txBody>
@@ -3419,8 +3419,8 @@
         </p:nvSpPr>
         <p:spPr>
           <a:xfrm>
-            <a:off x="1097280" y="6217920"/>
-            <a:ext cx="13167360" cy="5303520"/>
+            <a:off x="914400" y="5897880"/>
+            <a:ext cx="13350240" cy="3474720"/>
           </a:xfrm>
           <a:prstGeom prst="rect">
             <a:avLst/>
@@ -3436,79 +3436,131 @@
           <a:p>
             <a:pPr>
               <a:spcAft>
-                <a:spcPts val="800"/>
+                <a:spcPts val="400"/>
               </a:spcAft>
-              <a:defRPr sz="1450">
+            </a:pPr>
+            <a:r>
+              <a:rPr b="1" sz="1200">
+                <a:solidFill>
+                  <a:srgbClr val="00529B"/>
+                </a:solidFill>
+              </a:rPr>
+              <a:t>• Smart Subsoil Paradigm: </a:t>
+            </a:r>
+            <a:r>
+              <a:rPr sz="1150">
                 <a:solidFill>
                   <a:srgbClr val="1E293B"/>
                 </a:solidFill>
-                <a:latin typeface="Arial"/>
-              </a:defRPr>
-            </a:pPr>
-            <a:r>
-              <a:t>• Mining 4.0 &amp; Smart Subsoil: African and Russian mineral extraction complexes are rapidly integrating IoT sensors, SCADA telemetry, and automated milling fleets to maximize ore recovery.</a:t>
+              </a:rPr>
+              <a:t>African and Russian mining complexes are deploying IoT telemetry, autonomous haulage, and SCADA to maximize ore recovery in SAG mills, flotation circuits, and tailings dams.</a:t>
             </a:r>
           </a:p>
           <a:p>
             <a:pPr>
               <a:spcAft>
-                <a:spcPts val="800"/>
+                <a:spcPts val="400"/>
               </a:spcAft>
-              <a:defRPr sz="1450">
+            </a:pPr>
+            <a:r>
+              <a:rPr b="1" sz="1200">
+                <a:solidFill>
+                  <a:srgbClr val="00529B"/>
+                </a:solidFill>
+              </a:rPr>
+              <a:t>• The Air-Gap Collapse: </a:t>
+            </a:r>
+            <a:r>
+              <a:rPr sz="1150">
                 <a:solidFill>
                   <a:srgbClr val="1E293B"/>
                 </a:solidFill>
-                <a:latin typeface="Arial"/>
-              </a:defRPr>
-            </a:pPr>
-            <a:r>
-              <a:t>• The Air-Gap Myth: Connecting OT networks to enterprise analytics exposes unauthenticated Modbus RTU/TCP and DNP3 industrial protocols to hostile zero-day cyber intrusions.</a:t>
+              </a:rPr>
+              <a:t>Connecting operational technology (OT) to enterprise cloud analytics exposes unauthenticated Modbus RTU/TCP and DNP3 industrial protocols to hostile cyber intrusions.</a:t>
             </a:r>
           </a:p>
           <a:p>
             <a:pPr>
               <a:spcAft>
-                <a:spcPts val="800"/>
+                <a:spcPts val="400"/>
               </a:spcAft>
-              <a:defRPr sz="1450">
+            </a:pPr>
+            <a:r>
+              <a:rPr b="1" sz="1200">
+                <a:solidFill>
+                  <a:srgbClr val="00529B"/>
+                </a:solidFill>
+              </a:rPr>
+              <a:t>• Downtime Losses &amp; Life Safety: </a:t>
+            </a:r>
+            <a:r>
+              <a:rPr sz="1150">
                 <a:solidFill>
                   <a:srgbClr val="1E293B"/>
                 </a:solidFill>
-                <a:latin typeface="Arial"/>
-              </a:defRPr>
-            </a:pPr>
-            <a:r>
-              <a:t>• High Downtime Costs: Unplanned mining downtime costs between USD $50,000 and $500,000 per hour; cyber-physical disruption of ventilation or dewatering directly endangers human life.</a:t>
+              </a:rPr>
+              <a:t>Unplanned mining downtime costs USD $50k-$500k/hr. Cyber tampering with toxic gas scrubbers or dewatering pumps creates existential life safety risks.</a:t>
             </a:r>
           </a:p>
           <a:p>
             <a:pPr>
               <a:spcAft>
-                <a:spcPts val="800"/>
+                <a:spcPts val="400"/>
               </a:spcAft>
-              <a:defRPr sz="1450">
+            </a:pPr>
+            <a:r>
+              <a:rPr b="1" sz="1200">
+                <a:solidFill>
+                  <a:srgbClr val="00529B"/>
+                </a:solidFill>
+              </a:rPr>
+              <a:t>• Failure of IT-Centric IDS: </a:t>
+            </a:r>
+            <a:r>
+              <a:rPr sz="1150">
                 <a:solidFill>
                   <a:srgbClr val="1E293B"/>
                 </a:solidFill>
-                <a:latin typeface="Arial"/>
-              </a:defRPr>
-            </a:pPr>
-            <a:r>
-              <a:t>• Failure of IT-Centric IDS: Enterprise security tools analyze 41+ features taking 150+ ms, directly violating the 20 to 50 millisecond control loop deadlines of industrial PLCs.</a:t>
-            </a:r>
-          </a:p>
-        </p:txBody>
-      </p:sp>
-      <p:sp>
-        <p:nvSpPr>
-          <p:cNvPr id="10" name="TextBox 9"/>
+              </a:rPr>
+              <a:t>Traditional tools evaluate 41+ features taking 150+ ms, directly violating the 20 to 50 millisecond control loop deadlines of industrial PLCs.</a:t>
+            </a:r>
+          </a:p>
+        </p:txBody>
+      </p:sp>
+      <p:pic>
+        <p:nvPicPr>
+          <p:cNvPr id="10" name="Picture 9" descr="mining_scada_flowchart.png"/>
+          <p:cNvPicPr>
+            <a:picLocks noChangeAspect="1"/>
+          </p:cNvPicPr>
+          <p:nvPr/>
+        </p:nvPicPr>
+        <p:blipFill>
+          <a:blip r:embed="rId2"/>
+          <a:stretch>
+            <a:fillRect/>
+          </a:stretch>
+        </p:blipFill>
+        <p:spPr>
+          <a:xfrm>
+            <a:off x="914400" y="9372600"/>
+            <a:ext cx="13350240" cy="6613880"/>
+          </a:xfrm>
+          <a:prstGeom prst="rect">
+            <a:avLst/>
+          </a:prstGeom>
+        </p:spPr>
+      </p:pic>
+      <p:sp>
+        <p:nvSpPr>
+          <p:cNvPr id="11" name="TextBox 10"/>
           <p:cNvSpPr txBox="1"/>
           <p:nvPr/>
         </p:nvSpPr>
         <p:spPr>
           <a:xfrm>
-            <a:off x="1097280" y="11704320"/>
-            <a:ext cx="13167360" cy="731520"/>
+            <a:off x="914400" y="13578840"/>
+            <a:ext cx="13350240" cy="548640"/>
           </a:xfrm>
           <a:prstGeom prst="rect">
             <a:avLst/>
@@ -3522,27 +3574,27 @@
           <a:lstStyle/>
           <a:p>
             <a:r>
-              <a:rPr sz="2600" b="1">
+              <a:rPr sz="2200" b="1">
                 <a:solidFill>
                   <a:srgbClr val="00529B"/>
                 </a:solidFill>
                 <a:latin typeface="Arial"/>
               </a:rPr>
-              <a:t>Method</a:t>
-            </a:r>
-          </a:p>
-        </p:txBody>
-      </p:sp>
-      <p:sp>
-        <p:nvSpPr>
-          <p:cNvPr id="11" name="TextBox 10"/>
+              <a:t>2. Method &amp; BWOA Mathematics</a:t>
+            </a:r>
+          </a:p>
+        </p:txBody>
+      </p:sp>
+      <p:sp>
+        <p:nvSpPr>
+          <p:cNvPr id="12" name="TextBox 11"/>
           <p:cNvSpPr txBox="1"/>
           <p:nvPr/>
         </p:nvSpPr>
         <p:spPr>
           <a:xfrm>
-            <a:off x="1097280" y="12435840"/>
-            <a:ext cx="13167360" cy="12344400"/>
+            <a:off x="914400" y="14173200"/>
+            <a:ext cx="13350240" cy="14630400"/>
           </a:xfrm>
           <a:prstGeom prst="rect">
             <a:avLst/>
@@ -3554,134 +3606,180 @@
             <a:spAutoFit/>
           </a:bodyPr>
           <a:lstStyle/>
+          <a:p/>
           <a:p>
             <a:pPr>
               <a:spcAft>
-                <a:spcPts val="800"/>
+                <a:spcPts val="600"/>
               </a:spcAft>
             </a:pPr>
             <a:r>
-              <a:rPr sz="1450" b="1">
+              <a:rPr b="1" sz="1200">
+                <a:solidFill>
+                  <a:srgbClr val="00529B"/>
+                </a:solidFill>
+              </a:rPr>
+              <a:t>• Data Ingestion Layer: </a:t>
+            </a:r>
+            <a:r>
+              <a:rPr sz="1150">
                 <a:solidFill>
                   <a:srgbClr val="1E293B"/>
                 </a:solidFill>
-                <a:latin typeface="Arial"/>
-              </a:rPr>
-              <a:t>Our approach is built around four interconnected modules designed to operate in real-time on edge gateways:</a:t>
+              </a:rPr>
+              <a:t>Promiscuous packet capture using @mhiskall282/unesco-mine-sec-cli parsing IP/TCP/Modbus headers without packet drop.</a:t>
             </a:r>
           </a:p>
           <a:p>
             <a:pPr>
               <a:spcAft>
-                <a:spcPts val="1000"/>
+                <a:spcPts val="600"/>
               </a:spcAft>
             </a:pPr>
             <a:r>
-              <a:rPr b="1" sz="1400">
+              <a:rPr b="1" sz="1200">
                 <a:solidFill>
                   <a:srgbClr val="00529B"/>
                 </a:solidFill>
-                <a:latin typeface="Arial"/>
-              </a:rPr>
-              <a:t>• Data Ingestion &amp; Extraction: </a:t>
-            </a:r>
-            <a:r>
-              <a:rPr sz="1400">
+              </a:rPr>
+              <a:t>• 1. Shrinking Encircling: </a:t>
+            </a:r>
+            <a:r>
+              <a:rPr sz="1150">
                 <a:solidFill>
                   <a:srgbClr val="1E293B"/>
                 </a:solidFill>
-                <a:latin typeface="Arial"/>
-              </a:rPr>
-              <a:t>Promiscuously captures raw network frames from SCADA interfaces at line speed using @mhiskall282/unesco-mine-sec-cli, parsing IP/TCP/Modbus packet headers without dropping packets.</a:t>
+              </a:rPr>
+              <a:t>D = |C * X*(t) - X(t)|,  X(t+1) = X*(t) - A * D  (where A = 2a*r1 - a, C = 2*r2, and 'a' linearly decreases from 2 to 0).</a:t>
             </a:r>
           </a:p>
           <a:p>
             <a:pPr>
               <a:spcAft>
-                <a:spcPts val="1000"/>
+                <a:spcPts val="600"/>
               </a:spcAft>
             </a:pPr>
             <a:r>
-              <a:rPr b="1" sz="1400">
+              <a:rPr b="1" sz="1200">
                 <a:solidFill>
                   <a:srgbClr val="00529B"/>
                 </a:solidFill>
-                <a:latin typeface="Arial"/>
-              </a:rPr>
-              <a:t>• BWOA Feature Pruning: </a:t>
-            </a:r>
-            <a:r>
-              <a:rPr sz="1400">
+              </a:rPr>
+              <a:t>• 2. Spiral Bubble-Net: </a:t>
+            </a:r>
+            <a:r>
+              <a:rPr sz="1150">
                 <a:solidFill>
                   <a:srgbClr val="1E293B"/>
                 </a:solidFill>
-                <a:latin typeface="Arial"/>
-              </a:rPr>
-              <a:t>Applies Binary Whale Optimization with a V-shaped transfer function and a 75% accuracy floor constraint, pruning input dimensions by 75.61% (from 41 down to 10 vital features).</a:t>
+              </a:rPr>
+              <a:t>X(t+1) = D' * exp(b*l) * cos(2*pi*l) + X*(t)  (where b=1.0, l is uniform in [-1, 1], modeling humpback hunting).</a:t>
             </a:r>
           </a:p>
           <a:p>
             <a:pPr>
               <a:spcAft>
-                <a:spcPts val="1000"/>
+                <a:spcPts val="600"/>
               </a:spcAft>
             </a:pPr>
             <a:r>
-              <a:rPr b="1" sz="1400">
+              <a:rPr b="1" sz="1200">
                 <a:solidFill>
                   <a:srgbClr val="00529B"/>
                 </a:solidFill>
-                <a:latin typeface="Arial"/>
-              </a:rPr>
-              <a:t>• Spatial-Temporal Classifier: </a:t>
-            </a:r>
-            <a:r>
-              <a:rPr sz="1400">
+              </a:rPr>
+              <a:t>• 3. V-Shaped Binary Transfer: </a:t>
+            </a:r>
+            <a:r>
+              <a:rPr sz="1150">
                 <a:solidFill>
                   <a:srgbClr val="1E293B"/>
                 </a:solidFill>
-                <a:latin typeface="Arial"/>
-              </a:rPr>
-              <a:t>Combines a 1D Convolutional Neural Network (Conv1D) layer for packet spatial feature extraction with Long Short-Term Memory (LSTM) cells for temporal state tracking.</a:t>
+              </a:rPr>
+              <a:t>V(x) = |x / sqrt(1 + x^2)|,  X_d(t+1) = 1 - X_d(t) if rand() &lt; V(x_d) else X_d(t).</a:t>
             </a:r>
           </a:p>
           <a:p>
             <a:pPr>
               <a:spcAft>
-                <a:spcPts val="1000"/>
+                <a:spcPts val="600"/>
               </a:spcAft>
             </a:pPr>
             <a:r>
-              <a:rPr b="1" sz="1400">
+              <a:rPr b="1" sz="1200">
                 <a:solidFill>
                   <a:srgbClr val="00529B"/>
                 </a:solidFill>
-                <a:latin typeface="Arial"/>
+              </a:rPr>
+              <a:t>• 4. Accuracy Floor Fitness: </a:t>
+            </a:r>
+            <a:r>
+              <a:rPr sz="1150">
+                <a:solidFill>
+                  <a:srgbClr val="1E293B"/>
+                </a:solidFill>
+              </a:rPr>
+              <a:t>Fit(X) = alpha*(1 - Acc(X)) + (1-alpha)*(|X|/D) + Penalty  (alpha=0.3, Penalty=1.0 if Acc &lt; 0.75 or |X| &lt; 10).</a:t>
+            </a:r>
+          </a:p>
+          <a:p>
+            <a:pPr>
+              <a:spcAft>
+                <a:spcPts val="600"/>
+              </a:spcAft>
+            </a:pPr>
+            <a:r>
+              <a:rPr b="1" sz="1200">
+                <a:solidFill>
+                  <a:srgbClr val="00529B"/>
+                </a:solidFill>
+              </a:rPr>
+              <a:t>• Spatial-Temporal Classifier: </a:t>
+            </a:r>
+            <a:r>
+              <a:rPr sz="1150">
+                <a:solidFill>
+                  <a:srgbClr val="1E293B"/>
+                </a:solidFill>
+              </a:rPr>
+              <a:t>Conv1D spatial feature extraction (64 filters) + LSTM temporal state tracking (256 units).</a:t>
+            </a:r>
+          </a:p>
+          <a:p>
+            <a:pPr>
+              <a:spcAft>
+                <a:spcPts val="600"/>
+              </a:spcAft>
+            </a:pPr>
+            <a:r>
+              <a:rPr b="1" sz="1200">
+                <a:solidFill>
+                  <a:srgbClr val="00529B"/>
+                </a:solidFill>
               </a:rPr>
               <a:t>• Float16 Edge Quantization: </a:t>
             </a:r>
             <a:r>
-              <a:rPr sz="1400">
+              <a:rPr sz="1150">
                 <a:solidFill>
                   <a:srgbClr val="1E293B"/>
                 </a:solidFill>
-                <a:latin typeface="Arial"/>
-              </a:rPr>
-              <a:t>Applies post-training Float16 weight quantization, compressing model memory footprint to 0.82 MB (83.2% compression) for sub-millisecond execution.</a:t>
-            </a:r>
-          </a:p>
-        </p:txBody>
-      </p:sp>
-      <p:sp>
-        <p:nvSpPr>
-          <p:cNvPr id="12" name="Parallelogram 11"/>
+              </a:rPr>
+              <a:t>Compresses model to 0.82 MB (83.2% reduction) for sub-millisecond execution on 1GB RAM edge gateways.</a:t>
+            </a:r>
+          </a:p>
+        </p:txBody>
+      </p:sp>
+      <p:sp>
+        <p:nvSpPr>
+          <p:cNvPr id="13" name="Parallelogram 12"/>
           <p:cNvSpPr/>
           <p:nvPr/>
         </p:nvSpPr>
         <p:spPr>
           <a:xfrm>
-            <a:off x="1097280" y="25420320"/>
-            <a:ext cx="548640" cy="1280160"/>
+            <a:off x="914400" y="27249120"/>
+            <a:ext cx="548640" cy="1097280"/>
           </a:xfrm>
           <a:prstGeom prst="parallelogram">
             <a:avLst/>
@@ -3717,14 +3815,14 @@
       </p:sp>
       <p:sp>
         <p:nvSpPr>
-          <p:cNvPr id="13" name="Parallelogram 12"/>
+          <p:cNvPr id="14" name="Parallelogram 13"/>
           <p:cNvSpPr/>
           <p:nvPr/>
         </p:nvSpPr>
         <p:spPr>
           <a:xfrm>
-            <a:off x="1920240" y="25420320"/>
-            <a:ext cx="548640" cy="1280160"/>
+            <a:off x="1737360" y="27249120"/>
+            <a:ext cx="548640" cy="1097280"/>
           </a:xfrm>
           <a:prstGeom prst="parallelogram">
             <a:avLst/>
@@ -3760,14 +3858,14 @@
       </p:sp>
       <p:sp>
         <p:nvSpPr>
-          <p:cNvPr id="14" name="Parallelogram 13"/>
+          <p:cNvPr id="15" name="Parallelogram 14"/>
           <p:cNvSpPr/>
           <p:nvPr/>
         </p:nvSpPr>
         <p:spPr>
           <a:xfrm>
-            <a:off x="2743200" y="25420320"/>
-            <a:ext cx="548640" cy="1280160"/>
+            <a:off x="2560320" y="27249120"/>
+            <a:ext cx="548640" cy="1097280"/>
           </a:xfrm>
           <a:prstGeom prst="parallelogram">
             <a:avLst/>
@@ -3803,14 +3901,14 @@
       </p:sp>
       <p:sp>
         <p:nvSpPr>
-          <p:cNvPr id="15" name="Parallelogram 14"/>
+          <p:cNvPr id="16" name="Parallelogram 15"/>
           <p:cNvSpPr/>
           <p:nvPr/>
         </p:nvSpPr>
         <p:spPr>
           <a:xfrm>
-            <a:off x="3566160" y="25420320"/>
-            <a:ext cx="548640" cy="1280160"/>
+            <a:off x="3383280" y="27249120"/>
+            <a:ext cx="548640" cy="1097280"/>
           </a:xfrm>
           <a:prstGeom prst="parallelogram">
             <a:avLst/>
@@ -3846,14 +3944,14 @@
       </p:sp>
       <p:sp>
         <p:nvSpPr>
-          <p:cNvPr id="16" name="Parallelogram 15"/>
+          <p:cNvPr id="17" name="Parallelogram 16"/>
           <p:cNvSpPr/>
           <p:nvPr/>
         </p:nvSpPr>
         <p:spPr>
           <a:xfrm>
-            <a:off x="4389120" y="25420320"/>
-            <a:ext cx="548640" cy="1280160"/>
+            <a:off x="4206240" y="27249120"/>
+            <a:ext cx="548640" cy="1097280"/>
           </a:xfrm>
           <a:prstGeom prst="parallelogram">
             <a:avLst/>
@@ -3889,14 +3987,14 @@
       </p:sp>
       <p:sp>
         <p:nvSpPr>
-          <p:cNvPr id="17" name="Parallelogram 16"/>
+          <p:cNvPr id="18" name="Parallelogram 17"/>
           <p:cNvSpPr/>
           <p:nvPr/>
         </p:nvSpPr>
         <p:spPr>
           <a:xfrm>
-            <a:off x="5212080" y="25420320"/>
-            <a:ext cx="548640" cy="1280160"/>
+            <a:off x="5029200" y="27249120"/>
+            <a:ext cx="548640" cy="1097280"/>
           </a:xfrm>
           <a:prstGeom prst="parallelogram">
             <a:avLst/>
@@ -3932,14 +4030,14 @@
       </p:sp>
       <p:sp>
         <p:nvSpPr>
-          <p:cNvPr id="18" name="Parallelogram 17"/>
+          <p:cNvPr id="19" name="Parallelogram 18"/>
           <p:cNvSpPr/>
           <p:nvPr/>
         </p:nvSpPr>
         <p:spPr>
           <a:xfrm>
-            <a:off x="6035040" y="25420320"/>
-            <a:ext cx="548640" cy="1280160"/>
+            <a:off x="5852160" y="27249120"/>
+            <a:ext cx="548640" cy="1097280"/>
           </a:xfrm>
           <a:prstGeom prst="parallelogram">
             <a:avLst/>
@@ -3975,14 +4073,57 @@
       </p:sp>
       <p:sp>
         <p:nvSpPr>
-          <p:cNvPr id="19" name="TextBox 18"/>
+          <p:cNvPr id="20" name="Parallelogram 19"/>
+          <p:cNvSpPr/>
+          <p:nvPr/>
+        </p:nvSpPr>
+        <p:spPr>
+          <a:xfrm>
+            <a:off x="6675120" y="27249120"/>
+            <a:ext cx="548640" cy="1097280"/>
+          </a:xfrm>
+          <a:prstGeom prst="parallelogram">
+            <a:avLst/>
+          </a:prstGeom>
+          <a:solidFill>
+            <a:srgbClr val="00A3E0"/>
+          </a:solidFill>
+          <a:ln>
+            <a:noFill/>
+          </a:ln>
+        </p:spPr>
+        <p:style>
+          <a:lnRef idx="1">
+            <a:schemeClr val="accent1"/>
+          </a:lnRef>
+          <a:fillRef idx="3">
+            <a:schemeClr val="accent1"/>
+          </a:fillRef>
+          <a:effectRef idx="2">
+            <a:schemeClr val="accent1"/>
+          </a:effectRef>
+          <a:fontRef idx="minor">
+            <a:schemeClr val="lt1"/>
+          </a:fontRef>
+        </p:style>
+        <p:txBody>
+          <a:bodyPr rtlCol="0" anchor="ctr"/>
+          <a:lstStyle/>
+          <a:p>
+            <a:pPr algn="ctr"/>
+          </a:p>
+        </p:txBody>
+      </p:sp>
+      <p:sp>
+        <p:nvSpPr>
+          <p:cNvPr id="21" name="TextBox 20"/>
           <p:cNvSpPr txBox="1"/>
           <p:nvPr/>
         </p:nvSpPr>
         <p:spPr>
           <a:xfrm>
-            <a:off x="15361920" y="5486400"/>
-            <a:ext cx="13167360" cy="914400"/>
+            <a:off x="15270480" y="5303520"/>
+            <a:ext cx="13350240" cy="548640"/>
           </a:xfrm>
           <a:prstGeom prst="rect">
             <a:avLst/>
@@ -3990,183 +4131,26 @@
           <a:noFill/>
         </p:spPr>
         <p:txBody>
-          <a:bodyPr wrap="square">
-            <a:spAutoFit/>
-          </a:bodyPr>
-          <a:lstStyle/>
-          <a:p>
-            <a:r>
-              <a:rPr sz="1500" b="1">
-                <a:solidFill>
-                  <a:srgbClr val="1E293B"/>
-                </a:solidFill>
-                <a:latin typeface="Arial"/>
-              </a:rPr>
-              <a:t>• Real-Time Edge Telemetry to Deep Learning Inference Pipeline:</a:t>
-            </a:r>
-          </a:p>
-        </p:txBody>
-      </p:sp>
-      <p:pic>
-        <p:nvPicPr>
-          <p:cNvPr id="20" name="Picture 19" descr="system_architecture.png"/>
-          <p:cNvPicPr>
-            <a:picLocks noChangeAspect="1"/>
-          </p:cNvPicPr>
-          <p:nvPr/>
-        </p:nvPicPr>
-        <p:blipFill>
-          <a:blip r:embed="rId2"/>
-          <a:stretch>
-            <a:fillRect/>
-          </a:stretch>
-        </p:blipFill>
-        <p:spPr>
-          <a:xfrm>
-            <a:off x="15361920" y="6217920"/>
-            <a:ext cx="13167360" cy="7724905"/>
-          </a:xfrm>
-          <a:prstGeom prst="rect">
-            <a:avLst/>
-          </a:prstGeom>
-        </p:spPr>
-      </p:pic>
-      <p:sp>
-        <p:nvSpPr>
-          <p:cNvPr id="21" name="TextBox 20"/>
-          <p:cNvSpPr txBox="1"/>
-          <p:nvPr/>
-        </p:nvSpPr>
-        <p:spPr>
-          <a:xfrm>
-            <a:off x="15361920" y="13533120"/>
-            <a:ext cx="13167360" cy="731520"/>
-          </a:xfrm>
-          <a:prstGeom prst="rect">
-            <a:avLst/>
-          </a:prstGeom>
-          <a:noFill/>
-        </p:spPr>
-        <p:txBody>
           <a:bodyPr wrap="none">
             <a:spAutoFit/>
           </a:bodyPr>
           <a:lstStyle/>
           <a:p>
             <a:r>
-              <a:rPr sz="2600" b="1">
+              <a:rPr sz="2200" b="1">
                 <a:solidFill>
                   <a:srgbClr val="00529B"/>
                 </a:solidFill>
                 <a:latin typeface="Arial"/>
               </a:rPr>
-              <a:t>Analysis</a:t>
-            </a:r>
-          </a:p>
-        </p:txBody>
-      </p:sp>
-      <p:sp>
-        <p:nvSpPr>
-          <p:cNvPr id="22" name="TextBox 21"/>
-          <p:cNvSpPr txBox="1"/>
-          <p:nvPr/>
-        </p:nvSpPr>
-        <p:spPr>
-          <a:xfrm>
-            <a:off x="15361920" y="14264640"/>
-            <a:ext cx="13167360" cy="5486400"/>
-          </a:xfrm>
-          <a:prstGeom prst="rect">
-            <a:avLst/>
-          </a:prstGeom>
-          <a:noFill/>
-        </p:spPr>
-        <p:txBody>
-          <a:bodyPr wrap="square">
-            <a:spAutoFit/>
-          </a:bodyPr>
-          <a:lstStyle/>
-          <a:p/>
-          <a:p>
-            <a:pPr>
-              <a:spcAft>
-                <a:spcPts val="800"/>
-              </a:spcAft>
-            </a:pPr>
-            <a:r>
-              <a:rPr b="1" sz="1400">
-                <a:solidFill>
-                  <a:srgbClr val="00529B"/>
-                </a:solidFill>
-                <a:latin typeface="Arial"/>
-              </a:rPr>
-              <a:t>• BWOA Convergence: </a:t>
-            </a:r>
-            <a:r>
-              <a:rPr sz="1400">
-                <a:solidFill>
-                  <a:srgbClr val="1E293B"/>
-                </a:solidFill>
-                <a:latin typeface="Arial"/>
-              </a:rPr>
-              <a:t>BWOA optimization reached minimal fitness at iteration 23/100, maintaining 92.31% Random Forest cross-validation accuracy on the selected 10-feature subset.</a:t>
-            </a:r>
-          </a:p>
-          <a:p>
-            <a:pPr>
-              <a:spcAft>
-                <a:spcPts val="800"/>
-              </a:spcAft>
-            </a:pPr>
-            <a:r>
-              <a:rPr b="1" sz="1400">
-                <a:solidFill>
-                  <a:srgbClr val="00529B"/>
-                </a:solidFill>
-                <a:latin typeface="Arial"/>
-              </a:rPr>
-              <a:t>• Significant Dimension Reduction: </a:t>
-            </a:r>
-            <a:r>
-              <a:rPr sz="1400">
-                <a:solidFill>
-                  <a:srgbClr val="1E293B"/>
-                </a:solidFill>
-                <a:latin typeface="Arial"/>
-              </a:rPr>
-              <a:t>Pruned 31 uninformative features, reducing bandwidth transmission overhead by 75.61% across low-bandwidth satellite links in African extraction sites.</a:t>
-            </a:r>
-          </a:p>
-          <a:p>
-            <a:pPr>
-              <a:spcAft>
-                <a:spcPts val="800"/>
-              </a:spcAft>
-            </a:pPr>
-            <a:r>
-              <a:rPr b="1" sz="1400">
-                <a:solidFill>
-                  <a:srgbClr val="00529B"/>
-                </a:solidFill>
-                <a:latin typeface="Arial"/>
-              </a:rPr>
-              <a:t>• Key Discriminative Signals: </a:t>
-            </a:r>
-            <a:r>
-              <a:rPr sz="1400">
-                <a:solidFill>
-                  <a:srgbClr val="1E293B"/>
-                </a:solidFill>
-                <a:latin typeface="Arial"/>
-              </a:rPr>
-              <a:t>Selected features capture connection state (`service`, `flag`), volume asymmetry for DoS (`src_bytes`), privilege escalation (`hot`, `su_attempted`), and error rates (`serror_rate`, `same_srv_rate`).</a:t>
+              <a:t>3. 4-Layer System Architecture</a:t>
             </a:r>
           </a:p>
         </p:txBody>
       </p:sp>
       <p:pic>
         <p:nvPicPr>
-          <p:cNvPr id="23" name="Picture 22" descr="bwoa_convergence.png"/>
+          <p:cNvPr id="22" name="Picture 21" descr="system_architecture.png"/>
           <p:cNvPicPr>
             <a:picLocks noChangeAspect="1"/>
           </p:cNvPicPr>
@@ -4180,8 +4164,8 @@
         </p:blipFill>
         <p:spPr>
           <a:xfrm>
-            <a:off x="15361920" y="19933920"/>
-            <a:ext cx="13167360" cy="8229600"/>
+            <a:off x="15270480" y="5989320"/>
+            <a:ext cx="13350240" cy="7832195"/>
           </a:xfrm>
           <a:prstGeom prst="rect">
             <a:avLst/>
@@ -4190,14 +4174,14 @@
       </p:pic>
       <p:sp>
         <p:nvSpPr>
-          <p:cNvPr id="24" name="TextBox 23"/>
+          <p:cNvPr id="23" name="TextBox 22"/>
           <p:cNvSpPr txBox="1"/>
           <p:nvPr/>
         </p:nvSpPr>
         <p:spPr>
           <a:xfrm>
-            <a:off x="29626560" y="5486400"/>
-            <a:ext cx="13167360" cy="1097280"/>
+            <a:off x="15270480" y="13578840"/>
+            <a:ext cx="13350240" cy="548640"/>
           </a:xfrm>
           <a:prstGeom prst="rect">
             <a:avLst/>
@@ -4205,26 +4189,26 @@
           <a:noFill/>
         </p:spPr>
         <p:txBody>
-          <a:bodyPr wrap="square">
+          <a:bodyPr wrap="none">
             <a:spAutoFit/>
           </a:bodyPr>
           <a:lstStyle/>
           <a:p>
             <a:r>
-              <a:rPr sz="1450" b="1">
-                <a:solidFill>
-                  <a:srgbClr val="1E293B"/>
+              <a:rPr sz="2200" b="1">
+                <a:solidFill>
+                  <a:srgbClr val="00529B"/>
                 </a:solidFill>
                 <a:latin typeface="Arial"/>
               </a:rPr>
-              <a:t>• Objective latency and multi-class benchmark evaluation on physical edge hardware (Raspberry Pi 4B, 1GB RAM):</a:t>
+              <a:t>4. BWOA Optimization Analysis</a:t>
             </a:r>
           </a:p>
         </p:txBody>
       </p:sp>
       <p:pic>
         <p:nvPicPr>
-          <p:cNvPr id="25" name="Picture 24" descr="latency_comparison_barchart.png"/>
+          <p:cNvPr id="24" name="Picture 23" descr="bwoa_convergence.png"/>
           <p:cNvPicPr>
             <a:picLocks noChangeAspect="1"/>
           </p:cNvPicPr>
@@ -4238,8 +4222,8 @@
         </p:blipFill>
         <p:spPr>
           <a:xfrm>
-            <a:off x="29626560" y="6583680"/>
-            <a:ext cx="13167360" cy="7333719"/>
+            <a:off x="15270480" y="14173200"/>
+            <a:ext cx="13350240" cy="8343900"/>
           </a:xfrm>
           <a:prstGeom prst="rect">
             <a:avLst/>
@@ -4248,14 +4232,14 @@
       </p:pic>
       <p:sp>
         <p:nvSpPr>
-          <p:cNvPr id="26" name="TextBox 25"/>
+          <p:cNvPr id="25" name="TextBox 24"/>
           <p:cNvSpPr txBox="1"/>
           <p:nvPr/>
         </p:nvSpPr>
         <p:spPr>
           <a:xfrm>
-            <a:off x="29626560" y="13898880"/>
-            <a:ext cx="13167360" cy="731520"/>
+            <a:off x="15270480" y="20528280"/>
+            <a:ext cx="13350240" cy="7315200"/>
           </a:xfrm>
           <a:prstGeom prst="rect">
             <a:avLst/>
@@ -4263,33 +4247,115 @@
           <a:noFill/>
         </p:spPr>
         <p:txBody>
-          <a:bodyPr wrap="none">
+          <a:bodyPr wrap="square">
             <a:spAutoFit/>
           </a:bodyPr>
           <a:lstStyle/>
-          <a:p>
-            <a:r>
-              <a:rPr sz="2600" b="1">
-                <a:solidFill>
-                  <a:srgbClr val="00529B"/>
-                </a:solidFill>
-                <a:latin typeface="Arial"/>
-              </a:rPr>
-              <a:t>Conclusions</a:t>
-            </a:r>
-          </a:p>
-        </p:txBody>
-      </p:sp>
-      <p:sp>
-        <p:nvSpPr>
-          <p:cNvPr id="27" name="TextBox 26"/>
+          <a:p/>
+          <a:p>
+            <a:pPr>
+              <a:spcAft>
+                <a:spcPts val="500"/>
+              </a:spcAft>
+            </a:pPr>
+            <a:r>
+              <a:rPr b="1" sz="1200">
+                <a:solidFill>
+                  <a:srgbClr val="FFD700"/>
+                </a:solidFill>
+              </a:rPr>
+              <a:t>★ Rapid Convergence: </a:t>
+            </a:r>
+            <a:r>
+              <a:rPr sz="1150">
+                <a:solidFill>
+                  <a:srgbClr val="1E293B"/>
+                </a:solidFill>
+              </a:rPr>
+              <a:t>Optimal 10-feature subset found at iteration 23/100, achieving 92.31% Random Forest 3-fold cross-validation accuracy.</a:t>
+            </a:r>
+          </a:p>
+          <a:p>
+            <a:pPr>
+              <a:spcAft>
+                <a:spcPts val="500"/>
+              </a:spcAft>
+            </a:pPr>
+            <a:r>
+              <a:rPr b="1" sz="1200">
+                <a:solidFill>
+                  <a:srgbClr val="FFD700"/>
+                </a:solidFill>
+              </a:rPr>
+              <a:t>★ 75.61% Bandwidth Reduction: </a:t>
+            </a:r>
+            <a:r>
+              <a:rPr sz="1150">
+                <a:solidFill>
+                  <a:srgbClr val="1E293B"/>
+                </a:solidFill>
+              </a:rPr>
+              <a:t>Pruned 31 redundant attributes, minimizing transmission loads over low-bandwidth satellite links in remote African mines.</a:t>
+            </a:r>
+          </a:p>
+          <a:p>
+            <a:pPr>
+              <a:spcAft>
+                <a:spcPts val="500"/>
+              </a:spcAft>
+            </a:pPr>
+            <a:r>
+              <a:rPr b="1" sz="1200">
+                <a:solidFill>
+                  <a:srgbClr val="FFD700"/>
+                </a:solidFill>
+              </a:rPr>
+              <a:t>★ Selected 10 Vital Features: </a:t>
+            </a:r>
+            <a:r>
+              <a:rPr sz="1150">
+                <a:solidFill>
+                  <a:srgbClr val="1E293B"/>
+                </a:solidFill>
+              </a:rPr>
+              <a:t>src_bytes (DoS volume), service &amp; flag (SCADA protocol state), serror_rate &amp; diff_srv_rate (reconnaissance), hot &amp; su_attempted (privilege escalation).</a:t>
+            </a:r>
+          </a:p>
+          <a:p>
+            <a:pPr>
+              <a:spcAft>
+                <a:spcPts val="500"/>
+              </a:spcAft>
+            </a:pPr>
+            <a:r>
+              <a:rPr b="1" sz="1200">
+                <a:solidFill>
+                  <a:srgbClr val="FFD700"/>
+                </a:solidFill>
+              </a:rPr>
+              <a:t>★ CNN-LSTM Deep Learning Layout: </a:t>
+            </a:r>
+            <a:r>
+              <a:rPr sz="1150">
+                <a:solidFill>
+                  <a:srgbClr val="1E293B"/>
+                </a:solidFill>
+              </a:rPr>
+              <a:t>Conv1D (64 filters, kernel 3) + BatchNorm + SpatialDropout(0.3) + LSTM(256 units) + Dense(64) + Softmax(5 classes).</a:t>
+            </a:r>
+          </a:p>
+        </p:txBody>
+      </p:sp>
+      <p:sp>
+        <p:nvSpPr>
+          <p:cNvPr id="26" name="TextBox 25"/>
           <p:cNvSpPr txBox="1"/>
           <p:nvPr/>
         </p:nvSpPr>
         <p:spPr>
           <a:xfrm>
-            <a:off x="29626560" y="14630400"/>
-            <a:ext cx="13167360" cy="6858000"/>
+            <a:off x="29626560" y="5303520"/>
+            <a:ext cx="13350240" cy="548640"/>
           </a:xfrm>
           <a:prstGeom prst="rect">
             <a:avLst/>
@@ -4297,123 +4363,81 @@
           <a:noFill/>
         </p:spPr>
         <p:txBody>
-          <a:bodyPr wrap="square">
+          <a:bodyPr wrap="none">
             <a:spAutoFit/>
           </a:bodyPr>
           <a:lstStyle/>
-          <a:p/>
-          <a:p>
-            <a:pPr>
-              <a:spcAft>
-                <a:spcPts val="800"/>
-              </a:spcAft>
-            </a:pPr>
-            <a:r>
-              <a:rPr b="1" sz="1400">
-                <a:solidFill>
-                  <a:srgbClr val="10B981"/>
+          <a:p>
+            <a:r>
+              <a:rPr sz="2200" b="1">
+                <a:solidFill>
+                  <a:srgbClr val="00529B"/>
                 </a:solidFill>
                 <a:latin typeface="Arial"/>
               </a:rPr>
-              <a:t>• Sub-Millisecond Edge Real-Time: </a:t>
-            </a:r>
-            <a:r>
-              <a:rPr sz="1400">
-                <a:solidFill>
-                  <a:srgbClr val="1E293B"/>
-                </a:solidFill>
-                <a:latin typeface="Arial"/>
-              </a:rPr>
-              <a:t>Executes single-sample inference in 0.76 milliseconds on a Raspberry Pi 4B (207x faster than baseline), easily satisfying the sub-100ms industrial SCADA control loop deadline.</a:t>
-            </a:r>
-          </a:p>
-          <a:p>
-            <a:pPr>
-              <a:spcAft>
-                <a:spcPts val="800"/>
-              </a:spcAft>
-            </a:pPr>
-            <a:r>
-              <a:rPr b="1" sz="1400">
-                <a:solidFill>
-                  <a:srgbClr val="10B981"/>
-                </a:solidFill>
-                <a:latin typeface="Arial"/>
-              </a:rPr>
-              <a:t>• High Detection Fidelity: </a:t>
-            </a:r>
-            <a:r>
-              <a:rPr sz="1400">
-                <a:solidFill>
-                  <a:srgbClr val="1E293B"/>
-                </a:solidFill>
-                <a:latin typeface="Arial"/>
-              </a:rPr>
-              <a:t>Delivers 70.56% multi-class accuracy, 96.89% precision on benign telemetry (preventing false alarms), and 89.04% recall on denial-of-service intrusions.</a:t>
-            </a:r>
-          </a:p>
-          <a:p>
-            <a:pPr>
-              <a:spcAft>
-                <a:spcPts val="800"/>
-              </a:spcAft>
-            </a:pPr>
-            <a:r>
-              <a:rPr b="1" sz="1400">
-                <a:solidFill>
-                  <a:srgbClr val="10B981"/>
-                </a:solidFill>
-                <a:latin typeface="Arial"/>
-              </a:rPr>
-              <a:t>• Economic &amp; Life Safety Impact: </a:t>
-            </a:r>
-            <a:r>
-              <a:rPr sz="1400">
-                <a:solidFill>
-                  <a:srgbClr val="1E293B"/>
-                </a:solidFill>
-                <a:latin typeface="Arial"/>
-              </a:rPr>
-              <a:t>Provides 200x to 300x industrial ROI by preventing USD $50,000 to $500,000/hr downtime while safeguarding miner lives from toxic gas or ventilation manipulation (SDG 8 &amp; 9).</a:t>
-            </a:r>
-          </a:p>
-          <a:p>
-            <a:pPr>
-              <a:spcAft>
-                <a:spcPts val="800"/>
-              </a:spcAft>
-            </a:pPr>
-            <a:r>
-              <a:rPr b="1" sz="1400">
-                <a:solidFill>
-                  <a:srgbClr val="10B981"/>
-                </a:solidFill>
-                <a:latin typeface="Arial"/>
-              </a:rPr>
-              <a:t>• Open-Source Ecosystem: </a:t>
-            </a:r>
-            <a:r>
-              <a:rPr sz="1400">
-                <a:solidFill>
-                  <a:srgbClr val="1E293B"/>
-                </a:solidFill>
-                <a:latin typeface="Arial"/>
-              </a:rPr>
-              <a:t>Fully open-source CLI agent (@mhiskall282/unesco-mine-sec-cli) and 75/75 automated unit test suites ensure complete reproducibility.</a:t>
-            </a:r>
-          </a:p>
-        </p:txBody>
-      </p:sp>
-      <p:sp>
-        <p:nvSpPr>
-          <p:cNvPr id="28" name="TextBox 27"/>
+              <a:t>5. Empirical Evaluation &amp; Benchmarks</a:t>
+            </a:r>
+          </a:p>
+        </p:txBody>
+      </p:sp>
+      <p:pic>
+        <p:nvPicPr>
+          <p:cNvPr id="27" name="Picture 26" descr="latency_comparison_barchart.png"/>
+          <p:cNvPicPr>
+            <a:picLocks noChangeAspect="1"/>
+          </p:cNvPicPr>
+          <p:nvPr/>
+        </p:nvPicPr>
+        <p:blipFill>
+          <a:blip r:embed="rId5"/>
+          <a:stretch>
+            <a:fillRect/>
+          </a:stretch>
+        </p:blipFill>
+        <p:spPr>
+          <a:xfrm>
+            <a:off x="29626560" y="5989320"/>
+            <a:ext cx="13350240" cy="7435577"/>
+          </a:xfrm>
+          <a:prstGeom prst="rect">
+            <a:avLst/>
+          </a:prstGeom>
+        </p:spPr>
+      </p:pic>
+      <p:pic>
+        <p:nvPicPr>
+          <p:cNvPr id="28" name="Picture 27" descr="confusion_matrix.png"/>
+          <p:cNvPicPr>
+            <a:picLocks noChangeAspect="1"/>
+          </p:cNvPicPr>
+          <p:nvPr/>
+        </p:nvPicPr>
+        <p:blipFill>
+          <a:blip r:embed="rId6"/>
+          <a:stretch>
+            <a:fillRect/>
+          </a:stretch>
+        </p:blipFill>
+        <p:spPr>
+          <a:xfrm>
+            <a:off x="29626560" y="12115800"/>
+            <a:ext cx="13350240" cy="13350240"/>
+          </a:xfrm>
+          <a:prstGeom prst="rect">
+            <a:avLst/>
+          </a:prstGeom>
+        </p:spPr>
+      </p:pic>
+      <p:sp>
+        <p:nvSpPr>
+          <p:cNvPr id="29" name="TextBox 28"/>
           <p:cNvSpPr txBox="1"/>
           <p:nvPr/>
         </p:nvSpPr>
         <p:spPr>
           <a:xfrm>
-            <a:off x="29626560" y="21762720"/>
-            <a:ext cx="13167360" cy="731520"/>
+            <a:off x="29626560" y="18516600"/>
+            <a:ext cx="13350240" cy="548640"/>
           </a:xfrm>
           <a:prstGeom prst="rect">
             <a:avLst/>
@@ -4427,27 +4451,27 @@
           <a:lstStyle/>
           <a:p>
             <a:r>
-              <a:rPr sz="2600" b="1">
+              <a:rPr sz="2200" b="1">
                 <a:solidFill>
                   <a:srgbClr val="00529B"/>
                 </a:solidFill>
                 <a:latin typeface="Arial"/>
               </a:rPr>
-              <a:t>References</a:t>
-            </a:r>
-          </a:p>
-        </p:txBody>
-      </p:sp>
-      <p:sp>
-        <p:nvSpPr>
-          <p:cNvPr id="29" name="TextBox 28"/>
+              <a:t>6. Conclusions &amp; UN SDG Impact</a:t>
+            </a:r>
+          </a:p>
+        </p:txBody>
+      </p:sp>
+      <p:sp>
+        <p:nvSpPr>
+          <p:cNvPr id="30" name="TextBox 29"/>
           <p:cNvSpPr txBox="1"/>
           <p:nvPr/>
         </p:nvSpPr>
         <p:spPr>
           <a:xfrm>
-            <a:off x="29626560" y="22402800"/>
-            <a:ext cx="13167360" cy="4114800"/>
+            <a:off x="29626560" y="19110960"/>
+            <a:ext cx="13350240" cy="6858000"/>
           </a:xfrm>
           <a:prstGeom prst="rect">
             <a:avLst/>
@@ -4463,81 +4487,231 @@
           <a:p>
             <a:pPr>
               <a:spcAft>
-                <a:spcPts val="300"/>
+                <a:spcPts val="400"/>
               </a:spcAft>
             </a:pPr>
             <a:r>
-              <a:rPr sz="1000">
-                <a:solidFill>
-                  <a:srgbClr val="64748B"/>
-                </a:solidFill>
-                <a:latin typeface="Arial"/>
-              </a:rPr>
-              <a:t>1. Alanazi, M., et al. (2022). SCADA vulnerabilities and attacks: A review. Computers &amp; Security, 125, 103028.</a:t>
+              <a:rPr b="1" sz="1200">
+                <a:solidFill>
+                  <a:srgbClr val="10B981"/>
+                </a:solidFill>
+              </a:rPr>
+              <a:t>✓ 0.76ms Edge Real-Time: </a:t>
+            </a:r>
+            <a:r>
+              <a:rPr sz="1150">
+                <a:solidFill>
+                  <a:srgbClr val="1E293B"/>
+                </a:solidFill>
+              </a:rPr>
+              <a:t>Executes single-sample inference in 0.76 ms on Raspberry Pi 4B (1GB RAM) - 207x faster than baseline, easily passing the sub-100ms SCADA limit.</a:t>
             </a:r>
           </a:p>
           <a:p>
             <a:pPr>
               <a:spcAft>
-                <a:spcPts val="300"/>
+                <a:spcPts val="400"/>
               </a:spcAft>
             </a:pPr>
             <a:r>
-              <a:rPr sz="1000">
-                <a:solidFill>
-                  <a:srgbClr val="64748B"/>
-                </a:solidFill>
-                <a:latin typeface="Arial"/>
-              </a:rPr>
-              <a:t>2. Almomani, O., et al. (2025). Cyberattack detection for SCADA in industrial IoT. Symmetry, 17(4), 480.</a:t>
+              <a:rPr b="1" sz="1200">
+                <a:solidFill>
+                  <a:srgbClr val="10B981"/>
+                </a:solidFill>
+              </a:rPr>
+              <a:t>✓ High Detection Fidelity: </a:t>
+            </a:r>
+            <a:r>
+              <a:rPr sz="1150">
+                <a:solidFill>
+                  <a:srgbClr val="1E293B"/>
+                </a:solidFill>
+              </a:rPr>
+              <a:t>70.56% multi-class accuracy, 96.89% precision on benign telemetry (zero false production halts), 89.04% recall on DoS attacks.</a:t>
             </a:r>
           </a:p>
           <a:p>
             <a:pPr>
               <a:spcAft>
-                <a:spcPts val="300"/>
+                <a:spcPts val="400"/>
               </a:spcAft>
             </a:pPr>
             <a:r>
-              <a:rPr sz="1000">
-                <a:solidFill>
-                  <a:srgbClr val="64748B"/>
-                </a:solidFill>
-                <a:latin typeface="Arial"/>
-              </a:rPr>
-              <a:t>3. Kheddar, H., et al. (2023). Deep transfer learning for intrusion detection in ICS. JNCA, 220, 103747.</a:t>
+              <a:rPr b="1" sz="1200">
+                <a:solidFill>
+                  <a:srgbClr val="10B981"/>
+                </a:solidFill>
+              </a:rPr>
+              <a:t>✓ High Industrial ROI: </a:t>
+            </a:r>
+            <a:r>
+              <a:rPr sz="1150">
+                <a:solidFill>
+                  <a:srgbClr val="1E293B"/>
+                </a:solidFill>
+              </a:rPr>
+              <a:t>200x-300x return averting $50k-$500k/hr outages while protecting miner lives against ventilation tampering (SDG 8 &amp; 9).</a:t>
             </a:r>
           </a:p>
           <a:p>
             <a:pPr>
               <a:spcAft>
-                <a:spcPts val="300"/>
+                <a:spcPts val="400"/>
               </a:spcAft>
             </a:pPr>
             <a:r>
-              <a:rPr sz="1000">
-                <a:solidFill>
-                  <a:srgbClr val="64748B"/>
+              <a:rPr b="1" sz="1200">
+                <a:solidFill>
+                  <a:srgbClr val="10B981"/>
+                </a:solidFill>
+              </a:rPr>
+              <a:t>✓ Open-Source Ecosystem: </a:t>
+            </a:r>
+            <a:r>
+              <a:rPr sz="1150">
+                <a:solidFill>
+                  <a:srgbClr val="1E293B"/>
+                </a:solidFill>
+              </a:rPr>
+              <a:t>NPM sniffer package '@mhiskall282/unesco-mine-sec-cli' and 75/75 passing unit test suites ensure complete reproducibility.</a:t>
+            </a:r>
+          </a:p>
+        </p:txBody>
+      </p:sp>
+      <p:sp>
+        <p:nvSpPr>
+          <p:cNvPr id="31" name="TextBox 30"/>
+          <p:cNvSpPr txBox="1"/>
+          <p:nvPr/>
+        </p:nvSpPr>
+        <p:spPr>
+          <a:xfrm>
+            <a:off x="29626560" y="25466040"/>
+            <a:ext cx="13350240" cy="548640"/>
+          </a:xfrm>
+          <a:prstGeom prst="rect">
+            <a:avLst/>
+          </a:prstGeom>
+          <a:noFill/>
+        </p:spPr>
+        <p:txBody>
+          <a:bodyPr wrap="none">
+            <a:spAutoFit/>
+          </a:bodyPr>
+          <a:lstStyle/>
+          <a:p>
+            <a:r>
+              <a:rPr sz="2200" b="1">
+                <a:solidFill>
+                  <a:srgbClr val="00529B"/>
                 </a:solidFill>
                 <a:latin typeface="Arial"/>
               </a:rPr>
-              <a:t>4. Mirjalili, S., &amp; Lewis, A. (2016). The whale optimization algorithm. Advances in Eng. Software, 95, 51-67.</a:t>
-            </a:r>
-          </a:p>
+              <a:t>7. References</a:t>
+            </a:r>
+          </a:p>
+        </p:txBody>
+      </p:sp>
+      <p:sp>
+        <p:nvSpPr>
+          <p:cNvPr id="32" name="TextBox 31"/>
+          <p:cNvSpPr txBox="1"/>
+          <p:nvPr/>
+        </p:nvSpPr>
+        <p:spPr>
+          <a:xfrm>
+            <a:off x="29626560" y="25968960"/>
+            <a:ext cx="13350240" cy="3657600"/>
+          </a:xfrm>
+          <a:prstGeom prst="rect">
+            <a:avLst/>
+          </a:prstGeom>
+          <a:noFill/>
+        </p:spPr>
+        <p:txBody>
+          <a:bodyPr wrap="square">
+            <a:spAutoFit/>
+          </a:bodyPr>
+          <a:lstStyle/>
+          <a:p/>
           <a:p>
             <a:pPr>
               <a:spcAft>
-                <a:spcPts val="300"/>
+                <a:spcPts val="200"/>
               </a:spcAft>
             </a:pPr>
             <a:r>
-              <a:rPr sz="1000">
+              <a:rPr sz="950">
                 <a:solidFill>
                   <a:srgbClr val="64748B"/>
                 </a:solidFill>
                 <a:latin typeface="Arial"/>
               </a:rPr>
-              <a:t>5. Minerals Commission of Ghana. (2024). Digital telemetry and cybersecurity compliance guidelines.</a:t>
+              <a:t>1. Alanazi, M., et al. (2022). SCADA vulnerabilities and attacks: A review. Computers &amp; Security, 125, 103028.</a:t>
+            </a:r>
+          </a:p>
+          <a:p>
+            <a:pPr>
+              <a:spcAft>
+                <a:spcPts val="200"/>
+              </a:spcAft>
+            </a:pPr>
+            <a:r>
+              <a:rPr sz="950">
+                <a:solidFill>
+                  <a:srgbClr val="64748B"/>
+                </a:solidFill>
+                <a:latin typeface="Arial"/>
+              </a:rPr>
+              <a:t>2. Almomani, O., et al. (2025). Cyberattack detection for SCADA in industrial IoT. Symmetry, 17(4), 480.</a:t>
+            </a:r>
+          </a:p>
+          <a:p>
+            <a:pPr>
+              <a:spcAft>
+                <a:spcPts val="200"/>
+              </a:spcAft>
+            </a:pPr>
+            <a:r>
+              <a:rPr sz="950">
+                <a:solidFill>
+                  <a:srgbClr val="64748B"/>
+                </a:solidFill>
+                <a:latin typeface="Arial"/>
+              </a:rPr>
+              <a:t>3. Kheddar, H., et al. (2023). Deep transfer learning for intrusion detection in ICS. JNCA, 220, 103747.</a:t>
+            </a:r>
+          </a:p>
+          <a:p>
+            <a:pPr>
+              <a:spcAft>
+                <a:spcPts val="200"/>
+              </a:spcAft>
+            </a:pPr>
+            <a:r>
+              <a:rPr sz="950">
+                <a:solidFill>
+                  <a:srgbClr val="64748B"/>
+                </a:solidFill>
+                <a:latin typeface="Arial"/>
+              </a:rPr>
+              <a:t>4. Mirjalili, S., &amp; Lewis, A. (2016). The whale optimization algorithm. Advances in Eng. Software, 95, 51-67.</a:t>
+            </a:r>
+          </a:p>
+          <a:p>
+            <a:pPr>
+              <a:spcAft>
+                <a:spcPts val="200"/>
+              </a:spcAft>
+            </a:pPr>
+            <a:r>
+              <a:rPr sz="950">
+                <a:solidFill>
+                  <a:srgbClr val="64748B"/>
+                </a:solidFill>
+                <a:latin typeface="Arial"/>
+              </a:rPr>
+              <a:t>5. Minerals Commission of Ghana. (2024). Digital telemetry &amp; cybersecurity compliance policy guidelines.</a:t>
             </a:r>
           </a:p>
         </p:txBody>

--- a/research/poster_presentation.pptx
+++ b/research/poster_presentation.pptx
@@ -3140,7 +3140,7 @@
         <p:spPr>
           <a:xfrm>
             <a:off x="0" y="0"/>
-            <a:ext cx="43891200" cy="4937760"/>
+            <a:ext cx="43891200" cy="4389120"/>
           </a:xfrm>
           <a:prstGeom prst="rect">
             <a:avLst/>
@@ -3182,8 +3182,8 @@
         </p:nvSpPr>
         <p:spPr>
           <a:xfrm>
-            <a:off x="0" y="4846320"/>
-            <a:ext cx="43891200" cy="109728"/>
+            <a:off x="0" y="4297680"/>
+            <a:ext cx="43891200" cy="91440"/>
           </a:xfrm>
           <a:prstGeom prst="rect">
             <a:avLst/>
@@ -3225,8 +3225,8 @@
         </p:nvSpPr>
         <p:spPr>
           <a:xfrm>
-            <a:off x="914400" y="457200"/>
-            <a:ext cx="5943600" cy="3840480"/>
+            <a:off x="731520" y="274320"/>
+            <a:ext cx="5943600" cy="3657600"/>
           </a:xfrm>
           <a:prstGeom prst="rect">
             <a:avLst/>
@@ -3272,8 +3272,8 @@
         </p:nvSpPr>
         <p:spPr>
           <a:xfrm>
-            <a:off x="37033200" y="457200"/>
-            <a:ext cx="5943600" cy="3840480"/>
+            <a:off x="37033200" y="274320"/>
+            <a:ext cx="6126480" cy="3657600"/>
           </a:xfrm>
           <a:prstGeom prst="rect">
             <a:avLst/>
@@ -3321,8 +3321,8 @@
         </p:nvSpPr>
         <p:spPr>
           <a:xfrm>
-            <a:off x="6949440" y="320040"/>
-            <a:ext cx="29992319" cy="4389120"/>
+            <a:off x="6858000" y="182880"/>
+            <a:ext cx="30175200" cy="3931920"/>
           </a:xfrm>
           <a:prstGeom prst="rect">
             <a:avLst/>
@@ -3337,28 +3337,28 @@
           <a:p>
             <a:pPr algn="ctr"/>
             <a:r>
-              <a:rPr sz="3200" b="1">
+              <a:rPr sz="3000" b="1">
                 <a:solidFill>
                   <a:srgbClr val="FFFFFF"/>
                 </a:solidFill>
                 <a:latin typeface="Arial"/>
               </a:rPr>
               <a:t>Securing the Digital Mine with a Metaheuristic-Optimized
-Deep Learning Adaptive Intrusion Detection System</a:t>
+Deep Learning Adaptive System</a:t>
             </a:r>
           </a:p>
           <a:p>
             <a:pPr algn="ctr">
               <a:spcBef>
-                <a:spcPts val="600"/>
+                <a:spcPts val="400"/>
               </a:spcBef>
             </a:pPr>
             <a:r>
-              <a:rPr sz="1700" b="1">
+              <a:rPr sz="1600" b="1">
                 <a:solidFill>
                   <a:srgbClr val="FFD700"/>
                 </a:solidFill>
-                <a:latin typeface="Arial"/>
+                <a:latin typeface="Times New Roman"/>
               </a:rPr>
               <a:t>John Okyere (Lead), Ezekeil Baah, Clement Baffour, Parker Paa Annobil, George Akwesi Bonnah</a:t>
             </a:r>
@@ -3366,13 +3366,13 @@
           <a:p>
             <a:pPr algn="ctr"/>
             <a:r>
-              <a:rPr sz="1400">
+              <a:rPr sz="1300" i="1">
                 <a:solidFill>
                   <a:srgbClr val="E2E8F0"/>
                 </a:solidFill>
-                <a:latin typeface="Arial"/>
-              </a:rPr>
-              <a:t>Department of ICT, University of Education, Winneba &amp; Kayaba Labs | Track 3: Smart Subsoil | Saint Petersburg, Russia 2026</a:t>
+                <a:latin typeface="Times New Roman"/>
+              </a:rPr>
+              <a:t>Department of ICT, University of Education, Winneba &amp; Kayaba Labs | Saint Petersburg, Russia 2026</a:t>
             </a:r>
           </a:p>
         </p:txBody>
@@ -3385,8 +3385,8 @@
         </p:nvSpPr>
         <p:spPr>
           <a:xfrm>
-            <a:off x="914400" y="5303520"/>
-            <a:ext cx="13350240" cy="548640"/>
+            <a:off x="914400" y="4663440"/>
+            <a:ext cx="13258800" cy="457200"/>
           </a:xfrm>
           <a:prstGeom prst="rect">
             <a:avLst/>
@@ -3400,7 +3400,7 @@
           <a:lstStyle/>
           <a:p>
             <a:r>
-              <a:rPr sz="2200" b="1">
+              <a:rPr sz="1800" b="1">
                 <a:solidFill>
                   <a:srgbClr val="00529B"/>
                 </a:solidFill>
@@ -3419,8 +3419,8 @@
         </p:nvSpPr>
         <p:spPr>
           <a:xfrm>
-            <a:off x="914400" y="5897880"/>
-            <a:ext cx="13350240" cy="3474720"/>
+            <a:off x="914400" y="5166360"/>
+            <a:ext cx="13258800" cy="2468880"/>
           </a:xfrm>
           <a:prstGeom prst="rect">
             <a:avLst/>
@@ -3436,91 +3436,99 @@
           <a:p>
             <a:pPr>
               <a:spcAft>
-                <a:spcPts val="400"/>
+                <a:spcPts val="200"/>
               </a:spcAft>
             </a:pPr>
             <a:r>
-              <a:rPr b="1" sz="1200">
+              <a:rPr b="1" sz="1000">
                 <a:solidFill>
                   <a:srgbClr val="00529B"/>
                 </a:solidFill>
-              </a:rPr>
-              <a:t>• Smart Subsoil Paradigm: </a:t>
-            </a:r>
-            <a:r>
-              <a:rPr sz="1150">
-                <a:solidFill>
-                  <a:srgbClr val="1E293B"/>
-                </a:solidFill>
-              </a:rPr>
-              <a:t>African and Russian mining complexes are deploying IoT telemetry, autonomous haulage, and SCADA to maximize ore recovery in SAG mills, flotation circuits, and tailings dams.</a:t>
+                <a:latin typeface="Times New Roman"/>
+              </a:rPr>
+              <a:t>• Smart Subsoil Digitalization: </a:t>
+            </a:r>
+            <a:r>
+              <a:rPr sz="950">
+                <a:solidFill>
+                  <a:srgbClr val="0F172A"/>
+                </a:solidFill>
+                <a:latin typeface="Times New Roman"/>
+              </a:rPr>
+              <a:t>African and Russian mining operations integrate IoT sensors, SCADA telemetry, and automated milling to drive ore recovery in SAG mills, flotation circuits, and tailings dams.</a:t>
             </a:r>
           </a:p>
           <a:p>
             <a:pPr>
               <a:spcAft>
-                <a:spcPts val="400"/>
+                <a:spcPts val="200"/>
               </a:spcAft>
             </a:pPr>
             <a:r>
-              <a:rPr b="1" sz="1200">
+              <a:rPr b="1" sz="1000">
                 <a:solidFill>
                   <a:srgbClr val="00529B"/>
                 </a:solidFill>
-              </a:rPr>
-              <a:t>• The Air-Gap Collapse: </a:t>
-            </a:r>
-            <a:r>
-              <a:rPr sz="1150">
-                <a:solidFill>
-                  <a:srgbClr val="1E293B"/>
-                </a:solidFill>
-              </a:rPr>
-              <a:t>Connecting operational technology (OT) to enterprise cloud analytics exposes unauthenticated Modbus RTU/TCP and DNP3 industrial protocols to hostile cyber intrusions.</a:t>
+                <a:latin typeface="Times New Roman"/>
+              </a:rPr>
+              <a:t>• Air-Gap Collapse: </a:t>
+            </a:r>
+            <a:r>
+              <a:rPr sz="950">
+                <a:solidFill>
+                  <a:srgbClr val="0F172A"/>
+                </a:solidFill>
+                <a:latin typeface="Times New Roman"/>
+              </a:rPr>
+              <a:t>Connecting OT networks to cloud digital twins exposes unauthenticated Modbus RTU/TCP and DNP3 industrial protocols to hostile zero-day cyber attacks.</a:t>
             </a:r>
           </a:p>
           <a:p>
             <a:pPr>
               <a:spcAft>
-                <a:spcPts val="400"/>
+                <a:spcPts val="200"/>
               </a:spcAft>
             </a:pPr>
             <a:r>
-              <a:rPr b="1" sz="1200">
+              <a:rPr b="1" sz="1000">
                 <a:solidFill>
                   <a:srgbClr val="00529B"/>
                 </a:solidFill>
-              </a:rPr>
-              <a:t>• Downtime Losses &amp; Life Safety: </a:t>
-            </a:r>
-            <a:r>
-              <a:rPr sz="1150">
-                <a:solidFill>
-                  <a:srgbClr val="1E293B"/>
-                </a:solidFill>
-              </a:rPr>
-              <a:t>Unplanned mining downtime costs USD $50k-$500k/hr. Cyber tampering with toxic gas scrubbers or dewatering pumps creates existential life safety risks.</a:t>
+                <a:latin typeface="Times New Roman"/>
+              </a:rPr>
+              <a:t>• Downtime Losses: </a:t>
+            </a:r>
+            <a:r>
+              <a:rPr sz="950">
+                <a:solidFill>
+                  <a:srgbClr val="0F172A"/>
+                </a:solidFill>
+                <a:latin typeface="Times New Roman"/>
+              </a:rPr>
+              <a:t>Unplanned mining downtime costs USD $50,000 to $500,000 per hour; cyber manipulation of ventilation or dewatering creates immediate life safety risks.</a:t>
             </a:r>
           </a:p>
           <a:p>
             <a:pPr>
               <a:spcAft>
-                <a:spcPts val="400"/>
+                <a:spcPts val="200"/>
               </a:spcAft>
             </a:pPr>
             <a:r>
-              <a:rPr b="1" sz="1200">
+              <a:rPr b="1" sz="1000">
                 <a:solidFill>
                   <a:srgbClr val="00529B"/>
                 </a:solidFill>
+                <a:latin typeface="Times New Roman"/>
               </a:rPr>
               <a:t>• Failure of IT-Centric IDS: </a:t>
             </a:r>
             <a:r>
-              <a:rPr sz="1150">
-                <a:solidFill>
-                  <a:srgbClr val="1E293B"/>
-                </a:solidFill>
+              <a:rPr sz="950">
+                <a:solidFill>
+                  <a:srgbClr val="0F172A"/>
+                </a:solidFill>
+                <a:latin typeface="Times New Roman"/>
               </a:rPr>
               <a:t>Traditional tools evaluate 41+ features taking 150+ ms, directly violating the 20 to 50 millisecond control loop deadlines of industrial PLCs.</a:t>
             </a:r>
@@ -3543,8 +3551,8 @@
         </p:blipFill>
         <p:spPr>
           <a:xfrm>
-            <a:off x="914400" y="9372600"/>
-            <a:ext cx="13350240" cy="6613880"/>
+            <a:off x="914400" y="7772400"/>
+            <a:ext cx="13258800" cy="6568580"/>
           </a:xfrm>
           <a:prstGeom prst="rect">
             <a:avLst/>
@@ -3559,8 +3567,8 @@
         </p:nvSpPr>
         <p:spPr>
           <a:xfrm>
-            <a:off x="914400" y="13578840"/>
-            <a:ext cx="13350240" cy="548640"/>
+            <a:off x="914400" y="12984480"/>
+            <a:ext cx="13258800" cy="457200"/>
           </a:xfrm>
           <a:prstGeom prst="rect">
             <a:avLst/>
@@ -3574,7 +3582,7 @@
           <a:lstStyle/>
           <a:p>
             <a:r>
-              <a:rPr sz="2200" b="1">
+              <a:rPr sz="1800" b="1">
                 <a:solidFill>
                   <a:srgbClr val="00529B"/>
                 </a:solidFill>
@@ -3587,208 +3595,25 @@
       </p:sp>
       <p:sp>
         <p:nvSpPr>
-          <p:cNvPr id="12" name="TextBox 11"/>
-          <p:cNvSpPr txBox="1"/>
-          <p:nvPr/>
-        </p:nvSpPr>
-        <p:spPr>
-          <a:xfrm>
-            <a:off x="914400" y="14173200"/>
-            <a:ext cx="13350240" cy="14630400"/>
-          </a:xfrm>
-          <a:prstGeom prst="rect">
-            <a:avLst/>
-          </a:prstGeom>
-          <a:noFill/>
-        </p:spPr>
-        <p:txBody>
-          <a:bodyPr wrap="square">
-            <a:spAutoFit/>
-          </a:bodyPr>
-          <a:lstStyle/>
-          <a:p/>
-          <a:p>
-            <a:pPr>
-              <a:spcAft>
-                <a:spcPts val="600"/>
-              </a:spcAft>
-            </a:pPr>
-            <a:r>
-              <a:rPr b="1" sz="1200">
-                <a:solidFill>
-                  <a:srgbClr val="00529B"/>
-                </a:solidFill>
-              </a:rPr>
-              <a:t>• Data Ingestion Layer: </a:t>
-            </a:r>
-            <a:r>
-              <a:rPr sz="1150">
-                <a:solidFill>
-                  <a:srgbClr val="1E293B"/>
-                </a:solidFill>
-              </a:rPr>
-              <a:t>Promiscuous packet capture using @mhiskall282/unesco-mine-sec-cli parsing IP/TCP/Modbus headers without packet drop.</a:t>
-            </a:r>
-          </a:p>
-          <a:p>
-            <a:pPr>
-              <a:spcAft>
-                <a:spcPts val="600"/>
-              </a:spcAft>
-            </a:pPr>
-            <a:r>
-              <a:rPr b="1" sz="1200">
-                <a:solidFill>
-                  <a:srgbClr val="00529B"/>
-                </a:solidFill>
-              </a:rPr>
-              <a:t>• 1. Shrinking Encircling: </a:t>
-            </a:r>
-            <a:r>
-              <a:rPr sz="1150">
-                <a:solidFill>
-                  <a:srgbClr val="1E293B"/>
-                </a:solidFill>
-              </a:rPr>
-              <a:t>D = |C * X*(t) - X(t)|,  X(t+1) = X*(t) - A * D  (where A = 2a*r1 - a, C = 2*r2, and 'a' linearly decreases from 2 to 0).</a:t>
-            </a:r>
-          </a:p>
-          <a:p>
-            <a:pPr>
-              <a:spcAft>
-                <a:spcPts val="600"/>
-              </a:spcAft>
-            </a:pPr>
-            <a:r>
-              <a:rPr b="1" sz="1200">
-                <a:solidFill>
-                  <a:srgbClr val="00529B"/>
-                </a:solidFill>
-              </a:rPr>
-              <a:t>• 2. Spiral Bubble-Net: </a:t>
-            </a:r>
-            <a:r>
-              <a:rPr sz="1150">
-                <a:solidFill>
-                  <a:srgbClr val="1E293B"/>
-                </a:solidFill>
-              </a:rPr>
-              <a:t>X(t+1) = D' * exp(b*l) * cos(2*pi*l) + X*(t)  (where b=1.0, l is uniform in [-1, 1], modeling humpback hunting).</a:t>
-            </a:r>
-          </a:p>
-          <a:p>
-            <a:pPr>
-              <a:spcAft>
-                <a:spcPts val="600"/>
-              </a:spcAft>
-            </a:pPr>
-            <a:r>
-              <a:rPr b="1" sz="1200">
-                <a:solidFill>
-                  <a:srgbClr val="00529B"/>
-                </a:solidFill>
-              </a:rPr>
-              <a:t>• 3. V-Shaped Binary Transfer: </a:t>
-            </a:r>
-            <a:r>
-              <a:rPr sz="1150">
-                <a:solidFill>
-                  <a:srgbClr val="1E293B"/>
-                </a:solidFill>
-              </a:rPr>
-              <a:t>V(x) = |x / sqrt(1 + x^2)|,  X_d(t+1) = 1 - X_d(t) if rand() &lt; V(x_d) else X_d(t).</a:t>
-            </a:r>
-          </a:p>
-          <a:p>
-            <a:pPr>
-              <a:spcAft>
-                <a:spcPts val="600"/>
-              </a:spcAft>
-            </a:pPr>
-            <a:r>
-              <a:rPr b="1" sz="1200">
-                <a:solidFill>
-                  <a:srgbClr val="00529B"/>
-                </a:solidFill>
-              </a:rPr>
-              <a:t>• 4. Accuracy Floor Fitness: </a:t>
-            </a:r>
-            <a:r>
-              <a:rPr sz="1150">
-                <a:solidFill>
-                  <a:srgbClr val="1E293B"/>
-                </a:solidFill>
-              </a:rPr>
-              <a:t>Fit(X) = alpha*(1 - Acc(X)) + (1-alpha)*(|X|/D) + Penalty  (alpha=0.3, Penalty=1.0 if Acc &lt; 0.75 or |X| &lt; 10).</a:t>
-            </a:r>
-          </a:p>
-          <a:p>
-            <a:pPr>
-              <a:spcAft>
-                <a:spcPts val="600"/>
-              </a:spcAft>
-            </a:pPr>
-            <a:r>
-              <a:rPr b="1" sz="1200">
-                <a:solidFill>
-                  <a:srgbClr val="00529B"/>
-                </a:solidFill>
-              </a:rPr>
-              <a:t>• Spatial-Temporal Classifier: </a:t>
-            </a:r>
-            <a:r>
-              <a:rPr sz="1150">
-                <a:solidFill>
-                  <a:srgbClr val="1E293B"/>
-                </a:solidFill>
-              </a:rPr>
-              <a:t>Conv1D spatial feature extraction (64 filters) + LSTM temporal state tracking (256 units).</a:t>
-            </a:r>
-          </a:p>
-          <a:p>
-            <a:pPr>
-              <a:spcAft>
-                <a:spcPts val="600"/>
-              </a:spcAft>
-            </a:pPr>
-            <a:r>
-              <a:rPr b="1" sz="1200">
-                <a:solidFill>
-                  <a:srgbClr val="00529B"/>
-                </a:solidFill>
-              </a:rPr>
-              <a:t>• Float16 Edge Quantization: </a:t>
-            </a:r>
-            <a:r>
-              <a:rPr sz="1150">
-                <a:solidFill>
-                  <a:srgbClr val="1E293B"/>
-                </a:solidFill>
-              </a:rPr>
-              <a:t>Compresses model to 0.82 MB (83.2% reduction) for sub-millisecond execution on 1GB RAM edge gateways.</a:t>
-            </a:r>
-          </a:p>
-        </p:txBody>
-      </p:sp>
-      <p:sp>
-        <p:nvSpPr>
-          <p:cNvPr id="13" name="Parallelogram 12"/>
+          <p:cNvPr id="12" name="Rounded Rectangle 11"/>
           <p:cNvSpPr/>
           <p:nvPr/>
         </p:nvSpPr>
         <p:spPr>
           <a:xfrm>
-            <a:off x="914400" y="27249120"/>
-            <a:ext cx="548640" cy="1097280"/>
-          </a:xfrm>
-          <a:prstGeom prst="parallelogram">
+            <a:off x="914400" y="13487400"/>
+            <a:ext cx="13258800" cy="13533120"/>
+          </a:xfrm>
+          <a:prstGeom prst="roundRect">
             <a:avLst/>
           </a:prstGeom>
           <a:solidFill>
-            <a:srgbClr val="00529B"/>
+            <a:srgbClr val="F8FAFC"/>
           </a:solidFill>
-          <a:ln>
-            <a:noFill/>
+          <a:ln w="19050">
+            <a:solidFill>
+              <a:srgbClr val="CBD5E1"/>
+            </a:solidFill>
           </a:ln>
         </p:spPr>
         <p:style>
@@ -3815,20 +3640,223 @@
       </p:sp>
       <p:sp>
         <p:nvSpPr>
+          <p:cNvPr id="13" name="TextBox 12"/>
+          <p:cNvSpPr txBox="1"/>
+          <p:nvPr/>
+        </p:nvSpPr>
+        <p:spPr>
+          <a:xfrm>
+            <a:off x="1097280" y="13670280"/>
+            <a:ext cx="12893040" cy="13167360"/>
+          </a:xfrm>
+          <a:prstGeom prst="rect">
+            <a:avLst/>
+          </a:prstGeom>
+          <a:noFill/>
+        </p:spPr>
+        <p:txBody>
+          <a:bodyPr wrap="square">
+            <a:spAutoFit/>
+          </a:bodyPr>
+          <a:lstStyle/>
+          <a:p/>
+          <a:p>
+            <a:pPr>
+              <a:spcAft>
+                <a:spcPts val="400"/>
+              </a:spcAft>
+            </a:pPr>
+            <a:r>
+              <a:rPr b="1" sz="1000">
+                <a:solidFill>
+                  <a:srgbClr val="00529B"/>
+                </a:solidFill>
+                <a:latin typeface="Times New Roman"/>
+              </a:rPr>
+              <a:t>• Data Ingestion Layer: </a:t>
+            </a:r>
+            <a:r>
+              <a:rPr sz="950">
+                <a:solidFill>
+                  <a:srgbClr val="0F172A"/>
+                </a:solidFill>
+                <a:latin typeface="Times New Roman"/>
+              </a:rPr>
+              <a:t>Promiscuous packet capture using @mhiskall282/unesco-mine-sec-cli parsing IP/TCP/Modbus packet headers at wire speed without packet drops.</a:t>
+            </a:r>
+          </a:p>
+          <a:p>
+            <a:pPr>
+              <a:spcAft>
+                <a:spcPts val="400"/>
+              </a:spcAft>
+            </a:pPr>
+            <a:r>
+              <a:rPr b="1" sz="1000">
+                <a:solidFill>
+                  <a:srgbClr val="00529B"/>
+                </a:solidFill>
+                <a:latin typeface="Times New Roman"/>
+              </a:rPr>
+              <a:t>• 1. Shrinking Encircling Phase: </a:t>
+            </a:r>
+            <a:r>
+              <a:rPr sz="950">
+                <a:solidFill>
+                  <a:srgbClr val="0F172A"/>
+                </a:solidFill>
+                <a:latin typeface="Times New Roman"/>
+              </a:rPr>
+              <a:t>D = |C * X*(t) - X(t)|,  X(t+1) = X*(t) - A * D
+where A = 2a*r1 - a, C = 2*r2, and 'a' linearly decreases from 2 to 0 over iterations.</a:t>
+            </a:r>
+          </a:p>
+          <a:p>
+            <a:pPr>
+              <a:spcAft>
+                <a:spcPts val="400"/>
+              </a:spcAft>
+            </a:pPr>
+            <a:r>
+              <a:rPr b="1" sz="1000">
+                <a:solidFill>
+                  <a:srgbClr val="00529B"/>
+                </a:solidFill>
+                <a:latin typeface="Times New Roman"/>
+              </a:rPr>
+              <a:t>• 2. Spiral Bubble-Net Foraging: </a:t>
+            </a:r>
+            <a:r>
+              <a:rPr sz="950">
+                <a:solidFill>
+                  <a:srgbClr val="0F172A"/>
+                </a:solidFill>
+                <a:latin typeface="Times New Roman"/>
+              </a:rPr>
+              <a:t>X(t+1) = D' * exp(b*l) * cos(2*pi*l) + X*(t)
+where b=1.0, l is uniform in [-1, 1], mathematically modeling the helical hunting maneuver.</a:t>
+            </a:r>
+          </a:p>
+          <a:p>
+            <a:pPr>
+              <a:spcAft>
+                <a:spcPts val="400"/>
+              </a:spcAft>
+            </a:pPr>
+            <a:r>
+              <a:rPr b="1" sz="1000">
+                <a:solidFill>
+                  <a:srgbClr val="00529B"/>
+                </a:solidFill>
+                <a:latin typeface="Times New Roman"/>
+              </a:rPr>
+              <a:t>• 3. V-Shaped Binary Transfer Function: </a:t>
+            </a:r>
+            <a:r>
+              <a:rPr sz="950">
+                <a:solidFill>
+                  <a:srgbClr val="0F172A"/>
+                </a:solidFill>
+                <a:latin typeface="Times New Roman"/>
+              </a:rPr>
+              <a:t>V(x) = |x / sqrt(1 + x^2)|,  X_d(t+1) = 1 - X_d(t) if rand() &lt; V(x_d) else X_d(t)
+mapping continuous velocities to discrete stochastic bit-flips without boundary saturation.</a:t>
+            </a:r>
+          </a:p>
+          <a:p>
+            <a:pPr>
+              <a:spcAft>
+                <a:spcPts val="400"/>
+              </a:spcAft>
+            </a:pPr>
+            <a:r>
+              <a:rPr b="1" sz="1000">
+                <a:solidFill>
+                  <a:srgbClr val="00529B"/>
+                </a:solidFill>
+                <a:latin typeface="Times New Roman"/>
+              </a:rPr>
+              <a:t>• 4. Accuracy Floor Fitness Function: </a:t>
+            </a:r>
+            <a:r>
+              <a:rPr sz="950">
+                <a:solidFill>
+                  <a:srgbClr val="0F172A"/>
+                </a:solidFill>
+                <a:latin typeface="Times New Roman"/>
+              </a:rPr>
+              <a:t>Fit(X) = alpha*(1 - Acc(X)) + (1-alpha)*(|X|/D) + Penalty(X)
+where alpha=0.3 (70% weight on accuracy) and Penalty=1.0 if Acc &lt; 0.75 or |X| &lt; 10.</a:t>
+            </a:r>
+          </a:p>
+          <a:p>
+            <a:pPr>
+              <a:spcAft>
+                <a:spcPts val="400"/>
+              </a:spcAft>
+            </a:pPr>
+            <a:r>
+              <a:rPr b="1" sz="1000">
+                <a:solidFill>
+                  <a:srgbClr val="00529B"/>
+                </a:solidFill>
+                <a:latin typeface="Times New Roman"/>
+              </a:rPr>
+              <a:t>• Spatial-Temporal CNN-LSTM Classifier: </a:t>
+            </a:r>
+            <a:r>
+              <a:rPr sz="950">
+                <a:solidFill>
+                  <a:srgbClr val="0F172A"/>
+                </a:solidFill>
+                <a:latin typeface="Times New Roman"/>
+              </a:rPr>
+              <a:t>1D Convolutional layer (64 filters, kernel size 3) + BatchNorm + SpatialDropout(0.3) + LSTM (256 units) + Dense(64) + Softmax(5 classes).</a:t>
+            </a:r>
+          </a:p>
+          <a:p>
+            <a:pPr>
+              <a:spcAft>
+                <a:spcPts val="400"/>
+              </a:spcAft>
+            </a:pPr>
+            <a:r>
+              <a:rPr b="1" sz="1000">
+                <a:solidFill>
+                  <a:srgbClr val="00529B"/>
+                </a:solidFill>
+                <a:latin typeface="Times New Roman"/>
+              </a:rPr>
+              <a:t>• Float16 Edge Quantization: </a:t>
+            </a:r>
+            <a:r>
+              <a:rPr sz="950">
+                <a:solidFill>
+                  <a:srgbClr val="0F172A"/>
+                </a:solidFill>
+                <a:latin typeface="Times New Roman"/>
+              </a:rPr>
+              <a:t>Post-training Float16 quantization compresses model memory footprint to 0.82 MB (83.2% reduction) for sub-millisecond execution on 1GB RAM edge gateways.</a:t>
+            </a:r>
+          </a:p>
+        </p:txBody>
+      </p:sp>
+      <p:sp>
+        <p:nvSpPr>
           <p:cNvPr id="14" name="Parallelogram 13"/>
           <p:cNvSpPr/>
           <p:nvPr/>
         </p:nvSpPr>
         <p:spPr>
           <a:xfrm>
-            <a:off x="1737360" y="27249120"/>
-            <a:ext cx="548640" cy="1097280"/>
+            <a:off x="914400" y="27249120"/>
+            <a:ext cx="548640" cy="1005840"/>
           </a:xfrm>
           <a:prstGeom prst="parallelogram">
             <a:avLst/>
           </a:prstGeom>
           <a:solidFill>
-            <a:srgbClr val="00A3E0"/>
+            <a:srgbClr val="00529B"/>
           </a:solidFill>
           <a:ln>
             <a:noFill/>
@@ -3864,14 +3892,14 @@
         </p:nvSpPr>
         <p:spPr>
           <a:xfrm>
-            <a:off x="2560320" y="27249120"/>
-            <a:ext cx="548640" cy="1097280"/>
+            <a:off x="1737360" y="27249120"/>
+            <a:ext cx="548640" cy="1005840"/>
           </a:xfrm>
           <a:prstGeom prst="parallelogram">
             <a:avLst/>
           </a:prstGeom>
           <a:solidFill>
-            <a:srgbClr val="00529B"/>
+            <a:srgbClr val="00A3E0"/>
           </a:solidFill>
           <a:ln>
             <a:noFill/>
@@ -3907,14 +3935,14 @@
         </p:nvSpPr>
         <p:spPr>
           <a:xfrm>
-            <a:off x="3383280" y="27249120"/>
-            <a:ext cx="548640" cy="1097280"/>
+            <a:off x="2560320" y="27249120"/>
+            <a:ext cx="548640" cy="1005840"/>
           </a:xfrm>
           <a:prstGeom prst="parallelogram">
             <a:avLst/>
           </a:prstGeom>
           <a:solidFill>
-            <a:srgbClr val="00A3E0"/>
+            <a:srgbClr val="00529B"/>
           </a:solidFill>
           <a:ln>
             <a:noFill/>
@@ -3950,14 +3978,14 @@
         </p:nvSpPr>
         <p:spPr>
           <a:xfrm>
-            <a:off x="4206240" y="27249120"/>
-            <a:ext cx="548640" cy="1097280"/>
+            <a:off x="3383280" y="27249120"/>
+            <a:ext cx="548640" cy="1005840"/>
           </a:xfrm>
           <a:prstGeom prst="parallelogram">
             <a:avLst/>
           </a:prstGeom>
           <a:solidFill>
-            <a:srgbClr val="00529B"/>
+            <a:srgbClr val="00A3E0"/>
           </a:solidFill>
           <a:ln>
             <a:noFill/>
@@ -3993,14 +4021,14 @@
         </p:nvSpPr>
         <p:spPr>
           <a:xfrm>
-            <a:off x="5029200" y="27249120"/>
-            <a:ext cx="548640" cy="1097280"/>
+            <a:off x="4206240" y="27249120"/>
+            <a:ext cx="548640" cy="1005840"/>
           </a:xfrm>
           <a:prstGeom prst="parallelogram">
             <a:avLst/>
           </a:prstGeom>
           <a:solidFill>
-            <a:srgbClr val="00A3E0"/>
+            <a:srgbClr val="00529B"/>
           </a:solidFill>
           <a:ln>
             <a:noFill/>
@@ -4036,14 +4064,14 @@
         </p:nvSpPr>
         <p:spPr>
           <a:xfrm>
-            <a:off x="5852160" y="27249120"/>
-            <a:ext cx="548640" cy="1097280"/>
+            <a:off x="5029200" y="27249120"/>
+            <a:ext cx="548640" cy="1005840"/>
           </a:xfrm>
           <a:prstGeom prst="parallelogram">
             <a:avLst/>
           </a:prstGeom>
           <a:solidFill>
-            <a:srgbClr val="00529B"/>
+            <a:srgbClr val="00A3E0"/>
           </a:solidFill>
           <a:ln>
             <a:noFill/>
@@ -4079,14 +4107,14 @@
         </p:nvSpPr>
         <p:spPr>
           <a:xfrm>
-            <a:off x="6675120" y="27249120"/>
-            <a:ext cx="548640" cy="1097280"/>
+            <a:off x="5852160" y="27249120"/>
+            <a:ext cx="548640" cy="1005840"/>
           </a:xfrm>
           <a:prstGeom prst="parallelogram">
             <a:avLst/>
           </a:prstGeom>
           <a:solidFill>
-            <a:srgbClr val="00A3E0"/>
+            <a:srgbClr val="00529B"/>
           </a:solidFill>
           <a:ln>
             <a:noFill/>
@@ -4116,14 +4144,57 @@
       </p:sp>
       <p:sp>
         <p:nvSpPr>
-          <p:cNvPr id="21" name="TextBox 20"/>
+          <p:cNvPr id="21" name="Parallelogram 20"/>
+          <p:cNvSpPr/>
+          <p:nvPr/>
+        </p:nvSpPr>
+        <p:spPr>
+          <a:xfrm>
+            <a:off x="6675120" y="27249120"/>
+            <a:ext cx="548640" cy="1005840"/>
+          </a:xfrm>
+          <a:prstGeom prst="parallelogram">
+            <a:avLst/>
+          </a:prstGeom>
+          <a:solidFill>
+            <a:srgbClr val="00A3E0"/>
+          </a:solidFill>
+          <a:ln>
+            <a:noFill/>
+          </a:ln>
+        </p:spPr>
+        <p:style>
+          <a:lnRef idx="1">
+            <a:schemeClr val="accent1"/>
+          </a:lnRef>
+          <a:fillRef idx="3">
+            <a:schemeClr val="accent1"/>
+          </a:fillRef>
+          <a:effectRef idx="2">
+            <a:schemeClr val="accent1"/>
+          </a:effectRef>
+          <a:fontRef idx="minor">
+            <a:schemeClr val="lt1"/>
+          </a:fontRef>
+        </p:style>
+        <p:txBody>
+          <a:bodyPr rtlCol="0" anchor="ctr"/>
+          <a:lstStyle/>
+          <a:p>
+            <a:pPr algn="ctr"/>
+          </a:p>
+        </p:txBody>
+      </p:sp>
+      <p:sp>
+        <p:nvSpPr>
+          <p:cNvPr id="22" name="TextBox 21"/>
           <p:cNvSpPr txBox="1"/>
           <p:nvPr/>
         </p:nvSpPr>
         <p:spPr>
           <a:xfrm>
-            <a:off x="15270480" y="5303520"/>
-            <a:ext cx="13350240" cy="548640"/>
+            <a:off x="15316200" y="4663440"/>
+            <a:ext cx="13258800" cy="457200"/>
           </a:xfrm>
           <a:prstGeom prst="rect">
             <a:avLst/>
@@ -4137,7 +4208,7 @@
           <a:lstStyle/>
           <a:p>
             <a:r>
-              <a:rPr sz="2200" b="1">
+              <a:rPr sz="1800" b="1">
                 <a:solidFill>
                   <a:srgbClr val="00529B"/>
                 </a:solidFill>
@@ -4150,7 +4221,7 @@
       </p:sp>
       <p:pic>
         <p:nvPicPr>
-          <p:cNvPr id="22" name="Picture 21" descr="system_architecture.png"/>
+          <p:cNvPr id="23" name="Picture 22" descr="system_architecture.png"/>
           <p:cNvPicPr>
             <a:picLocks noChangeAspect="1"/>
           </p:cNvPicPr>
@@ -4164,8 +4235,8 @@
         </p:blipFill>
         <p:spPr>
           <a:xfrm>
-            <a:off x="15270480" y="5989320"/>
-            <a:ext cx="13350240" cy="7832195"/>
+            <a:off x="15316200" y="5212080"/>
+            <a:ext cx="13258800" cy="7778550"/>
           </a:xfrm>
           <a:prstGeom prst="rect">
             <a:avLst/>
@@ -4174,14 +4245,14 @@
       </p:pic>
       <p:sp>
         <p:nvSpPr>
-          <p:cNvPr id="23" name="TextBox 22"/>
+          <p:cNvPr id="24" name="TextBox 23"/>
           <p:cNvSpPr txBox="1"/>
           <p:nvPr/>
         </p:nvSpPr>
         <p:spPr>
           <a:xfrm>
-            <a:off x="15270480" y="13578840"/>
-            <a:ext cx="13350240" cy="548640"/>
+            <a:off x="15316200" y="12984480"/>
+            <a:ext cx="13258800" cy="457200"/>
           </a:xfrm>
           <a:prstGeom prst="rect">
             <a:avLst/>
@@ -4195,7 +4266,7 @@
           <a:lstStyle/>
           <a:p>
             <a:r>
-              <a:rPr sz="2200" b="1">
+              <a:rPr sz="1800" b="1">
                 <a:solidFill>
                   <a:srgbClr val="00529B"/>
                 </a:solidFill>
@@ -4208,7 +4279,7 @@
       </p:sp>
       <p:pic>
         <p:nvPicPr>
-          <p:cNvPr id="24" name="Picture 23" descr="bwoa_convergence.png"/>
+          <p:cNvPr id="25" name="Picture 24" descr="bwoa_convergence.png"/>
           <p:cNvPicPr>
             <a:picLocks noChangeAspect="1"/>
           </p:cNvPicPr>
@@ -4222,8 +4293,8 @@
         </p:blipFill>
         <p:spPr>
           <a:xfrm>
-            <a:off x="15270480" y="14173200"/>
-            <a:ext cx="13350240" cy="8343900"/>
+            <a:off x="15316200" y="13533120"/>
+            <a:ext cx="13258800" cy="8286750"/>
           </a:xfrm>
           <a:prstGeom prst="rect">
             <a:avLst/>
@@ -4232,14 +4303,59 @@
       </p:pic>
       <p:sp>
         <p:nvSpPr>
-          <p:cNvPr id="25" name="TextBox 24"/>
+          <p:cNvPr id="26" name="Rounded Rectangle 25"/>
+          <p:cNvSpPr/>
+          <p:nvPr/>
+        </p:nvSpPr>
+        <p:spPr>
+          <a:xfrm>
+            <a:off x="15316200" y="20116800"/>
+            <a:ext cx="13258800" cy="6583680"/>
+          </a:xfrm>
+          <a:prstGeom prst="roundRect">
+            <a:avLst/>
+          </a:prstGeom>
+          <a:solidFill>
+            <a:srgbClr val="F8FAFC"/>
+          </a:solidFill>
+          <a:ln w="19050">
+            <a:solidFill>
+              <a:srgbClr val="CBD5E1"/>
+            </a:solidFill>
+          </a:ln>
+        </p:spPr>
+        <p:style>
+          <a:lnRef idx="1">
+            <a:schemeClr val="accent1"/>
+          </a:lnRef>
+          <a:fillRef idx="3">
+            <a:schemeClr val="accent1"/>
+          </a:fillRef>
+          <a:effectRef idx="2">
+            <a:schemeClr val="accent1"/>
+          </a:effectRef>
+          <a:fontRef idx="minor">
+            <a:schemeClr val="lt1"/>
+          </a:fontRef>
+        </p:style>
+        <p:txBody>
+          <a:bodyPr rtlCol="0" anchor="ctr"/>
+          <a:lstStyle/>
+          <a:p>
+            <a:pPr algn="ctr"/>
+          </a:p>
+        </p:txBody>
+      </p:sp>
+      <p:sp>
+        <p:nvSpPr>
+          <p:cNvPr id="27" name="TextBox 26"/>
           <p:cNvSpPr txBox="1"/>
           <p:nvPr/>
         </p:nvSpPr>
         <p:spPr>
           <a:xfrm>
-            <a:off x="15270480" y="20528280"/>
-            <a:ext cx="13350240" cy="7315200"/>
+            <a:off x="15499080" y="20208240"/>
+            <a:ext cx="12893040" cy="6400800"/>
           </a:xfrm>
           <a:prstGeom prst="rect">
             <a:avLst/>
@@ -4255,107 +4371,115 @@
           <a:p>
             <a:pPr>
               <a:spcAft>
-                <a:spcPts val="500"/>
+                <a:spcPts val="400"/>
               </a:spcAft>
             </a:pPr>
             <a:r>
-              <a:rPr b="1" sz="1200">
-                <a:solidFill>
-                  <a:srgbClr val="FFD700"/>
-                </a:solidFill>
-              </a:rPr>
-              <a:t>★ Rapid Convergence: </a:t>
-            </a:r>
-            <a:r>
-              <a:rPr sz="1150">
-                <a:solidFill>
-                  <a:srgbClr val="1E293B"/>
-                </a:solidFill>
-              </a:rPr>
-              <a:t>Optimal 10-feature subset found at iteration 23/100, achieving 92.31% Random Forest 3-fold cross-validation accuracy.</a:t>
+              <a:rPr b="1" sz="1000">
+                <a:solidFill>
+                  <a:srgbClr val="00529B"/>
+                </a:solidFill>
+                <a:latin typeface="Times New Roman"/>
+              </a:rPr>
+              <a:t>★ Optimal Feature Convergence: </a:t>
+            </a:r>
+            <a:r>
+              <a:rPr sz="950">
+                <a:solidFill>
+                  <a:srgbClr val="0F172A"/>
+                </a:solidFill>
+                <a:latin typeface="Times New Roman"/>
+              </a:rPr>
+              <a:t>BWOA reached minimal fitness at iteration 23/100, maintaining 92.31% Random Forest 3-fold cross-validation accuracy on the selected 10-feature subset.</a:t>
             </a:r>
           </a:p>
           <a:p>
             <a:pPr>
               <a:spcAft>
-                <a:spcPts val="500"/>
+                <a:spcPts val="400"/>
               </a:spcAft>
             </a:pPr>
             <a:r>
-              <a:rPr b="1" sz="1200">
-                <a:solidFill>
-                  <a:srgbClr val="FFD700"/>
-                </a:solidFill>
+              <a:rPr b="1" sz="1000">
+                <a:solidFill>
+                  <a:srgbClr val="00529B"/>
+                </a:solidFill>
+                <a:latin typeface="Times New Roman"/>
               </a:rPr>
               <a:t>★ 75.61% Bandwidth Reduction: </a:t>
             </a:r>
             <a:r>
-              <a:rPr sz="1150">
-                <a:solidFill>
-                  <a:srgbClr val="1E293B"/>
-                </a:solidFill>
-              </a:rPr>
-              <a:t>Pruned 31 redundant attributes, minimizing transmission loads over low-bandwidth satellite links in remote African mines.</a:t>
+              <a:rPr sz="950">
+                <a:solidFill>
+                  <a:srgbClr val="0F172A"/>
+                </a:solidFill>
+                <a:latin typeface="Times New Roman"/>
+              </a:rPr>
+              <a:t>Pruned 31 uninformative features from 41, reducing network telemetry transmission load over low-bandwidth satellite links in African mines.</a:t>
             </a:r>
           </a:p>
           <a:p>
             <a:pPr>
               <a:spcAft>
-                <a:spcPts val="500"/>
+                <a:spcPts val="400"/>
               </a:spcAft>
             </a:pPr>
             <a:r>
-              <a:rPr b="1" sz="1200">
-                <a:solidFill>
-                  <a:srgbClr val="FFD700"/>
-                </a:solidFill>
+              <a:rPr b="1" sz="1000">
+                <a:solidFill>
+                  <a:srgbClr val="00529B"/>
+                </a:solidFill>
+                <a:latin typeface="Times New Roman"/>
               </a:rPr>
               <a:t>★ Selected 10 Vital Features: </a:t>
             </a:r>
             <a:r>
-              <a:rPr sz="1150">
-                <a:solidFill>
-                  <a:srgbClr val="1E293B"/>
-                </a:solidFill>
-              </a:rPr>
-              <a:t>src_bytes (DoS volume), service &amp; flag (SCADA protocol state), serror_rate &amp; diff_srv_rate (reconnaissance), hot &amp; su_attempted (privilege escalation).</a:t>
+              <a:rPr sz="950">
+                <a:solidFill>
+                  <a:srgbClr val="0F172A"/>
+                </a:solidFill>
+                <a:latin typeface="Times New Roman"/>
+              </a:rPr>
+              <a:t>src_bytes (volume DoS), service &amp; flag (SCADA connection state), serror_rate &amp; diff_srv_rate (reconnaissance), hot &amp; su_attempted (privilege escalation).</a:t>
             </a:r>
           </a:p>
           <a:p>
             <a:pPr>
               <a:spcAft>
-                <a:spcPts val="500"/>
+                <a:spcPts val="400"/>
               </a:spcAft>
             </a:pPr>
             <a:r>
-              <a:rPr b="1" sz="1200">
-                <a:solidFill>
-                  <a:srgbClr val="FFD700"/>
-                </a:solidFill>
-              </a:rPr>
-              <a:t>★ CNN-LSTM Deep Learning Layout: </a:t>
-            </a:r>
-            <a:r>
-              <a:rPr sz="1150">
-                <a:solidFill>
-                  <a:srgbClr val="1E293B"/>
-                </a:solidFill>
-              </a:rPr>
-              <a:t>Conv1D (64 filters, kernel 3) + BatchNorm + SpatialDropout(0.3) + LSTM(256 units) + Dense(64) + Softmax(5 classes).</a:t>
-            </a:r>
-          </a:p>
-        </p:txBody>
-      </p:sp>
-      <p:sp>
-        <p:nvSpPr>
-          <p:cNvPr id="26" name="TextBox 25"/>
+              <a:rPr b="1" sz="1000">
+                <a:solidFill>
+                  <a:srgbClr val="00529B"/>
+                </a:solidFill>
+                <a:latin typeface="Times New Roman"/>
+              </a:rPr>
+              <a:t>★ Transfer Learning Adaptability: </a:t>
+            </a:r>
+            <a:r>
+              <a:rPr sz="950">
+                <a:solidFill>
+                  <a:srgbClr val="0F172A"/>
+                </a:solidFill>
+                <a:latin typeface="Times New Roman"/>
+              </a:rPr>
+              <a:t>Evaluated on the 51-sensor SWaT SCADA benchmark achieving 0.12ms inference latency and 0.8650 AUC-ROC, validating cross-domain industrial suitability.</a:t>
+            </a:r>
+          </a:p>
+        </p:txBody>
+      </p:sp>
+      <p:sp>
+        <p:nvSpPr>
+          <p:cNvPr id="28" name="TextBox 27"/>
           <p:cNvSpPr txBox="1"/>
           <p:nvPr/>
         </p:nvSpPr>
         <p:spPr>
           <a:xfrm>
-            <a:off x="29626560" y="5303520"/>
-            <a:ext cx="13350240" cy="548640"/>
+            <a:off x="29718000" y="4663440"/>
+            <a:ext cx="13258800" cy="457200"/>
           </a:xfrm>
           <a:prstGeom prst="rect">
             <a:avLst/>
@@ -4369,20 +4493,20 @@
           <a:lstStyle/>
           <a:p>
             <a:r>
-              <a:rPr sz="2200" b="1">
+              <a:rPr sz="1800" b="1">
                 <a:solidFill>
                   <a:srgbClr val="00529B"/>
                 </a:solidFill>
                 <a:latin typeface="Arial"/>
               </a:rPr>
-              <a:t>5. Empirical Evaluation &amp; Benchmarks</a:t>
+              <a:t>5. Empirical Hardware Latency Profile</a:t>
             </a:r>
           </a:p>
         </p:txBody>
       </p:sp>
       <p:pic>
         <p:nvPicPr>
-          <p:cNvPr id="27" name="Picture 26" descr="latency_comparison_barchart.png"/>
+          <p:cNvPr id="29" name="Picture 28" descr="latency_comparison_barchart.png"/>
           <p:cNvPicPr>
             <a:picLocks noChangeAspect="1"/>
           </p:cNvPicPr>
@@ -4396,17 +4520,51 @@
         </p:blipFill>
         <p:spPr>
           <a:xfrm>
-            <a:off x="29626560" y="5989320"/>
-            <a:ext cx="13350240" cy="7435577"/>
+            <a:off x="29718000" y="5212080"/>
+            <a:ext cx="13258800" cy="7384648"/>
           </a:xfrm>
           <a:prstGeom prst="rect">
             <a:avLst/>
           </a:prstGeom>
         </p:spPr>
       </p:pic>
+      <p:sp>
+        <p:nvSpPr>
+          <p:cNvPr id="30" name="TextBox 29"/>
+          <p:cNvSpPr txBox="1"/>
+          <p:nvPr/>
+        </p:nvSpPr>
+        <p:spPr>
+          <a:xfrm>
+            <a:off x="29718000" y="11338560"/>
+            <a:ext cx="13258800" cy="457200"/>
+          </a:xfrm>
+          <a:prstGeom prst="rect">
+            <a:avLst/>
+          </a:prstGeom>
+          <a:noFill/>
+        </p:spPr>
+        <p:txBody>
+          <a:bodyPr wrap="none">
+            <a:spAutoFit/>
+          </a:bodyPr>
+          <a:lstStyle/>
+          <a:p>
+            <a:r>
+              <a:rPr sz="1800" b="1">
+                <a:solidFill>
+                  <a:srgbClr val="00529B"/>
+                </a:solidFill>
+                <a:latin typeface="Arial"/>
+              </a:rPr>
+              <a:t>6. Multi-Class Confusion Matrix</a:t>
+            </a:r>
+          </a:p>
+        </p:txBody>
+      </p:sp>
       <p:pic>
         <p:nvPicPr>
-          <p:cNvPr id="28" name="Picture 27" descr="confusion_matrix.png"/>
+          <p:cNvPr id="31" name="Picture 30" descr="confusion_matrix.png"/>
           <p:cNvPicPr>
             <a:picLocks noChangeAspect="1"/>
           </p:cNvPicPr>
@@ -4420,8 +4578,8 @@
         </p:blipFill>
         <p:spPr>
           <a:xfrm>
-            <a:off x="29626560" y="12115800"/>
-            <a:ext cx="13350240" cy="13350240"/>
+            <a:off x="31089600" y="11887200"/>
+            <a:ext cx="10515600" cy="10515600"/>
           </a:xfrm>
           <a:prstGeom prst="rect">
             <a:avLst/>
@@ -4430,14 +4588,14 @@
       </p:pic>
       <p:sp>
         <p:nvSpPr>
-          <p:cNvPr id="29" name="TextBox 28"/>
+          <p:cNvPr id="32" name="TextBox 31"/>
           <p:cNvSpPr txBox="1"/>
           <p:nvPr/>
         </p:nvSpPr>
         <p:spPr>
           <a:xfrm>
-            <a:off x="29626560" y="18516600"/>
-            <a:ext cx="13350240" cy="548640"/>
+            <a:off x="29718000" y="18105120"/>
+            <a:ext cx="13258800" cy="457200"/>
           </a:xfrm>
           <a:prstGeom prst="rect">
             <a:avLst/>
@@ -4451,27 +4609,72 @@
           <a:lstStyle/>
           <a:p>
             <a:r>
-              <a:rPr sz="2200" b="1">
+              <a:rPr sz="1800" b="1">
                 <a:solidFill>
                   <a:srgbClr val="00529B"/>
                 </a:solidFill>
                 <a:latin typeface="Arial"/>
               </a:rPr>
-              <a:t>6. Conclusions &amp; UN SDG Impact</a:t>
-            </a:r>
-          </a:p>
-        </p:txBody>
-      </p:sp>
-      <p:sp>
-        <p:nvSpPr>
-          <p:cNvPr id="30" name="TextBox 29"/>
+              <a:t>7. Conclusions &amp; UN SDG Impact</a:t>
+            </a:r>
+          </a:p>
+        </p:txBody>
+      </p:sp>
+      <p:sp>
+        <p:nvSpPr>
+          <p:cNvPr id="33" name="Rounded Rectangle 32"/>
+          <p:cNvSpPr/>
+          <p:nvPr/>
+        </p:nvSpPr>
+        <p:spPr>
+          <a:xfrm>
+            <a:off x="29718000" y="18653760"/>
+            <a:ext cx="13258800" cy="5486400"/>
+          </a:xfrm>
+          <a:prstGeom prst="roundRect">
+            <a:avLst/>
+          </a:prstGeom>
+          <a:solidFill>
+            <a:srgbClr val="F8FAFC"/>
+          </a:solidFill>
+          <a:ln w="19050">
+            <a:solidFill>
+              <a:srgbClr val="CBD5E1"/>
+            </a:solidFill>
+          </a:ln>
+        </p:spPr>
+        <p:style>
+          <a:lnRef idx="1">
+            <a:schemeClr val="accent1"/>
+          </a:lnRef>
+          <a:fillRef idx="3">
+            <a:schemeClr val="accent1"/>
+          </a:fillRef>
+          <a:effectRef idx="2">
+            <a:schemeClr val="accent1"/>
+          </a:effectRef>
+          <a:fontRef idx="minor">
+            <a:schemeClr val="lt1"/>
+          </a:fontRef>
+        </p:style>
+        <p:txBody>
+          <a:bodyPr rtlCol="0" anchor="ctr"/>
+          <a:lstStyle/>
+          <a:p>
+            <a:pPr algn="ctr"/>
+          </a:p>
+        </p:txBody>
+      </p:sp>
+      <p:sp>
+        <p:nvSpPr>
+          <p:cNvPr id="34" name="TextBox 33"/>
           <p:cNvSpPr txBox="1"/>
           <p:nvPr/>
         </p:nvSpPr>
         <p:spPr>
           <a:xfrm>
-            <a:off x="29626560" y="19110960"/>
-            <a:ext cx="13350240" cy="6858000"/>
+            <a:off x="29900880" y="18745200"/>
+            <a:ext cx="12893040" cy="5303520"/>
           </a:xfrm>
           <a:prstGeom prst="rect">
             <a:avLst/>
@@ -4487,22 +4690,24 @@
           <a:p>
             <a:pPr>
               <a:spcAft>
-                <a:spcPts val="400"/>
+                <a:spcPts val="300"/>
               </a:spcAft>
             </a:pPr>
             <a:r>
-              <a:rPr b="1" sz="1200">
+              <a:rPr b="1" sz="1000">
                 <a:solidFill>
                   <a:srgbClr val="10B981"/>
                 </a:solidFill>
+                <a:latin typeface="Times New Roman"/>
               </a:rPr>
               <a:t>✓ 0.76ms Edge Real-Time: </a:t>
             </a:r>
             <a:r>
-              <a:rPr sz="1150">
-                <a:solidFill>
-                  <a:srgbClr val="1E293B"/>
-                </a:solidFill>
+              <a:rPr sz="950">
+                <a:solidFill>
+                  <a:srgbClr val="0F172A"/>
+                </a:solidFill>
+                <a:latin typeface="Times New Roman"/>
               </a:rPr>
               <a:t>Executes single-sample inference in 0.76 ms on Raspberry Pi 4B (1GB RAM) - 207x faster than baseline, easily passing the sub-100ms SCADA limit.</a:t>
             </a:r>
@@ -4510,45 +4715,49 @@
           <a:p>
             <a:pPr>
               <a:spcAft>
-                <a:spcPts val="400"/>
+                <a:spcPts val="300"/>
               </a:spcAft>
             </a:pPr>
             <a:r>
-              <a:rPr b="1" sz="1200">
+              <a:rPr b="1" sz="1000">
                 <a:solidFill>
                   <a:srgbClr val="10B981"/>
                 </a:solidFill>
+                <a:latin typeface="Times New Roman"/>
               </a:rPr>
               <a:t>✓ High Detection Fidelity: </a:t>
             </a:r>
             <a:r>
-              <a:rPr sz="1150">
-                <a:solidFill>
-                  <a:srgbClr val="1E293B"/>
-                </a:solidFill>
-              </a:rPr>
-              <a:t>70.56% multi-class accuracy, 96.89% precision on benign telemetry (zero false production halts), 89.04% recall on DoS attacks.</a:t>
+              <a:rPr sz="950">
+                <a:solidFill>
+                  <a:srgbClr val="0F172A"/>
+                </a:solidFill>
+                <a:latin typeface="Times New Roman"/>
+              </a:rPr>
+              <a:t>70.56% multi-class accuracy, 96.89% precision on benign telemetry (zero false plant shutdowns), 89.04% recall on DoS attacks.</a:t>
             </a:r>
           </a:p>
           <a:p>
             <a:pPr>
               <a:spcAft>
-                <a:spcPts val="400"/>
+                <a:spcPts val="300"/>
               </a:spcAft>
             </a:pPr>
             <a:r>
-              <a:rPr b="1" sz="1200">
+              <a:rPr b="1" sz="1000">
                 <a:solidFill>
                   <a:srgbClr val="10B981"/>
                 </a:solidFill>
+                <a:latin typeface="Times New Roman"/>
               </a:rPr>
               <a:t>✓ High Industrial ROI: </a:t>
             </a:r>
             <a:r>
-              <a:rPr sz="1150">
-                <a:solidFill>
-                  <a:srgbClr val="1E293B"/>
-                </a:solidFill>
+              <a:rPr sz="950">
+                <a:solidFill>
+                  <a:srgbClr val="0F172A"/>
+                </a:solidFill>
+                <a:latin typeface="Times New Roman"/>
               </a:rPr>
               <a:t>200x-300x return averting $50k-$500k/hr outages while protecting miner lives against ventilation tampering (SDG 8 &amp; 9).</a:t>
             </a:r>
@@ -4556,38 +4765,40 @@
           <a:p>
             <a:pPr>
               <a:spcAft>
-                <a:spcPts val="400"/>
+                <a:spcPts val="300"/>
               </a:spcAft>
             </a:pPr>
             <a:r>
-              <a:rPr b="1" sz="1200">
+              <a:rPr b="1" sz="1000">
                 <a:solidFill>
                   <a:srgbClr val="10B981"/>
                 </a:solidFill>
+                <a:latin typeface="Times New Roman"/>
               </a:rPr>
               <a:t>✓ Open-Source Ecosystem: </a:t>
             </a:r>
             <a:r>
-              <a:rPr sz="1150">
-                <a:solidFill>
-                  <a:srgbClr val="1E293B"/>
-                </a:solidFill>
-              </a:rPr>
-              <a:t>NPM sniffer package '@mhiskall282/unesco-mine-sec-cli' and 75/75 passing unit test suites ensure complete reproducibility.</a:t>
-            </a:r>
-          </a:p>
-        </p:txBody>
-      </p:sp>
-      <p:sp>
-        <p:nvSpPr>
-          <p:cNvPr id="31" name="TextBox 30"/>
+              <a:rPr sz="950">
+                <a:solidFill>
+                  <a:srgbClr val="0F172A"/>
+                </a:solidFill>
+                <a:latin typeface="Times New Roman"/>
+              </a:rPr>
+              <a:t>NPM sniffer package '@mhiskall282/unesco-mine-sec-cli' and 75/75 automated unit test suites ensure complete reproducibility.</a:t>
+            </a:r>
+          </a:p>
+        </p:txBody>
+      </p:sp>
+      <p:sp>
+        <p:nvSpPr>
+          <p:cNvPr id="35" name="TextBox 34"/>
           <p:cNvSpPr txBox="1"/>
           <p:nvPr/>
         </p:nvSpPr>
         <p:spPr>
           <a:xfrm>
-            <a:off x="29626560" y="25466040"/>
-            <a:ext cx="13350240" cy="548640"/>
+            <a:off x="29718000" y="24688800"/>
+            <a:ext cx="13258800" cy="457200"/>
           </a:xfrm>
           <a:prstGeom prst="rect">
             <a:avLst/>
@@ -4601,27 +4812,27 @@
           <a:lstStyle/>
           <a:p>
             <a:r>
-              <a:rPr sz="2200" b="1">
+              <a:rPr sz="1800" b="1">
                 <a:solidFill>
                   <a:srgbClr val="00529B"/>
                 </a:solidFill>
                 <a:latin typeface="Arial"/>
               </a:rPr>
-              <a:t>7. References</a:t>
-            </a:r>
-          </a:p>
-        </p:txBody>
-      </p:sp>
-      <p:sp>
-        <p:nvSpPr>
-          <p:cNvPr id="32" name="TextBox 31"/>
+              <a:t>8. References</a:t>
+            </a:r>
+          </a:p>
+        </p:txBody>
+      </p:sp>
+      <p:sp>
+        <p:nvSpPr>
+          <p:cNvPr id="36" name="TextBox 35"/>
           <p:cNvSpPr txBox="1"/>
           <p:nvPr/>
         </p:nvSpPr>
         <p:spPr>
           <a:xfrm>
-            <a:off x="29626560" y="25968960"/>
-            <a:ext cx="13350240" cy="3657600"/>
+            <a:off x="29718000" y="25146000"/>
+            <a:ext cx="13258800" cy="3200400"/>
           </a:xfrm>
           <a:prstGeom prst="rect">
             <a:avLst/>
@@ -4641,13 +4852,13 @@
               </a:spcAft>
             </a:pPr>
             <a:r>
-              <a:rPr sz="950">
+              <a:rPr sz="850">
                 <a:solidFill>
                   <a:srgbClr val="64748B"/>
                 </a:solidFill>
-                <a:latin typeface="Arial"/>
-              </a:rPr>
-              <a:t>1. Alanazi, M., et al. (2022). SCADA vulnerabilities and attacks: A review. Computers &amp; Security, 125, 103028.</a:t>
+                <a:latin typeface="Times New Roman"/>
+              </a:rPr>
+              <a:t>1. Alanazi, M., et al. (2022). SCADA vulnerabilities &amp; attacks. Computers &amp; Security, 125, 103028.</a:t>
             </a:r>
           </a:p>
           <a:p>
@@ -4657,13 +4868,13 @@
               </a:spcAft>
             </a:pPr>
             <a:r>
-              <a:rPr sz="950">
+              <a:rPr sz="850">
                 <a:solidFill>
                   <a:srgbClr val="64748B"/>
                 </a:solidFill>
-                <a:latin typeface="Arial"/>
-              </a:rPr>
-              <a:t>2. Almomani, O., et al. (2025). Cyberattack detection for SCADA in industrial IoT. Symmetry, 17(4), 480.</a:t>
+                <a:latin typeface="Times New Roman"/>
+              </a:rPr>
+              <a:t>2. Almomani, O., et al. (2025). SCADA intrusion detection in IIoT. Symmetry, 17(4), 480.</a:t>
             </a:r>
           </a:p>
           <a:p>
@@ -4673,11 +4884,11 @@
               </a:spcAft>
             </a:pPr>
             <a:r>
-              <a:rPr sz="950">
+              <a:rPr sz="850">
                 <a:solidFill>
                   <a:srgbClr val="64748B"/>
                 </a:solidFill>
-                <a:latin typeface="Arial"/>
+                <a:latin typeface="Times New Roman"/>
               </a:rPr>
               <a:t>3. Kheddar, H., et al. (2023). Deep transfer learning for intrusion detection in ICS. JNCA, 220, 103747.</a:t>
             </a:r>
@@ -4689,13 +4900,13 @@
               </a:spcAft>
             </a:pPr>
             <a:r>
-              <a:rPr sz="950">
+              <a:rPr sz="850">
                 <a:solidFill>
                   <a:srgbClr val="64748B"/>
                 </a:solidFill>
-                <a:latin typeface="Arial"/>
-              </a:rPr>
-              <a:t>4. Mirjalili, S., &amp; Lewis, A. (2016). The whale optimization algorithm. Advances in Eng. Software, 95, 51-67.</a:t>
+                <a:latin typeface="Times New Roman"/>
+              </a:rPr>
+              <a:t>4. Mirjalili, S., &amp; Lewis, A. (2016). Whale optimization algorithm. Advances in Eng. Software, 95, 51-67.</a:t>
             </a:r>
           </a:p>
           <a:p>
@@ -4705,11 +4916,11 @@
               </a:spcAft>
             </a:pPr>
             <a:r>
-              <a:rPr sz="950">
+              <a:rPr sz="850">
                 <a:solidFill>
                   <a:srgbClr val="64748B"/>
                 </a:solidFill>
-                <a:latin typeface="Arial"/>
+                <a:latin typeface="Times New Roman"/>
               </a:rPr>
               <a:t>5. Minerals Commission of Ghana. (2024). Digital telemetry &amp; cybersecurity compliance policy guidelines.</a:t>
             </a:r>

--- a/research/poster_presentation.pptx
+++ b/research/poster_presentation.pptx
@@ -7,7 +7,7 @@
   <p:sldIdLst>
     <p:sldId id="256" r:id="rId7"/>
   </p:sldIdLst>
-  <p:sldSz cx="43891200" cy="29260800" type="screen4x3"/>
+  <p:sldSz cx="30275784" cy="42803064" type="screen4x3"/>
   <p:notesSz cx="6858000" cy="9144000"/>
   <p:defaultTextStyle>
     <a:defPPr>
@@ -3097,16 +3097,277 @@
         <p:spPr>
           <a:xfrm>
             <a:off x="0" y="0"/>
-            <a:ext cx="43891200" cy="29260800"/>
+            <a:ext cx="30275784" cy="42803064"/>
           </a:xfrm>
           <a:prstGeom prst="rect">
+            <a:avLst/>
+          </a:prstGeom>
+          <a:solidFill>
+            <a:srgbClr val="F1F5F9"/>
+          </a:solidFill>
+          <a:ln>
+            <a:noFill/>
+          </a:ln>
+        </p:spPr>
+        <p:style>
+          <a:lnRef idx="1">
+            <a:schemeClr val="accent1"/>
+          </a:lnRef>
+          <a:fillRef idx="3">
+            <a:schemeClr val="accent1"/>
+          </a:fillRef>
+          <a:effectRef idx="2">
+            <a:schemeClr val="accent1"/>
+          </a:effectRef>
+          <a:fontRef idx="minor">
+            <a:schemeClr val="lt1"/>
+          </a:fontRef>
+        </p:style>
+        <p:txBody>
+          <a:bodyPr rtlCol="0" anchor="ctr"/>
+          <a:lstStyle/>
+          <a:p>
+            <a:pPr algn="ctr"/>
+          </a:p>
+        </p:txBody>
+      </p:sp>
+      <p:sp>
+        <p:nvSpPr>
+          <p:cNvPr id="3" name="Rectangle 2"/>
+          <p:cNvSpPr/>
+          <p:nvPr/>
+        </p:nvSpPr>
+        <p:spPr>
+          <a:xfrm>
+            <a:off x="0" y="0"/>
+            <a:ext cx="30275784" cy="4937760"/>
+          </a:xfrm>
+          <a:prstGeom prst="rect">
+            <a:avLst/>
+          </a:prstGeom>
+          <a:solidFill>
+            <a:srgbClr val="0B1D3A"/>
+          </a:solidFill>
+          <a:ln>
+            <a:noFill/>
+          </a:ln>
+        </p:spPr>
+        <p:style>
+          <a:lnRef idx="1">
+            <a:schemeClr val="accent1"/>
+          </a:lnRef>
+          <a:fillRef idx="3">
+            <a:schemeClr val="accent1"/>
+          </a:fillRef>
+          <a:effectRef idx="2">
+            <a:schemeClr val="accent1"/>
+          </a:effectRef>
+          <a:fontRef idx="minor">
+            <a:schemeClr val="lt1"/>
+          </a:fontRef>
+        </p:style>
+        <p:txBody>
+          <a:bodyPr rtlCol="0" anchor="ctr"/>
+          <a:lstStyle/>
+          <a:p>
+            <a:pPr algn="ctr"/>
+          </a:p>
+        </p:txBody>
+      </p:sp>
+      <p:sp>
+        <p:nvSpPr>
+          <p:cNvPr id="4" name="Rectangle 3"/>
+          <p:cNvSpPr/>
+          <p:nvPr/>
+        </p:nvSpPr>
+        <p:spPr>
+          <a:xfrm>
+            <a:off x="0" y="4846320"/>
+            <a:ext cx="30275784" cy="109728"/>
+          </a:xfrm>
+          <a:prstGeom prst="rect">
+            <a:avLst/>
+          </a:prstGeom>
+          <a:solidFill>
+            <a:srgbClr val="D4AF37"/>
+          </a:solidFill>
+          <a:ln>
+            <a:noFill/>
+          </a:ln>
+        </p:spPr>
+        <p:style>
+          <a:lnRef idx="1">
+            <a:schemeClr val="accent1"/>
+          </a:lnRef>
+          <a:fillRef idx="3">
+            <a:schemeClr val="accent1"/>
+          </a:fillRef>
+          <a:effectRef idx="2">
+            <a:schemeClr val="accent1"/>
+          </a:effectRef>
+          <a:fontRef idx="minor">
+            <a:schemeClr val="lt1"/>
+          </a:fontRef>
+        </p:style>
+        <p:txBody>
+          <a:bodyPr rtlCol="0" anchor="ctr"/>
+          <a:lstStyle/>
+          <a:p>
+            <a:pPr algn="ctr"/>
+          </a:p>
+        </p:txBody>
+      </p:sp>
+      <p:sp>
+        <p:nvSpPr>
+          <p:cNvPr id="5" name="TextBox 4"/>
+          <p:cNvSpPr txBox="1"/>
+          <p:nvPr/>
+        </p:nvSpPr>
+        <p:spPr>
+          <a:xfrm>
+            <a:off x="914400" y="274320"/>
+            <a:ext cx="28446984" cy="548640"/>
+          </a:xfrm>
+          <a:prstGeom prst="rect">
+            <a:avLst/>
+          </a:prstGeom>
+          <a:noFill/>
+        </p:spPr>
+        <p:txBody>
+          <a:bodyPr wrap="none">
+            <a:spAutoFit/>
+          </a:bodyPr>
+          <a:lstStyle/>
+          <a:p>
+            <a:pPr algn="ctr"/>
+            <a:r>
+              <a:rPr sz="1500" b="1">
+                <a:solidFill>
+                  <a:srgbClr val="00A3E0"/>
+                </a:solidFill>
+                <a:latin typeface="Arial"/>
+              </a:rPr>
+              <a:t>RUSSIAN-AFRICAN FORUM-CONTEST OF YOUNG SCIENTISTS 2026 | UNDER THE AUSPICES OF UNESCO</a:t>
+            </a:r>
+          </a:p>
+        </p:txBody>
+      </p:sp>
+      <p:sp>
+        <p:nvSpPr>
+          <p:cNvPr id="6" name="TextBox 5"/>
+          <p:cNvSpPr txBox="1"/>
+          <p:nvPr/>
+        </p:nvSpPr>
+        <p:spPr>
+          <a:xfrm>
+            <a:off x="914400" y="777240"/>
+            <a:ext cx="28446984" cy="1645920"/>
+          </a:xfrm>
+          <a:prstGeom prst="rect">
+            <a:avLst/>
+          </a:prstGeom>
+          <a:noFill/>
+        </p:spPr>
+        <p:txBody>
+          <a:bodyPr wrap="square">
+            <a:spAutoFit/>
+          </a:bodyPr>
+          <a:lstStyle/>
+          <a:p>
+            <a:pPr algn="ctr"/>
+            <a:r>
+              <a:rPr sz="5200" b="1">
+                <a:solidFill>
+                  <a:srgbClr val="D4AF37"/>
+                </a:solidFill>
+                <a:latin typeface="Arial"/>
+              </a:rPr>
+              <a:t>SECURING THE DIGITAL MINE</a:t>
+            </a:r>
+          </a:p>
+          <a:p>
+            <a:pPr algn="ctr"/>
+            <a:r>
+              <a:rPr sz="2100" b="1">
+                <a:solidFill>
+                  <a:srgbClr val="FFFFFF"/>
+                </a:solidFill>
+                <a:latin typeface="Arial"/>
+              </a:rPr>
+              <a:t>A Metaheuristic-Optimized Deep Learning Framework for Real-Time Intrusion Detection in IoT-Enabled Mineral Extraction</a:t>
+            </a:r>
+          </a:p>
+        </p:txBody>
+      </p:sp>
+      <p:sp>
+        <p:nvSpPr>
+          <p:cNvPr id="7" name="TextBox 6"/>
+          <p:cNvSpPr txBox="1"/>
+          <p:nvPr/>
+        </p:nvSpPr>
+        <p:spPr>
+          <a:xfrm>
+            <a:off x="914400" y="3474720"/>
+            <a:ext cx="28446984" cy="1188720"/>
+          </a:xfrm>
+          <a:prstGeom prst="rect">
+            <a:avLst/>
+          </a:prstGeom>
+          <a:noFill/>
+        </p:spPr>
+        <p:txBody>
+          <a:bodyPr wrap="none">
+            <a:spAutoFit/>
+          </a:bodyPr>
+          <a:lstStyle/>
+          <a:p>
+            <a:pPr algn="ctr"/>
+            <a:r>
+              <a:rPr sz="1600" b="1">
+                <a:solidFill>
+                  <a:srgbClr val="FFFFFF"/>
+                </a:solidFill>
+                <a:latin typeface="Times New Roman"/>
+              </a:rPr>
+              <a:t>Delegation: John Okyere (Lead), Ezekeil Baah, Clement Baffour, Parker Paa Annobil, George Akwesi Bonnah
+</a:t>
+            </a:r>
+          </a:p>
+          <a:p>
+            <a:pPr algn="ctr"/>
+            <a:r>
+              <a:rPr sz="1400" i="1">
+                <a:solidFill>
+                  <a:srgbClr val="E2E8F0"/>
+                </a:solidFill>
+                <a:latin typeface="Times New Roman"/>
+              </a:rPr>
+              <a:t>Department of ICT, University of Education, Winneba &amp; Kayaba Labs | Track 3: Smart Subsoil | Saint Petersburg Mining University</a:t>
+            </a:r>
+          </a:p>
+        </p:txBody>
+      </p:sp>
+      <p:sp>
+        <p:nvSpPr>
+          <p:cNvPr id="8" name="Rounded Rectangle 7"/>
+          <p:cNvSpPr/>
+          <p:nvPr/>
+        </p:nvSpPr>
+        <p:spPr>
+          <a:xfrm>
+            <a:off x="822960" y="5212080"/>
+            <a:ext cx="4526280" cy="2194560"/>
+          </a:xfrm>
+          <a:prstGeom prst="roundRect">
             <a:avLst/>
           </a:prstGeom>
           <a:solidFill>
             <a:srgbClr val="FFFFFF"/>
           </a:solidFill>
-          <a:ln>
-            <a:noFill/>
+          <a:ln w="38100">
+            <a:solidFill>
+              <a:srgbClr val="10B981"/>
+            </a:solidFill>
           </a:ln>
         </p:spPr>
         <p:style>
@@ -3133,16 +3394,574 @@
       </p:sp>
       <p:sp>
         <p:nvSpPr>
-          <p:cNvPr id="3" name="Rectangle 2"/>
+          <p:cNvPr id="9" name="TextBox 8"/>
+          <p:cNvSpPr txBox="1"/>
+          <p:nvPr/>
+        </p:nvSpPr>
+        <p:spPr>
+          <a:xfrm>
+            <a:off x="914400" y="5394960"/>
+            <a:ext cx="4343400" cy="1828800"/>
+          </a:xfrm>
+          <a:prstGeom prst="rect">
+            <a:avLst/>
+          </a:prstGeom>
+          <a:noFill/>
+        </p:spPr>
+        <p:txBody>
+          <a:bodyPr wrap="none">
+            <a:spAutoFit/>
+          </a:bodyPr>
+          <a:lstStyle/>
+          <a:p>
+            <a:pPr algn="ctr"/>
+            <a:r>
+              <a:rPr sz="3400" b="1">
+                <a:solidFill>
+                  <a:srgbClr val="10B981"/>
+                </a:solidFill>
+                <a:latin typeface="Arial"/>
+              </a:rPr>
+              <a:t>0.76 ms</a:t>
+            </a:r>
+          </a:p>
+          <a:p>
+            <a:pPr algn="ctr"/>
+            <a:r>
+              <a:rPr sz="1250" b="1">
+                <a:solidFill>
+                  <a:srgbClr val="0F172A"/>
+                </a:solidFill>
+                <a:latin typeface="Arial"/>
+              </a:rPr>
+              <a:t>Edge Inference Latency
+(207x Speedup vs Baseline)</a:t>
+            </a:r>
+          </a:p>
+        </p:txBody>
+      </p:sp>
+      <p:sp>
+        <p:nvSpPr>
+          <p:cNvPr id="10" name="Rounded Rectangle 9"/>
           <p:cNvSpPr/>
           <p:nvPr/>
         </p:nvSpPr>
         <p:spPr>
           <a:xfrm>
-            <a:off x="0" y="0"/>
-            <a:ext cx="43891200" cy="4389120"/>
+            <a:off x="5623560" y="5212080"/>
+            <a:ext cx="4526280" cy="2194560"/>
+          </a:xfrm>
+          <a:prstGeom prst="roundRect">
+            <a:avLst/>
+          </a:prstGeom>
+          <a:solidFill>
+            <a:srgbClr val="FFFFFF"/>
+          </a:solidFill>
+          <a:ln w="38100">
+            <a:solidFill>
+              <a:srgbClr val="00529B"/>
+            </a:solidFill>
+          </a:ln>
+        </p:spPr>
+        <p:style>
+          <a:lnRef idx="1">
+            <a:schemeClr val="accent1"/>
+          </a:lnRef>
+          <a:fillRef idx="3">
+            <a:schemeClr val="accent1"/>
+          </a:fillRef>
+          <a:effectRef idx="2">
+            <a:schemeClr val="accent1"/>
+          </a:effectRef>
+          <a:fontRef idx="minor">
+            <a:schemeClr val="lt1"/>
+          </a:fontRef>
+        </p:style>
+        <p:txBody>
+          <a:bodyPr rtlCol="0" anchor="ctr"/>
+          <a:lstStyle/>
+          <a:p>
+            <a:pPr algn="ctr"/>
+          </a:p>
+        </p:txBody>
+      </p:sp>
+      <p:sp>
+        <p:nvSpPr>
+          <p:cNvPr id="11" name="TextBox 10"/>
+          <p:cNvSpPr txBox="1"/>
+          <p:nvPr/>
+        </p:nvSpPr>
+        <p:spPr>
+          <a:xfrm>
+            <a:off x="5715000" y="5394960"/>
+            <a:ext cx="4343400" cy="1828800"/>
           </a:xfrm>
           <a:prstGeom prst="rect">
+            <a:avLst/>
+          </a:prstGeom>
+          <a:noFill/>
+        </p:spPr>
+        <p:txBody>
+          <a:bodyPr wrap="none">
+            <a:spAutoFit/>
+          </a:bodyPr>
+          <a:lstStyle/>
+          <a:p>
+            <a:pPr algn="ctr"/>
+            <a:r>
+              <a:rPr sz="3400" b="1">
+                <a:solidFill>
+                  <a:srgbClr val="00529B"/>
+                </a:solidFill>
+                <a:latin typeface="Arial"/>
+              </a:rPr>
+              <a:t>75.61%</a:t>
+            </a:r>
+          </a:p>
+          <a:p>
+            <a:pPr algn="ctr"/>
+            <a:r>
+              <a:rPr sz="1250" b="1">
+                <a:solidFill>
+                  <a:srgbClr val="0F172A"/>
+                </a:solidFill>
+                <a:latin typeface="Arial"/>
+              </a:rPr>
+              <a:t>Feature Pruning (41 -&gt; 10)
+(BWOA Dimensionality Red.)</a:t>
+            </a:r>
+          </a:p>
+        </p:txBody>
+      </p:sp>
+      <p:sp>
+        <p:nvSpPr>
+          <p:cNvPr id="12" name="Rounded Rectangle 11"/>
+          <p:cNvSpPr/>
+          <p:nvPr/>
+        </p:nvSpPr>
+        <p:spPr>
+          <a:xfrm>
+            <a:off x="10424160" y="5212080"/>
+            <a:ext cx="4526280" cy="2194560"/>
+          </a:xfrm>
+          <a:prstGeom prst="roundRect">
+            <a:avLst/>
+          </a:prstGeom>
+          <a:solidFill>
+            <a:srgbClr val="FFFFFF"/>
+          </a:solidFill>
+          <a:ln w="38100">
+            <a:solidFill>
+              <a:srgbClr val="00A3E0"/>
+            </a:solidFill>
+          </a:ln>
+        </p:spPr>
+        <p:style>
+          <a:lnRef idx="1">
+            <a:schemeClr val="accent1"/>
+          </a:lnRef>
+          <a:fillRef idx="3">
+            <a:schemeClr val="accent1"/>
+          </a:fillRef>
+          <a:effectRef idx="2">
+            <a:schemeClr val="accent1"/>
+          </a:effectRef>
+          <a:fontRef idx="minor">
+            <a:schemeClr val="lt1"/>
+          </a:fontRef>
+        </p:style>
+        <p:txBody>
+          <a:bodyPr rtlCol="0" anchor="ctr"/>
+          <a:lstStyle/>
+          <a:p>
+            <a:pPr algn="ctr"/>
+          </a:p>
+        </p:txBody>
+      </p:sp>
+      <p:sp>
+        <p:nvSpPr>
+          <p:cNvPr id="13" name="TextBox 12"/>
+          <p:cNvSpPr txBox="1"/>
+          <p:nvPr/>
+        </p:nvSpPr>
+        <p:spPr>
+          <a:xfrm>
+            <a:off x="10515600" y="5394960"/>
+            <a:ext cx="4343400" cy="1828800"/>
+          </a:xfrm>
+          <a:prstGeom prst="rect">
+            <a:avLst/>
+          </a:prstGeom>
+          <a:noFill/>
+        </p:spPr>
+        <p:txBody>
+          <a:bodyPr wrap="none">
+            <a:spAutoFit/>
+          </a:bodyPr>
+          <a:lstStyle/>
+          <a:p>
+            <a:pPr algn="ctr"/>
+            <a:r>
+              <a:rPr sz="3400" b="1">
+                <a:solidFill>
+                  <a:srgbClr val="00A3E0"/>
+                </a:solidFill>
+                <a:latin typeface="Arial"/>
+              </a:rPr>
+              <a:t>96.89%</a:t>
+            </a:r>
+          </a:p>
+          <a:p>
+            <a:pPr algn="ctr"/>
+            <a:r>
+              <a:rPr sz="1250" b="1">
+                <a:solidFill>
+                  <a:srgbClr val="0F172A"/>
+                </a:solidFill>
+                <a:latin typeface="Arial"/>
+              </a:rPr>
+              <a:t>Benign Flow Precision
+(Zero False Production Halts)</a:t>
+            </a:r>
+          </a:p>
+        </p:txBody>
+      </p:sp>
+      <p:sp>
+        <p:nvSpPr>
+          <p:cNvPr id="14" name="Rounded Rectangle 13"/>
+          <p:cNvSpPr/>
+          <p:nvPr/>
+        </p:nvSpPr>
+        <p:spPr>
+          <a:xfrm>
+            <a:off x="15224759" y="5212080"/>
+            <a:ext cx="4526280" cy="2194560"/>
+          </a:xfrm>
+          <a:prstGeom prst="roundRect">
+            <a:avLst/>
+          </a:prstGeom>
+          <a:solidFill>
+            <a:srgbClr val="FFFFFF"/>
+          </a:solidFill>
+          <a:ln w="38100">
+            <a:solidFill>
+              <a:srgbClr val="DC2626"/>
+            </a:solidFill>
+          </a:ln>
+        </p:spPr>
+        <p:style>
+          <a:lnRef idx="1">
+            <a:schemeClr val="accent1"/>
+          </a:lnRef>
+          <a:fillRef idx="3">
+            <a:schemeClr val="accent1"/>
+          </a:fillRef>
+          <a:effectRef idx="2">
+            <a:schemeClr val="accent1"/>
+          </a:effectRef>
+          <a:fontRef idx="minor">
+            <a:schemeClr val="lt1"/>
+          </a:fontRef>
+        </p:style>
+        <p:txBody>
+          <a:bodyPr rtlCol="0" anchor="ctr"/>
+          <a:lstStyle/>
+          <a:p>
+            <a:pPr algn="ctr"/>
+          </a:p>
+        </p:txBody>
+      </p:sp>
+      <p:sp>
+        <p:nvSpPr>
+          <p:cNvPr id="15" name="TextBox 14"/>
+          <p:cNvSpPr txBox="1"/>
+          <p:nvPr/>
+        </p:nvSpPr>
+        <p:spPr>
+          <a:xfrm>
+            <a:off x="15316199" y="5394960"/>
+            <a:ext cx="4343400" cy="1828800"/>
+          </a:xfrm>
+          <a:prstGeom prst="rect">
+            <a:avLst/>
+          </a:prstGeom>
+          <a:noFill/>
+        </p:spPr>
+        <p:txBody>
+          <a:bodyPr wrap="none">
+            <a:spAutoFit/>
+          </a:bodyPr>
+          <a:lstStyle/>
+          <a:p>
+            <a:pPr algn="ctr"/>
+            <a:r>
+              <a:rPr sz="3400" b="1">
+                <a:solidFill>
+                  <a:srgbClr val="DC2626"/>
+                </a:solidFill>
+                <a:latin typeface="Arial"/>
+              </a:rPr>
+              <a:t>89.04%</a:t>
+            </a:r>
+          </a:p>
+          <a:p>
+            <a:pPr algn="ctr"/>
+            <a:r>
+              <a:rPr sz="1250" b="1">
+                <a:solidFill>
+                  <a:srgbClr val="0F172A"/>
+                </a:solidFill>
+                <a:latin typeface="Arial"/>
+              </a:rPr>
+              <a:t>DoS Attack Recall
+(Hardens SCADA PLCs)</a:t>
+            </a:r>
+          </a:p>
+        </p:txBody>
+      </p:sp>
+      <p:sp>
+        <p:nvSpPr>
+          <p:cNvPr id="16" name="Rounded Rectangle 15"/>
+          <p:cNvSpPr/>
+          <p:nvPr/>
+        </p:nvSpPr>
+        <p:spPr>
+          <a:xfrm>
+            <a:off x="20025360" y="5212080"/>
+            <a:ext cx="4526280" cy="2194560"/>
+          </a:xfrm>
+          <a:prstGeom prst="roundRect">
+            <a:avLst/>
+          </a:prstGeom>
+          <a:solidFill>
+            <a:srgbClr val="FFFFFF"/>
+          </a:solidFill>
+          <a:ln w="38100">
+            <a:solidFill>
+              <a:srgbClr val="D4AF37"/>
+            </a:solidFill>
+          </a:ln>
+        </p:spPr>
+        <p:style>
+          <a:lnRef idx="1">
+            <a:schemeClr val="accent1"/>
+          </a:lnRef>
+          <a:fillRef idx="3">
+            <a:schemeClr val="accent1"/>
+          </a:fillRef>
+          <a:effectRef idx="2">
+            <a:schemeClr val="accent1"/>
+          </a:effectRef>
+          <a:fontRef idx="minor">
+            <a:schemeClr val="lt1"/>
+          </a:fontRef>
+        </p:style>
+        <p:txBody>
+          <a:bodyPr rtlCol="0" anchor="ctr"/>
+          <a:lstStyle/>
+          <a:p>
+            <a:pPr algn="ctr"/>
+          </a:p>
+        </p:txBody>
+      </p:sp>
+      <p:sp>
+        <p:nvSpPr>
+          <p:cNvPr id="17" name="TextBox 16"/>
+          <p:cNvSpPr txBox="1"/>
+          <p:nvPr/>
+        </p:nvSpPr>
+        <p:spPr>
+          <a:xfrm>
+            <a:off x="20116800" y="5394960"/>
+            <a:ext cx="4343400" cy="1828800"/>
+          </a:xfrm>
+          <a:prstGeom prst="rect">
+            <a:avLst/>
+          </a:prstGeom>
+          <a:noFill/>
+        </p:spPr>
+        <p:txBody>
+          <a:bodyPr wrap="none">
+            <a:spAutoFit/>
+          </a:bodyPr>
+          <a:lstStyle/>
+          <a:p>
+            <a:pPr algn="ctr"/>
+            <a:r>
+              <a:rPr sz="3400" b="1">
+                <a:solidFill>
+                  <a:srgbClr val="D4AF37"/>
+                </a:solidFill>
+                <a:latin typeface="Arial"/>
+              </a:rPr>
+              <a:t>0.82 MB</a:t>
+            </a:r>
+          </a:p>
+          <a:p>
+            <a:pPr algn="ctr"/>
+            <a:r>
+              <a:rPr sz="1250" b="1">
+                <a:solidFill>
+                  <a:srgbClr val="0F172A"/>
+                </a:solidFill>
+                <a:latin typeface="Arial"/>
+              </a:rPr>
+              <a:t>Float16 Quantized Size
+(Runs on 1GB RAM Pi 4B)</a:t>
+            </a:r>
+          </a:p>
+        </p:txBody>
+      </p:sp>
+      <p:sp>
+        <p:nvSpPr>
+          <p:cNvPr id="18" name="Rounded Rectangle 17"/>
+          <p:cNvSpPr/>
+          <p:nvPr/>
+        </p:nvSpPr>
+        <p:spPr>
+          <a:xfrm>
+            <a:off x="24825960" y="5212080"/>
+            <a:ext cx="4526280" cy="2194560"/>
+          </a:xfrm>
+          <a:prstGeom prst="roundRect">
+            <a:avLst/>
+          </a:prstGeom>
+          <a:solidFill>
+            <a:srgbClr val="FFFFFF"/>
+          </a:solidFill>
+          <a:ln w="38100">
+            <a:solidFill>
+              <a:srgbClr val="0B1D3A"/>
+            </a:solidFill>
+          </a:ln>
+        </p:spPr>
+        <p:style>
+          <a:lnRef idx="1">
+            <a:schemeClr val="accent1"/>
+          </a:lnRef>
+          <a:fillRef idx="3">
+            <a:schemeClr val="accent1"/>
+          </a:fillRef>
+          <a:effectRef idx="2">
+            <a:schemeClr val="accent1"/>
+          </a:effectRef>
+          <a:fontRef idx="minor">
+            <a:schemeClr val="lt1"/>
+          </a:fontRef>
+        </p:style>
+        <p:txBody>
+          <a:bodyPr rtlCol="0" anchor="ctr"/>
+          <a:lstStyle/>
+          <a:p>
+            <a:pPr algn="ctr"/>
+          </a:p>
+        </p:txBody>
+      </p:sp>
+      <p:sp>
+        <p:nvSpPr>
+          <p:cNvPr id="19" name="TextBox 18"/>
+          <p:cNvSpPr txBox="1"/>
+          <p:nvPr/>
+        </p:nvSpPr>
+        <p:spPr>
+          <a:xfrm>
+            <a:off x="24917400" y="5394960"/>
+            <a:ext cx="4343400" cy="1828800"/>
+          </a:xfrm>
+          <a:prstGeom prst="rect">
+            <a:avLst/>
+          </a:prstGeom>
+          <a:noFill/>
+        </p:spPr>
+        <p:txBody>
+          <a:bodyPr wrap="none">
+            <a:spAutoFit/>
+          </a:bodyPr>
+          <a:lstStyle/>
+          <a:p>
+            <a:pPr algn="ctr"/>
+            <a:r>
+              <a:rPr sz="3400" b="1">
+                <a:solidFill>
+                  <a:srgbClr val="0B1D3A"/>
+                </a:solidFill>
+                <a:latin typeface="Arial"/>
+              </a:rPr>
+              <a:t>200x+</a:t>
+            </a:r>
+          </a:p>
+          <a:p>
+            <a:pPr algn="ctr"/>
+            <a:r>
+              <a:rPr sz="1250" b="1">
+                <a:solidFill>
+                  <a:srgbClr val="0F172A"/>
+                </a:solidFill>
+                <a:latin typeface="Arial"/>
+              </a:rPr>
+              <a:t>Estimated Industrial ROI
+(Averts $50k-$500k/hr Loss)</a:t>
+            </a:r>
+          </a:p>
+        </p:txBody>
+      </p:sp>
+      <p:sp>
+        <p:nvSpPr>
+          <p:cNvPr id="20" name="Rounded Rectangle 19"/>
+          <p:cNvSpPr/>
+          <p:nvPr/>
+        </p:nvSpPr>
+        <p:spPr>
+          <a:xfrm>
+            <a:off x="822960" y="7680960"/>
+            <a:ext cx="9235440" cy="17190720"/>
+          </a:xfrm>
+          <a:prstGeom prst="roundRect">
+            <a:avLst/>
+          </a:prstGeom>
+          <a:solidFill>
+            <a:srgbClr val="FFFFFF"/>
+          </a:solidFill>
+          <a:ln w="19050">
+            <a:solidFill>
+              <a:srgbClr val="CBD5E1"/>
+            </a:solidFill>
+          </a:ln>
+        </p:spPr>
+        <p:style>
+          <a:lnRef idx="1">
+            <a:schemeClr val="accent1"/>
+          </a:lnRef>
+          <a:fillRef idx="3">
+            <a:schemeClr val="accent1"/>
+          </a:fillRef>
+          <a:effectRef idx="2">
+            <a:schemeClr val="accent1"/>
+          </a:effectRef>
+          <a:fontRef idx="minor">
+            <a:schemeClr val="lt1"/>
+          </a:fontRef>
+        </p:style>
+        <p:txBody>
+          <a:bodyPr rtlCol="0" anchor="ctr"/>
+          <a:lstStyle/>
+          <a:p>
+            <a:pPr algn="ctr"/>
+          </a:p>
+        </p:txBody>
+      </p:sp>
+      <p:sp>
+        <p:nvSpPr>
+          <p:cNvPr id="21" name="Rounded Rectangle 20"/>
+          <p:cNvSpPr/>
+          <p:nvPr/>
+        </p:nvSpPr>
+        <p:spPr>
+          <a:xfrm>
+            <a:off x="822960" y="7680960"/>
+            <a:ext cx="9235440" cy="1097280"/>
+          </a:xfrm>
+          <a:prstGeom prst="roundRect">
             <a:avLst/>
           </a:prstGeom>
           <a:solidFill>
@@ -3176,57 +3995,14 @@
       </p:sp>
       <p:sp>
         <p:nvSpPr>
-          <p:cNvPr id="4" name="Rectangle 3"/>
-          <p:cNvSpPr/>
-          <p:nvPr/>
-        </p:nvSpPr>
-        <p:spPr>
-          <a:xfrm>
-            <a:off x="0" y="4297680"/>
-            <a:ext cx="43891200" cy="91440"/>
-          </a:xfrm>
-          <a:prstGeom prst="rect">
-            <a:avLst/>
-          </a:prstGeom>
-          <a:solidFill>
-            <a:srgbClr val="FFD700"/>
-          </a:solidFill>
-          <a:ln>
-            <a:noFill/>
-          </a:ln>
-        </p:spPr>
-        <p:style>
-          <a:lnRef idx="1">
-            <a:schemeClr val="accent1"/>
-          </a:lnRef>
-          <a:fillRef idx="3">
-            <a:schemeClr val="accent1"/>
-          </a:fillRef>
-          <a:effectRef idx="2">
-            <a:schemeClr val="accent1"/>
-          </a:effectRef>
-          <a:fontRef idx="minor">
-            <a:schemeClr val="lt1"/>
-          </a:fontRef>
-        </p:style>
-        <p:txBody>
-          <a:bodyPr rtlCol="0" anchor="ctr"/>
-          <a:lstStyle/>
-          <a:p>
-            <a:pPr algn="ctr"/>
-          </a:p>
-        </p:txBody>
-      </p:sp>
-      <p:sp>
-        <p:nvSpPr>
-          <p:cNvPr id="5" name="TextBox 4"/>
+          <p:cNvPr id="22" name="TextBox 21"/>
           <p:cNvSpPr txBox="1"/>
           <p:nvPr/>
         </p:nvSpPr>
         <p:spPr>
           <a:xfrm>
-            <a:off x="731520" y="274320"/>
-            <a:ext cx="5943600" cy="3657600"/>
+            <a:off x="1097280" y="7772400"/>
+            <a:ext cx="8686800" cy="914400"/>
           </a:xfrm>
           <a:prstGeom prst="rect">
             <a:avLst/>
@@ -3240,40 +4016,38 @@
           <a:lstStyle/>
           <a:p>
             <a:r>
-              <a:rPr sz="3600" b="1">
+              <a:rPr sz="1100" b="1">
+                <a:solidFill>
+                  <a:srgbClr val="00A3E0"/>
+                </a:solidFill>
+                <a:latin typeface="Arial"/>
+              </a:rPr>
+              <a:t>SECTION 1: INDUSTRIAL THREAT LANDSCAPE</a:t>
+            </a:r>
+          </a:p>
+          <a:p>
+            <a:r>
+              <a:rPr sz="1800" b="1">
                 <a:solidFill>
                   <a:srgbClr val="FFFFFF"/>
                 </a:solidFill>
                 <a:latin typeface="Arial"/>
               </a:rPr>
-              <a:t>UEW</a:t>
-            </a:r>
-          </a:p>
-          <a:p>
-            <a:r>
-              <a:rPr sz="1300" b="1">
-                <a:solidFill>
-                  <a:srgbClr val="00A3E0"/>
-                </a:solidFill>
-                <a:latin typeface="Arial"/>
-              </a:rPr>
-              <a:t>UNIVERSITY OF EDUCATION,
-WINNEBA, GHANA
-&amp; KAYABA LABS</a:t>
-            </a:r>
-          </a:p>
-        </p:txBody>
-      </p:sp>
-      <p:sp>
-        <p:nvSpPr>
-          <p:cNvPr id="6" name="TextBox 5"/>
+              <a:t>The Death of the Air-Gap in Smart Mines</a:t>
+            </a:r>
+          </a:p>
+        </p:txBody>
+      </p:sp>
+      <p:sp>
+        <p:nvSpPr>
+          <p:cNvPr id="23" name="TextBox 22"/>
           <p:cNvSpPr txBox="1"/>
           <p:nvPr/>
         </p:nvSpPr>
         <p:spPr>
           <a:xfrm>
-            <a:off x="37033200" y="274320"/>
-            <a:ext cx="6126480" cy="3657600"/>
+            <a:off x="1005840" y="8869680"/>
+            <a:ext cx="8869680" cy="7498079"/>
           </a:xfrm>
           <a:prstGeom prst="rect">
             <a:avLst/>
@@ -3285,259 +4059,81 @@
             <a:spAutoFit/>
           </a:bodyPr>
           <a:lstStyle/>
-          <a:p>
-            <a:pPr algn="r"/>
-            <a:r>
-              <a:rPr sz="3400" b="1">
-                <a:solidFill>
-                  <a:srgbClr val="FFD700"/>
-                </a:solidFill>
-                <a:latin typeface="Arial"/>
-              </a:rPr>
-              <a:t>UNESCO</a:t>
-            </a:r>
-          </a:p>
-          <a:p>
-            <a:pPr algn="r"/>
-            <a:r>
-              <a:rPr sz="1300" b="1">
-                <a:solidFill>
-                  <a:srgbClr val="FFFFFF"/>
-                </a:solidFill>
-                <a:latin typeface="Arial"/>
-              </a:rPr>
-              <a:t>Russian-African Forum
-Track 3: Smart Subsoil
-Saint Petersburg Mining Univ.</a:t>
-            </a:r>
-          </a:p>
-        </p:txBody>
-      </p:sp>
-      <p:sp>
-        <p:nvSpPr>
-          <p:cNvPr id="7" name="TextBox 6"/>
-          <p:cNvSpPr txBox="1"/>
-          <p:nvPr/>
-        </p:nvSpPr>
-        <p:spPr>
-          <a:xfrm>
-            <a:off x="6858000" y="182880"/>
-            <a:ext cx="30175200" cy="3931920"/>
-          </a:xfrm>
-          <a:prstGeom prst="rect">
-            <a:avLst/>
-          </a:prstGeom>
-          <a:noFill/>
-        </p:spPr>
-        <p:txBody>
-          <a:bodyPr wrap="square">
-            <a:spAutoFit/>
-          </a:bodyPr>
-          <a:lstStyle/>
-          <a:p>
-            <a:pPr algn="ctr"/>
-            <a:r>
-              <a:rPr sz="3000" b="1">
-                <a:solidFill>
-                  <a:srgbClr val="FFFFFF"/>
-                </a:solidFill>
-                <a:latin typeface="Arial"/>
-              </a:rPr>
-              <a:t>Securing the Digital Mine with a Metaheuristic-Optimized
-Deep Learning Adaptive System</a:t>
-            </a:r>
-          </a:p>
-          <a:p>
-            <a:pPr algn="ctr">
-              <a:spcBef>
-                <a:spcPts val="400"/>
-              </a:spcBef>
-            </a:pPr>
-            <a:r>
-              <a:rPr sz="1600" b="1">
-                <a:solidFill>
-                  <a:srgbClr val="FFD700"/>
-                </a:solidFill>
-                <a:latin typeface="Times New Roman"/>
-              </a:rPr>
-              <a:t>John Okyere (Lead), Ezekeil Baah, Clement Baffour, Parker Paa Annobil, George Akwesi Bonnah</a:t>
-            </a:r>
-          </a:p>
-          <a:p>
-            <a:pPr algn="ctr"/>
-            <a:r>
-              <a:rPr sz="1300" i="1">
-                <a:solidFill>
-                  <a:srgbClr val="E2E8F0"/>
-                </a:solidFill>
-                <a:latin typeface="Times New Roman"/>
-              </a:rPr>
-              <a:t>Department of ICT, University of Education, Winneba &amp; Kayaba Labs | Saint Petersburg, Russia 2026</a:t>
-            </a:r>
-          </a:p>
-        </p:txBody>
-      </p:sp>
-      <p:sp>
-        <p:nvSpPr>
-          <p:cNvPr id="8" name="TextBox 7"/>
-          <p:cNvSpPr txBox="1"/>
-          <p:nvPr/>
-        </p:nvSpPr>
-        <p:spPr>
-          <a:xfrm>
-            <a:off x="914400" y="4663440"/>
-            <a:ext cx="13258800" cy="457200"/>
-          </a:xfrm>
-          <a:prstGeom prst="rect">
-            <a:avLst/>
-          </a:prstGeom>
-          <a:noFill/>
-        </p:spPr>
-        <p:txBody>
-          <a:bodyPr wrap="none">
-            <a:spAutoFit/>
-          </a:bodyPr>
-          <a:lstStyle/>
-          <a:p>
-            <a:r>
-              <a:rPr sz="1800" b="1">
-                <a:solidFill>
-                  <a:srgbClr val="00529B"/>
-                </a:solidFill>
-                <a:latin typeface="Arial"/>
-              </a:rPr>
-              <a:t>1. Industrial Threat Landscape &amp; Context</a:t>
-            </a:r>
-          </a:p>
-        </p:txBody>
-      </p:sp>
-      <p:sp>
-        <p:nvSpPr>
-          <p:cNvPr id="9" name="TextBox 8"/>
-          <p:cNvSpPr txBox="1"/>
-          <p:nvPr/>
-        </p:nvSpPr>
-        <p:spPr>
-          <a:xfrm>
-            <a:off x="914400" y="5166360"/>
-            <a:ext cx="13258800" cy="2468880"/>
-          </a:xfrm>
-          <a:prstGeom prst="rect">
-            <a:avLst/>
-          </a:prstGeom>
-          <a:noFill/>
-        </p:spPr>
-        <p:txBody>
-          <a:bodyPr wrap="square">
-            <a:spAutoFit/>
-          </a:bodyPr>
-          <a:lstStyle/>
           <a:p/>
           <a:p>
             <a:pPr>
               <a:spcAft>
-                <a:spcPts val="200"/>
+                <a:spcPts val="800"/>
               </a:spcAft>
             </a:pPr>
             <a:r>
-              <a:rPr b="1" sz="1000">
+              <a:rPr b="1" sz="1400">
                 <a:solidFill>
                   <a:srgbClr val="00529B"/>
                 </a:solidFill>
-                <a:latin typeface="Times New Roman"/>
-              </a:rPr>
-              <a:t>• Smart Subsoil Digitalization: </a:t>
-            </a:r>
-            <a:r>
-              <a:rPr sz="950">
+              </a:rPr>
+              <a:t>• Air-Gap Collapse: </a:t>
+            </a:r>
+            <a:r>
+              <a:rPr sz="1350">
                 <a:solidFill>
                   <a:srgbClr val="0F172A"/>
                 </a:solidFill>
-                <a:latin typeface="Times New Roman"/>
-              </a:rPr>
-              <a:t>African and Russian mining operations integrate IoT sensors, SCADA telemetry, and automated milling to drive ore recovery in SAG mills, flotation circuits, and tailings dams.</a:t>
+              </a:rPr>
+              <a:t>Smart Subsoil digitalization connects SAG mills, froth flotation circuits, and tailings dams to cloud twins, exposing unauthenticated Modbus/DNP3 protocols to zero-day intrusion.</a:t>
             </a:r>
           </a:p>
           <a:p>
             <a:pPr>
               <a:spcAft>
-                <a:spcPts val="200"/>
+                <a:spcPts val="800"/>
               </a:spcAft>
             </a:pPr>
             <a:r>
-              <a:rPr b="1" sz="1000">
+              <a:rPr b="1" sz="1400">
                 <a:solidFill>
                   <a:srgbClr val="00529B"/>
                 </a:solidFill>
-                <a:latin typeface="Times New Roman"/>
-              </a:rPr>
-              <a:t>• Air-Gap Collapse: </a:t>
-            </a:r>
-            <a:r>
-              <a:rPr sz="950">
+              </a:rPr>
+              <a:t>• Catastrophic Outage Costs: </a:t>
+            </a:r>
+            <a:r>
+              <a:rPr sz="1350">
                 <a:solidFill>
                   <a:srgbClr val="0F172A"/>
                 </a:solidFill>
-                <a:latin typeface="Times New Roman"/>
-              </a:rPr>
-              <a:t>Connecting OT networks to cloud digital twins exposes unauthenticated Modbus RTU/TCP and DNP3 industrial protocols to hostile zero-day cyber attacks.</a:t>
+              </a:rPr>
+              <a:t>Unplanned mining downtime costs USD $50,000 to $500,000 per hour. Tampering with toxic gas sensors or dewatering pumps creates severe life safety hazards.</a:t>
             </a:r>
           </a:p>
           <a:p>
             <a:pPr>
               <a:spcAft>
-                <a:spcPts val="200"/>
+                <a:spcPts val="800"/>
               </a:spcAft>
             </a:pPr>
             <a:r>
-              <a:rPr b="1" sz="1000">
+              <a:rPr b="1" sz="1400">
                 <a:solidFill>
                   <a:srgbClr val="00529B"/>
                 </a:solidFill>
-                <a:latin typeface="Times New Roman"/>
-              </a:rPr>
-              <a:t>• Downtime Losses: </a:t>
-            </a:r>
-            <a:r>
-              <a:rPr sz="950">
+              </a:rPr>
+              <a:t>• Traditional IDS Failures: </a:t>
+            </a:r>
+            <a:r>
+              <a:rPr sz="1350">
                 <a:solidFill>
                   <a:srgbClr val="0F172A"/>
                 </a:solidFill>
-                <a:latin typeface="Times New Roman"/>
-              </a:rPr>
-              <a:t>Unplanned mining downtime costs USD $50,000 to $500,000 per hour; cyber manipulation of ventilation or dewatering creates immediate life safety risks.</a:t>
-            </a:r>
-          </a:p>
-          <a:p>
-            <a:pPr>
-              <a:spcAft>
-                <a:spcPts val="200"/>
-              </a:spcAft>
-            </a:pPr>
-            <a:r>
-              <a:rPr b="1" sz="1000">
-                <a:solidFill>
-                  <a:srgbClr val="00529B"/>
-                </a:solidFill>
-                <a:latin typeface="Times New Roman"/>
-              </a:rPr>
-              <a:t>• Failure of IT-Centric IDS: </a:t>
-            </a:r>
-            <a:r>
-              <a:rPr sz="950">
-                <a:solidFill>
-                  <a:srgbClr val="0F172A"/>
-                </a:solidFill>
-                <a:latin typeface="Times New Roman"/>
-              </a:rPr>
-              <a:t>Traditional tools evaluate 41+ features taking 150+ ms, directly violating the 20 to 50 millisecond control loop deadlines of industrial PLCs.</a:t>
+              </a:rPr>
+              <a:t>Heavyweight enterprise IDS tools require 150+ milliseconds to evaluate 41 features, violating the 20 to 50 millisecond control loop deadlines of industrial PLCs.</a:t>
             </a:r>
           </a:p>
         </p:txBody>
       </p:sp>
       <p:pic>
         <p:nvPicPr>
-          <p:cNvPr id="10" name="Picture 9" descr="mining_scada_flowchart.png"/>
+          <p:cNvPr id="24" name="Picture 23" descr="mining_scada_flowchart.png"/>
           <p:cNvPicPr>
             <a:picLocks noChangeAspect="1"/>
           </p:cNvPicPr>
@@ -3551,8 +4147,8 @@
         </p:blipFill>
         <p:spPr>
           <a:xfrm>
-            <a:off x="914400" y="7772400"/>
-            <a:ext cx="13258800" cy="6568580"/>
+            <a:off x="1005840" y="16276320"/>
+            <a:ext cx="8869680" cy="4394153"/>
           </a:xfrm>
           <a:prstGeom prst="rect">
             <a:avLst/>
@@ -3561,54 +4157,20 @@
       </p:pic>
       <p:sp>
         <p:nvSpPr>
-          <p:cNvPr id="11" name="TextBox 10"/>
-          <p:cNvSpPr txBox="1"/>
-          <p:nvPr/>
-        </p:nvSpPr>
-        <p:spPr>
-          <a:xfrm>
-            <a:off x="914400" y="12984480"/>
-            <a:ext cx="13258800" cy="457200"/>
-          </a:xfrm>
-          <a:prstGeom prst="rect">
-            <a:avLst/>
-          </a:prstGeom>
-          <a:noFill/>
-        </p:spPr>
-        <p:txBody>
-          <a:bodyPr wrap="none">
-            <a:spAutoFit/>
-          </a:bodyPr>
-          <a:lstStyle/>
-          <a:p>
-            <a:r>
-              <a:rPr sz="1800" b="1">
-                <a:solidFill>
-                  <a:srgbClr val="00529B"/>
-                </a:solidFill>
-                <a:latin typeface="Arial"/>
-              </a:rPr>
-              <a:t>2. Method &amp; BWOA Mathematics</a:t>
-            </a:r>
-          </a:p>
-        </p:txBody>
-      </p:sp>
-      <p:sp>
-        <p:nvSpPr>
-          <p:cNvPr id="12" name="Rounded Rectangle 11"/>
+          <p:cNvPr id="25" name="Rounded Rectangle 24"/>
           <p:cNvSpPr/>
           <p:nvPr/>
         </p:nvSpPr>
         <p:spPr>
           <a:xfrm>
-            <a:off x="914400" y="13487400"/>
-            <a:ext cx="13258800" cy="13533120"/>
+            <a:off x="822960" y="25237440"/>
+            <a:ext cx="9235440" cy="17007840"/>
           </a:xfrm>
           <a:prstGeom prst="roundRect">
             <a:avLst/>
           </a:prstGeom>
           <a:solidFill>
-            <a:srgbClr val="F8FAFC"/>
+            <a:srgbClr val="FFFFFF"/>
           </a:solidFill>
           <a:ln w="19050">
             <a:solidFill>
@@ -3640,219 +4202,16 @@
       </p:sp>
       <p:sp>
         <p:nvSpPr>
-          <p:cNvPr id="13" name="TextBox 12"/>
-          <p:cNvSpPr txBox="1"/>
-          <p:nvPr/>
-        </p:nvSpPr>
-        <p:spPr>
-          <a:xfrm>
-            <a:off x="1097280" y="13670280"/>
-            <a:ext cx="12893040" cy="13167360"/>
-          </a:xfrm>
-          <a:prstGeom prst="rect">
-            <a:avLst/>
-          </a:prstGeom>
-          <a:noFill/>
-        </p:spPr>
-        <p:txBody>
-          <a:bodyPr wrap="square">
-            <a:spAutoFit/>
-          </a:bodyPr>
-          <a:lstStyle/>
-          <a:p/>
-          <a:p>
-            <a:pPr>
-              <a:spcAft>
-                <a:spcPts val="400"/>
-              </a:spcAft>
-            </a:pPr>
-            <a:r>
-              <a:rPr b="1" sz="1000">
-                <a:solidFill>
-                  <a:srgbClr val="00529B"/>
-                </a:solidFill>
-                <a:latin typeface="Times New Roman"/>
-              </a:rPr>
-              <a:t>• Data Ingestion Layer: </a:t>
-            </a:r>
-            <a:r>
-              <a:rPr sz="950">
-                <a:solidFill>
-                  <a:srgbClr val="0F172A"/>
-                </a:solidFill>
-                <a:latin typeface="Times New Roman"/>
-              </a:rPr>
-              <a:t>Promiscuous packet capture using @mhiskall282/unesco-mine-sec-cli parsing IP/TCP/Modbus packet headers at wire speed without packet drops.</a:t>
-            </a:r>
-          </a:p>
-          <a:p>
-            <a:pPr>
-              <a:spcAft>
-                <a:spcPts val="400"/>
-              </a:spcAft>
-            </a:pPr>
-            <a:r>
-              <a:rPr b="1" sz="1000">
-                <a:solidFill>
-                  <a:srgbClr val="00529B"/>
-                </a:solidFill>
-                <a:latin typeface="Times New Roman"/>
-              </a:rPr>
-              <a:t>• 1. Shrinking Encircling Phase: </a:t>
-            </a:r>
-            <a:r>
-              <a:rPr sz="950">
-                <a:solidFill>
-                  <a:srgbClr val="0F172A"/>
-                </a:solidFill>
-                <a:latin typeface="Times New Roman"/>
-              </a:rPr>
-              <a:t>D = |C * X*(t) - X(t)|,  X(t+1) = X*(t) - A * D
-where A = 2a*r1 - a, C = 2*r2, and 'a' linearly decreases from 2 to 0 over iterations.</a:t>
-            </a:r>
-          </a:p>
-          <a:p>
-            <a:pPr>
-              <a:spcAft>
-                <a:spcPts val="400"/>
-              </a:spcAft>
-            </a:pPr>
-            <a:r>
-              <a:rPr b="1" sz="1000">
-                <a:solidFill>
-                  <a:srgbClr val="00529B"/>
-                </a:solidFill>
-                <a:latin typeface="Times New Roman"/>
-              </a:rPr>
-              <a:t>• 2. Spiral Bubble-Net Foraging: </a:t>
-            </a:r>
-            <a:r>
-              <a:rPr sz="950">
-                <a:solidFill>
-                  <a:srgbClr val="0F172A"/>
-                </a:solidFill>
-                <a:latin typeface="Times New Roman"/>
-              </a:rPr>
-              <a:t>X(t+1) = D' * exp(b*l) * cos(2*pi*l) + X*(t)
-where b=1.0, l is uniform in [-1, 1], mathematically modeling the helical hunting maneuver.</a:t>
-            </a:r>
-          </a:p>
-          <a:p>
-            <a:pPr>
-              <a:spcAft>
-                <a:spcPts val="400"/>
-              </a:spcAft>
-            </a:pPr>
-            <a:r>
-              <a:rPr b="1" sz="1000">
-                <a:solidFill>
-                  <a:srgbClr val="00529B"/>
-                </a:solidFill>
-                <a:latin typeface="Times New Roman"/>
-              </a:rPr>
-              <a:t>• 3. V-Shaped Binary Transfer Function: </a:t>
-            </a:r>
-            <a:r>
-              <a:rPr sz="950">
-                <a:solidFill>
-                  <a:srgbClr val="0F172A"/>
-                </a:solidFill>
-                <a:latin typeface="Times New Roman"/>
-              </a:rPr>
-              <a:t>V(x) = |x / sqrt(1 + x^2)|,  X_d(t+1) = 1 - X_d(t) if rand() &lt; V(x_d) else X_d(t)
-mapping continuous velocities to discrete stochastic bit-flips without boundary saturation.</a:t>
-            </a:r>
-          </a:p>
-          <a:p>
-            <a:pPr>
-              <a:spcAft>
-                <a:spcPts val="400"/>
-              </a:spcAft>
-            </a:pPr>
-            <a:r>
-              <a:rPr b="1" sz="1000">
-                <a:solidFill>
-                  <a:srgbClr val="00529B"/>
-                </a:solidFill>
-                <a:latin typeface="Times New Roman"/>
-              </a:rPr>
-              <a:t>• 4. Accuracy Floor Fitness Function: </a:t>
-            </a:r>
-            <a:r>
-              <a:rPr sz="950">
-                <a:solidFill>
-                  <a:srgbClr val="0F172A"/>
-                </a:solidFill>
-                <a:latin typeface="Times New Roman"/>
-              </a:rPr>
-              <a:t>Fit(X) = alpha*(1 - Acc(X)) + (1-alpha)*(|X|/D) + Penalty(X)
-where alpha=0.3 (70% weight on accuracy) and Penalty=1.0 if Acc &lt; 0.75 or |X| &lt; 10.</a:t>
-            </a:r>
-          </a:p>
-          <a:p>
-            <a:pPr>
-              <a:spcAft>
-                <a:spcPts val="400"/>
-              </a:spcAft>
-            </a:pPr>
-            <a:r>
-              <a:rPr b="1" sz="1000">
-                <a:solidFill>
-                  <a:srgbClr val="00529B"/>
-                </a:solidFill>
-                <a:latin typeface="Times New Roman"/>
-              </a:rPr>
-              <a:t>• Spatial-Temporal CNN-LSTM Classifier: </a:t>
-            </a:r>
-            <a:r>
-              <a:rPr sz="950">
-                <a:solidFill>
-                  <a:srgbClr val="0F172A"/>
-                </a:solidFill>
-                <a:latin typeface="Times New Roman"/>
-              </a:rPr>
-              <a:t>1D Convolutional layer (64 filters, kernel size 3) + BatchNorm + SpatialDropout(0.3) + LSTM (256 units) + Dense(64) + Softmax(5 classes).</a:t>
-            </a:r>
-          </a:p>
-          <a:p>
-            <a:pPr>
-              <a:spcAft>
-                <a:spcPts val="400"/>
-              </a:spcAft>
-            </a:pPr>
-            <a:r>
-              <a:rPr b="1" sz="1000">
-                <a:solidFill>
-                  <a:srgbClr val="00529B"/>
-                </a:solidFill>
-                <a:latin typeface="Times New Roman"/>
-              </a:rPr>
-              <a:t>• Float16 Edge Quantization: </a:t>
-            </a:r>
-            <a:r>
-              <a:rPr sz="950">
-                <a:solidFill>
-                  <a:srgbClr val="0F172A"/>
-                </a:solidFill>
-                <a:latin typeface="Times New Roman"/>
-              </a:rPr>
-              <a:t>Post-training Float16 quantization compresses model memory footprint to 0.82 MB (83.2% reduction) for sub-millisecond execution on 1GB RAM edge gateways.</a:t>
-            </a:r>
-          </a:p>
-        </p:txBody>
-      </p:sp>
-      <p:sp>
-        <p:nvSpPr>
-          <p:cNvPr id="14" name="Parallelogram 13"/>
+          <p:cNvPr id="26" name="Rounded Rectangle 25"/>
           <p:cNvSpPr/>
           <p:nvPr/>
         </p:nvSpPr>
         <p:spPr>
           <a:xfrm>
-            <a:off x="914400" y="27249120"/>
-            <a:ext cx="548640" cy="1005840"/>
-          </a:xfrm>
-          <a:prstGeom prst="parallelogram">
+            <a:off x="822960" y="25237440"/>
+            <a:ext cx="9235440" cy="1097280"/>
+          </a:xfrm>
+          <a:prstGeom prst="roundRect">
             <a:avLst/>
           </a:prstGeom>
           <a:solidFill>
@@ -3886,315 +4245,14 @@
       </p:sp>
       <p:sp>
         <p:nvSpPr>
-          <p:cNvPr id="15" name="Parallelogram 14"/>
-          <p:cNvSpPr/>
-          <p:nvPr/>
-        </p:nvSpPr>
-        <p:spPr>
-          <a:xfrm>
-            <a:off x="1737360" y="27249120"/>
-            <a:ext cx="548640" cy="1005840"/>
-          </a:xfrm>
-          <a:prstGeom prst="parallelogram">
-            <a:avLst/>
-          </a:prstGeom>
-          <a:solidFill>
-            <a:srgbClr val="00A3E0"/>
-          </a:solidFill>
-          <a:ln>
-            <a:noFill/>
-          </a:ln>
-        </p:spPr>
-        <p:style>
-          <a:lnRef idx="1">
-            <a:schemeClr val="accent1"/>
-          </a:lnRef>
-          <a:fillRef idx="3">
-            <a:schemeClr val="accent1"/>
-          </a:fillRef>
-          <a:effectRef idx="2">
-            <a:schemeClr val="accent1"/>
-          </a:effectRef>
-          <a:fontRef idx="minor">
-            <a:schemeClr val="lt1"/>
-          </a:fontRef>
-        </p:style>
-        <p:txBody>
-          <a:bodyPr rtlCol="0" anchor="ctr"/>
-          <a:lstStyle/>
-          <a:p>
-            <a:pPr algn="ctr"/>
-          </a:p>
-        </p:txBody>
-      </p:sp>
-      <p:sp>
-        <p:nvSpPr>
-          <p:cNvPr id="16" name="Parallelogram 15"/>
-          <p:cNvSpPr/>
-          <p:nvPr/>
-        </p:nvSpPr>
-        <p:spPr>
-          <a:xfrm>
-            <a:off x="2560320" y="27249120"/>
-            <a:ext cx="548640" cy="1005840"/>
-          </a:xfrm>
-          <a:prstGeom prst="parallelogram">
-            <a:avLst/>
-          </a:prstGeom>
-          <a:solidFill>
-            <a:srgbClr val="00529B"/>
-          </a:solidFill>
-          <a:ln>
-            <a:noFill/>
-          </a:ln>
-        </p:spPr>
-        <p:style>
-          <a:lnRef idx="1">
-            <a:schemeClr val="accent1"/>
-          </a:lnRef>
-          <a:fillRef idx="3">
-            <a:schemeClr val="accent1"/>
-          </a:fillRef>
-          <a:effectRef idx="2">
-            <a:schemeClr val="accent1"/>
-          </a:effectRef>
-          <a:fontRef idx="minor">
-            <a:schemeClr val="lt1"/>
-          </a:fontRef>
-        </p:style>
-        <p:txBody>
-          <a:bodyPr rtlCol="0" anchor="ctr"/>
-          <a:lstStyle/>
-          <a:p>
-            <a:pPr algn="ctr"/>
-          </a:p>
-        </p:txBody>
-      </p:sp>
-      <p:sp>
-        <p:nvSpPr>
-          <p:cNvPr id="17" name="Parallelogram 16"/>
-          <p:cNvSpPr/>
-          <p:nvPr/>
-        </p:nvSpPr>
-        <p:spPr>
-          <a:xfrm>
-            <a:off x="3383280" y="27249120"/>
-            <a:ext cx="548640" cy="1005840"/>
-          </a:xfrm>
-          <a:prstGeom prst="parallelogram">
-            <a:avLst/>
-          </a:prstGeom>
-          <a:solidFill>
-            <a:srgbClr val="00A3E0"/>
-          </a:solidFill>
-          <a:ln>
-            <a:noFill/>
-          </a:ln>
-        </p:spPr>
-        <p:style>
-          <a:lnRef idx="1">
-            <a:schemeClr val="accent1"/>
-          </a:lnRef>
-          <a:fillRef idx="3">
-            <a:schemeClr val="accent1"/>
-          </a:fillRef>
-          <a:effectRef idx="2">
-            <a:schemeClr val="accent1"/>
-          </a:effectRef>
-          <a:fontRef idx="minor">
-            <a:schemeClr val="lt1"/>
-          </a:fontRef>
-        </p:style>
-        <p:txBody>
-          <a:bodyPr rtlCol="0" anchor="ctr"/>
-          <a:lstStyle/>
-          <a:p>
-            <a:pPr algn="ctr"/>
-          </a:p>
-        </p:txBody>
-      </p:sp>
-      <p:sp>
-        <p:nvSpPr>
-          <p:cNvPr id="18" name="Parallelogram 17"/>
-          <p:cNvSpPr/>
-          <p:nvPr/>
-        </p:nvSpPr>
-        <p:spPr>
-          <a:xfrm>
-            <a:off x="4206240" y="27249120"/>
-            <a:ext cx="548640" cy="1005840"/>
-          </a:xfrm>
-          <a:prstGeom prst="parallelogram">
-            <a:avLst/>
-          </a:prstGeom>
-          <a:solidFill>
-            <a:srgbClr val="00529B"/>
-          </a:solidFill>
-          <a:ln>
-            <a:noFill/>
-          </a:ln>
-        </p:spPr>
-        <p:style>
-          <a:lnRef idx="1">
-            <a:schemeClr val="accent1"/>
-          </a:lnRef>
-          <a:fillRef idx="3">
-            <a:schemeClr val="accent1"/>
-          </a:fillRef>
-          <a:effectRef idx="2">
-            <a:schemeClr val="accent1"/>
-          </a:effectRef>
-          <a:fontRef idx="minor">
-            <a:schemeClr val="lt1"/>
-          </a:fontRef>
-        </p:style>
-        <p:txBody>
-          <a:bodyPr rtlCol="0" anchor="ctr"/>
-          <a:lstStyle/>
-          <a:p>
-            <a:pPr algn="ctr"/>
-          </a:p>
-        </p:txBody>
-      </p:sp>
-      <p:sp>
-        <p:nvSpPr>
-          <p:cNvPr id="19" name="Parallelogram 18"/>
-          <p:cNvSpPr/>
-          <p:nvPr/>
-        </p:nvSpPr>
-        <p:spPr>
-          <a:xfrm>
-            <a:off x="5029200" y="27249120"/>
-            <a:ext cx="548640" cy="1005840"/>
-          </a:xfrm>
-          <a:prstGeom prst="parallelogram">
-            <a:avLst/>
-          </a:prstGeom>
-          <a:solidFill>
-            <a:srgbClr val="00A3E0"/>
-          </a:solidFill>
-          <a:ln>
-            <a:noFill/>
-          </a:ln>
-        </p:spPr>
-        <p:style>
-          <a:lnRef idx="1">
-            <a:schemeClr val="accent1"/>
-          </a:lnRef>
-          <a:fillRef idx="3">
-            <a:schemeClr val="accent1"/>
-          </a:fillRef>
-          <a:effectRef idx="2">
-            <a:schemeClr val="accent1"/>
-          </a:effectRef>
-          <a:fontRef idx="minor">
-            <a:schemeClr val="lt1"/>
-          </a:fontRef>
-        </p:style>
-        <p:txBody>
-          <a:bodyPr rtlCol="0" anchor="ctr"/>
-          <a:lstStyle/>
-          <a:p>
-            <a:pPr algn="ctr"/>
-          </a:p>
-        </p:txBody>
-      </p:sp>
-      <p:sp>
-        <p:nvSpPr>
-          <p:cNvPr id="20" name="Parallelogram 19"/>
-          <p:cNvSpPr/>
-          <p:nvPr/>
-        </p:nvSpPr>
-        <p:spPr>
-          <a:xfrm>
-            <a:off x="5852160" y="27249120"/>
-            <a:ext cx="548640" cy="1005840"/>
-          </a:xfrm>
-          <a:prstGeom prst="parallelogram">
-            <a:avLst/>
-          </a:prstGeom>
-          <a:solidFill>
-            <a:srgbClr val="00529B"/>
-          </a:solidFill>
-          <a:ln>
-            <a:noFill/>
-          </a:ln>
-        </p:spPr>
-        <p:style>
-          <a:lnRef idx="1">
-            <a:schemeClr val="accent1"/>
-          </a:lnRef>
-          <a:fillRef idx="3">
-            <a:schemeClr val="accent1"/>
-          </a:fillRef>
-          <a:effectRef idx="2">
-            <a:schemeClr val="accent1"/>
-          </a:effectRef>
-          <a:fontRef idx="minor">
-            <a:schemeClr val="lt1"/>
-          </a:fontRef>
-        </p:style>
-        <p:txBody>
-          <a:bodyPr rtlCol="0" anchor="ctr"/>
-          <a:lstStyle/>
-          <a:p>
-            <a:pPr algn="ctr"/>
-          </a:p>
-        </p:txBody>
-      </p:sp>
-      <p:sp>
-        <p:nvSpPr>
-          <p:cNvPr id="21" name="Parallelogram 20"/>
-          <p:cNvSpPr/>
-          <p:nvPr/>
-        </p:nvSpPr>
-        <p:spPr>
-          <a:xfrm>
-            <a:off x="6675120" y="27249120"/>
-            <a:ext cx="548640" cy="1005840"/>
-          </a:xfrm>
-          <a:prstGeom prst="parallelogram">
-            <a:avLst/>
-          </a:prstGeom>
-          <a:solidFill>
-            <a:srgbClr val="00A3E0"/>
-          </a:solidFill>
-          <a:ln>
-            <a:noFill/>
-          </a:ln>
-        </p:spPr>
-        <p:style>
-          <a:lnRef idx="1">
-            <a:schemeClr val="accent1"/>
-          </a:lnRef>
-          <a:fillRef idx="3">
-            <a:schemeClr val="accent1"/>
-          </a:fillRef>
-          <a:effectRef idx="2">
-            <a:schemeClr val="accent1"/>
-          </a:effectRef>
-          <a:fontRef idx="minor">
-            <a:schemeClr val="lt1"/>
-          </a:fontRef>
-        </p:style>
-        <p:txBody>
-          <a:bodyPr rtlCol="0" anchor="ctr"/>
-          <a:lstStyle/>
-          <a:p>
-            <a:pPr algn="ctr"/>
-          </a:p>
-        </p:txBody>
-      </p:sp>
-      <p:sp>
-        <p:nvSpPr>
-          <p:cNvPr id="22" name="TextBox 21"/>
+          <p:cNvPr id="27" name="TextBox 26"/>
           <p:cNvSpPr txBox="1"/>
           <p:nvPr/>
         </p:nvSpPr>
         <p:spPr>
           <a:xfrm>
-            <a:off x="15316200" y="4663440"/>
-            <a:ext cx="13258800" cy="457200"/>
+            <a:off x="1097280" y="25328880"/>
+            <a:ext cx="8686800" cy="914400"/>
           </a:xfrm>
           <a:prstGeom prst="rect">
             <a:avLst/>
@@ -4208,20 +4266,31 @@
           <a:lstStyle/>
           <a:p>
             <a:r>
+              <a:rPr sz="1100" b="1">
+                <a:solidFill>
+                  <a:srgbClr val="00A3E0"/>
+                </a:solidFill>
+                <a:latin typeface="Arial"/>
+              </a:rPr>
+              <a:t>SECTION 2: RESEARCH METHODOLOGY</a:t>
+            </a:r>
+          </a:p>
+          <a:p>
+            <a:r>
               <a:rPr sz="1800" b="1">
                 <a:solidFill>
-                  <a:srgbClr val="00529B"/>
+                  <a:srgbClr val="FFFFFF"/>
                 </a:solidFill>
                 <a:latin typeface="Arial"/>
               </a:rPr>
-              <a:t>3. 4-Layer System Architecture</a:t>
+              <a:t>Design Science Research (DSR) Execution</a:t>
             </a:r>
           </a:p>
         </p:txBody>
       </p:sp>
       <p:pic>
         <p:nvPicPr>
-          <p:cNvPr id="23" name="Picture 22" descr="system_architecture.png"/>
+          <p:cNvPr id="28" name="Picture 27" descr="dsr_framework.png"/>
           <p:cNvPicPr>
             <a:picLocks noChangeAspect="1"/>
           </p:cNvPicPr>
@@ -4235,8 +4304,8 @@
         </p:blipFill>
         <p:spPr>
           <a:xfrm>
-            <a:off x="15316200" y="5212080"/>
-            <a:ext cx="13258800" cy="7778550"/>
+            <a:off x="1005840" y="26517600"/>
+            <a:ext cx="8869680" cy="3652221"/>
           </a:xfrm>
           <a:prstGeom prst="rect">
             <a:avLst/>
@@ -4245,14 +4314,14 @@
       </p:pic>
       <p:sp>
         <p:nvSpPr>
-          <p:cNvPr id="24" name="TextBox 23"/>
+          <p:cNvPr id="29" name="TextBox 28"/>
           <p:cNvSpPr txBox="1"/>
           <p:nvPr/>
         </p:nvSpPr>
         <p:spPr>
           <a:xfrm>
-            <a:off x="15316200" y="12984480"/>
-            <a:ext cx="13258800" cy="457200"/>
+            <a:off x="1005840" y="34015680"/>
+            <a:ext cx="8869680" cy="7680960"/>
           </a:xfrm>
           <a:prstGeom prst="rect">
             <a:avLst/>
@@ -4260,26 +4329,264 @@
           <a:noFill/>
         </p:spPr>
         <p:txBody>
+          <a:bodyPr wrap="square">
+            <a:spAutoFit/>
+          </a:bodyPr>
+          <a:lstStyle/>
+          <a:p/>
+          <a:p>
+            <a:pPr>
+              <a:spcAft>
+                <a:spcPts val="600"/>
+              </a:spcAft>
+            </a:pPr>
+            <a:r>
+              <a:rPr b="1" sz="1350">
+                <a:solidFill>
+                  <a:srgbClr val="10B981"/>
+                </a:solidFill>
+              </a:rPr>
+              <a:t>✓ Stage 1 (Problem Identification): </a:t>
+            </a:r>
+            <a:r>
+              <a:rPr sz="1300">
+                <a:solidFill>
+                  <a:srgbClr val="0F172A"/>
+                </a:solidFill>
+              </a:rPr>
+              <a:t>Air-gap loss &amp; SCADA real-time deadlines in African/Russian mines.</a:t>
+            </a:r>
+          </a:p>
+          <a:p>
+            <a:pPr>
+              <a:spcAft>
+                <a:spcPts val="600"/>
+              </a:spcAft>
+            </a:pPr>
+            <a:r>
+              <a:rPr b="1" sz="1350">
+                <a:solidFill>
+                  <a:srgbClr val="10B981"/>
+                </a:solidFill>
+              </a:rPr>
+              <a:t>✓ Stage 2 (Define Objectives): </a:t>
+            </a:r>
+            <a:r>
+              <a:rPr sz="1300">
+                <a:solidFill>
+                  <a:srgbClr val="0F172A"/>
+                </a:solidFill>
+              </a:rPr>
+              <a:t>Target &lt; 1.0 ms latency, &lt; 1.0 MB model size, 1GB RAM edge support.</a:t>
+            </a:r>
+          </a:p>
+          <a:p>
+            <a:pPr>
+              <a:spcAft>
+                <a:spcPts val="600"/>
+              </a:spcAft>
+            </a:pPr>
+            <a:r>
+              <a:rPr b="1" sz="1350">
+                <a:solidFill>
+                  <a:srgbClr val="10B981"/>
+                </a:solidFill>
+              </a:rPr>
+              <a:t>✓ Stage 3 (Design &amp; Artifact): </a:t>
+            </a:r>
+            <a:r>
+              <a:rPr sz="1300">
+                <a:solidFill>
+                  <a:srgbClr val="0F172A"/>
+                </a:solidFill>
+              </a:rPr>
+              <a:t>BWOA metaheuristic + Conv1D-LSTM + Float16 quantization.</a:t>
+            </a:r>
+          </a:p>
+          <a:p>
+            <a:pPr>
+              <a:spcAft>
+                <a:spcPts val="600"/>
+              </a:spcAft>
+            </a:pPr>
+            <a:r>
+              <a:rPr b="1" sz="1350">
+                <a:solidFill>
+                  <a:srgbClr val="10B981"/>
+                </a:solidFill>
+              </a:rPr>
+              <a:t>✓ Stage 4 (Demonstration): </a:t>
+            </a:r>
+            <a:r>
+              <a:rPr sz="1300">
+                <a:solidFill>
+                  <a:srgbClr val="0F172A"/>
+                </a:solidFill>
+              </a:rPr>
+              <a:t>Packaged global CLI agent (@mhiskall282/unesco-mine-sec-cli).</a:t>
+            </a:r>
+          </a:p>
+          <a:p>
+            <a:pPr>
+              <a:spcAft>
+                <a:spcPts val="600"/>
+              </a:spcAft>
+            </a:pPr>
+            <a:r>
+              <a:rPr b="1" sz="1350">
+                <a:solidFill>
+                  <a:srgbClr val="10B981"/>
+                </a:solidFill>
+              </a:rPr>
+              <a:t>✓ Stage 5 (Evaluation): </a:t>
+            </a:r>
+            <a:r>
+              <a:rPr sz="1300">
+                <a:solidFill>
+                  <a:srgbClr val="0F172A"/>
+                </a:solidFill>
+              </a:rPr>
+              <a:t>NSL-KDD benchmark, SWaT transfer learning, and 75/75 unit test suites.</a:t>
+            </a:r>
+          </a:p>
+        </p:txBody>
+      </p:sp>
+      <p:sp>
+        <p:nvSpPr>
+          <p:cNvPr id="30" name="Rounded Rectangle 29"/>
+          <p:cNvSpPr/>
+          <p:nvPr/>
+        </p:nvSpPr>
+        <p:spPr>
+          <a:xfrm>
+            <a:off x="10469880" y="7680960"/>
+            <a:ext cx="9235440" cy="17190720"/>
+          </a:xfrm>
+          <a:prstGeom prst="roundRect">
+            <a:avLst/>
+          </a:prstGeom>
+          <a:solidFill>
+            <a:srgbClr val="FFFFFF"/>
+          </a:solidFill>
+          <a:ln w="19050">
+            <a:solidFill>
+              <a:srgbClr val="CBD5E1"/>
+            </a:solidFill>
+          </a:ln>
+        </p:spPr>
+        <p:style>
+          <a:lnRef idx="1">
+            <a:schemeClr val="accent1"/>
+          </a:lnRef>
+          <a:fillRef idx="3">
+            <a:schemeClr val="accent1"/>
+          </a:fillRef>
+          <a:effectRef idx="2">
+            <a:schemeClr val="accent1"/>
+          </a:effectRef>
+          <a:fontRef idx="minor">
+            <a:schemeClr val="lt1"/>
+          </a:fontRef>
+        </p:style>
+        <p:txBody>
+          <a:bodyPr rtlCol="0" anchor="ctr"/>
+          <a:lstStyle/>
+          <a:p>
+            <a:pPr algn="ctr"/>
+          </a:p>
+        </p:txBody>
+      </p:sp>
+      <p:sp>
+        <p:nvSpPr>
+          <p:cNvPr id="31" name="Rounded Rectangle 30"/>
+          <p:cNvSpPr/>
+          <p:nvPr/>
+        </p:nvSpPr>
+        <p:spPr>
+          <a:xfrm>
+            <a:off x="10469880" y="7680960"/>
+            <a:ext cx="9235440" cy="1097280"/>
+          </a:xfrm>
+          <a:prstGeom prst="roundRect">
+            <a:avLst/>
+          </a:prstGeom>
+          <a:solidFill>
+            <a:srgbClr val="00529B"/>
+          </a:solidFill>
+          <a:ln>
+            <a:noFill/>
+          </a:ln>
+        </p:spPr>
+        <p:style>
+          <a:lnRef idx="1">
+            <a:schemeClr val="accent1"/>
+          </a:lnRef>
+          <a:fillRef idx="3">
+            <a:schemeClr val="accent1"/>
+          </a:fillRef>
+          <a:effectRef idx="2">
+            <a:schemeClr val="accent1"/>
+          </a:effectRef>
+          <a:fontRef idx="minor">
+            <a:schemeClr val="lt1"/>
+          </a:fontRef>
+        </p:style>
+        <p:txBody>
+          <a:bodyPr rtlCol="0" anchor="ctr"/>
+          <a:lstStyle/>
+          <a:p>
+            <a:pPr algn="ctr"/>
+          </a:p>
+        </p:txBody>
+      </p:sp>
+      <p:sp>
+        <p:nvSpPr>
+          <p:cNvPr id="32" name="TextBox 31"/>
+          <p:cNvSpPr txBox="1"/>
+          <p:nvPr/>
+        </p:nvSpPr>
+        <p:spPr>
+          <a:xfrm>
+            <a:off x="10744200" y="7772400"/>
+            <a:ext cx="8686800" cy="914400"/>
+          </a:xfrm>
+          <a:prstGeom prst="rect">
+            <a:avLst/>
+          </a:prstGeom>
+          <a:noFill/>
+        </p:spPr>
+        <p:txBody>
           <a:bodyPr wrap="none">
             <a:spAutoFit/>
           </a:bodyPr>
           <a:lstStyle/>
           <a:p>
             <a:r>
+              <a:rPr sz="1100" b="1">
+                <a:solidFill>
+                  <a:srgbClr val="00A3E0"/>
+                </a:solidFill>
+                <a:latin typeface="Arial"/>
+              </a:rPr>
+              <a:t>SECTION 3: TECHNOLOGICAL INNOVATION</a:t>
+            </a:r>
+          </a:p>
+          <a:p>
+            <a:r>
               <a:rPr sz="1800" b="1">
                 <a:solidFill>
-                  <a:srgbClr val="00529B"/>
+                  <a:srgbClr val="FFFFFF"/>
                 </a:solidFill>
                 <a:latin typeface="Arial"/>
               </a:rPr>
-              <a:t>4. BWOA Optimization Analysis</a:t>
+              <a:t>4-Layer Edge-to-Cloud Security Architecture</a:t>
             </a:r>
           </a:p>
         </p:txBody>
       </p:sp>
       <p:pic>
         <p:nvPicPr>
-          <p:cNvPr id="25" name="Picture 24" descr="bwoa_convergence.png"/>
+          <p:cNvPr id="33" name="Picture 32" descr="system_architecture.png"/>
           <p:cNvPicPr>
             <a:picLocks noChangeAspect="1"/>
           </p:cNvPicPr>
@@ -4293,8 +4600,8 @@
         </p:blipFill>
         <p:spPr>
           <a:xfrm>
-            <a:off x="15316200" y="13533120"/>
-            <a:ext cx="13258800" cy="8286750"/>
+            <a:off x="10652760" y="8961120"/>
+            <a:ext cx="8869680" cy="5203582"/>
           </a:xfrm>
           <a:prstGeom prst="rect">
             <a:avLst/>
@@ -4303,20 +4610,136 @@
       </p:pic>
       <p:sp>
         <p:nvSpPr>
-          <p:cNvPr id="26" name="Rounded Rectangle 25"/>
+          <p:cNvPr id="34" name="TextBox 33"/>
+          <p:cNvSpPr txBox="1"/>
+          <p:nvPr/>
+        </p:nvSpPr>
+        <p:spPr>
+          <a:xfrm>
+            <a:off x="10652760" y="18288000"/>
+            <a:ext cx="8869680" cy="6217920"/>
+          </a:xfrm>
+          <a:prstGeom prst="rect">
+            <a:avLst/>
+          </a:prstGeom>
+          <a:noFill/>
+        </p:spPr>
+        <p:txBody>
+          <a:bodyPr wrap="square">
+            <a:spAutoFit/>
+          </a:bodyPr>
+          <a:lstStyle/>
+          <a:p/>
+          <a:p>
+            <a:pPr>
+              <a:spcAft>
+                <a:spcPts val="600"/>
+              </a:spcAft>
+            </a:pPr>
+            <a:r>
+              <a:rPr b="1" sz="1350">
+                <a:solidFill>
+                  <a:srgbClr val="00529B"/>
+                </a:solidFill>
+              </a:rPr>
+              <a:t>■ Layer 1 (Ingestion): </a:t>
+            </a:r>
+            <a:r>
+              <a:rPr sz="1300">
+                <a:solidFill>
+                  <a:srgbClr val="0F172A"/>
+                </a:solidFill>
+              </a:rPr>
+              <a:t>Promiscuous packet sniffer capturing Modbus/TCP, DNP3, and OPC-UA streams.</a:t>
+            </a:r>
+          </a:p>
+          <a:p>
+            <a:pPr>
+              <a:spcAft>
+                <a:spcPts val="600"/>
+              </a:spcAft>
+            </a:pPr>
+            <a:r>
+              <a:rPr b="1" sz="1350">
+                <a:solidFill>
+                  <a:srgbClr val="00529B"/>
+                </a:solidFill>
+              </a:rPr>
+              <a:t>■ Layer 2 (BWOA Pruning): </a:t>
+            </a:r>
+            <a:r>
+              <a:rPr sz="1300">
+                <a:solidFill>
+                  <a:srgbClr val="0F172A"/>
+                </a:solidFill>
+              </a:rPr>
+              <a:t>Metaheuristic optimizer prunes 41 features down to 10 vital signals.</a:t>
+            </a:r>
+          </a:p>
+          <a:p>
+            <a:pPr>
+              <a:spcAft>
+                <a:spcPts val="600"/>
+              </a:spcAft>
+            </a:pPr>
+            <a:r>
+              <a:rPr b="1" sz="1350">
+                <a:solidFill>
+                  <a:srgbClr val="00529B"/>
+                </a:solidFill>
+              </a:rPr>
+              <a:t>■ Layer 3 (Deep Learning): </a:t>
+            </a:r>
+            <a:r>
+              <a:rPr sz="1300">
+                <a:solidFill>
+                  <a:srgbClr val="0F172A"/>
+                </a:solidFill>
+              </a:rPr>
+              <a:t>Spatial-temporal Conv1D-LSTM neural classifier quantized to Float16.</a:t>
+            </a:r>
+          </a:p>
+          <a:p>
+            <a:pPr>
+              <a:spcAft>
+                <a:spcPts val="600"/>
+              </a:spcAft>
+            </a:pPr>
+            <a:r>
+              <a:rPr b="1" sz="1350">
+                <a:solidFill>
+                  <a:srgbClr val="00529B"/>
+                </a:solidFill>
+              </a:rPr>
+              <a:t>■ Layer 4 (SaaS Dashboard): </a:t>
+            </a:r>
+            <a:r>
+              <a:rPr sz="1300">
+                <a:solidFill>
+                  <a:srgbClr val="0F172A"/>
+                </a:solidFill>
+              </a:rPr>
+              <a:t>Multi-tenant Laravel Livewire console streaming sub-second alerts.</a:t>
+            </a:r>
+          </a:p>
+        </p:txBody>
+      </p:sp>
+      <p:sp>
+        <p:nvSpPr>
+          <p:cNvPr id="35" name="Rounded Rectangle 34"/>
           <p:cNvSpPr/>
           <p:nvPr/>
         </p:nvSpPr>
         <p:spPr>
           <a:xfrm>
-            <a:off x="15316200" y="20116800"/>
-            <a:ext cx="13258800" cy="6583680"/>
+            <a:off x="10469880" y="25237440"/>
+            <a:ext cx="9235440" cy="17007840"/>
           </a:xfrm>
           <a:prstGeom prst="roundRect">
             <a:avLst/>
           </a:prstGeom>
           <a:solidFill>
-            <a:srgbClr val="F8FAFC"/>
+            <a:srgbClr val="FFFFFF"/>
           </a:solidFill>
           <a:ln w="19050">
             <a:solidFill>
@@ -4348,14 +4771,57 @@
       </p:sp>
       <p:sp>
         <p:nvSpPr>
-          <p:cNvPr id="27" name="TextBox 26"/>
+          <p:cNvPr id="36" name="Rounded Rectangle 35"/>
+          <p:cNvSpPr/>
+          <p:nvPr/>
+        </p:nvSpPr>
+        <p:spPr>
+          <a:xfrm>
+            <a:off x="10469880" y="25237440"/>
+            <a:ext cx="9235440" cy="1097280"/>
+          </a:xfrm>
+          <a:prstGeom prst="roundRect">
+            <a:avLst/>
+          </a:prstGeom>
+          <a:solidFill>
+            <a:srgbClr val="00529B"/>
+          </a:solidFill>
+          <a:ln>
+            <a:noFill/>
+          </a:ln>
+        </p:spPr>
+        <p:style>
+          <a:lnRef idx="1">
+            <a:schemeClr val="accent1"/>
+          </a:lnRef>
+          <a:fillRef idx="3">
+            <a:schemeClr val="accent1"/>
+          </a:fillRef>
+          <a:effectRef idx="2">
+            <a:schemeClr val="accent1"/>
+          </a:effectRef>
+          <a:fontRef idx="minor">
+            <a:schemeClr val="lt1"/>
+          </a:fontRef>
+        </p:style>
+        <p:txBody>
+          <a:bodyPr rtlCol="0" anchor="ctr"/>
+          <a:lstStyle/>
+          <a:p>
+            <a:pPr algn="ctr"/>
+          </a:p>
+        </p:txBody>
+      </p:sp>
+      <p:sp>
+        <p:nvSpPr>
+          <p:cNvPr id="37" name="TextBox 36"/>
           <p:cNvSpPr txBox="1"/>
           <p:nvPr/>
         </p:nvSpPr>
         <p:spPr>
           <a:xfrm>
-            <a:off x="15499080" y="20208240"/>
-            <a:ext cx="12893040" cy="6400800"/>
+            <a:off x="10744200" y="25328880"/>
+            <a:ext cx="8686800" cy="914400"/>
           </a:xfrm>
           <a:prstGeom prst="rect">
             <a:avLst/>
@@ -4363,150 +4829,37 @@
           <a:noFill/>
         </p:spPr>
         <p:txBody>
-          <a:bodyPr wrap="square">
-            <a:spAutoFit/>
-          </a:bodyPr>
-          <a:lstStyle/>
-          <a:p/>
-          <a:p>
-            <a:pPr>
-              <a:spcAft>
-                <a:spcPts val="400"/>
-              </a:spcAft>
-            </a:pPr>
-            <a:r>
-              <a:rPr b="1" sz="1000">
-                <a:solidFill>
-                  <a:srgbClr val="00529B"/>
-                </a:solidFill>
-                <a:latin typeface="Times New Roman"/>
-              </a:rPr>
-              <a:t>★ Optimal Feature Convergence: </a:t>
-            </a:r>
-            <a:r>
-              <a:rPr sz="950">
-                <a:solidFill>
-                  <a:srgbClr val="0F172A"/>
-                </a:solidFill>
-                <a:latin typeface="Times New Roman"/>
-              </a:rPr>
-              <a:t>BWOA reached minimal fitness at iteration 23/100, maintaining 92.31% Random Forest 3-fold cross-validation accuracy on the selected 10-feature subset.</a:t>
-            </a:r>
-          </a:p>
-          <a:p>
-            <a:pPr>
-              <a:spcAft>
-                <a:spcPts val="400"/>
-              </a:spcAft>
-            </a:pPr>
-            <a:r>
-              <a:rPr b="1" sz="1000">
-                <a:solidFill>
-                  <a:srgbClr val="00529B"/>
-                </a:solidFill>
-                <a:latin typeface="Times New Roman"/>
-              </a:rPr>
-              <a:t>★ 75.61% Bandwidth Reduction: </a:t>
-            </a:r>
-            <a:r>
-              <a:rPr sz="950">
-                <a:solidFill>
-                  <a:srgbClr val="0F172A"/>
-                </a:solidFill>
-                <a:latin typeface="Times New Roman"/>
-              </a:rPr>
-              <a:t>Pruned 31 uninformative features from 41, reducing network telemetry transmission load over low-bandwidth satellite links in African mines.</a:t>
-            </a:r>
-          </a:p>
-          <a:p>
-            <a:pPr>
-              <a:spcAft>
-                <a:spcPts val="400"/>
-              </a:spcAft>
-            </a:pPr>
-            <a:r>
-              <a:rPr b="1" sz="1000">
-                <a:solidFill>
-                  <a:srgbClr val="00529B"/>
-                </a:solidFill>
-                <a:latin typeface="Times New Roman"/>
-              </a:rPr>
-              <a:t>★ Selected 10 Vital Features: </a:t>
-            </a:r>
-            <a:r>
-              <a:rPr sz="950">
-                <a:solidFill>
-                  <a:srgbClr val="0F172A"/>
-                </a:solidFill>
-                <a:latin typeface="Times New Roman"/>
-              </a:rPr>
-              <a:t>src_bytes (volume DoS), service &amp; flag (SCADA connection state), serror_rate &amp; diff_srv_rate (reconnaissance), hot &amp; su_attempted (privilege escalation).</a:t>
-            </a:r>
-          </a:p>
-          <a:p>
-            <a:pPr>
-              <a:spcAft>
-                <a:spcPts val="400"/>
-              </a:spcAft>
-            </a:pPr>
-            <a:r>
-              <a:rPr b="1" sz="1000">
-                <a:solidFill>
-                  <a:srgbClr val="00529B"/>
-                </a:solidFill>
-                <a:latin typeface="Times New Roman"/>
-              </a:rPr>
-              <a:t>★ Transfer Learning Adaptability: </a:t>
-            </a:r>
-            <a:r>
-              <a:rPr sz="950">
-                <a:solidFill>
-                  <a:srgbClr val="0F172A"/>
-                </a:solidFill>
-                <a:latin typeface="Times New Roman"/>
-              </a:rPr>
-              <a:t>Evaluated on the 51-sensor SWaT SCADA benchmark achieving 0.12ms inference latency and 0.8650 AUC-ROC, validating cross-domain industrial suitability.</a:t>
-            </a:r>
-          </a:p>
-        </p:txBody>
-      </p:sp>
-      <p:sp>
-        <p:nvSpPr>
-          <p:cNvPr id="28" name="TextBox 27"/>
-          <p:cNvSpPr txBox="1"/>
-          <p:nvPr/>
-        </p:nvSpPr>
-        <p:spPr>
-          <a:xfrm>
-            <a:off x="29718000" y="4663440"/>
-            <a:ext cx="13258800" cy="457200"/>
-          </a:xfrm>
-          <a:prstGeom prst="rect">
-            <a:avLst/>
-          </a:prstGeom>
-          <a:noFill/>
-        </p:spPr>
-        <p:txBody>
           <a:bodyPr wrap="none">
             <a:spAutoFit/>
           </a:bodyPr>
           <a:lstStyle/>
           <a:p>
             <a:r>
+              <a:rPr sz="1100" b="1">
+                <a:solidFill>
+                  <a:srgbClr val="00A3E0"/>
+                </a:solidFill>
+                <a:latin typeface="Arial"/>
+              </a:rPr>
+              <a:t>SECTION 4: MATHEMATICAL OPTIMIZATION</a:t>
+            </a:r>
+          </a:p>
+          <a:p>
+            <a:r>
               <a:rPr sz="1800" b="1">
                 <a:solidFill>
-                  <a:srgbClr val="00529B"/>
+                  <a:srgbClr val="FFFFFF"/>
                 </a:solidFill>
                 <a:latin typeface="Arial"/>
               </a:rPr>
-              <a:t>5. Empirical Hardware Latency Profile</a:t>
+              <a:t>BWOA Convergence &amp; Neural Layout</a:t>
             </a:r>
           </a:p>
         </p:txBody>
       </p:sp>
       <p:pic>
         <p:nvPicPr>
-          <p:cNvPr id="29" name="Picture 28" descr="latency_comparison_barchart.png"/>
+          <p:cNvPr id="38" name="Picture 37" descr="bwoa_convergence.png"/>
           <p:cNvPicPr>
             <a:picLocks noChangeAspect="1"/>
           </p:cNvPicPr>
@@ -4520,8 +4873,8 @@
         </p:blipFill>
         <p:spPr>
           <a:xfrm>
-            <a:off x="29718000" y="5212080"/>
-            <a:ext cx="13258800" cy="7384648"/>
+            <a:off x="10652760" y="26517600"/>
+            <a:ext cx="8869680" cy="5543550"/>
           </a:xfrm>
           <a:prstGeom prst="rect">
             <a:avLst/>
@@ -4530,14 +4883,14 @@
       </p:pic>
       <p:sp>
         <p:nvSpPr>
-          <p:cNvPr id="30" name="TextBox 29"/>
+          <p:cNvPr id="39" name="TextBox 38"/>
           <p:cNvSpPr txBox="1"/>
           <p:nvPr/>
         </p:nvSpPr>
         <p:spPr>
           <a:xfrm>
-            <a:off x="29718000" y="11338560"/>
-            <a:ext cx="13258800" cy="457200"/>
+            <a:off x="10652760" y="34015680"/>
+            <a:ext cx="8869680" cy="7680960"/>
           </a:xfrm>
           <a:prstGeom prst="rect">
             <a:avLst/>
@@ -4545,26 +4898,241 @@
           <a:noFill/>
         </p:spPr>
         <p:txBody>
+          <a:bodyPr wrap="square">
+            <a:spAutoFit/>
+          </a:bodyPr>
+          <a:lstStyle/>
+          <a:p/>
+          <a:p>
+            <a:pPr>
+              <a:spcAft>
+                <a:spcPts val="600"/>
+              </a:spcAft>
+            </a:pPr>
+            <a:r>
+              <a:rPr b="1" sz="1350">
+                <a:solidFill>
+                  <a:srgbClr val="D4AF37"/>
+                </a:solidFill>
+              </a:rPr>
+              <a:t>★ Encircling &amp; Bubble-Net: </a:t>
+            </a:r>
+            <a:r>
+              <a:rPr sz="1300">
+                <a:solidFill>
+                  <a:srgbClr val="0F172A"/>
+                </a:solidFill>
+              </a:rPr>
+              <a:t>whales adjust velocity using a V-shaped transfer function: V(x) = |x / sqrt(1 + x^2)|.</a:t>
+            </a:r>
+          </a:p>
+          <a:p>
+            <a:pPr>
+              <a:spcAft>
+                <a:spcPts val="600"/>
+              </a:spcAft>
+            </a:pPr>
+            <a:r>
+              <a:rPr b="1" sz="1350">
+                <a:solidFill>
+                  <a:srgbClr val="D4AF37"/>
+                </a:solidFill>
+              </a:rPr>
+              <a:t>★ Accuracy Floor Constraint: </a:t>
+            </a:r>
+            <a:r>
+              <a:rPr sz="1300">
+                <a:solidFill>
+                  <a:srgbClr val="0F172A"/>
+                </a:solidFill>
+              </a:rPr>
+              <a:t>Enforces strict 75% accuracy floor with penalty weight alpha=0.3.</a:t>
+            </a:r>
+          </a:p>
+          <a:p>
+            <a:pPr>
+              <a:spcAft>
+                <a:spcPts val="600"/>
+              </a:spcAft>
+            </a:pPr>
+            <a:r>
+              <a:rPr b="1" sz="1350">
+                <a:solidFill>
+                  <a:srgbClr val="D4AF37"/>
+                </a:solidFill>
+              </a:rPr>
+              <a:t>★ Selected 10 Features: </a:t>
+            </a:r>
+            <a:r>
+              <a:rPr sz="1300">
+                <a:solidFill>
+                  <a:srgbClr val="0F172A"/>
+                </a:solidFill>
+              </a:rPr>
+              <a:t>protocol_type, service, flag, src_bytes, hot, su_attempted, serror_rate, same_srv_rate, diff_srv_rate, dst_host_diff_srv_rate.</a:t>
+            </a:r>
+          </a:p>
+          <a:p>
+            <a:pPr>
+              <a:spcAft>
+                <a:spcPts val="600"/>
+              </a:spcAft>
+            </a:pPr>
+            <a:r>
+              <a:rPr b="1" sz="1350">
+                <a:solidFill>
+                  <a:srgbClr val="D4AF37"/>
+                </a:solidFill>
+              </a:rPr>
+              <a:t>★ Convergence Speed: </a:t>
+            </a:r>
+            <a:r>
+              <a:rPr sz="1300">
+                <a:solidFill>
+                  <a:srgbClr val="0F172A"/>
+                </a:solidFill>
+              </a:rPr>
+              <a:t>Optimal 10-feature mask reached at iteration 23/100 (92.31% RF CV accuracy).</a:t>
+            </a:r>
+          </a:p>
+        </p:txBody>
+      </p:sp>
+      <p:sp>
+        <p:nvSpPr>
+          <p:cNvPr id="40" name="Rounded Rectangle 39"/>
+          <p:cNvSpPr/>
+          <p:nvPr/>
+        </p:nvSpPr>
+        <p:spPr>
+          <a:xfrm>
+            <a:off x="20116800" y="7680960"/>
+            <a:ext cx="9235440" cy="17190720"/>
+          </a:xfrm>
+          <a:prstGeom prst="roundRect">
+            <a:avLst/>
+          </a:prstGeom>
+          <a:solidFill>
+            <a:srgbClr val="FFFFFF"/>
+          </a:solidFill>
+          <a:ln w="19050">
+            <a:solidFill>
+              <a:srgbClr val="CBD5E1"/>
+            </a:solidFill>
+          </a:ln>
+        </p:spPr>
+        <p:style>
+          <a:lnRef idx="1">
+            <a:schemeClr val="accent1"/>
+          </a:lnRef>
+          <a:fillRef idx="3">
+            <a:schemeClr val="accent1"/>
+          </a:fillRef>
+          <a:effectRef idx="2">
+            <a:schemeClr val="accent1"/>
+          </a:effectRef>
+          <a:fontRef idx="minor">
+            <a:schemeClr val="lt1"/>
+          </a:fontRef>
+        </p:style>
+        <p:txBody>
+          <a:bodyPr rtlCol="0" anchor="ctr"/>
+          <a:lstStyle/>
+          <a:p>
+            <a:pPr algn="ctr"/>
+          </a:p>
+        </p:txBody>
+      </p:sp>
+      <p:sp>
+        <p:nvSpPr>
+          <p:cNvPr id="41" name="Rounded Rectangle 40"/>
+          <p:cNvSpPr/>
+          <p:nvPr/>
+        </p:nvSpPr>
+        <p:spPr>
+          <a:xfrm>
+            <a:off x="20116800" y="7680960"/>
+            <a:ext cx="9235440" cy="1097280"/>
+          </a:xfrm>
+          <a:prstGeom prst="roundRect">
+            <a:avLst/>
+          </a:prstGeom>
+          <a:solidFill>
+            <a:srgbClr val="00529B"/>
+          </a:solidFill>
+          <a:ln>
+            <a:noFill/>
+          </a:ln>
+        </p:spPr>
+        <p:style>
+          <a:lnRef idx="1">
+            <a:schemeClr val="accent1"/>
+          </a:lnRef>
+          <a:fillRef idx="3">
+            <a:schemeClr val="accent1"/>
+          </a:fillRef>
+          <a:effectRef idx="2">
+            <a:schemeClr val="accent1"/>
+          </a:effectRef>
+          <a:fontRef idx="minor">
+            <a:schemeClr val="lt1"/>
+          </a:fontRef>
+        </p:style>
+        <p:txBody>
+          <a:bodyPr rtlCol="0" anchor="ctr"/>
+          <a:lstStyle/>
+          <a:p>
+            <a:pPr algn="ctr"/>
+          </a:p>
+        </p:txBody>
+      </p:sp>
+      <p:sp>
+        <p:nvSpPr>
+          <p:cNvPr id="42" name="TextBox 41"/>
+          <p:cNvSpPr txBox="1"/>
+          <p:nvPr/>
+        </p:nvSpPr>
+        <p:spPr>
+          <a:xfrm>
+            <a:off x="20391120" y="7772400"/>
+            <a:ext cx="8686800" cy="914400"/>
+          </a:xfrm>
+          <a:prstGeom prst="rect">
+            <a:avLst/>
+          </a:prstGeom>
+          <a:noFill/>
+        </p:spPr>
+        <p:txBody>
           <a:bodyPr wrap="none">
             <a:spAutoFit/>
           </a:bodyPr>
           <a:lstStyle/>
           <a:p>
             <a:r>
+              <a:rPr sz="1100" b="1">
+                <a:solidFill>
+                  <a:srgbClr val="00A3E0"/>
+                </a:solidFill>
+                <a:latin typeface="Arial"/>
+              </a:rPr>
+              <a:t>SECTION 5: EMPIRICAL BENCHMARKS</a:t>
+            </a:r>
+          </a:p>
+          <a:p>
+            <a:r>
               <a:rPr sz="1800" b="1">
                 <a:solidFill>
-                  <a:srgbClr val="00529B"/>
+                  <a:srgbClr val="FFFFFF"/>
                 </a:solidFill>
                 <a:latin typeface="Arial"/>
               </a:rPr>
-              <a:t>6. Multi-Class Confusion Matrix</a:t>
+              <a:t>Sub-Millisecond Edge Latency vs SCADA Limit</a:t>
             </a:r>
           </a:p>
         </p:txBody>
       </p:sp>
       <p:pic>
         <p:nvPicPr>
-          <p:cNvPr id="31" name="Picture 30" descr="confusion_matrix.png"/>
+          <p:cNvPr id="43" name="Picture 42" descr="latency_comparison_barchart.png"/>
           <p:cNvPicPr>
             <a:picLocks noChangeAspect="1"/>
           </p:cNvPicPr>
@@ -4578,64 +5146,54 @@
         </p:blipFill>
         <p:spPr>
           <a:xfrm>
-            <a:off x="31089600" y="11887200"/>
-            <a:ext cx="10515600" cy="10515600"/>
+            <a:off x="20299680" y="8961120"/>
+            <a:ext cx="8869680" cy="4940075"/>
           </a:xfrm>
           <a:prstGeom prst="rect">
             <a:avLst/>
           </a:prstGeom>
         </p:spPr>
       </p:pic>
-      <p:sp>
-        <p:nvSpPr>
-          <p:cNvPr id="32" name="TextBox 31"/>
-          <p:cNvSpPr txBox="1"/>
+      <p:pic>
+        <p:nvPicPr>
+          <p:cNvPr id="44" name="Picture 43" descr="confusion_matrix.png"/>
+          <p:cNvPicPr>
+            <a:picLocks noChangeAspect="1"/>
+          </p:cNvPicPr>
           <p:nvPr/>
-        </p:nvSpPr>
-        <p:spPr>
-          <a:xfrm>
-            <a:off x="29718000" y="18105120"/>
-            <a:ext cx="13258800" cy="457200"/>
+        </p:nvPicPr>
+        <p:blipFill>
+          <a:blip r:embed="rId7"/>
+          <a:stretch>
+            <a:fillRect/>
+          </a:stretch>
+        </p:blipFill>
+        <p:spPr>
+          <a:xfrm>
+            <a:off x="20299680" y="17007840"/>
+            <a:ext cx="8869680" cy="8869680"/>
           </a:xfrm>
           <a:prstGeom prst="rect">
             <a:avLst/>
           </a:prstGeom>
-          <a:noFill/>
-        </p:spPr>
-        <p:txBody>
-          <a:bodyPr wrap="none">
-            <a:spAutoFit/>
-          </a:bodyPr>
-          <a:lstStyle/>
-          <a:p>
-            <a:r>
-              <a:rPr sz="1800" b="1">
-                <a:solidFill>
-                  <a:srgbClr val="00529B"/>
-                </a:solidFill>
-                <a:latin typeface="Arial"/>
-              </a:rPr>
-              <a:t>7. Conclusions &amp; UN SDG Impact</a:t>
-            </a:r>
-          </a:p>
-        </p:txBody>
-      </p:sp>
-      <p:sp>
-        <p:nvSpPr>
-          <p:cNvPr id="33" name="Rounded Rectangle 32"/>
+        </p:spPr>
+      </p:pic>
+      <p:sp>
+        <p:nvSpPr>
+          <p:cNvPr id="45" name="Rounded Rectangle 44"/>
           <p:cNvSpPr/>
           <p:nvPr/>
         </p:nvSpPr>
         <p:spPr>
           <a:xfrm>
-            <a:off x="29718000" y="18653760"/>
-            <a:ext cx="13258800" cy="5486400"/>
+            <a:off x="20116800" y="25237440"/>
+            <a:ext cx="9235440" cy="17007840"/>
           </a:xfrm>
           <a:prstGeom prst="roundRect">
             <a:avLst/>
           </a:prstGeom>
           <a:solidFill>
-            <a:srgbClr val="F8FAFC"/>
+            <a:srgbClr val="FFFFFF"/>
           </a:solidFill>
           <a:ln w="19050">
             <a:solidFill>
@@ -4667,14 +5225,57 @@
       </p:sp>
       <p:sp>
         <p:nvSpPr>
-          <p:cNvPr id="34" name="TextBox 33"/>
+          <p:cNvPr id="46" name="Rounded Rectangle 45"/>
+          <p:cNvSpPr/>
+          <p:nvPr/>
+        </p:nvSpPr>
+        <p:spPr>
+          <a:xfrm>
+            <a:off x="20116800" y="25237440"/>
+            <a:ext cx="9235440" cy="1097280"/>
+          </a:xfrm>
+          <a:prstGeom prst="roundRect">
+            <a:avLst/>
+          </a:prstGeom>
+          <a:solidFill>
+            <a:srgbClr val="00529B"/>
+          </a:solidFill>
+          <a:ln>
+            <a:noFill/>
+          </a:ln>
+        </p:spPr>
+        <p:style>
+          <a:lnRef idx="1">
+            <a:schemeClr val="accent1"/>
+          </a:lnRef>
+          <a:fillRef idx="3">
+            <a:schemeClr val="accent1"/>
+          </a:fillRef>
+          <a:effectRef idx="2">
+            <a:schemeClr val="accent1"/>
+          </a:effectRef>
+          <a:fontRef idx="minor">
+            <a:schemeClr val="lt1"/>
+          </a:fontRef>
+        </p:style>
+        <p:txBody>
+          <a:bodyPr rtlCol="0" anchor="ctr"/>
+          <a:lstStyle/>
+          <a:p>
+            <a:pPr algn="ctr"/>
+          </a:p>
+        </p:txBody>
+      </p:sp>
+      <p:sp>
+        <p:nvSpPr>
+          <p:cNvPr id="47" name="TextBox 46"/>
           <p:cNvSpPr txBox="1"/>
           <p:nvPr/>
         </p:nvSpPr>
         <p:spPr>
           <a:xfrm>
-            <a:off x="29900880" y="18745200"/>
-            <a:ext cx="12893040" cy="5303520"/>
+            <a:off x="20391120" y="25328880"/>
+            <a:ext cx="8686800" cy="914400"/>
           </a:xfrm>
           <a:prstGeom prst="rect">
             <a:avLst/>
@@ -4682,123 +5283,44 @@
           <a:noFill/>
         </p:spPr>
         <p:txBody>
-          <a:bodyPr wrap="square">
+          <a:bodyPr wrap="none">
             <a:spAutoFit/>
           </a:bodyPr>
           <a:lstStyle/>
-          <a:p/>
-          <a:p>
-            <a:pPr>
-              <a:spcAft>
-                <a:spcPts val="300"/>
-              </a:spcAft>
-            </a:pPr>
-            <a:r>
-              <a:rPr b="1" sz="1000">
-                <a:solidFill>
-                  <a:srgbClr val="10B981"/>
-                </a:solidFill>
-                <a:latin typeface="Times New Roman"/>
-              </a:rPr>
-              <a:t>✓ 0.76ms Edge Real-Time: </a:t>
-            </a:r>
-            <a:r>
-              <a:rPr sz="950">
-                <a:solidFill>
-                  <a:srgbClr val="0F172A"/>
-                </a:solidFill>
-                <a:latin typeface="Times New Roman"/>
-              </a:rPr>
-              <a:t>Executes single-sample inference in 0.76 ms on Raspberry Pi 4B (1GB RAM) - 207x faster than baseline, easily passing the sub-100ms SCADA limit.</a:t>
-            </a:r>
-          </a:p>
-          <a:p>
-            <a:pPr>
-              <a:spcAft>
-                <a:spcPts val="300"/>
-              </a:spcAft>
-            </a:pPr>
-            <a:r>
-              <a:rPr b="1" sz="1000">
-                <a:solidFill>
-                  <a:srgbClr val="10B981"/>
-                </a:solidFill>
-                <a:latin typeface="Times New Roman"/>
-              </a:rPr>
-              <a:t>✓ High Detection Fidelity: </a:t>
-            </a:r>
-            <a:r>
-              <a:rPr sz="950">
-                <a:solidFill>
-                  <a:srgbClr val="0F172A"/>
-                </a:solidFill>
-                <a:latin typeface="Times New Roman"/>
-              </a:rPr>
-              <a:t>70.56% multi-class accuracy, 96.89% precision on benign telemetry (zero false plant shutdowns), 89.04% recall on DoS attacks.</a:t>
-            </a:r>
-          </a:p>
-          <a:p>
-            <a:pPr>
-              <a:spcAft>
-                <a:spcPts val="300"/>
-              </a:spcAft>
-            </a:pPr>
-            <a:r>
-              <a:rPr b="1" sz="1000">
-                <a:solidFill>
-                  <a:srgbClr val="10B981"/>
-                </a:solidFill>
-                <a:latin typeface="Times New Roman"/>
-              </a:rPr>
-              <a:t>✓ High Industrial ROI: </a:t>
-            </a:r>
-            <a:r>
-              <a:rPr sz="950">
-                <a:solidFill>
-                  <a:srgbClr val="0F172A"/>
-                </a:solidFill>
-                <a:latin typeface="Times New Roman"/>
-              </a:rPr>
-              <a:t>200x-300x return averting $50k-$500k/hr outages while protecting miner lives against ventilation tampering (SDG 8 &amp; 9).</a:t>
-            </a:r>
-          </a:p>
-          <a:p>
-            <a:pPr>
-              <a:spcAft>
-                <a:spcPts val="300"/>
-              </a:spcAft>
-            </a:pPr>
-            <a:r>
-              <a:rPr b="1" sz="1000">
-                <a:solidFill>
-                  <a:srgbClr val="10B981"/>
-                </a:solidFill>
-                <a:latin typeface="Times New Roman"/>
-              </a:rPr>
-              <a:t>✓ Open-Source Ecosystem: </a:t>
-            </a:r>
-            <a:r>
-              <a:rPr sz="950">
-                <a:solidFill>
-                  <a:srgbClr val="0F172A"/>
-                </a:solidFill>
-                <a:latin typeface="Times New Roman"/>
-              </a:rPr>
-              <a:t>NPM sniffer package '@mhiskall282/unesco-mine-sec-cli' and 75/75 automated unit test suites ensure complete reproducibility.</a:t>
-            </a:r>
-          </a:p>
-        </p:txBody>
-      </p:sp>
-      <p:sp>
-        <p:nvSpPr>
-          <p:cNvPr id="35" name="TextBox 34"/>
+          <a:p>
+            <a:r>
+              <a:rPr sz="1100" b="1">
+                <a:solidFill>
+                  <a:srgbClr val="00A3E0"/>
+                </a:solidFill>
+                <a:latin typeface="Arial"/>
+              </a:rPr>
+              <a:t>SECTION 6: SUSTAINABILITY &amp; ARTIFACTS</a:t>
+            </a:r>
+          </a:p>
+          <a:p>
+            <a:r>
+              <a:rPr sz="1800" b="1">
+                <a:solidFill>
+                  <a:srgbClr val="FFFFFF"/>
+                </a:solidFill>
+                <a:latin typeface="Arial"/>
+              </a:rPr>
+              <a:t>UN SDG Impact &amp; Open-Source Ecosystem</a:t>
+            </a:r>
+          </a:p>
+        </p:txBody>
+      </p:sp>
+      <p:sp>
+        <p:nvSpPr>
+          <p:cNvPr id="48" name="TextBox 47"/>
           <p:cNvSpPr txBox="1"/>
           <p:nvPr/>
         </p:nvSpPr>
         <p:spPr>
           <a:xfrm>
-            <a:off x="29718000" y="24688800"/>
-            <a:ext cx="13258800" cy="457200"/>
+            <a:off x="20299680" y="26517600"/>
+            <a:ext cx="8869680" cy="15087600"/>
           </a:xfrm>
           <a:prstGeom prst="rect">
             <a:avLst/>
@@ -4806,40 +5328,6 @@
           <a:noFill/>
         </p:spPr>
         <p:txBody>
-          <a:bodyPr wrap="none">
-            <a:spAutoFit/>
-          </a:bodyPr>
-          <a:lstStyle/>
-          <a:p>
-            <a:r>
-              <a:rPr sz="1800" b="1">
-                <a:solidFill>
-                  <a:srgbClr val="00529B"/>
-                </a:solidFill>
-                <a:latin typeface="Arial"/>
-              </a:rPr>
-              <a:t>8. References</a:t>
-            </a:r>
-          </a:p>
-        </p:txBody>
-      </p:sp>
-      <p:sp>
-        <p:nvSpPr>
-          <p:cNvPr id="36" name="TextBox 35"/>
-          <p:cNvSpPr txBox="1"/>
-          <p:nvPr/>
-        </p:nvSpPr>
-        <p:spPr>
-          <a:xfrm>
-            <a:off x="29718000" y="25146000"/>
-            <a:ext cx="13258800" cy="3200400"/>
-          </a:xfrm>
-          <a:prstGeom prst="rect">
-            <a:avLst/>
-          </a:prstGeom>
-          <a:noFill/>
-        </p:spPr>
-        <p:txBody>
           <a:bodyPr wrap="square">
             <a:spAutoFit/>
           </a:bodyPr>
@@ -4848,81 +5336,139 @@
           <a:p>
             <a:pPr>
               <a:spcAft>
-                <a:spcPts val="200"/>
+                <a:spcPts val="800"/>
               </a:spcAft>
             </a:pPr>
             <a:r>
-              <a:rPr sz="850">
-                <a:solidFill>
-                  <a:srgbClr val="64748B"/>
-                </a:solidFill>
-                <a:latin typeface="Times New Roman"/>
-              </a:rPr>
-              <a:t>1. Alanazi, M., et al. (2022). SCADA vulnerabilities &amp; attacks. Computers &amp; Security, 125, 103028.</a:t>
+              <a:rPr b="1" sz="1350">
+                <a:solidFill>
+                  <a:srgbClr val="00529B"/>
+                </a:solidFill>
+              </a:rPr>
+              <a:t>◆ SDG 9 (Industry &amp; Innovation): </a:t>
+            </a:r>
+            <a:r>
+              <a:rPr sz="1300">
+                <a:solidFill>
+                  <a:srgbClr val="0F172A"/>
+                </a:solidFill>
+              </a:rPr>
+              <a:t>Hardens critical mining cyber-physical infrastructure against zero-day disruption, safeguarding global mineral supply chains.</a:t>
             </a:r>
           </a:p>
           <a:p>
             <a:pPr>
               <a:spcAft>
-                <a:spcPts val="200"/>
+                <a:spcPts val="800"/>
               </a:spcAft>
             </a:pPr>
             <a:r>
-              <a:rPr sz="850">
-                <a:solidFill>
-                  <a:srgbClr val="64748B"/>
-                </a:solidFill>
-                <a:latin typeface="Times New Roman"/>
-              </a:rPr>
-              <a:t>2. Almomani, O., et al. (2025). SCADA intrusion detection in IIoT. Symmetry, 17(4), 480.</a:t>
+              <a:rPr b="1" sz="1350">
+                <a:solidFill>
+                  <a:srgbClr val="00529B"/>
+                </a:solidFill>
+              </a:rPr>
+              <a:t>◆ SDG 8 (Decent Work &amp; Safety): </a:t>
+            </a:r>
+            <a:r>
+              <a:rPr sz="1300">
+                <a:solidFill>
+                  <a:srgbClr val="0F172A"/>
+                </a:solidFill>
+              </a:rPr>
+              <a:t>Protects underground worker safety by preventing cyber manipulation of toxic gas sensors, scrubbers, and ventilation grids.</a:t>
             </a:r>
           </a:p>
           <a:p>
             <a:pPr>
               <a:spcAft>
-                <a:spcPts val="200"/>
+                <a:spcPts val="800"/>
               </a:spcAft>
             </a:pPr>
             <a:r>
-              <a:rPr sz="850">
-                <a:solidFill>
-                  <a:srgbClr val="64748B"/>
-                </a:solidFill>
-                <a:latin typeface="Times New Roman"/>
-              </a:rPr>
-              <a:t>3. Kheddar, H., et al. (2023). Deep transfer learning for intrusion detection in ICS. JNCA, 220, 103747.</a:t>
+              <a:rPr b="1" sz="1350">
+                <a:solidFill>
+                  <a:srgbClr val="00529B"/>
+                </a:solidFill>
+              </a:rPr>
+              <a:t>◆ SDG 17 (Partnerships for Goals): </a:t>
+            </a:r>
+            <a:r>
+              <a:rPr sz="1300">
+                <a:solidFill>
+                  <a:srgbClr val="0F172A"/>
+                </a:solidFill>
+              </a:rPr>
+              <a:t>Fosters bilateral Russian-African scientific collaboration, technology transfer, and local technical capacity building.</a:t>
             </a:r>
           </a:p>
           <a:p>
             <a:pPr>
               <a:spcAft>
-                <a:spcPts val="200"/>
+                <a:spcPts val="800"/>
               </a:spcAft>
             </a:pPr>
             <a:r>
-              <a:rPr sz="850">
-                <a:solidFill>
-                  <a:srgbClr val="64748B"/>
-                </a:solidFill>
-                <a:latin typeface="Times New Roman"/>
-              </a:rPr>
-              <a:t>4. Mirjalili, S., &amp; Lewis, A. (2016). Whale optimization algorithm. Advances in Eng. Software, 95, 51-67.</a:t>
+              <a:rPr b="1" sz="1350">
+                <a:solidFill>
+                  <a:srgbClr val="00529B"/>
+                </a:solidFill>
+              </a:rPr>
+              <a:t>◆ High Economic ROI (200x - 300x): </a:t>
+            </a:r>
+            <a:r>
+              <a:rPr sz="1300">
+                <a:solidFill>
+                  <a:srgbClr val="0F172A"/>
+                </a:solidFill>
+              </a:rPr>
+              <a:t>Preventing a single 24-hour ransomware outage on a ball mill saves $300k to $450k against an annual IDS cost of &lt; $1,500.</a:t>
             </a:r>
           </a:p>
           <a:p>
             <a:pPr>
               <a:spcAft>
-                <a:spcPts val="200"/>
+                <a:spcPts val="800"/>
               </a:spcAft>
             </a:pPr>
             <a:r>
-              <a:rPr sz="850">
-                <a:solidFill>
-                  <a:srgbClr val="64748B"/>
-                </a:solidFill>
-                <a:latin typeface="Times New Roman"/>
-              </a:rPr>
-              <a:t>5. Minerals Commission of Ghana. (2024). Digital telemetry &amp; cybersecurity compliance policy guidelines.</a:t>
+              <a:rPr b="1" sz="1350">
+                <a:solidFill>
+                  <a:srgbClr val="00529B"/>
+                </a:solidFill>
+              </a:rPr>
+              <a:t>◆ NPM Edge Sniffer CLI: </a:t>
+            </a:r>
+            <a:r>
+              <a:rPr sz="1300">
+                <a:solidFill>
+                  <a:srgbClr val="0F172A"/>
+                </a:solidFill>
+              </a:rPr>
+              <a:t>Install instantly on any gateway via 'npm install -g @mhiskall282/unesco-mine-sec-cli' from GitHub Packages.</a:t>
+            </a:r>
+          </a:p>
+          <a:p>
+            <a:pPr>
+              <a:spcAft>
+                <a:spcPts val="800"/>
+              </a:spcAft>
+            </a:pPr>
+            <a:r>
+              <a:rPr b="1" sz="1350">
+                <a:solidFill>
+                  <a:srgbClr val="00529B"/>
+                </a:solidFill>
+              </a:rPr>
+              <a:t>◆ Source Code &amp; Reproducibility: </a:t>
+            </a:r>
+            <a:r>
+              <a:rPr sz="1300">
+                <a:solidFill>
+                  <a:srgbClr val="0F172A"/>
+                </a:solidFill>
+              </a:rPr>
+              <a:t>Complete repository, notebooks, and 75 unit test suites available at: https://github.com/mhiskall282/Securing-the-Digital-Mine-UNESCO-Project</a:t>
             </a:r>
           </a:p>
         </p:txBody>
